--- a/presentations/Артамонов_ВКР_телеметрия_NEW.pptx
+++ b/presentations/Артамонов_ВКР_телеметрия_NEW.pptx
@@ -6126,61 +6126,49 @@
           </a:p>
         </p:txBody>
       </p:sp>
-      <p:cxnSp>
-        <p:nvCxnSpPr>
-          <p:cNvPr id="104" name="c"/>
-          <p:cNvCxnSpPr/>
-          <p:nvPr/>
-        </p:nvCxnSpPr>
-        <p:spPr>
-          <a:xfrm>
-            <a:off x="1500000" y="1960000"/>
-            <a:ext cx="0" cy="3100000"/>
-          </a:xfrm>
-          <a:prstGeom prst="straightConnector1">
-            <a:avLst/>
-          </a:prstGeom>
-          <a:ln w="28575" cap="rnd">
+      <p:sp>
+        <p:nvSpPr>
+          <p:cNvPr id="104" name="S"/>
+          <p:cNvSpPr/>
+          <p:nvPr/>
+        </p:nvSpPr>
+        <p:spPr>
+          <a:xfrm>
+            <a:off x="640080" y="2650000"/>
+            <a:ext cx="2300000" cy="760000"/>
+          </a:xfrm>
+          <a:prstGeom prst="chevron">
+            <a:avLst>
+              <a:gd name="adj" fmla="val 22000"/>
+            </a:avLst>
+          </a:prstGeom>
+          <a:solidFill>
+            <a:srgbClr val="BBD3E6"/>
+          </a:solidFill>
+          <a:ln w="6350">
             <a:solidFill>
-              <a:srgbClr val="DCE6EC"/>
+              <a:srgbClr val="9AA0A6"/>
             </a:solidFill>
           </a:ln>
-        </p:spPr>
-      </p:cxnSp>
-      <p:sp>
-        <p:nvSpPr>
-          <p:cNvPr id="105" name="S"/>
-          <p:cNvSpPr/>
-          <p:nvPr/>
-        </p:nvSpPr>
-        <p:spPr>
-          <a:xfrm>
-            <a:off x="1300000" y="1760000"/>
-            <a:ext cx="400000" cy="400000"/>
-          </a:xfrm>
-          <a:prstGeom prst="ellipse">
-            <a:avLst/>
-          </a:prstGeom>
-          <a:solidFill>
-            <a:srgbClr val="1F9BD8"/>
-          </a:solidFill>
-          <a:ln w="19050">
-            <a:solidFill>
-              <a:srgbClr val="FFFFFF"/>
-            </a:solidFill>
-          </a:ln>
-        </p:spPr>
-      </p:sp>
-      <p:sp>
-        <p:nvSpPr>
-          <p:cNvPr id="106" name="T"/>
-          <p:cNvSpPr/>
-          <p:nvPr/>
-        </p:nvSpPr>
-        <p:spPr>
-          <a:xfrm>
-            <a:off x="1300000" y="1760000"/>
-            <a:ext cx="400000" cy="400000"/>
+          <a:effectLst>
+            <a:outerShdw sx="100000" sy="100000" kx="0" ky="0" algn="bl" rotWithShape="0" blurRad="76200" dist="20000" dir="5400000">
+              <a:srgbClr val="B8C9D4">
+                <a:alpha val="20000"/>
+              </a:srgbClr>
+            </a:outerShdw>
+          </a:effectLst>
+        </p:spPr>
+      </p:sp>
+      <p:sp>
+        <p:nvSpPr>
+          <p:cNvPr id="105" name="T"/>
+          <p:cNvSpPr/>
+          <p:nvPr/>
+        </p:nvSpPr>
+        <p:spPr>
+          <a:xfrm>
+            <a:off x="840080" y="2650000"/>
+            <a:ext cx="1960000" cy="760000"/>
           </a:xfrm>
           <a:prstGeom prst="rect">
             <a:avLst/>
@@ -6196,18 +6184,38 @@
               <a:buNone/>
             </a:pPr>
             <a:r>
-              <a:rPr lang="ru-RU" sz="1400" b="1" kern="0" dirty="0">
-                <a:solidFill>
-                  <a:srgbClr val="FFFFFF"/>
+              <a:rPr lang="ru-RU" sz="1150" b="1" kern="0" dirty="0">
+                <a:solidFill>
+                  <a:srgbClr val="2B2B2B"/>
                 </a:solidFill>
                 <a:latin typeface="Calibri" pitchFamily="34" charset="0"/>
                 <a:ea typeface="Calibri" pitchFamily="34" charset="-122"/>
                 <a:cs typeface="Calibri" pitchFamily="34" charset="-120"/>
               </a:rPr>
-              <a:t>1</a:t>
-            </a:r>
-          </a:p>
-        </p:txBody>
+              <a:t>1. Подключение</a:t>
+            </a:r>
+          </a:p>
+        </p:txBody>
+      </p:sp>
+      <p:sp>
+        <p:nvSpPr>
+          <p:cNvPr id="106" name="S"/>
+          <p:cNvSpPr/>
+          <p:nvPr/>
+        </p:nvSpPr>
+        <p:spPr>
+          <a:xfrm>
+            <a:off x="790080" y="3714000"/>
+            <a:ext cx="130000" cy="130000"/>
+          </a:xfrm>
+          <a:prstGeom prst="rect">
+            <a:avLst/>
+          </a:prstGeom>
+          <a:solidFill>
+            <a:srgbClr val="9AA3AD"/>
+          </a:solidFill>
+          <a:ln/>
+        </p:spPr>
       </p:sp>
       <p:sp>
         <p:nvSpPr>
@@ -6217,8 +6225,8 @@
         </p:nvSpPr>
         <p:spPr>
           <a:xfrm>
-            <a:off x="1960000" y="1750000"/>
-            <a:ext cx="3400000" cy="360000"/>
+            <a:off x="1020080" y="3670000"/>
+            <a:ext cx="1880000" cy="300000"/>
           </a:xfrm>
           <a:prstGeom prst="rect">
             <a:avLst/>
@@ -6234,29 +6242,49 @@
               <a:buNone/>
             </a:pPr>
             <a:r>
-              <a:rPr lang="ru-RU" sz="1450" b="1" kern="0" dirty="0">
-                <a:solidFill>
-                  <a:srgbClr val="111418"/>
+              <a:rPr lang="ru-RU" sz="1100" kern="0" dirty="0">
+                <a:solidFill>
+                  <a:srgbClr val="444444"/>
                 </a:solidFill>
                 <a:latin typeface="Calibri" pitchFamily="34" charset="0"/>
                 <a:ea typeface="Calibri" pitchFamily="34" charset="-122"/>
                 <a:cs typeface="Calibri" pitchFamily="34" charset="-120"/>
               </a:rPr>
-              <a:t>Подключение к серверу</a:t>
-            </a:r>
-          </a:p>
-        </p:txBody>
-      </p:sp>
-      <p:sp>
-        <p:nvSpPr>
-          <p:cNvPr id="108" name="T"/>
-          <p:cNvSpPr/>
-          <p:nvPr/>
-        </p:nvSpPr>
-        <p:spPr>
-          <a:xfrm>
-            <a:off x="1960000" y="2080000"/>
-            <a:ext cx="9600000" cy="300000"/>
+              <a:t>Чтение настроек</a:t>
+            </a:r>
+          </a:p>
+        </p:txBody>
+      </p:sp>
+      <p:sp>
+        <p:nvSpPr>
+          <p:cNvPr id="108" name="S"/>
+          <p:cNvSpPr/>
+          <p:nvPr/>
+        </p:nvSpPr>
+        <p:spPr>
+          <a:xfrm>
+            <a:off x="790080" y="4074000"/>
+            <a:ext cx="130000" cy="130000"/>
+          </a:xfrm>
+          <a:prstGeom prst="rect">
+            <a:avLst/>
+          </a:prstGeom>
+          <a:solidFill>
+            <a:srgbClr val="9AA3AD"/>
+          </a:solidFill>
+          <a:ln/>
+        </p:spPr>
+      </p:sp>
+      <p:sp>
+        <p:nvSpPr>
+          <p:cNvPr id="109" name="T"/>
+          <p:cNvSpPr/>
+          <p:nvPr/>
+        </p:nvSpPr>
+        <p:spPr>
+          <a:xfrm>
+            <a:off x="1020080" y="4030000"/>
+            <a:ext cx="1880000" cy="300000"/>
           </a:xfrm>
           <a:prstGeom prst="rect">
             <a:avLst/>
@@ -6272,53 +6300,49 @@
               <a:buNone/>
             </a:pPr>
             <a:r>
-              <a:rPr lang="ru-RU" sz="1200" kern="0" dirty="0">
-                <a:solidFill>
-                  <a:srgbClr val="6B7480"/>
+              <a:rPr lang="ru-RU" sz="1100" kern="0" dirty="0">
+                <a:solidFill>
+                  <a:srgbClr val="444444"/>
                 </a:solidFill>
                 <a:latin typeface="Calibri" pitchFamily="34" charset="0"/>
                 <a:ea typeface="Calibri" pitchFamily="34" charset="-122"/>
                 <a:cs typeface="Calibri" pitchFamily="34" charset="-120"/>
               </a:rPr>
-              <a:t>плагин читает настройки и проверяет доступность сервера (health-check)</a:t>
-            </a:r>
-          </a:p>
-        </p:txBody>
-      </p:sp>
-      <p:sp>
-        <p:nvSpPr>
-          <p:cNvPr id="109" name="S"/>
-          <p:cNvSpPr/>
-          <p:nvPr/>
-        </p:nvSpPr>
-        <p:spPr>
-          <a:xfrm>
-            <a:off x="1300000" y="2380000"/>
-            <a:ext cx="400000" cy="400000"/>
-          </a:xfrm>
-          <a:prstGeom prst="ellipse">
-            <a:avLst/>
-          </a:prstGeom>
-          <a:solidFill>
-            <a:srgbClr val="1F9BD8"/>
-          </a:solidFill>
-          <a:ln w="19050">
-            <a:solidFill>
-              <a:srgbClr val="FFFFFF"/>
-            </a:solidFill>
-          </a:ln>
-        </p:spPr>
-      </p:sp>
-      <p:sp>
-        <p:nvSpPr>
-          <p:cNvPr id="110" name="T"/>
-          <p:cNvSpPr/>
-          <p:nvPr/>
-        </p:nvSpPr>
-        <p:spPr>
-          <a:xfrm>
-            <a:off x="1300000" y="2380000"/>
-            <a:ext cx="400000" cy="400000"/>
+              <a:t>Проверка сервера</a:t>
+            </a:r>
+          </a:p>
+        </p:txBody>
+      </p:sp>
+      <p:sp>
+        <p:nvSpPr>
+          <p:cNvPr id="110" name="S"/>
+          <p:cNvSpPr/>
+          <p:nvPr/>
+        </p:nvSpPr>
+        <p:spPr>
+          <a:xfrm>
+            <a:off x="790080" y="4434000"/>
+            <a:ext cx="130000" cy="130000"/>
+          </a:xfrm>
+          <a:prstGeom prst="rect">
+            <a:avLst/>
+          </a:prstGeom>
+          <a:solidFill>
+            <a:srgbClr val="9AA3AD"/>
+          </a:solidFill>
+          <a:ln/>
+        </p:spPr>
+      </p:sp>
+      <p:sp>
+        <p:nvSpPr>
+          <p:cNvPr id="111" name="T"/>
+          <p:cNvSpPr/>
+          <p:nvPr/>
+        </p:nvSpPr>
+        <p:spPr>
+          <a:xfrm>
+            <a:off x="1020080" y="4390000"/>
+            <a:ext cx="1880000" cy="300000"/>
           </a:xfrm>
           <a:prstGeom prst="rect">
             <a:avLst/>
@@ -6330,33 +6354,66 @@
           <a:bodyPr wrap="square" lIns="0" tIns="0" rIns="0" bIns="0" rtlCol="0" anchor="ctr"/>
           <a:lstStyle/>
           <a:p>
-            <a:pPr algn="ctr" indent="0" marL="0">
-              <a:buNone/>
-            </a:pPr>
-            <a:r>
-              <a:rPr lang="ru-RU" sz="1400" b="1" kern="0" dirty="0">
-                <a:solidFill>
-                  <a:srgbClr val="FFFFFF"/>
+            <a:pPr algn="l" indent="0" marL="0">
+              <a:buNone/>
+            </a:pPr>
+            <a:r>
+              <a:rPr lang="ru-RU" sz="1100" kern="0" dirty="0">
+                <a:solidFill>
+                  <a:srgbClr val="444444"/>
                 </a:solidFill>
                 <a:latin typeface="Calibri" pitchFamily="34" charset="0"/>
                 <a:ea typeface="Calibri" pitchFamily="34" charset="-122"/>
                 <a:cs typeface="Calibri" pitchFamily="34" charset="-120"/>
               </a:rPr>
-              <a:t>2</a:t>
-            </a:r>
-          </a:p>
-        </p:txBody>
-      </p:sp>
-      <p:sp>
-        <p:nvSpPr>
-          <p:cNvPr id="111" name="T"/>
-          <p:cNvSpPr/>
-          <p:nvPr/>
-        </p:nvSpPr>
-        <p:spPr>
-          <a:xfrm>
-            <a:off x="1960000" y="2370000"/>
-            <a:ext cx="3400000" cy="360000"/>
+              <a:t>Профиль модели</a:t>
+            </a:r>
+          </a:p>
+        </p:txBody>
+      </p:sp>
+      <p:sp>
+        <p:nvSpPr>
+          <p:cNvPr id="112" name="S"/>
+          <p:cNvSpPr/>
+          <p:nvPr/>
+        </p:nvSpPr>
+        <p:spPr>
+          <a:xfrm>
+            <a:off x="2760080" y="2650000"/>
+            <a:ext cx="2300000" cy="760000"/>
+          </a:xfrm>
+          <a:prstGeom prst="chevron">
+            <a:avLst>
+              <a:gd name="adj" fmla="val 22000"/>
+            </a:avLst>
+          </a:prstGeom>
+          <a:solidFill>
+            <a:srgbClr val="F3C89B"/>
+          </a:solidFill>
+          <a:ln w="6350">
+            <a:solidFill>
+              <a:srgbClr val="9AA0A6"/>
+            </a:solidFill>
+          </a:ln>
+          <a:effectLst>
+            <a:outerShdw sx="100000" sy="100000" kx="0" ky="0" algn="bl" rotWithShape="0" blurRad="76200" dist="20000" dir="5400000">
+              <a:srgbClr val="B8C9D4">
+                <a:alpha val="20000"/>
+              </a:srgbClr>
+            </a:outerShdw>
+          </a:effectLst>
+        </p:spPr>
+      </p:sp>
+      <p:sp>
+        <p:nvSpPr>
+          <p:cNvPr id="113" name="T"/>
+          <p:cNvSpPr/>
+          <p:nvPr/>
+        </p:nvSpPr>
+        <p:spPr>
+          <a:xfrm>
+            <a:off x="2960080" y="2650000"/>
+            <a:ext cx="1960000" cy="760000"/>
           </a:xfrm>
           <a:prstGeom prst="rect">
             <a:avLst/>
@@ -6368,33 +6425,53 @@
           <a:bodyPr wrap="square" lIns="0" tIns="0" rIns="0" bIns="0" rtlCol="0" anchor="ctr"/>
           <a:lstStyle/>
           <a:p>
-            <a:pPr algn="l" indent="0" marL="0">
-              <a:buNone/>
-            </a:pPr>
-            <a:r>
-              <a:rPr lang="ru-RU" sz="1450" b="1" kern="0" dirty="0">
-                <a:solidFill>
-                  <a:srgbClr val="111418"/>
+            <a:pPr algn="ctr" indent="0" marL="0">
+              <a:buNone/>
+            </a:pPr>
+            <a:r>
+              <a:rPr lang="ru-RU" sz="1150" b="1" kern="0" dirty="0">
+                <a:solidFill>
+                  <a:srgbClr val="2B2B2B"/>
                 </a:solidFill>
                 <a:latin typeface="Calibri" pitchFamily="34" charset="0"/>
                 <a:ea typeface="Calibri" pitchFamily="34" charset="-122"/>
                 <a:cs typeface="Calibri" pitchFamily="34" charset="-120"/>
               </a:rPr>
-              <a:t>Старт сессии</a:t>
-            </a:r>
-          </a:p>
-        </p:txBody>
-      </p:sp>
-      <p:sp>
-        <p:nvSpPr>
-          <p:cNvPr id="112" name="T"/>
-          <p:cNvSpPr/>
-          <p:nvPr/>
-        </p:nvSpPr>
-        <p:spPr>
-          <a:xfrm>
-            <a:off x="1960000" y="2700000"/>
-            <a:ext cx="9600000" cy="300000"/>
+              <a:t>2. Старт сессии</a:t>
+            </a:r>
+          </a:p>
+        </p:txBody>
+      </p:sp>
+      <p:sp>
+        <p:nvSpPr>
+          <p:cNvPr id="114" name="S"/>
+          <p:cNvSpPr/>
+          <p:nvPr/>
+        </p:nvSpPr>
+        <p:spPr>
+          <a:xfrm>
+            <a:off x="2910080" y="3714000"/>
+            <a:ext cx="130000" cy="130000"/>
+          </a:xfrm>
+          <a:prstGeom prst="rect">
+            <a:avLst/>
+          </a:prstGeom>
+          <a:solidFill>
+            <a:srgbClr val="9AA3AD"/>
+          </a:solidFill>
+          <a:ln/>
+        </p:spPr>
+      </p:sp>
+      <p:sp>
+        <p:nvSpPr>
+          <p:cNvPr id="115" name="T"/>
+          <p:cNvSpPr/>
+          <p:nvPr/>
+        </p:nvSpPr>
+        <p:spPr>
+          <a:xfrm>
+            <a:off x="3140080" y="3670000"/>
+            <a:ext cx="1880000" cy="300000"/>
           </a:xfrm>
           <a:prstGeom prst="rect">
             <a:avLst/>
@@ -6410,53 +6487,49 @@
               <a:buNone/>
             </a:pPr>
             <a:r>
-              <a:rPr lang="ru-RU" sz="1200" kern="0" dirty="0">
-                <a:solidFill>
-                  <a:srgbClr val="6B7480"/>
+              <a:rPr lang="ru-RU" sz="1100" kern="0" dirty="0">
+                <a:solidFill>
+                  <a:srgbClr val="444444"/>
                 </a:solidFill>
                 <a:latin typeface="Calibri" pitchFamily="34" charset="0"/>
                 <a:ea typeface="Calibri" pitchFamily="34" charset="-122"/>
                 <a:cs typeface="Calibri" pitchFamily="34" charset="-120"/>
               </a:rPr>
-              <a:t>инициализация плагина и открытие сессии; сервер выдаёт session_id</a:t>
-            </a:r>
-          </a:p>
-        </p:txBody>
-      </p:sp>
-      <p:sp>
-        <p:nvSpPr>
-          <p:cNvPr id="113" name="S"/>
-          <p:cNvSpPr/>
-          <p:nvPr/>
-        </p:nvSpPr>
-        <p:spPr>
-          <a:xfrm>
-            <a:off x="1300000" y="3000000"/>
-            <a:ext cx="400000" cy="400000"/>
-          </a:xfrm>
-          <a:prstGeom prst="ellipse">
-            <a:avLst/>
-          </a:prstGeom>
-          <a:solidFill>
-            <a:srgbClr val="1F9BD8"/>
-          </a:solidFill>
-          <a:ln w="19050">
-            <a:solidFill>
-              <a:srgbClr val="FFFFFF"/>
-            </a:solidFill>
-          </a:ln>
-        </p:spPr>
-      </p:sp>
-      <p:sp>
-        <p:nvSpPr>
-          <p:cNvPr id="114" name="T"/>
-          <p:cNvSpPr/>
-          <p:nvPr/>
-        </p:nvSpPr>
-        <p:spPr>
-          <a:xfrm>
-            <a:off x="1300000" y="3000000"/>
-            <a:ext cx="400000" cy="400000"/>
+              <a:t>Инициализация</a:t>
+            </a:r>
+          </a:p>
+        </p:txBody>
+      </p:sp>
+      <p:sp>
+        <p:nvSpPr>
+          <p:cNvPr id="116" name="S"/>
+          <p:cNvSpPr/>
+          <p:nvPr/>
+        </p:nvSpPr>
+        <p:spPr>
+          <a:xfrm>
+            <a:off x="2910080" y="4074000"/>
+            <a:ext cx="130000" cy="130000"/>
+          </a:xfrm>
+          <a:prstGeom prst="rect">
+            <a:avLst/>
+          </a:prstGeom>
+          <a:solidFill>
+            <a:srgbClr val="9AA3AD"/>
+          </a:solidFill>
+          <a:ln/>
+        </p:spPr>
+      </p:sp>
+      <p:sp>
+        <p:nvSpPr>
+          <p:cNvPr id="117" name="T"/>
+          <p:cNvSpPr/>
+          <p:nvPr/>
+        </p:nvSpPr>
+        <p:spPr>
+          <a:xfrm>
+            <a:off x="3140080" y="4030000"/>
+            <a:ext cx="1880000" cy="300000"/>
           </a:xfrm>
           <a:prstGeom prst="rect">
             <a:avLst/>
@@ -6468,33 +6541,53 @@
           <a:bodyPr wrap="square" lIns="0" tIns="0" rIns="0" bIns="0" rtlCol="0" anchor="ctr"/>
           <a:lstStyle/>
           <a:p>
-            <a:pPr algn="ctr" indent="0" marL="0">
-              <a:buNone/>
-            </a:pPr>
-            <a:r>
-              <a:rPr lang="ru-RU" sz="1400" b="1" kern="0" dirty="0">
-                <a:solidFill>
-                  <a:srgbClr val="FFFFFF"/>
+            <a:pPr algn="l" indent="0" marL="0">
+              <a:buNone/>
+            </a:pPr>
+            <a:r>
+              <a:rPr lang="ru-RU" sz="1100" kern="0" dirty="0">
+                <a:solidFill>
+                  <a:srgbClr val="444444"/>
                 </a:solidFill>
                 <a:latin typeface="Calibri" pitchFamily="34" charset="0"/>
                 <a:ea typeface="Calibri" pitchFamily="34" charset="-122"/>
                 <a:cs typeface="Calibri" pitchFamily="34" charset="-120"/>
               </a:rPr>
-              <a:t>3</a:t>
-            </a:r>
-          </a:p>
-        </p:txBody>
-      </p:sp>
-      <p:sp>
-        <p:nvSpPr>
-          <p:cNvPr id="115" name="T"/>
-          <p:cNvSpPr/>
-          <p:nvPr/>
-        </p:nvSpPr>
-        <p:spPr>
-          <a:xfrm>
-            <a:off x="1960000" y="2990000"/>
-            <a:ext cx="3400000" cy="360000"/>
+              <a:t>Открытие сессии</a:t>
+            </a:r>
+          </a:p>
+        </p:txBody>
+      </p:sp>
+      <p:sp>
+        <p:nvSpPr>
+          <p:cNvPr id="118" name="S"/>
+          <p:cNvSpPr/>
+          <p:nvPr/>
+        </p:nvSpPr>
+        <p:spPr>
+          <a:xfrm>
+            <a:off x="2910080" y="4434000"/>
+            <a:ext cx="130000" cy="130000"/>
+          </a:xfrm>
+          <a:prstGeom prst="rect">
+            <a:avLst/>
+          </a:prstGeom>
+          <a:solidFill>
+            <a:srgbClr val="9AA3AD"/>
+          </a:solidFill>
+          <a:ln/>
+        </p:spPr>
+      </p:sp>
+      <p:sp>
+        <p:nvSpPr>
+          <p:cNvPr id="119" name="T"/>
+          <p:cNvSpPr/>
+          <p:nvPr/>
+        </p:nvSpPr>
+        <p:spPr>
+          <a:xfrm>
+            <a:off x="3140080" y="4390000"/>
+            <a:ext cx="1880000" cy="300000"/>
           </a:xfrm>
           <a:prstGeom prst="rect">
             <a:avLst/>
@@ -6510,29 +6603,62 @@
               <a:buNone/>
             </a:pPr>
             <a:r>
-              <a:rPr lang="ru-RU" sz="1450" b="1" kern="0" dirty="0">
-                <a:solidFill>
-                  <a:srgbClr val="111418"/>
+              <a:rPr lang="ru-RU" sz="1100" kern="0" dirty="0">
+                <a:solidFill>
+                  <a:srgbClr val="444444"/>
                 </a:solidFill>
                 <a:latin typeface="Calibri" pitchFamily="34" charset="0"/>
                 <a:ea typeface="Calibri" pitchFamily="34" charset="-122"/>
                 <a:cs typeface="Calibri" pitchFamily="34" charset="-120"/>
               </a:rPr>
-              <a:t>Сбор событий</a:t>
-            </a:r>
-          </a:p>
-        </p:txBody>
-      </p:sp>
-      <p:sp>
-        <p:nvSpPr>
-          <p:cNvPr id="116" name="T"/>
-          <p:cNvSpPr/>
-          <p:nvPr/>
-        </p:nvSpPr>
-        <p:spPr>
-          <a:xfrm>
-            <a:off x="1960000" y="3320000"/>
-            <a:ext cx="9600000" cy="300000"/>
+              <a:t>session_id</a:t>
+            </a:r>
+          </a:p>
+        </p:txBody>
+      </p:sp>
+      <p:sp>
+        <p:nvSpPr>
+          <p:cNvPr id="120" name="S"/>
+          <p:cNvSpPr/>
+          <p:nvPr/>
+        </p:nvSpPr>
+        <p:spPr>
+          <a:xfrm>
+            <a:off x="4880080" y="2650000"/>
+            <a:ext cx="2300000" cy="760000"/>
+          </a:xfrm>
+          <a:prstGeom prst="chevron">
+            <a:avLst>
+              <a:gd name="adj" fmla="val 22000"/>
+            </a:avLst>
+          </a:prstGeom>
+          <a:solidFill>
+            <a:srgbClr val="D2C8DF"/>
+          </a:solidFill>
+          <a:ln w="6350">
+            <a:solidFill>
+              <a:srgbClr val="9AA0A6"/>
+            </a:solidFill>
+          </a:ln>
+          <a:effectLst>
+            <a:outerShdw sx="100000" sy="100000" kx="0" ky="0" algn="bl" rotWithShape="0" blurRad="76200" dist="20000" dir="5400000">
+              <a:srgbClr val="B8C9D4">
+                <a:alpha val="20000"/>
+              </a:srgbClr>
+            </a:outerShdw>
+          </a:effectLst>
+        </p:spPr>
+      </p:sp>
+      <p:sp>
+        <p:nvSpPr>
+          <p:cNvPr id="121" name="T"/>
+          <p:cNvSpPr/>
+          <p:nvPr/>
+        </p:nvSpPr>
+        <p:spPr>
+          <a:xfrm>
+            <a:off x="5080080" y="2650000"/>
+            <a:ext cx="1960000" cy="760000"/>
           </a:xfrm>
           <a:prstGeom prst="rect">
             <a:avLst/>
@@ -6544,57 +6670,53 @@
           <a:bodyPr wrap="square" lIns="0" tIns="0" rIns="0" bIns="0" rtlCol="0" anchor="ctr"/>
           <a:lstStyle/>
           <a:p>
-            <a:pPr algn="l" indent="0" marL="0">
-              <a:buNone/>
-            </a:pPr>
-            <a:r>
-              <a:rPr lang="ru-RU" sz="1200" kern="0" dirty="0">
-                <a:solidFill>
-                  <a:srgbClr val="6B7480"/>
+            <a:pPr algn="ctr" indent="0" marL="0">
+              <a:buNone/>
+            </a:pPr>
+            <a:r>
+              <a:rPr lang="ru-RU" sz="1150" b="1" kern="0" dirty="0">
+                <a:solidFill>
+                  <a:srgbClr val="2B2B2B"/>
                 </a:solidFill>
                 <a:latin typeface="Calibri" pitchFamily="34" charset="0"/>
                 <a:ea typeface="Calibri" pitchFamily="34" charset="-122"/>
                 <a:cs typeface="Calibri" pitchFamily="34" charset="-120"/>
               </a:rPr>
-              <a:t>track() фиксирует действия игрока, события копятся в буфере</a:t>
-            </a:r>
-          </a:p>
-        </p:txBody>
-      </p:sp>
-      <p:sp>
-        <p:nvSpPr>
-          <p:cNvPr id="117" name="S"/>
-          <p:cNvSpPr/>
-          <p:nvPr/>
-        </p:nvSpPr>
-        <p:spPr>
-          <a:xfrm>
-            <a:off x="1300000" y="3620000"/>
-            <a:ext cx="400000" cy="400000"/>
-          </a:xfrm>
-          <a:prstGeom prst="ellipse">
-            <a:avLst/>
-          </a:prstGeom>
-          <a:solidFill>
-            <a:srgbClr val="1F9BD8"/>
-          </a:solidFill>
-          <a:ln w="19050">
-            <a:solidFill>
-              <a:srgbClr val="FFFFFF"/>
-            </a:solidFill>
-          </a:ln>
-        </p:spPr>
-      </p:sp>
-      <p:sp>
-        <p:nvSpPr>
-          <p:cNvPr id="118" name="T"/>
-          <p:cNvSpPr/>
-          <p:nvPr/>
-        </p:nvSpPr>
-        <p:spPr>
-          <a:xfrm>
-            <a:off x="1300000" y="3620000"/>
-            <a:ext cx="400000" cy="400000"/>
+              <a:t>3. Сбор событий</a:t>
+            </a:r>
+          </a:p>
+        </p:txBody>
+      </p:sp>
+      <p:sp>
+        <p:nvSpPr>
+          <p:cNvPr id="122" name="S"/>
+          <p:cNvSpPr/>
+          <p:nvPr/>
+        </p:nvSpPr>
+        <p:spPr>
+          <a:xfrm>
+            <a:off x="5030080" y="3714000"/>
+            <a:ext cx="130000" cy="130000"/>
+          </a:xfrm>
+          <a:prstGeom prst="rect">
+            <a:avLst/>
+          </a:prstGeom>
+          <a:solidFill>
+            <a:srgbClr val="9AA3AD"/>
+          </a:solidFill>
+          <a:ln/>
+        </p:spPr>
+      </p:sp>
+      <p:sp>
+        <p:nvSpPr>
+          <p:cNvPr id="123" name="T"/>
+          <p:cNvSpPr/>
+          <p:nvPr/>
+        </p:nvSpPr>
+        <p:spPr>
+          <a:xfrm>
+            <a:off x="5260080" y="3670000"/>
+            <a:ext cx="1880000" cy="300000"/>
           </a:xfrm>
           <a:prstGeom prst="rect">
             <a:avLst/>
@@ -6606,33 +6728,53 @@
           <a:bodyPr wrap="square" lIns="0" tIns="0" rIns="0" bIns="0" rtlCol="0" anchor="ctr"/>
           <a:lstStyle/>
           <a:p>
-            <a:pPr algn="ctr" indent="0" marL="0">
-              <a:buNone/>
-            </a:pPr>
-            <a:r>
-              <a:rPr lang="ru-RU" sz="1400" b="1" kern="0" dirty="0">
-                <a:solidFill>
-                  <a:srgbClr val="FFFFFF"/>
+            <a:pPr algn="l" indent="0" marL="0">
+              <a:buNone/>
+            </a:pPr>
+            <a:r>
+              <a:rPr lang="ru-RU" sz="1100" kern="0" dirty="0">
+                <a:solidFill>
+                  <a:srgbClr val="444444"/>
                 </a:solidFill>
                 <a:latin typeface="Calibri" pitchFamily="34" charset="0"/>
                 <a:ea typeface="Calibri" pitchFamily="34" charset="-122"/>
                 <a:cs typeface="Calibri" pitchFamily="34" charset="-120"/>
               </a:rPr>
-              <a:t>4</a:t>
-            </a:r>
-          </a:p>
-        </p:txBody>
-      </p:sp>
-      <p:sp>
-        <p:nvSpPr>
-          <p:cNvPr id="119" name="T"/>
-          <p:cNvSpPr/>
-          <p:nvPr/>
-        </p:nvSpPr>
-        <p:spPr>
-          <a:xfrm>
-            <a:off x="1960000" y="3610000"/>
-            <a:ext cx="3400000" cy="360000"/>
+              <a:t>track() событий</a:t>
+            </a:r>
+          </a:p>
+        </p:txBody>
+      </p:sp>
+      <p:sp>
+        <p:nvSpPr>
+          <p:cNvPr id="124" name="S"/>
+          <p:cNvSpPr/>
+          <p:nvPr/>
+        </p:nvSpPr>
+        <p:spPr>
+          <a:xfrm>
+            <a:off x="5030080" y="4074000"/>
+            <a:ext cx="130000" cy="130000"/>
+          </a:xfrm>
+          <a:prstGeom prst="rect">
+            <a:avLst/>
+          </a:prstGeom>
+          <a:solidFill>
+            <a:srgbClr val="9AA3AD"/>
+          </a:solidFill>
+          <a:ln/>
+        </p:spPr>
+      </p:sp>
+      <p:sp>
+        <p:nvSpPr>
+          <p:cNvPr id="125" name="T"/>
+          <p:cNvSpPr/>
+          <p:nvPr/>
+        </p:nvSpPr>
+        <p:spPr>
+          <a:xfrm>
+            <a:off x="5260080" y="4030000"/>
+            <a:ext cx="1880000" cy="300000"/>
           </a:xfrm>
           <a:prstGeom prst="rect">
             <a:avLst/>
@@ -6648,29 +6790,49 @@
               <a:buNone/>
             </a:pPr>
             <a:r>
-              <a:rPr lang="ru-RU" sz="1450" b="1" kern="0" dirty="0">
-                <a:solidFill>
-                  <a:srgbClr val="111418"/>
+              <a:rPr lang="ru-RU" sz="1100" kern="0" dirty="0">
+                <a:solidFill>
+                  <a:srgbClr val="444444"/>
                 </a:solidFill>
                 <a:latin typeface="Calibri" pitchFamily="34" charset="0"/>
                 <a:ea typeface="Calibri" pitchFamily="34" charset="-122"/>
                 <a:cs typeface="Calibri" pitchFamily="34" charset="-120"/>
               </a:rPr>
-              <a:t>Отправка на сервер</a:t>
-            </a:r>
-          </a:p>
-        </p:txBody>
-      </p:sp>
-      <p:sp>
-        <p:nvSpPr>
-          <p:cNvPr id="120" name="T"/>
-          <p:cNvSpPr/>
-          <p:nvPr/>
-        </p:nvSpPr>
-        <p:spPr>
-          <a:xfrm>
-            <a:off x="1960000" y="3940000"/>
-            <a:ext cx="9600000" cy="300000"/>
+              <a:t>Буферизация</a:t>
+            </a:r>
+          </a:p>
+        </p:txBody>
+      </p:sp>
+      <p:sp>
+        <p:nvSpPr>
+          <p:cNvPr id="126" name="S"/>
+          <p:cNvSpPr/>
+          <p:nvPr/>
+        </p:nvSpPr>
+        <p:spPr>
+          <a:xfrm>
+            <a:off x="5030080" y="4434000"/>
+            <a:ext cx="130000" cy="130000"/>
+          </a:xfrm>
+          <a:prstGeom prst="rect">
+            <a:avLst/>
+          </a:prstGeom>
+          <a:solidFill>
+            <a:srgbClr val="9AA3AD"/>
+          </a:solidFill>
+          <a:ln/>
+        </p:spPr>
+      </p:sp>
+      <p:sp>
+        <p:nvSpPr>
+          <p:cNvPr id="127" name="T"/>
+          <p:cNvSpPr/>
+          <p:nvPr/>
+        </p:nvSpPr>
+        <p:spPr>
+          <a:xfrm>
+            <a:off x="5260080" y="4390000"/>
+            <a:ext cx="1880000" cy="300000"/>
           </a:xfrm>
           <a:prstGeom prst="rect">
             <a:avLst/>
@@ -6686,53 +6848,62 @@
               <a:buNone/>
             </a:pPr>
             <a:r>
-              <a:rPr lang="ru-RU" sz="1200" kern="0" dirty="0">
-                <a:solidFill>
-                  <a:srgbClr val="6B7480"/>
+              <a:rPr lang="ru-RU" sz="1100" kern="0" dirty="0">
+                <a:solidFill>
+                  <a:srgbClr val="444444"/>
                 </a:solidFill>
                 <a:latin typeface="Calibri" pitchFamily="34" charset="0"/>
                 <a:ea typeface="Calibri" pitchFamily="34" charset="-122"/>
                 <a:cs typeface="Calibri" pitchFamily="34" charset="-120"/>
               </a:rPr>
-              <a:t>батч уходит на /ingest по таймеру или заполнению буфера</a:t>
-            </a:r>
-          </a:p>
-        </p:txBody>
-      </p:sp>
-      <p:sp>
-        <p:nvSpPr>
-          <p:cNvPr id="121" name="S"/>
-          <p:cNvSpPr/>
-          <p:nvPr/>
-        </p:nvSpPr>
-        <p:spPr>
-          <a:xfrm>
-            <a:off x="1300000" y="4240000"/>
-            <a:ext cx="400000" cy="400000"/>
-          </a:xfrm>
-          <a:prstGeom prst="ellipse">
-            <a:avLst/>
-          </a:prstGeom>
-          <a:solidFill>
-            <a:srgbClr val="1F9BD8"/>
-          </a:solidFill>
-          <a:ln w="19050">
+              <a:t>Метки времени</a:t>
+            </a:r>
+          </a:p>
+        </p:txBody>
+      </p:sp>
+      <p:sp>
+        <p:nvSpPr>
+          <p:cNvPr id="128" name="S"/>
+          <p:cNvSpPr/>
+          <p:nvPr/>
+        </p:nvSpPr>
+        <p:spPr>
+          <a:xfrm>
+            <a:off x="7000080" y="2650000"/>
+            <a:ext cx="2300000" cy="760000"/>
+          </a:xfrm>
+          <a:prstGeom prst="chevron">
+            <a:avLst>
+              <a:gd name="adj" fmla="val 22000"/>
+            </a:avLst>
+          </a:prstGeom>
+          <a:solidFill>
+            <a:srgbClr val="EFE98C"/>
+          </a:solidFill>
+          <a:ln w="6350">
             <a:solidFill>
-              <a:srgbClr val="FFFFFF"/>
+              <a:srgbClr val="9AA0A6"/>
             </a:solidFill>
           </a:ln>
-        </p:spPr>
-      </p:sp>
-      <p:sp>
-        <p:nvSpPr>
-          <p:cNvPr id="122" name="T"/>
-          <p:cNvSpPr/>
-          <p:nvPr/>
-        </p:nvSpPr>
-        <p:spPr>
-          <a:xfrm>
-            <a:off x="1300000" y="4240000"/>
-            <a:ext cx="400000" cy="400000"/>
+          <a:effectLst>
+            <a:outerShdw sx="100000" sy="100000" kx="0" ky="0" algn="bl" rotWithShape="0" blurRad="76200" dist="20000" dir="5400000">
+              <a:srgbClr val="B8C9D4">
+                <a:alpha val="20000"/>
+              </a:srgbClr>
+            </a:outerShdw>
+          </a:effectLst>
+        </p:spPr>
+      </p:sp>
+      <p:sp>
+        <p:nvSpPr>
+          <p:cNvPr id="129" name="T"/>
+          <p:cNvSpPr/>
+          <p:nvPr/>
+        </p:nvSpPr>
+        <p:spPr>
+          <a:xfrm>
+            <a:off x="7200080" y="2650000"/>
+            <a:ext cx="1960000" cy="760000"/>
           </a:xfrm>
           <a:prstGeom prst="rect">
             <a:avLst/>
@@ -6748,29 +6919,49 @@
               <a:buNone/>
             </a:pPr>
             <a:r>
-              <a:rPr lang="ru-RU" sz="1400" b="1" kern="0" dirty="0">
-                <a:solidFill>
-                  <a:srgbClr val="FFFFFF"/>
+              <a:rPr lang="ru-RU" sz="1150" b="1" kern="0" dirty="0">
+                <a:solidFill>
+                  <a:srgbClr val="2B2B2B"/>
                 </a:solidFill>
                 <a:latin typeface="Calibri" pitchFamily="34" charset="0"/>
                 <a:ea typeface="Calibri" pitchFamily="34" charset="-122"/>
                 <a:cs typeface="Calibri" pitchFamily="34" charset="-120"/>
               </a:rPr>
-              <a:t>5</a:t>
-            </a:r>
-          </a:p>
-        </p:txBody>
-      </p:sp>
-      <p:sp>
-        <p:nvSpPr>
-          <p:cNvPr id="123" name="T"/>
-          <p:cNvSpPr/>
-          <p:nvPr/>
-        </p:nvSpPr>
-        <p:spPr>
-          <a:xfrm>
-            <a:off x="1960000" y="4230000"/>
-            <a:ext cx="3400000" cy="360000"/>
+              <a:t>4. Отправка</a:t>
+            </a:r>
+          </a:p>
+        </p:txBody>
+      </p:sp>
+      <p:sp>
+        <p:nvSpPr>
+          <p:cNvPr id="130" name="S"/>
+          <p:cNvSpPr/>
+          <p:nvPr/>
+        </p:nvSpPr>
+        <p:spPr>
+          <a:xfrm>
+            <a:off x="7150080" y="3714000"/>
+            <a:ext cx="130000" cy="130000"/>
+          </a:xfrm>
+          <a:prstGeom prst="rect">
+            <a:avLst/>
+          </a:prstGeom>
+          <a:solidFill>
+            <a:srgbClr val="9AA3AD"/>
+          </a:solidFill>
+          <a:ln/>
+        </p:spPr>
+      </p:sp>
+      <p:sp>
+        <p:nvSpPr>
+          <p:cNvPr id="131" name="T"/>
+          <p:cNvSpPr/>
+          <p:nvPr/>
+        </p:nvSpPr>
+        <p:spPr>
+          <a:xfrm>
+            <a:off x="7380080" y="3670000"/>
+            <a:ext cx="1880000" cy="300000"/>
           </a:xfrm>
           <a:prstGeom prst="rect">
             <a:avLst/>
@@ -6786,29 +6977,49 @@
               <a:buNone/>
             </a:pPr>
             <a:r>
-              <a:rPr lang="ru-RU" sz="1450" b="1" kern="0" dirty="0">
-                <a:solidFill>
-                  <a:srgbClr val="111418"/>
+              <a:rPr lang="ru-RU" sz="1100" kern="0" dirty="0">
+                <a:solidFill>
+                  <a:srgbClr val="444444"/>
                 </a:solidFill>
                 <a:latin typeface="Calibri" pitchFamily="34" charset="0"/>
                 <a:ea typeface="Calibri" pitchFamily="34" charset="-122"/>
                 <a:cs typeface="Calibri" pitchFamily="34" charset="-120"/>
               </a:rPr>
-              <a:t>Адаптация в игру</a:t>
-            </a:r>
-          </a:p>
-        </p:txBody>
-      </p:sp>
-      <p:sp>
-        <p:nvSpPr>
-          <p:cNvPr id="124" name="T"/>
-          <p:cNvSpPr/>
-          <p:nvPr/>
-        </p:nvSpPr>
-        <p:spPr>
-          <a:xfrm>
-            <a:off x="1960000" y="4560000"/>
-            <a:ext cx="9600000" cy="300000"/>
+              <a:t>Батч → /ingest</a:t>
+            </a:r>
+          </a:p>
+        </p:txBody>
+      </p:sp>
+      <p:sp>
+        <p:nvSpPr>
+          <p:cNvPr id="132" name="S"/>
+          <p:cNvSpPr/>
+          <p:nvPr/>
+        </p:nvSpPr>
+        <p:spPr>
+          <a:xfrm>
+            <a:off x="7150080" y="4074000"/>
+            <a:ext cx="130000" cy="130000"/>
+          </a:xfrm>
+          <a:prstGeom prst="rect">
+            <a:avLst/>
+          </a:prstGeom>
+          <a:solidFill>
+            <a:srgbClr val="9AA3AD"/>
+          </a:solidFill>
+          <a:ln/>
+        </p:spPr>
+      </p:sp>
+      <p:sp>
+        <p:nvSpPr>
+          <p:cNvPr id="133" name="T"/>
+          <p:cNvSpPr/>
+          <p:nvPr/>
+        </p:nvSpPr>
+        <p:spPr>
+          <a:xfrm>
+            <a:off x="7380080" y="4030000"/>
+            <a:ext cx="1880000" cy="300000"/>
           </a:xfrm>
           <a:prstGeom prst="rect">
             <a:avLst/>
@@ -6824,53 +7035,49 @@
               <a:buNone/>
             </a:pPr>
             <a:r>
-              <a:rPr lang="ru-RU" sz="1200" kern="0" dirty="0">
-                <a:solidFill>
-                  <a:srgbClr val="6B7480"/>
+              <a:rPr lang="ru-RU" sz="1100" kern="0" dirty="0">
+                <a:solidFill>
+                  <a:srgbClr val="444444"/>
                 </a:solidFill>
                 <a:latin typeface="Calibri" pitchFamily="34" charset="0"/>
                 <a:ea typeface="Calibri" pitchFamily="34" charset="-122"/>
                 <a:cs typeface="Calibri" pitchFamily="34" charset="-120"/>
               </a:rPr>
-              <a:t>сервер возвращает параметры — плагин применяет их через сигнал</a:t>
-            </a:r>
-          </a:p>
-        </p:txBody>
-      </p:sp>
-      <p:sp>
-        <p:nvSpPr>
-          <p:cNvPr id="125" name="S"/>
-          <p:cNvSpPr/>
-          <p:nvPr/>
-        </p:nvSpPr>
-        <p:spPr>
-          <a:xfrm>
-            <a:off x="1300000" y="4860000"/>
-            <a:ext cx="400000" cy="400000"/>
-          </a:xfrm>
-          <a:prstGeom prst="ellipse">
-            <a:avLst/>
-          </a:prstGeom>
-          <a:solidFill>
-            <a:srgbClr val="1F9BD8"/>
-          </a:solidFill>
-          <a:ln w="19050">
-            <a:solidFill>
-              <a:srgbClr val="FFFFFF"/>
-            </a:solidFill>
-          </a:ln>
-        </p:spPr>
-      </p:sp>
-      <p:sp>
-        <p:nvSpPr>
-          <p:cNvPr id="126" name="T"/>
-          <p:cNvSpPr/>
-          <p:nvPr/>
-        </p:nvSpPr>
-        <p:spPr>
-          <a:xfrm>
-            <a:off x="1300000" y="4860000"/>
-            <a:ext cx="400000" cy="400000"/>
+              <a:t>По таймеру/буферу</a:t>
+            </a:r>
+          </a:p>
+        </p:txBody>
+      </p:sp>
+      <p:sp>
+        <p:nvSpPr>
+          <p:cNvPr id="134" name="S"/>
+          <p:cNvSpPr/>
+          <p:nvPr/>
+        </p:nvSpPr>
+        <p:spPr>
+          <a:xfrm>
+            <a:off x="7150080" y="4434000"/>
+            <a:ext cx="130000" cy="130000"/>
+          </a:xfrm>
+          <a:prstGeom prst="rect">
+            <a:avLst/>
+          </a:prstGeom>
+          <a:solidFill>
+            <a:srgbClr val="9AA3AD"/>
+          </a:solidFill>
+          <a:ln/>
+        </p:spPr>
+      </p:sp>
+      <p:sp>
+        <p:nvSpPr>
+          <p:cNvPr id="135" name="T"/>
+          <p:cNvSpPr/>
+          <p:nvPr/>
+        </p:nvSpPr>
+        <p:spPr>
+          <a:xfrm>
+            <a:off x="7380080" y="4390000"/>
+            <a:ext cx="1880000" cy="300000"/>
           </a:xfrm>
           <a:prstGeom prst="rect">
             <a:avLst/>
@@ -6882,33 +7089,66 @@
           <a:bodyPr wrap="square" lIns="0" tIns="0" rIns="0" bIns="0" rtlCol="0" anchor="ctr"/>
           <a:lstStyle/>
           <a:p>
-            <a:pPr algn="ctr" indent="0" marL="0">
-              <a:buNone/>
-            </a:pPr>
-            <a:r>
-              <a:rPr lang="ru-RU" sz="1400" b="1" kern="0" dirty="0">
-                <a:solidFill>
-                  <a:srgbClr val="FFFFFF"/>
+            <a:pPr algn="l" indent="0" marL="0">
+              <a:buNone/>
+            </a:pPr>
+            <a:r>
+              <a:rPr lang="ru-RU" sz="1100" kern="0" dirty="0">
+                <a:solidFill>
+                  <a:srgbClr val="444444"/>
                 </a:solidFill>
                 <a:latin typeface="Calibri" pitchFamily="34" charset="0"/>
                 <a:ea typeface="Calibri" pitchFamily="34" charset="-122"/>
                 <a:cs typeface="Calibri" pitchFamily="34" charset="-120"/>
               </a:rPr>
-              <a:t>6</a:t>
-            </a:r>
-          </a:p>
-        </p:txBody>
-      </p:sp>
-      <p:sp>
-        <p:nvSpPr>
-          <p:cNvPr id="127" name="T"/>
-          <p:cNvSpPr/>
-          <p:nvPr/>
-        </p:nvSpPr>
-        <p:spPr>
-          <a:xfrm>
-            <a:off x="1960000" y="4850000"/>
-            <a:ext cx="3400000" cy="360000"/>
+              <a:t>Повторные попытки</a:t>
+            </a:r>
+          </a:p>
+        </p:txBody>
+      </p:sp>
+      <p:sp>
+        <p:nvSpPr>
+          <p:cNvPr id="136" name="S"/>
+          <p:cNvSpPr/>
+          <p:nvPr/>
+        </p:nvSpPr>
+        <p:spPr>
+          <a:xfrm>
+            <a:off x="9120080" y="2650000"/>
+            <a:ext cx="2300000" cy="760000"/>
+          </a:xfrm>
+          <a:prstGeom prst="chevron">
+            <a:avLst>
+              <a:gd name="adj" fmla="val 22000"/>
+            </a:avLst>
+          </a:prstGeom>
+          <a:solidFill>
+            <a:srgbClr val="8FD6A0"/>
+          </a:solidFill>
+          <a:ln w="6350">
+            <a:solidFill>
+              <a:srgbClr val="9AA0A6"/>
+            </a:solidFill>
+          </a:ln>
+          <a:effectLst>
+            <a:outerShdw sx="100000" sy="100000" kx="0" ky="0" algn="bl" rotWithShape="0" blurRad="76200" dist="20000" dir="5400000">
+              <a:srgbClr val="B8C9D4">
+                <a:alpha val="20000"/>
+              </a:srgbClr>
+            </a:outerShdw>
+          </a:effectLst>
+        </p:spPr>
+      </p:sp>
+      <p:sp>
+        <p:nvSpPr>
+          <p:cNvPr id="137" name="T"/>
+          <p:cNvSpPr/>
+          <p:nvPr/>
+        </p:nvSpPr>
+        <p:spPr>
+          <a:xfrm>
+            <a:off x="9320080" y="2650000"/>
+            <a:ext cx="1960000" cy="760000"/>
           </a:xfrm>
           <a:prstGeom prst="rect">
             <a:avLst/>
@@ -6920,33 +7160,53 @@
           <a:bodyPr wrap="square" lIns="0" tIns="0" rIns="0" bIns="0" rtlCol="0" anchor="ctr"/>
           <a:lstStyle/>
           <a:p>
-            <a:pPr algn="l" indent="0" marL="0">
-              <a:buNone/>
-            </a:pPr>
-            <a:r>
-              <a:rPr lang="ru-RU" sz="1450" b="1" kern="0" dirty="0">
-                <a:solidFill>
-                  <a:srgbClr val="111418"/>
+            <a:pPr algn="ctr" indent="0" marL="0">
+              <a:buNone/>
+            </a:pPr>
+            <a:r>
+              <a:rPr lang="ru-RU" sz="1150" b="1" kern="0" dirty="0">
+                <a:solidFill>
+                  <a:srgbClr val="2B2B2B"/>
                 </a:solidFill>
                 <a:latin typeface="Calibri" pitchFamily="34" charset="0"/>
                 <a:ea typeface="Calibri" pitchFamily="34" charset="-122"/>
                 <a:cs typeface="Calibri" pitchFamily="34" charset="-120"/>
               </a:rPr>
-              <a:t>Завершение сессии</a:t>
-            </a:r>
-          </a:p>
-        </p:txBody>
-      </p:sp>
-      <p:sp>
-        <p:nvSpPr>
-          <p:cNvPr id="128" name="T"/>
-          <p:cNvSpPr/>
-          <p:nvPr/>
-        </p:nvSpPr>
-        <p:spPr>
-          <a:xfrm>
-            <a:off x="1960000" y="5180000"/>
-            <a:ext cx="9600000" cy="300000"/>
+              <a:t>5. Адаптация</a:t>
+            </a:r>
+          </a:p>
+        </p:txBody>
+      </p:sp>
+      <p:sp>
+        <p:nvSpPr>
+          <p:cNvPr id="138" name="S"/>
+          <p:cNvSpPr/>
+          <p:nvPr/>
+        </p:nvSpPr>
+        <p:spPr>
+          <a:xfrm>
+            <a:off x="9270080" y="3714000"/>
+            <a:ext cx="130000" cy="130000"/>
+          </a:xfrm>
+          <a:prstGeom prst="rect">
+            <a:avLst/>
+          </a:prstGeom>
+          <a:solidFill>
+            <a:srgbClr val="9AA3AD"/>
+          </a:solidFill>
+          <a:ln/>
+        </p:spPr>
+      </p:sp>
+      <p:sp>
+        <p:nvSpPr>
+          <p:cNvPr id="139" name="T"/>
+          <p:cNvSpPr/>
+          <p:nvPr/>
+        </p:nvSpPr>
+        <p:spPr>
+          <a:xfrm>
+            <a:off x="9500080" y="3670000"/>
+            <a:ext cx="1880000" cy="300000"/>
           </a:xfrm>
           <a:prstGeom prst="rect">
             <a:avLst/>
@@ -6962,15 +7222,131 @@
               <a:buNone/>
             </a:pPr>
             <a:r>
-              <a:rPr lang="ru-RU" sz="1200" kern="0" dirty="0">
-                <a:solidFill>
-                  <a:srgbClr val="6B7480"/>
+              <a:rPr lang="ru-RU" sz="1100" kern="0" dirty="0">
+                <a:solidFill>
+                  <a:srgbClr val="444444"/>
                 </a:solidFill>
                 <a:latin typeface="Calibri" pitchFamily="34" charset="0"/>
                 <a:ea typeface="Calibri" pitchFamily="34" charset="-122"/>
                 <a:cs typeface="Calibri" pitchFamily="34" charset="-120"/>
               </a:rPr>
-              <a:t>end_game закрывает сессию и досылает остаток буфера</a:t>
+              <a:t>Приём параметров</a:t>
+            </a:r>
+          </a:p>
+        </p:txBody>
+      </p:sp>
+      <p:sp>
+        <p:nvSpPr>
+          <p:cNvPr id="140" name="S"/>
+          <p:cNvSpPr/>
+          <p:nvPr/>
+        </p:nvSpPr>
+        <p:spPr>
+          <a:xfrm>
+            <a:off x="9270080" y="4074000"/>
+            <a:ext cx="130000" cy="130000"/>
+          </a:xfrm>
+          <a:prstGeom prst="rect">
+            <a:avLst/>
+          </a:prstGeom>
+          <a:solidFill>
+            <a:srgbClr val="9AA3AD"/>
+          </a:solidFill>
+          <a:ln/>
+        </p:spPr>
+      </p:sp>
+      <p:sp>
+        <p:nvSpPr>
+          <p:cNvPr id="141" name="T"/>
+          <p:cNvSpPr/>
+          <p:nvPr/>
+        </p:nvSpPr>
+        <p:spPr>
+          <a:xfrm>
+            <a:off x="9500080" y="4030000"/>
+            <a:ext cx="1880000" cy="300000"/>
+          </a:xfrm>
+          <a:prstGeom prst="rect">
+            <a:avLst/>
+          </a:prstGeom>
+          <a:noFill/>
+          <a:ln/>
+        </p:spPr>
+        <p:txBody>
+          <a:bodyPr wrap="square" lIns="0" tIns="0" rIns="0" bIns="0" rtlCol="0" anchor="ctr"/>
+          <a:lstStyle/>
+          <a:p>
+            <a:pPr algn="l" indent="0" marL="0">
+              <a:buNone/>
+            </a:pPr>
+            <a:r>
+              <a:rPr lang="ru-RU" sz="1100" kern="0" dirty="0">
+                <a:solidFill>
+                  <a:srgbClr val="444444"/>
+                </a:solidFill>
+                <a:latin typeface="Calibri" pitchFamily="34" charset="0"/>
+                <a:ea typeface="Calibri" pitchFamily="34" charset="-122"/>
+                <a:cs typeface="Calibri" pitchFamily="34" charset="-120"/>
+              </a:rPr>
+              <a:t>Применение в игре</a:t>
+            </a:r>
+          </a:p>
+        </p:txBody>
+      </p:sp>
+      <p:sp>
+        <p:nvSpPr>
+          <p:cNvPr id="142" name="S"/>
+          <p:cNvSpPr/>
+          <p:nvPr/>
+        </p:nvSpPr>
+        <p:spPr>
+          <a:xfrm>
+            <a:off x="9270080" y="4434000"/>
+            <a:ext cx="130000" cy="130000"/>
+          </a:xfrm>
+          <a:prstGeom prst="rect">
+            <a:avLst/>
+          </a:prstGeom>
+          <a:solidFill>
+            <a:srgbClr val="9AA3AD"/>
+          </a:solidFill>
+          <a:ln/>
+        </p:spPr>
+      </p:sp>
+      <p:sp>
+        <p:nvSpPr>
+          <p:cNvPr id="143" name="T"/>
+          <p:cNvSpPr/>
+          <p:nvPr/>
+        </p:nvSpPr>
+        <p:spPr>
+          <a:xfrm>
+            <a:off x="9500080" y="4390000"/>
+            <a:ext cx="1880000" cy="300000"/>
+          </a:xfrm>
+          <a:prstGeom prst="rect">
+            <a:avLst/>
+          </a:prstGeom>
+          <a:noFill/>
+          <a:ln/>
+        </p:spPr>
+        <p:txBody>
+          <a:bodyPr wrap="square" lIns="0" tIns="0" rIns="0" bIns="0" rtlCol="0" anchor="ctr"/>
+          <a:lstStyle/>
+          <a:p>
+            <a:pPr algn="l" indent="0" marL="0">
+              <a:buNone/>
+            </a:pPr>
+            <a:r>
+              <a:rPr lang="ru-RU" sz="1100" kern="0" dirty="0">
+                <a:solidFill>
+                  <a:srgbClr val="444444"/>
+                </a:solidFill>
+                <a:latin typeface="Calibri" pitchFamily="34" charset="0"/>
+                <a:ea typeface="Calibri" pitchFamily="34" charset="-122"/>
+                <a:cs typeface="Calibri" pitchFamily="34" charset="-120"/>
+              </a:rPr>
+              <a:t>end_game, досыл</a:t>
             </a:r>
           </a:p>
         </p:txBody>

--- a/presentations/Артамонов_ВКР_телеметрия_NEW.pptx
+++ b/presentations/Артамонов_ВКР_телеметрия_NEW.pptx
@@ -3250,7 +3250,7 @@
               <a:buNone/>
             </a:pPr>
             <a:r>
-              <a:rPr lang="ru-RU" sz="1250" b="1" spc="250" kern="0" dirty="0">
+              <a:rPr lang="ru-RU" sz="1500" b="1" spc="250" kern="0" dirty="0">
                 <a:solidFill>
                   <a:srgbClr val="1F9BD8"/>
                 </a:solidFill>
@@ -4547,7 +4547,7 @@
               <a:buNone/>
             </a:pPr>
             <a:r>
-              <a:rPr lang="en-US" sz="1250" b="1" spc="250" kern="0" dirty="0">
+              <a:rPr lang="en-US" sz="1500" b="1" spc="250" kern="0" dirty="0">
                 <a:solidFill>
                   <a:srgbClr val="1F9BD8"/>
                 </a:solidFill>
@@ -4557,7 +4557,7 @@
               </a:rPr>
               <a:t>АКТУАЛЬНОСТЬ</a:t>
             </a:r>
-            <a:endParaRPr lang="en-US" sz="1250" dirty="0"/>
+            <a:endParaRPr lang="en-US" sz="1500" dirty="0"/>
           </a:p>
         </p:txBody>
       </p:sp>
@@ -5194,7 +5194,7 @@
               <a:buNone/>
             </a:pPr>
             <a:r>
-              <a:rPr lang="en-US" sz="1250" b="1" spc="250" kern="0" dirty="0">
+              <a:rPr lang="en-US" sz="1500" b="1" spc="250" kern="0" dirty="0">
                 <a:solidFill>
                   <a:srgbClr val="1F9BD8"/>
                 </a:solidFill>
@@ -5204,7 +5204,7 @@
               </a:rPr>
               <a:t>ВЫБОР ДВИЖКА</a:t>
             </a:r>
-            <a:endParaRPr lang="en-US" sz="1250" dirty="0"/>
+            <a:endParaRPr lang="en-US" sz="1500" dirty="0"/>
           </a:p>
         </p:txBody>
       </p:sp>
@@ -6037,7 +6037,7 @@
               <a:buNone/>
             </a:pPr>
             <a:r>
-              <a:rPr lang="ru-RU" sz="1250" b="1" kern="0" dirty="0">
+              <a:rPr lang="ru-RU" sz="1500" b="1" kern="0" dirty="0">
                 <a:solidFill>
                   <a:srgbClr val="1F9BD8"/>
                 </a:solidFill>
@@ -7447,7 +7447,7 @@
               <a:buNone/>
             </a:pPr>
             <a:r>
-              <a:rPr lang="en-US" sz="1250" b="1" spc="250" kern="0" dirty="0">
+              <a:rPr lang="en-US" sz="1500" b="1" spc="250" kern="0" dirty="0">
                 <a:solidFill>
                   <a:srgbClr val="1F9BD8"/>
                 </a:solidFill>
@@ -7457,7 +7457,7 @@
               </a:rPr>
               <a:t>ИНТЕРФЕЙС</a:t>
             </a:r>
-            <a:endParaRPr lang="en-US" sz="1250" dirty="0"/>
+            <a:endParaRPr lang="en-US" sz="1500" dirty="0"/>
           </a:p>
         </p:txBody>
       </p:sp>
@@ -8302,7 +8302,7 @@
               <a:buNone/>
             </a:pPr>
             <a:r>
-              <a:rPr lang="en-US" sz="1250" b="1" spc="250" kern="0" dirty="0">
+              <a:rPr lang="en-US" sz="1500" b="1" spc="250" kern="0" dirty="0">
                 <a:solidFill>
                   <a:srgbClr val="1F9BD8"/>
                 </a:solidFill>
@@ -8312,7 +8312,7 @@
               </a:rPr>
               <a:t>ИНТЕРФЕЙС</a:t>
             </a:r>
-            <a:endParaRPr lang="en-US" sz="1250" dirty="0"/>
+            <a:endParaRPr lang="en-US" sz="1500" dirty="0"/>
           </a:p>
         </p:txBody>
       </p:sp>
@@ -9923,7 +9923,7 @@
               <a:buNone/>
             </a:pPr>
             <a:r>
-              <a:rPr lang="en-US" sz="1250" b="1" spc="250" kern="0" dirty="0">
+              <a:rPr lang="en-US" sz="1500" b="1" spc="250" kern="0" dirty="0">
                 <a:solidFill>
                   <a:srgbClr val="1F9BD8"/>
                 </a:solidFill>
@@ -9933,7 +9933,7 @@
               </a:rPr>
               <a:t>КОНТРАКТ</a:t>
             </a:r>
-            <a:endParaRPr lang="en-US" sz="1250" dirty="0"/>
+            <a:endParaRPr lang="en-US" sz="1500" dirty="0"/>
           </a:p>
         </p:txBody>
       </p:sp>
@@ -10960,7 +10960,7 @@
               <a:buNone/>
             </a:pPr>
             <a:r>
-              <a:rPr lang="en-US" sz="1250" b="1" spc="250" kern="0" dirty="0">
+              <a:rPr lang="en-US" sz="1500" b="1" spc="250" kern="0" dirty="0">
                 <a:solidFill>
                   <a:srgbClr val="1F9BD8"/>
                 </a:solidFill>
@@ -10970,7 +10970,7 @@
               </a:rPr>
               <a:t>МАСШТАБИРОВАНИЕ</a:t>
             </a:r>
-            <a:endParaRPr lang="en-US" sz="1250" dirty="0"/>
+            <a:endParaRPr lang="en-US" sz="1500" dirty="0"/>
           </a:p>
         </p:txBody>
       </p:sp>
@@ -11866,7 +11866,7 @@
               <a:buNone/>
             </a:pPr>
             <a:r>
-              <a:rPr lang="en-US" sz="1250" b="1" spc="250" kern="0" dirty="0">
+              <a:rPr lang="en-US" sz="1500" b="1" spc="250" kern="0" dirty="0">
                 <a:solidFill>
                   <a:srgbClr val="1F9BD8"/>
                 </a:solidFill>
@@ -11876,7 +11876,7 @@
               </a:rPr>
               <a:t>ЗАДЕЛЫ НА БУДУЩЕЕ</a:t>
             </a:r>
-            <a:endParaRPr lang="en-US" sz="1250" dirty="0"/>
+            <a:endParaRPr lang="en-US" sz="1500" dirty="0"/>
           </a:p>
         </p:txBody>
       </p:sp>

--- a/presentations/Артамонов_ВКР_телеметрия_NEW.pptx
+++ b/presentations/Артамонов_ВКР_телеметрия_NEW.pptx
@@ -4,22 +4,22 @@
   <p:sldMasterIdLst>
     <p:sldMasterId id="2147483648" r:id="rId1"/>
   </p:sldMasterIdLst>
+  <p:notesMasterIdLst>
+    <p:notesMasterId r:id="rId13"/>
+  </p:notesMasterIdLst>
   <p:sldIdLst>
     <p:sldId id="256" r:id="rId2"/>
     <p:sldId id="257" r:id="rId3"/>
-    <p:sldId id="266" r:id="rId17"/>
-    <p:sldId id="258" r:id="rId4"/>
-    <p:sldId id="259" r:id="rId5"/>
-    <p:sldId id="260" r:id="rId6"/>
-    <p:sldId id="261" r:id="rId7"/>
-    <p:sldId id="262" r:id="rId8"/>
-    <p:sldId id="263" r:id="rId9"/>
-    <p:sldId id="264" r:id="rId10"/>
-    <p:sldId id="265" r:id="rId11"/>
+    <p:sldId id="266" r:id="rId4"/>
+    <p:sldId id="258" r:id="rId5"/>
+    <p:sldId id="259" r:id="rId6"/>
+    <p:sldId id="260" r:id="rId7"/>
+    <p:sldId id="261" r:id="rId8"/>
+    <p:sldId id="262" r:id="rId9"/>
+    <p:sldId id="263" r:id="rId10"/>
+    <p:sldId id="264" r:id="rId11"/>
+    <p:sldId id="265" r:id="rId12"/>
   </p:sldIdLst>
-  <p:notesMasterIdLst>
-    <p:notesMasterId r:id="rId12"/>
-  </p:notesMasterIdLst>
   <p:sldSz cx="12192000" cy="6858000"/>
   <p:notesSz cx="6858000" cy="12192000"/>
   <p:defaultTextStyle>
@@ -114,6 +114,11 @@
       </a:defRPr>
     </a:lvl9pPr>
   </p:defaultTextStyle>
+  <p:extLst>
+    <p:ext uri="{EFAFB233-063F-42B5-8137-9DF3F51BA10A}">
+      <p15:sldGuideLst xmlns:p15="http://schemas.microsoft.com/office/powerpoint/2012/main"/>
+    </p:ext>
+  </p:extLst>
 </p:presentation>
 </file>
 
@@ -139,234 +144,10 @@
           <a:chExt cx="0" cy="0"/>
         </a:xfrm>
       </p:grpSpPr>
-      <p:sp>
-        <p:nvSpPr>
-          <p:cNvPr id="2" name="Header Placeholder 1"/>
-          <p:cNvSpPr>
-            <a:spLocks noGrp="1"/>
-          </p:cNvSpPr>
-          <p:nvPr>
-            <p:ph type="hdr" sz="quarter"/>
-          </p:nvPr>
-        </p:nvSpPr>
-        <p:spPr>
-          <a:xfrm>
-            <a:off x="0" y="0"/>
-            <a:ext cx="2971800" cy="458788"/>
-          </a:xfrm>
-          <a:prstGeom prst="rect">
-            <a:avLst/>
-          </a:prstGeom>
-        </p:spPr>
-        <p:txBody>
-          <a:bodyPr vert="horz" lIns="91440" tIns="45720" rIns="91440" bIns="45720" rtlCol="0"/>
-          <a:lstStyle>
-            <a:lvl1pPr algn="l">
-              <a:defRPr sz="1200"/>
-            </a:lvl1pPr>
-          </a:lstStyle>
-          <a:p>
-            <a:endParaRPr lang="en-US"/>
-          </a:p>
-        </p:txBody>
-      </p:sp>
-      <p:sp>
-        <p:nvSpPr>
-          <p:cNvPr id="3" name="Date Placeholder 2"/>
-          <p:cNvSpPr>
-            <a:spLocks noGrp="1"/>
-          </p:cNvSpPr>
-          <p:nvPr>
-            <p:ph type="dt" idx="1"/>
-          </p:nvPr>
-        </p:nvSpPr>
-        <p:spPr>
-          <a:xfrm>
-            <a:off x="3884613" y="0"/>
-            <a:ext cx="2971800" cy="458788"/>
-          </a:xfrm>
-          <a:prstGeom prst="rect">
-            <a:avLst/>
-          </a:prstGeom>
-        </p:spPr>
-        <p:txBody>
-          <a:bodyPr vert="horz" lIns="91440" tIns="45720" rIns="91440" bIns="45720" rtlCol="0"/>
-          <a:lstStyle>
-            <a:lvl1pPr algn="r">
-              <a:defRPr sz="1200"/>
-            </a:lvl1pPr>
-          </a:lstStyle>
-          <a:p>
-            <a:fld id="{5282F153-3F37-0F45-9E97-73ACFA13230C}" type="datetimeFigureOut">
-              <a:rPr lang="en-US"/>
-              <a:t>7/23/19</a:t>
-            </a:fld>
-            <a:endParaRPr lang="en-US"/>
-          </a:p>
-        </p:txBody>
-      </p:sp>
-      <p:sp>
-        <p:nvSpPr>
-          <p:cNvPr id="4" name="Slide Image Placeholder 3"/>
-          <p:cNvSpPr>
-            <a:spLocks noGrp="1" noRot="1" noChangeAspect="1"/>
-          </p:cNvSpPr>
-          <p:nvPr>
-            <p:ph type="sldImg" idx="2"/>
-          </p:nvPr>
-        </p:nvSpPr>
-        <p:spPr>
-          <a:xfrm>
-            <a:off x="685800" y="1143000"/>
-            <a:ext cx="5486400" cy="3086100"/>
-          </a:xfrm>
-          <a:prstGeom prst="rect">
-            <a:avLst/>
-          </a:prstGeom>
-          <a:noFill/>
-          <a:ln w="12700">
-            <a:solidFill>
-              <a:prstClr val="black"/>
-            </a:solidFill>
-          </a:ln>
-        </p:spPr>
-        <p:txBody>
-          <a:bodyPr vert="horz" lIns="91440" tIns="45720" rIns="91440" bIns="45720" rtlCol="0" anchor="ctr"/>
-          <a:lstStyle/>
-          <a:p>
-            <a:endParaRPr lang="en-US"/>
-          </a:p>
-        </p:txBody>
-      </p:sp>
-      <p:sp>
-        <p:nvSpPr>
-          <p:cNvPr id="5" name="Notes Placeholder 4"/>
-          <p:cNvSpPr>
-            <a:spLocks noGrp="1"/>
-          </p:cNvSpPr>
-          <p:nvPr>
-            <p:ph type="body" sz="quarter" idx="3"/>
-          </p:nvPr>
-        </p:nvSpPr>
-        <p:spPr>
-          <a:xfrm>
-            <a:off x="685800" y="4400550"/>
-            <a:ext cx="5486400" cy="3600450"/>
-          </a:xfrm>
-          <a:prstGeom prst="rect">
-            <a:avLst/>
-          </a:prstGeom>
-        </p:spPr>
-        <p:txBody>
-          <a:bodyPr vert="horz" lIns="91440" tIns="45720" rIns="91440" bIns="45720" rtlCol="0"/>
-          <a:lstStyle/>
-          <a:p>
-            <a:pPr lvl="0"/>
-            <a:r>
-              <a:rPr lang="en-US"/>
-              <a:t>Click to edit Master text styles</a:t>
-            </a:r>
-          </a:p>
-          <a:p>
-            <a:pPr lvl="1"/>
-            <a:r>
-              <a:rPr lang="en-US"/>
-              <a:t>Second level</a:t>
-            </a:r>
-          </a:p>
-          <a:p>
-            <a:pPr lvl="2"/>
-            <a:r>
-              <a:rPr lang="en-US"/>
-              <a:t>Third level</a:t>
-            </a:r>
-          </a:p>
-          <a:p>
-            <a:pPr lvl="3"/>
-            <a:r>
-              <a:rPr lang="en-US"/>
-              <a:t>Fourth level</a:t>
-            </a:r>
-          </a:p>
-          <a:p>
-            <a:pPr lvl="4"/>
-            <a:r>
-              <a:rPr lang="en-US"/>
-              <a:t>Fifth level</a:t>
-            </a:r>
-          </a:p>
-        </p:txBody>
-      </p:sp>
-      <p:sp>
-        <p:nvSpPr>
-          <p:cNvPr id="6" name="Footer Placeholder 5"/>
-          <p:cNvSpPr>
-            <a:spLocks noGrp="1"/>
-          </p:cNvSpPr>
-          <p:nvPr>
-            <p:ph type="ftr" sz="quarter" idx="4"/>
-          </p:nvPr>
-        </p:nvSpPr>
-        <p:spPr>
-          <a:xfrm>
-            <a:off x="0" y="8685213"/>
-            <a:ext cx="2971800" cy="458787"/>
-          </a:xfrm>
-          <a:prstGeom prst="rect">
-            <a:avLst/>
-          </a:prstGeom>
-        </p:spPr>
-        <p:txBody>
-          <a:bodyPr vert="horz" lIns="91440" tIns="45720" rIns="91440" bIns="45720" rtlCol="0" anchor="b"/>
-          <a:lstStyle>
-            <a:lvl1pPr algn="l">
-              <a:defRPr sz="1200"/>
-            </a:lvl1pPr>
-          </a:lstStyle>
-          <a:p>
-            <a:endParaRPr lang="en-US"/>
-          </a:p>
-        </p:txBody>
-      </p:sp>
-      <p:sp>
-        <p:nvSpPr>
-          <p:cNvPr id="7" name="Slide Number Placeholder 6"/>
-          <p:cNvSpPr>
-            <a:spLocks noGrp="1"/>
-          </p:cNvSpPr>
-          <p:nvPr>
-            <p:ph type="sldNum" sz="quarter" idx="5"/>
-          </p:nvPr>
-        </p:nvSpPr>
-        <p:spPr>
-          <a:xfrm>
-            <a:off x="3884613" y="8685213"/>
-            <a:ext cx="2971800" cy="458787"/>
-          </a:xfrm>
-          <a:prstGeom prst="rect">
-            <a:avLst/>
-          </a:prstGeom>
-        </p:spPr>
-        <p:txBody>
-          <a:bodyPr vert="horz" lIns="91440" tIns="45720" rIns="91440" bIns="45720" rtlCol="0" anchor="b"/>
-          <a:lstStyle>
-            <a:lvl1pPr algn="r">
-              <a:defRPr sz="1200"/>
-            </a:lvl1pPr>
-          </a:lstStyle>
-          <a:p>
-            <a:fld id="{CE5E9CC1-C706-0F49-92D6-E571CC5EEA8F}" type="slidenum">
-              <a:rPr lang="en-US"/>
-              <a:t>‹#›</a:t>
-            </a:fld>
-            <a:endParaRPr lang="en-US"/>
-          </a:p>
-        </p:txBody>
-      </p:sp>
     </p:spTree>
     <p:extLst>
       <p:ext uri="{BB962C8B-B14F-4D97-AF65-F5344CB8AC3E}">
-        <p14:creationId xmlns:p14="http://schemas.microsoft.com/office/powerpoint/2010/main" val="1024086991"/>
+        <p14:creationId xmlns:p14="http://schemas.microsoft.com/office/powerpoint/2010/main" val="51601635"/>
       </p:ext>
     </p:extLst>
   </p:cSld>
@@ -514,7 +295,6 @@
               <a:rPr lang="en-US" dirty="0"/>
               <a:t>Здравствуйте. Я делал клиентскую часть проекта — плагин для движка Godot. Его задача — дать разработчику игры простой инструмент: скопировал папку аддона, включил плагин, и игра начинает собирать телеметрию и получать адаптацию из облака. При этом разработчик не пишет ни строчки ML-кода. Расскажу про сферу инди-разработки, почему Godot, как устроен плагин, его интерфейс и контракт с сервером.</a:t>
             </a:r>
-            <a:endParaRPr lang="en-US" dirty="0"/>
           </a:p>
         </p:txBody>
       </p:sp>
@@ -602,7 +382,6 @@
               <a:rPr lang="en-US" dirty="0"/>
               <a:t>Итог по моей части. Плагин analytics_plugin для Godot 4 даёт инди-разработчику серьёзную аналитику и адаптивный геймплей через простое API из четырёх вызовов, с настройкой прямо в редакторе и надёжной отправкой телеметрии. Спасибо за внимание.</a:t>
             </a:r>
-            <a:endParaRPr lang="en-US" dirty="0"/>
           </a:p>
         </p:txBody>
       </p:sp>
@@ -623,7 +402,7 @@
           <a:p>
             <a:fld id="{F7021451-1387-4CA6-816F-3879F97B5CBC}" type="slidenum">
               <a:rPr lang="en-US"/>
-              <a:t>10</a:t>
+              <a:t>11</a:t>
             </a:fld>
             <a:endParaRPr lang="en-US"/>
           </a:p>
@@ -690,7 +469,6 @@
               <a:rPr lang="en-US" dirty="0"/>
               <a:t>Почему это актуально. Инди-разработчики выпускают огромное число игр, но у них почти нет доступа к серьёзной аналитике поведения и адаптивному балансу — это дорого и требует отдельной команды дата-инженеров. В результате сложность настраивается вручную, на глаз, и одинаково для всех игроков. Наша ниша — готовый плагин, который встраивает такую аналитику в любой проект на Godot за несколько шагов. Вся сложность спрятана внутри, наружу — простое API.</a:t>
             </a:r>
-            <a:endParaRPr lang="en-US" dirty="0"/>
           </a:p>
         </p:txBody>
       </p:sp>
@@ -778,7 +556,6 @@
               <a:rPr lang="en-US" dirty="0"/>
               <a:t>Движок мы выбрали Godot 4 и вот почему. Во-первых, он полностью открытый и бесплатный, под MIT-лицензией — никаких роялти, что принципиально для инди. Во-вторых, у Godot отличная нативная система плагинов: EditorPlugin, autoload-синглтоны, собственные панели в редакторе — всё это «из коробки», именно на этом построен наш аддон. В-третьих, GDScript даёт низкий порог входа и очень быструю итерацию. Целевая версия — 4.2 и выше, вся установка плагина — это копирование одной папки.</a:t>
             </a:r>
-            <a:endParaRPr lang="en-US" dirty="0"/>
           </a:p>
         </p:txBody>
       </p:sp>
@@ -799,7 +576,7 @@
           <a:p>
             <a:fld id="{F7021451-1387-4CA6-816F-3879F97B5CBC}" type="slidenum">
               <a:rPr lang="en-US"/>
-              <a:t>3</a:t>
+              <a:t>4</a:t>
             </a:fld>
             <a:endParaRPr lang="en-US"/>
           </a:p>
@@ -866,7 +643,6 @@
               <a:rPr lang="en-US" dirty="0"/>
               <a:t>Как плагин встроен в общую систему. В игре есть autoload Analytics — единая точка с четырьмя методами: инициализация, старт игры, track событий и завершение. Модуль cloud_sender собирает события в батчи и шлёт на backend на эндпоинт ingest. Важная деталь — offline-буфер в формате JSONL: если сети нет, события не теряются, а отправляются при восстановлении связи. Обратно приходит adaptation, и AdaptationBridge превращает её в конкретные параметры баланса: сложность, плотность врагов, множитель лута.</a:t>
             </a:r>
-            <a:endParaRPr lang="en-US" dirty="0"/>
           </a:p>
         </p:txBody>
       </p:sp>
@@ -887,7 +663,7 @@
           <a:p>
             <a:fld id="{F7021451-1387-4CA6-816F-3879F97B5CBC}" type="slidenum">
               <a:rPr lang="en-US"/>
-              <a:t>4</a:t>
+              <a:t>5</a:t>
             </a:fld>
             <a:endParaRPr lang="en-US"/>
           </a:p>
@@ -954,7 +730,6 @@
               <a:rPr lang="en-US" dirty="0"/>
               <a:t>Теперь интерфейс для разработчика. Вся настройка живёт в редакторе Godot, во вкладке Analytics — руками конфиги править не нужно. Есть четыре блока: настройки облака — URL сервера, размер буфера, интервал автоотправки, повторы и кэш на случай оффлайна; ML-профиль — список событий, критические точки с весами, архетипы и параметр bootstrap_actions; просмотр логов — что ушло на сервер и что он ответил; и проверка сервера — кнопка health-check плюс блок с последней полученной адаптацией.</a:t>
             </a:r>
-            <a:endParaRPr lang="en-US" dirty="0"/>
           </a:p>
         </p:txBody>
       </p:sp>
@@ -975,7 +750,7 @@
           <a:p>
             <a:fld id="{F7021451-1387-4CA6-816F-3879F97B5CBC}" type="slidenum">
               <a:rPr lang="en-US"/>
-              <a:t>5</a:t>
+              <a:t>6</a:t>
             </a:fld>
             <a:endParaRPr lang="en-US"/>
           </a:p>
@@ -1042,7 +817,6 @@
               <a:rPr lang="en-US" dirty="0"/>
               <a:t>Вот как выглядят панели на практике. Слева — настройки облака: URL эндпоинта ingest, размер батча, интервал автоотправки, число повторов и переключатель offline-кэша. Справа — редактор ML-профиля: разработчик галочками задаёт архетипы, которые должна различать модель, и список критических точек с весами — это те числовые метрики, из которых сервер строит признаки. Всё это сохраняется и автоматически уходит на сервер как профиль игры.</a:t>
             </a:r>
-            <a:endParaRPr lang="en-US" dirty="0"/>
           </a:p>
         </p:txBody>
       </p:sp>
@@ -1063,7 +837,7 @@
           <a:p>
             <a:fld id="{F7021451-1387-4CA6-816F-3879F97B5CBC}" type="slidenum">
               <a:rPr lang="en-US"/>
-              <a:t>6</a:t>
+              <a:t>7</a:t>
             </a:fld>
             <a:endParaRPr lang="en-US"/>
           </a:p>
@@ -1130,7 +904,6 @@
               <a:rPr lang="en-US" dirty="0"/>
               <a:t>Контракт с сервером. Плагин шлёт на эндпоинт ingest JSON из двух частей. events — это батч событий: каждое содержит id сессии и игрока, имя события, время и parameters — числовые метрики, на которых работает ML. metadata — это критические точки и архетипы из профиля игры плюс режим cloud. Ключевой момент: большую часть полей плагин подставляет сам — session_id, timestamp, game_time, состояние, — разработчику в коде нужно лишь вызвать track с именем события и своим словарём параметров.</a:t>
             </a:r>
-            <a:endParaRPr lang="en-US" dirty="0"/>
           </a:p>
         </p:txBody>
       </p:sp>
@@ -1151,7 +924,7 @@
           <a:p>
             <a:fld id="{F7021451-1387-4CA6-816F-3879F97B5CBC}" type="slidenum">
               <a:rPr lang="en-US"/>
-              <a:t>7</a:t>
+              <a:t>8</a:t>
             </a:fld>
             <a:endParaRPr lang="en-US"/>
           </a:p>
@@ -1218,7 +991,6 @@
               <a:rPr lang="en-US" dirty="0"/>
               <a:t>Почему решение масштабируется на большие проекты. Аддон полностью изолирован — переносится только своя папка, он не лезет в код игры. API минимально: четыре вызова встраиваются в проект любого размера без рефакторинга. Сеть защищена батчами, повторами и offline-очередью, так что нестабильное соединение не ломает игру. И всё конфигурируется под конкретную игру через профиль. Работает это благодаря слабой связности: плагин общается с игрой через autoload и сигналы, а вся тяжёлая логика вынесена на сервер, поэтому клиент остаётся лёгким.</a:t>
             </a:r>
-            <a:endParaRPr lang="en-US" dirty="0"/>
           </a:p>
         </p:txBody>
       </p:sp>
@@ -1239,7 +1011,7 @@
           <a:p>
             <a:fld id="{F7021451-1387-4CA6-816F-3879F97B5CBC}" type="slidenum">
               <a:rPr lang="en-US"/>
-              <a:t>8</a:t>
+              <a:t>9</a:t>
             </a:fld>
             <a:endParaRPr lang="en-US"/>
           </a:p>
@@ -1306,7 +1078,6 @@
               <a:rPr lang="en-US" dirty="0"/>
               <a:t>Планы по плагину: оформить аддон для официальной Asset Library Godot, чтобы его можно было ставить в один клик. Расширить панель редактора — добавить визуализацию воронок событий и историю полученных адаптаций. И довести автоматические E2E-тесты интеграции как регрессионный чеклист. Весь код плагина — в репозитории по QR-коду, папка godot-plugin.</a:t>
             </a:r>
-            <a:endParaRPr lang="en-US" dirty="0"/>
           </a:p>
         </p:txBody>
       </p:sp>
@@ -1327,7 +1098,7 @@
           <a:p>
             <a:fld id="{F7021451-1387-4CA6-816F-3879F97B5CBC}" type="slidenum">
               <a:rPr lang="en-US"/>
-              <a:t>9</a:t>
+              <a:t>10</a:t>
             </a:fld>
             <a:endParaRPr lang="en-US"/>
           </a:p>
@@ -1379,6 +1150,11 @@
 <file path=ppt/slideMasters/slideMaster1.xml><?xml version="1.0" encoding="utf-8"?>
 <p:sldMaster xmlns:a="http://schemas.openxmlformats.org/drawingml/2006/main" xmlns:r="http://schemas.openxmlformats.org/officeDocument/2006/relationships" xmlns:p="http://schemas.openxmlformats.org/presentationml/2006/main">
   <p:cSld>
+    <p:bg>
+      <p:bgRef idx="1001">
+        <a:schemeClr val="bg1"/>
+      </p:bgRef>
+    </p:bg>
     <p:spTree>
       <p:nvGrpSpPr>
         <p:cNvPr id="1" name=""/>
@@ -1661,6 +1437,7 @@
         <a:solidFill>
           <a:srgbClr val="0B5E88"/>
         </a:solidFill>
+        <a:effectLst/>
       </p:bgPr>
     </p:bg>
     <p:spTree>
@@ -2118,11 +1895,11 @@
           <a:bodyPr wrap="square" lIns="0" tIns="0" rIns="0" bIns="0" rtlCol="0" anchor="ctr"/>
           <a:lstStyle/>
           <a:p>
-            <a:pPr indent="0" marL="0">
-              <a:buNone/>
-            </a:pPr>
-            <a:r>
-              <a:rPr lang="en-US" sz="1300" b="1" spc="250" kern="0" dirty="0">
+            <a:pPr marL="0" indent="0">
+              <a:buNone/>
+            </a:pPr>
+            <a:r>
+              <a:rPr lang="en-US" sz="2000" b="1" kern="0" spc="250" dirty="0">
                 <a:solidFill>
                   <a:srgbClr val="8FD0EE"/>
                 </a:solidFill>
@@ -2132,7 +1909,7 @@
               </a:rPr>
               <a:t>ВЫПУСКНАЯ КВАЛИФИКАЦИОННАЯ РАБОТА · 2026</a:t>
             </a:r>
-            <a:endParaRPr lang="en-US" sz="1300" dirty="0"/>
+            <a:endParaRPr lang="en-US" sz="2000" dirty="0"/>
           </a:p>
         </p:txBody>
       </p:sp>
@@ -2157,14 +1934,14 @@
           <a:bodyPr wrap="square" lIns="0" tIns="0" rIns="0" bIns="0" rtlCol="0" anchor="t"/>
           <a:lstStyle/>
           <a:p>
-            <a:pPr indent="0" marL="0">
+            <a:pPr marL="0" indent="0">
               <a:lnSpc>
                 <a:spcPct val="102000"/>
               </a:lnSpc>
               <a:buNone/>
             </a:pPr>
             <a:r>
-              <a:rPr lang="en-US" sz="3000" b="1" dirty="0">
+              <a:rPr lang="en-US" sz="4000" b="1" dirty="0">
                 <a:solidFill>
                   <a:srgbClr val="FFFFFF"/>
                 </a:solidFill>
@@ -2174,7 +1951,7 @@
               </a:rPr>
               <a:t>Разработка системы сбора и передачи игровой телеметрии в распределённое хранилище данных</a:t>
             </a:r>
-            <a:endParaRPr lang="en-US" sz="3000" dirty="0"/>
+            <a:endParaRPr lang="en-US" sz="4000" dirty="0"/>
           </a:p>
         </p:txBody>
       </p:sp>
@@ -2199,7 +1976,7 @@
           </a:solidFill>
           <a:ln/>
           <a:effectLst>
-            <a:outerShdw sx="100000" sy="100000" kx="0" ky="0" algn="bl" rotWithShape="0" blurRad="114300" dist="38100" dir="5400000">
+            <a:outerShdw blurRad="114300" dist="38100" dir="5400000" algn="bl" rotWithShape="0">
               <a:srgbClr val="9FB6C4">
                 <a:alpha val="28000"/>
               </a:srgbClr>
@@ -2226,7 +2003,7 @@
           </a:solidFill>
           <a:ln/>
           <a:effectLst>
-            <a:outerShdw sx="100000" sy="100000" kx="0" ky="0" algn="bl" rotWithShape="0" blurRad="88900" dist="25400" dir="5400000">
+            <a:outerShdw blurRad="88900" dist="25400" dir="5400000" algn="bl" rotWithShape="0">
               <a:srgbClr val="B8C9D4">
                 <a:alpha val="22000"/>
               </a:srgbClr>
@@ -2243,7 +2020,7 @@
           <p:nvPr/>
         </p:nvPicPr>
         <p:blipFill>
-          <a:blip r:embed="rId1"/>
+          <a:blip r:embed="rId3"/>
           <a:stretch>
             <a:fillRect/>
           </a:stretch>
@@ -2279,11 +2056,11 @@
           <a:bodyPr wrap="square" lIns="0" tIns="0" rIns="0" bIns="0" rtlCol="0" anchor="ctr"/>
           <a:lstStyle/>
           <a:p>
-            <a:pPr indent="0" marL="0">
-              <a:buNone/>
-            </a:pPr>
-            <a:r>
-              <a:rPr lang="en-US" sz="1050" b="1" spc="200" kern="0" dirty="0">
+            <a:pPr marL="0" indent="0">
+              <a:buNone/>
+            </a:pPr>
+            <a:r>
+              <a:rPr lang="en-US" sz="1050" b="1" kern="0" spc="200" dirty="0">
                 <a:solidFill>
                   <a:srgbClr val="8FD0EE"/>
                 </a:solidFill>
@@ -2318,7 +2095,7 @@
           <a:bodyPr wrap="square" lIns="0" tIns="0" rIns="0" bIns="0" rtlCol="0" anchor="ctr"/>
           <a:lstStyle/>
           <a:p>
-            <a:pPr indent="0" marL="0">
+            <a:pPr marL="0" indent="0">
               <a:buNone/>
             </a:pPr>
             <a:r>
@@ -2357,7 +2134,7 @@
           <a:bodyPr wrap="square" lIns="0" tIns="0" rIns="0" bIns="0" rtlCol="0" anchor="ctr"/>
           <a:lstStyle/>
           <a:p>
-            <a:pPr indent="0" marL="0">
+            <a:pPr marL="0" indent="0">
               <a:buNone/>
             </a:pPr>
             <a:r>
@@ -2396,7 +2173,7 @@
           </a:solidFill>
           <a:ln/>
           <a:effectLst>
-            <a:outerShdw sx="100000" sy="100000" kx="0" ky="0" algn="bl" rotWithShape="0" blurRad="114300" dist="38100" dir="5400000">
+            <a:outerShdw blurRad="114300" dist="38100" dir="5400000" algn="bl" rotWithShape="0">
               <a:srgbClr val="9FB6C4">
                 <a:alpha val="28000"/>
               </a:srgbClr>
@@ -2425,11 +2202,11 @@
           <a:bodyPr wrap="square" lIns="0" tIns="0" rIns="0" bIns="0" rtlCol="0" anchor="ctr"/>
           <a:lstStyle/>
           <a:p>
-            <a:pPr indent="0" marL="0">
-              <a:buNone/>
-            </a:pPr>
-            <a:r>
-              <a:rPr lang="en-US" sz="1050" b="1" spc="200" kern="0" dirty="0">
+            <a:pPr marL="0" indent="0">
+              <a:buNone/>
+            </a:pPr>
+            <a:r>
+              <a:rPr lang="en-US" sz="1050" b="1" kern="0" spc="200" dirty="0">
                 <a:solidFill>
                   <a:srgbClr val="8FD0EE"/>
                 </a:solidFill>
@@ -2464,7 +2241,7 @@
           <a:bodyPr wrap="square" lIns="0" tIns="0" rIns="0" bIns="0" rtlCol="0" anchor="t"/>
           <a:lstStyle/>
           <a:p>
-            <a:pPr indent="0" marL="0">
+            <a:pPr marL="0" indent="0">
               <a:lnSpc>
                 <a:spcPct val="102000"/>
               </a:lnSpc>
@@ -2484,7 +2261,7 @@
             <a:endParaRPr lang="en-US" sz="1500" dirty="0"/>
           </a:p>
           <a:p>
-            <a:pPr indent="0" marL="0">
+            <a:pPr marL="0" indent="0">
               <a:lnSpc>
                 <a:spcPct val="102000"/>
               </a:lnSpc>
@@ -2515,12 +2292,13 @@
 
 <file path=ppt/slides/slide10.xml><?xml version="1.0" encoding="utf-8"?>
 <p:sld xmlns:a="http://schemas.openxmlformats.org/drawingml/2006/main" xmlns:r="http://schemas.openxmlformats.org/officeDocument/2006/relationships" xmlns:p="http://schemas.openxmlformats.org/presentationml/2006/main">
-  <p:cSld name="Slide 10">
+  <p:cSld name="Slide 9">
     <p:bg>
       <p:bgPr>
         <a:solidFill>
-          <a:srgbClr val="0B5E88"/>
+          <a:srgbClr val="FFFFFF"/>
         </a:solidFill>
+        <a:effectLst/>
       </p:bgPr>
     </p:bg>
     <p:spTree>
@@ -2539,434 +2317,14 @@
       </p:grpSpPr>
       <p:sp>
         <p:nvSpPr>
-          <p:cNvPr id="2" name="Shape 0"/>
-          <p:cNvSpPr/>
-          <p:nvPr/>
-        </p:nvSpPr>
-        <p:spPr>
-          <a:xfrm>
-            <a:off x="640080" y="5760720"/>
-            <a:ext cx="54864" cy="54864"/>
-          </a:xfrm>
-          <a:prstGeom prst="ellipse">
-            <a:avLst/>
-          </a:prstGeom>
-          <a:solidFill>
-            <a:srgbClr val="3E8FB8"/>
-          </a:solidFill>
-          <a:ln/>
-        </p:spPr>
-      </p:sp>
-      <p:sp>
-        <p:nvSpPr>
-          <p:cNvPr id="3" name="Shape 1"/>
-          <p:cNvSpPr/>
-          <p:nvPr/>
-        </p:nvSpPr>
-        <p:spPr>
-          <a:xfrm>
-            <a:off x="640080" y="6126480"/>
-            <a:ext cx="54864" cy="54864"/>
-          </a:xfrm>
-          <a:prstGeom prst="ellipse">
-            <a:avLst/>
-          </a:prstGeom>
-          <a:solidFill>
-            <a:srgbClr val="3E8FB8"/>
-          </a:solidFill>
-          <a:ln/>
-        </p:spPr>
-      </p:sp>
-      <p:sp>
-        <p:nvSpPr>
-          <p:cNvPr id="4" name="Shape 2"/>
-          <p:cNvSpPr/>
-          <p:nvPr/>
-        </p:nvSpPr>
-        <p:spPr>
-          <a:xfrm>
-            <a:off x="640080" y="6492240"/>
-            <a:ext cx="54864" cy="54864"/>
-          </a:xfrm>
-          <a:prstGeom prst="ellipse">
-            <a:avLst/>
-          </a:prstGeom>
-          <a:solidFill>
-            <a:srgbClr val="3E8FB8"/>
-          </a:solidFill>
-          <a:ln/>
-        </p:spPr>
-      </p:sp>
-      <p:sp>
-        <p:nvSpPr>
-          <p:cNvPr id="5" name="Shape 3"/>
-          <p:cNvSpPr/>
-          <p:nvPr/>
-        </p:nvSpPr>
-        <p:spPr>
-          <a:xfrm>
-            <a:off x="1097280" y="5760720"/>
-            <a:ext cx="54864" cy="54864"/>
-          </a:xfrm>
-          <a:prstGeom prst="ellipse">
-            <a:avLst/>
-          </a:prstGeom>
-          <a:solidFill>
-            <a:srgbClr val="3E8FB8"/>
-          </a:solidFill>
-          <a:ln/>
-        </p:spPr>
-      </p:sp>
-      <p:sp>
-        <p:nvSpPr>
-          <p:cNvPr id="6" name="Shape 4"/>
-          <p:cNvSpPr/>
-          <p:nvPr/>
-        </p:nvSpPr>
-        <p:spPr>
-          <a:xfrm>
-            <a:off x="1097280" y="6126480"/>
-            <a:ext cx="54864" cy="54864"/>
-          </a:xfrm>
-          <a:prstGeom prst="ellipse">
-            <a:avLst/>
-          </a:prstGeom>
-          <a:solidFill>
-            <a:srgbClr val="3E8FB8"/>
-          </a:solidFill>
-          <a:ln/>
-        </p:spPr>
-      </p:sp>
-      <p:sp>
-        <p:nvSpPr>
-          <p:cNvPr id="7" name="Shape 5"/>
-          <p:cNvSpPr/>
-          <p:nvPr/>
-        </p:nvSpPr>
-        <p:spPr>
-          <a:xfrm>
-            <a:off x="1097280" y="6492240"/>
-            <a:ext cx="54864" cy="54864"/>
-          </a:xfrm>
-          <a:prstGeom prst="ellipse">
-            <a:avLst/>
-          </a:prstGeom>
-          <a:solidFill>
-            <a:srgbClr val="3E8FB8"/>
-          </a:solidFill>
-          <a:ln/>
-        </p:spPr>
-      </p:sp>
-      <p:sp>
-        <p:nvSpPr>
-          <p:cNvPr id="8" name="Shape 6"/>
-          <p:cNvSpPr/>
-          <p:nvPr/>
-        </p:nvSpPr>
-        <p:spPr>
-          <a:xfrm>
-            <a:off x="1554480" y="5760720"/>
-            <a:ext cx="54864" cy="54864"/>
-          </a:xfrm>
-          <a:prstGeom prst="ellipse">
-            <a:avLst/>
-          </a:prstGeom>
-          <a:solidFill>
-            <a:srgbClr val="3E8FB8"/>
-          </a:solidFill>
-          <a:ln/>
-        </p:spPr>
-      </p:sp>
-      <p:sp>
-        <p:nvSpPr>
-          <p:cNvPr id="9" name="Shape 7"/>
-          <p:cNvSpPr/>
-          <p:nvPr/>
-        </p:nvSpPr>
-        <p:spPr>
-          <a:xfrm>
-            <a:off x="1554480" y="6126480"/>
-            <a:ext cx="54864" cy="54864"/>
-          </a:xfrm>
-          <a:prstGeom prst="ellipse">
-            <a:avLst/>
-          </a:prstGeom>
-          <a:solidFill>
-            <a:srgbClr val="3E8FB8"/>
-          </a:solidFill>
-          <a:ln/>
-        </p:spPr>
-      </p:sp>
-      <p:sp>
-        <p:nvSpPr>
-          <p:cNvPr id="10" name="Shape 8"/>
-          <p:cNvSpPr/>
-          <p:nvPr/>
-        </p:nvSpPr>
-        <p:spPr>
-          <a:xfrm>
-            <a:off x="1554480" y="6492240"/>
-            <a:ext cx="54864" cy="54864"/>
-          </a:xfrm>
-          <a:prstGeom prst="ellipse">
-            <a:avLst/>
-          </a:prstGeom>
-          <a:solidFill>
-            <a:srgbClr val="3E8FB8"/>
-          </a:solidFill>
-          <a:ln/>
-        </p:spPr>
-      </p:sp>
-      <p:sp>
-        <p:nvSpPr>
-          <p:cNvPr id="11" name="Shape 9"/>
-          <p:cNvSpPr/>
-          <p:nvPr/>
-        </p:nvSpPr>
-        <p:spPr>
-          <a:xfrm>
-            <a:off x="2011680" y="5760720"/>
-            <a:ext cx="54864" cy="54864"/>
-          </a:xfrm>
-          <a:prstGeom prst="ellipse">
-            <a:avLst/>
-          </a:prstGeom>
-          <a:solidFill>
-            <a:srgbClr val="3E8FB8"/>
-          </a:solidFill>
-          <a:ln/>
-        </p:spPr>
-      </p:sp>
-      <p:sp>
-        <p:nvSpPr>
-          <p:cNvPr id="12" name="Shape 10"/>
-          <p:cNvSpPr/>
-          <p:nvPr/>
-        </p:nvSpPr>
-        <p:spPr>
-          <a:xfrm>
-            <a:off x="2011680" y="6126480"/>
-            <a:ext cx="54864" cy="54864"/>
-          </a:xfrm>
-          <a:prstGeom prst="ellipse">
-            <a:avLst/>
-          </a:prstGeom>
-          <a:solidFill>
-            <a:srgbClr val="3E8FB8"/>
-          </a:solidFill>
-          <a:ln/>
-        </p:spPr>
-      </p:sp>
-      <p:sp>
-        <p:nvSpPr>
-          <p:cNvPr id="13" name="Shape 11"/>
-          <p:cNvSpPr/>
-          <p:nvPr/>
-        </p:nvSpPr>
-        <p:spPr>
-          <a:xfrm>
-            <a:off x="2011680" y="6492240"/>
-            <a:ext cx="54864" cy="54864"/>
-          </a:xfrm>
-          <a:prstGeom prst="ellipse">
-            <a:avLst/>
-          </a:prstGeom>
-          <a:solidFill>
-            <a:srgbClr val="3E8FB8"/>
-          </a:solidFill>
-          <a:ln/>
-        </p:spPr>
-      </p:sp>
-      <p:sp>
-        <p:nvSpPr>
-          <p:cNvPr id="14" name="Shape 12"/>
-          <p:cNvSpPr/>
-          <p:nvPr/>
-        </p:nvSpPr>
-        <p:spPr>
-          <a:xfrm>
-            <a:off x="2468880" y="5760720"/>
-            <a:ext cx="54864" cy="54864"/>
-          </a:xfrm>
-          <a:prstGeom prst="ellipse">
-            <a:avLst/>
-          </a:prstGeom>
-          <a:solidFill>
-            <a:srgbClr val="3E8FB8"/>
-          </a:solidFill>
-          <a:ln/>
-        </p:spPr>
-      </p:sp>
-      <p:sp>
-        <p:nvSpPr>
-          <p:cNvPr id="15" name="Shape 13"/>
-          <p:cNvSpPr/>
-          <p:nvPr/>
-        </p:nvSpPr>
-        <p:spPr>
-          <a:xfrm>
-            <a:off x="2468880" y="6126480"/>
-            <a:ext cx="54864" cy="54864"/>
-          </a:xfrm>
-          <a:prstGeom prst="ellipse">
-            <a:avLst/>
-          </a:prstGeom>
-          <a:solidFill>
-            <a:srgbClr val="3E8FB8"/>
-          </a:solidFill>
-          <a:ln/>
-        </p:spPr>
-      </p:sp>
-      <p:sp>
-        <p:nvSpPr>
-          <p:cNvPr id="16" name="Shape 14"/>
-          <p:cNvSpPr/>
-          <p:nvPr/>
-        </p:nvSpPr>
-        <p:spPr>
-          <a:xfrm>
-            <a:off x="2468880" y="6492240"/>
-            <a:ext cx="54864" cy="54864"/>
-          </a:xfrm>
-          <a:prstGeom prst="ellipse">
-            <a:avLst/>
-          </a:prstGeom>
-          <a:solidFill>
-            <a:srgbClr val="3E8FB8"/>
-          </a:solidFill>
-          <a:ln/>
-        </p:spPr>
-      </p:sp>
-      <p:sp>
-        <p:nvSpPr>
-          <p:cNvPr id="17" name="Shape 15"/>
-          <p:cNvSpPr/>
-          <p:nvPr/>
-        </p:nvSpPr>
-        <p:spPr>
-          <a:xfrm>
-            <a:off x="2926080" y="5760720"/>
-            <a:ext cx="54864" cy="54864"/>
-          </a:xfrm>
-          <a:prstGeom prst="ellipse">
-            <a:avLst/>
-          </a:prstGeom>
-          <a:solidFill>
-            <a:srgbClr val="3E8FB8"/>
-          </a:solidFill>
-          <a:ln/>
-        </p:spPr>
-      </p:sp>
-      <p:sp>
-        <p:nvSpPr>
-          <p:cNvPr id="18" name="Shape 16"/>
-          <p:cNvSpPr/>
-          <p:nvPr/>
-        </p:nvSpPr>
-        <p:spPr>
-          <a:xfrm>
-            <a:off x="2926080" y="6126480"/>
-            <a:ext cx="54864" cy="54864"/>
-          </a:xfrm>
-          <a:prstGeom prst="ellipse">
-            <a:avLst/>
-          </a:prstGeom>
-          <a:solidFill>
-            <a:srgbClr val="3E8FB8"/>
-          </a:solidFill>
-          <a:ln/>
-        </p:spPr>
-      </p:sp>
-      <p:sp>
-        <p:nvSpPr>
-          <p:cNvPr id="19" name="Shape 17"/>
-          <p:cNvSpPr/>
-          <p:nvPr/>
-        </p:nvSpPr>
-        <p:spPr>
-          <a:xfrm>
-            <a:off x="2926080" y="6492240"/>
-            <a:ext cx="54864" cy="54864"/>
-          </a:xfrm>
-          <a:prstGeom prst="ellipse">
-            <a:avLst/>
-          </a:prstGeom>
-          <a:solidFill>
-            <a:srgbClr val="3E8FB8"/>
-          </a:solidFill>
-          <a:ln/>
-        </p:spPr>
-      </p:sp>
-      <p:sp>
-        <p:nvSpPr>
-          <p:cNvPr id="20" name="Shape 18"/>
-          <p:cNvSpPr/>
-          <p:nvPr/>
-        </p:nvSpPr>
-        <p:spPr>
-          <a:xfrm>
-            <a:off x="3383280" y="5760720"/>
-            <a:ext cx="54864" cy="54864"/>
-          </a:xfrm>
-          <a:prstGeom prst="ellipse">
-            <a:avLst/>
-          </a:prstGeom>
-          <a:solidFill>
-            <a:srgbClr val="3E8FB8"/>
-          </a:solidFill>
-          <a:ln/>
-        </p:spPr>
-      </p:sp>
-      <p:sp>
-        <p:nvSpPr>
-          <p:cNvPr id="21" name="Shape 19"/>
-          <p:cNvSpPr/>
-          <p:nvPr/>
-        </p:nvSpPr>
-        <p:spPr>
-          <a:xfrm>
-            <a:off x="3383280" y="6126480"/>
-            <a:ext cx="54864" cy="54864"/>
-          </a:xfrm>
-          <a:prstGeom prst="ellipse">
-            <a:avLst/>
-          </a:prstGeom>
-          <a:solidFill>
-            <a:srgbClr val="3E8FB8"/>
-          </a:solidFill>
-          <a:ln/>
-        </p:spPr>
-      </p:sp>
-      <p:sp>
-        <p:nvSpPr>
-          <p:cNvPr id="22" name="Shape 20"/>
-          <p:cNvSpPr/>
-          <p:nvPr/>
-        </p:nvSpPr>
-        <p:spPr>
-          <a:xfrm>
-            <a:off x="3383280" y="6492240"/>
-            <a:ext cx="54864" cy="54864"/>
-          </a:xfrm>
-          <a:prstGeom prst="ellipse">
-            <a:avLst/>
-          </a:prstGeom>
-          <a:solidFill>
-            <a:srgbClr val="3E8FB8"/>
-          </a:solidFill>
-          <a:ln/>
-        </p:spPr>
-      </p:sp>
-      <p:sp>
-        <p:nvSpPr>
-          <p:cNvPr id="23" name="Text 21"/>
-          <p:cNvSpPr/>
-          <p:nvPr/>
-        </p:nvSpPr>
-        <p:spPr>
-          <a:xfrm>
-            <a:off x="640080" y="2011680"/>
-            <a:ext cx="10058400" cy="365760"/>
+          <p:cNvPr id="2" name="Text 0"/>
+          <p:cNvSpPr/>
+          <p:nvPr/>
+        </p:nvSpPr>
+        <p:spPr>
+          <a:xfrm>
+            <a:off x="10820095" y="384048"/>
+            <a:ext cx="822960" cy="640080"/>
           </a:xfrm>
           <a:prstGeom prst="rect">
             <a:avLst/>
@@ -2978,217 +2336,768 @@
           <a:bodyPr wrap="square" lIns="0" tIns="0" rIns="0" bIns="0" rtlCol="0" anchor="ctr"/>
           <a:lstStyle/>
           <a:p>
-            <a:pPr indent="0" marL="0">
-              <a:buNone/>
-            </a:pPr>
-            <a:r>
-              <a:rPr lang="en-US" sz="1400" b="1" spc="300" kern="0" dirty="0">
-                <a:solidFill>
-                  <a:srgbClr val="8FD0EE"/>
+            <a:pPr marL="0" indent="0" algn="r">
+              <a:buNone/>
+            </a:pPr>
+            <a:r>
+              <a:rPr lang="en-US" sz="3000" b="1" dirty="0">
+                <a:solidFill>
+                  <a:srgbClr val="C6D6E0"/>
+                </a:solidFill>
+                <a:latin typeface="Cambria" pitchFamily="34" charset="0"/>
+                <a:ea typeface="Cambria" pitchFamily="34" charset="-122"/>
+                <a:cs typeface="Cambria" pitchFamily="34" charset="-120"/>
+              </a:rPr>
+              <a:t>10</a:t>
+            </a:r>
+            <a:endParaRPr lang="en-US" sz="3000" dirty="0"/>
+          </a:p>
+        </p:txBody>
+      </p:sp>
+      <p:sp>
+        <p:nvSpPr>
+          <p:cNvPr id="3" name="Text 1"/>
+          <p:cNvSpPr/>
+          <p:nvPr/>
+        </p:nvSpPr>
+        <p:spPr>
+          <a:xfrm>
+            <a:off x="640080" y="475488"/>
+            <a:ext cx="8229600" cy="274320"/>
+          </a:xfrm>
+          <a:prstGeom prst="rect">
+            <a:avLst/>
+          </a:prstGeom>
+          <a:noFill/>
+          <a:ln/>
+        </p:spPr>
+        <p:txBody>
+          <a:bodyPr wrap="square" lIns="0" tIns="0" rIns="0" bIns="0" rtlCol="0" anchor="ctr"/>
+          <a:lstStyle/>
+          <a:p>
+            <a:pPr marL="0" indent="0">
+              <a:buNone/>
+            </a:pPr>
+            <a:r>
+              <a:rPr lang="en-US" sz="2000" b="1" kern="0" spc="250" dirty="0">
+                <a:solidFill>
+                  <a:srgbClr val="1F9BD8"/>
                 </a:solidFill>
                 <a:latin typeface="Calibri" pitchFamily="34" charset="0"/>
                 <a:ea typeface="Calibri" pitchFamily="34" charset="-122"/>
                 <a:cs typeface="Calibri" pitchFamily="34" charset="-120"/>
               </a:rPr>
-              <a:t>СПАСИБО ЗА ВНИМАНИЕ</a:t>
-            </a:r>
-            <a:endParaRPr lang="en-US" sz="1400" dirty="0"/>
-          </a:p>
-        </p:txBody>
-      </p:sp>
-      <p:sp>
-        <p:nvSpPr>
-          <p:cNvPr id="24" name="Text 22"/>
-          <p:cNvSpPr/>
-          <p:nvPr/>
-        </p:nvSpPr>
-        <p:spPr>
-          <a:xfrm>
-            <a:off x="640080" y="2423160"/>
-            <a:ext cx="10424160" cy="1371600"/>
-          </a:xfrm>
-          <a:prstGeom prst="rect">
-            <a:avLst/>
-          </a:prstGeom>
-          <a:noFill/>
-          <a:ln/>
-        </p:spPr>
-        <p:txBody>
-          <a:bodyPr wrap="square" lIns="0" tIns="0" rIns="0" bIns="0" rtlCol="0" anchor="t"/>
-          <a:lstStyle/>
-          <a:p>
-            <a:pPr indent="0" marL="0">
-              <a:lnSpc>
-                <a:spcPct val="102000"/>
-              </a:lnSpc>
-              <a:buNone/>
-            </a:pPr>
-            <a:r>
-              <a:rPr lang="en-US" sz="3400" b="1" dirty="0">
-                <a:solidFill>
-                  <a:srgbClr val="FFFFFF"/>
+              <a:t>ЗАДЕЛЫ НА БУДУЩЕЕ</a:t>
+            </a:r>
+            <a:endParaRPr lang="en-US" sz="2000" dirty="0"/>
+          </a:p>
+        </p:txBody>
+      </p:sp>
+      <p:sp>
+        <p:nvSpPr>
+          <p:cNvPr id="4" name="Text 2"/>
+          <p:cNvSpPr/>
+          <p:nvPr/>
+        </p:nvSpPr>
+        <p:spPr>
+          <a:xfrm>
+            <a:off x="640080" y="749808"/>
+            <a:ext cx="10362895" cy="777240"/>
+          </a:xfrm>
+          <a:prstGeom prst="rect">
+            <a:avLst/>
+          </a:prstGeom>
+          <a:noFill/>
+          <a:ln/>
+        </p:spPr>
+        <p:txBody>
+          <a:bodyPr wrap="square" lIns="0" tIns="0" rIns="0" bIns="0" rtlCol="0" anchor="ctr"/>
+          <a:lstStyle/>
+          <a:p>
+            <a:pPr marL="0" indent="0">
+              <a:buNone/>
+            </a:pPr>
+            <a:r>
+              <a:rPr lang="en-US" sz="3000" b="1" dirty="0">
+                <a:solidFill>
+                  <a:srgbClr val="111418"/>
                 </a:solidFill>
                 <a:latin typeface="Cambria" pitchFamily="34" charset="0"/>
                 <a:ea typeface="Cambria" pitchFamily="34" charset="-122"/>
                 <a:cs typeface="Cambria" pitchFamily="34" charset="-120"/>
               </a:rPr>
-              <a:t>Сбор и передача игровой телеметрии</a:t>
-            </a:r>
-            <a:endParaRPr lang="en-US" sz="3400" dirty="0"/>
-          </a:p>
-          <a:p>
-            <a:pPr indent="0" marL="0">
-              <a:lnSpc>
-                <a:spcPct val="102000"/>
-              </a:lnSpc>
-              <a:buNone/>
-            </a:pPr>
-            <a:r>
-              <a:rPr lang="en-US" sz="3400" b="1" dirty="0">
-                <a:solidFill>
-                  <a:srgbClr val="FFFFFF"/>
-                </a:solidFill>
-                <a:latin typeface="Cambria" pitchFamily="34" charset="0"/>
-                <a:ea typeface="Cambria" pitchFamily="34" charset="-122"/>
-                <a:cs typeface="Cambria" pitchFamily="34" charset="-120"/>
-              </a:rPr>
-              <a:t>в распределённое хранилище</a:t>
-            </a:r>
-            <a:endParaRPr lang="en-US" sz="3400" dirty="0"/>
-          </a:p>
-        </p:txBody>
-      </p:sp>
-      <p:sp>
-        <p:nvSpPr>
-          <p:cNvPr id="25" name="Text 23"/>
-          <p:cNvSpPr/>
-          <p:nvPr/>
-        </p:nvSpPr>
-        <p:spPr>
-          <a:xfrm>
-            <a:off x="640080" y="3977640"/>
-            <a:ext cx="10058400" cy="731520"/>
-          </a:xfrm>
-          <a:prstGeom prst="rect">
-            <a:avLst/>
-          </a:prstGeom>
-          <a:noFill/>
-          <a:ln/>
-        </p:spPr>
-        <p:txBody>
-          <a:bodyPr wrap="square" lIns="0" tIns="0" rIns="0" bIns="0" rtlCol="0" anchor="t"/>
-          <a:lstStyle/>
-          <a:p>
-            <a:pPr indent="0" marL="0">
-              <a:lnSpc>
-                <a:spcPct val="105000"/>
-              </a:lnSpc>
-              <a:buNone/>
-            </a:pPr>
-            <a:r>
-              <a:rPr lang="en-US" sz="1500" dirty="0">
-                <a:solidFill>
-                  <a:srgbClr val="CFE8F6"/>
+              <a:t>Заделы на будущее</a:t>
+            </a:r>
+            <a:endParaRPr lang="en-US" sz="3000" dirty="0"/>
+          </a:p>
+        </p:txBody>
+      </p:sp>
+      <p:sp>
+        <p:nvSpPr>
+          <p:cNvPr id="7" name="Shape 5"/>
+          <p:cNvSpPr/>
+          <p:nvPr/>
+        </p:nvSpPr>
+        <p:spPr>
+          <a:xfrm>
+            <a:off x="640080" y="1783080"/>
+            <a:ext cx="5212080" cy="1078992"/>
+          </a:xfrm>
+          <a:prstGeom prst="roundRect">
+            <a:avLst>
+              <a:gd name="adj" fmla="val 6780"/>
+            </a:avLst>
+          </a:prstGeom>
+          <a:solidFill>
+            <a:srgbClr val="F4FAFD"/>
+          </a:solidFill>
+          <a:ln w="12700">
+            <a:solidFill>
+              <a:srgbClr val="DCE6EC"/>
+            </a:solidFill>
+            <a:prstDash val="solid"/>
+          </a:ln>
+        </p:spPr>
+      </p:sp>
+      <p:sp>
+        <p:nvSpPr>
+          <p:cNvPr id="8" name="Shape 6"/>
+          <p:cNvSpPr/>
+          <p:nvPr/>
+        </p:nvSpPr>
+        <p:spPr>
+          <a:xfrm>
+            <a:off x="859536" y="2039112"/>
+            <a:ext cx="566928" cy="566928"/>
+          </a:xfrm>
+          <a:prstGeom prst="ellipse">
+            <a:avLst/>
+          </a:prstGeom>
+          <a:solidFill>
+            <a:srgbClr val="1F9BD8"/>
+          </a:solidFill>
+          <a:ln/>
+          <a:effectLst>
+            <a:outerShdw blurRad="88900" dist="25400" dir="5400000" algn="bl" rotWithShape="0">
+              <a:srgbClr val="B8C9D4">
+                <a:alpha val="22000"/>
+              </a:srgbClr>
+            </a:outerShdw>
+          </a:effectLst>
+        </p:spPr>
+      </p:sp>
+      <p:pic>
+        <p:nvPicPr>
+          <p:cNvPr id="9" name="Image 0" descr="icons/store.png"/>
+          <p:cNvPicPr>
+            <a:picLocks noChangeAspect="1"/>
+          </p:cNvPicPr>
+          <p:nvPr/>
+        </p:nvPicPr>
+        <p:blipFill>
+          <a:blip r:embed="rId3"/>
+          <a:stretch>
+            <a:fillRect/>
+          </a:stretch>
+        </p:blipFill>
+        <p:spPr>
+          <a:xfrm>
+            <a:off x="1029614" y="2209190"/>
+            <a:ext cx="226771" cy="226771"/>
+          </a:xfrm>
+          <a:prstGeom prst="rect">
+            <a:avLst/>
+          </a:prstGeom>
+        </p:spPr>
+      </p:pic>
+      <p:sp>
+        <p:nvSpPr>
+          <p:cNvPr id="10" name="Text 7"/>
+          <p:cNvSpPr/>
+          <p:nvPr/>
+        </p:nvSpPr>
+        <p:spPr>
+          <a:xfrm>
+            <a:off x="1664208" y="1947672"/>
+            <a:ext cx="4023360" cy="365760"/>
+          </a:xfrm>
+          <a:prstGeom prst="rect">
+            <a:avLst/>
+          </a:prstGeom>
+          <a:noFill/>
+          <a:ln/>
+        </p:spPr>
+        <p:txBody>
+          <a:bodyPr wrap="square" lIns="0" tIns="0" rIns="0" bIns="0" rtlCol="0" anchor="ctr"/>
+          <a:lstStyle/>
+          <a:p>
+            <a:pPr marL="0" indent="0">
+              <a:buNone/>
+            </a:pPr>
+            <a:r>
+              <a:rPr lang="en-US" sz="1450" b="1" dirty="0">
+                <a:solidFill>
+                  <a:srgbClr val="111418"/>
                 </a:solidFill>
                 <a:latin typeface="Calibri" pitchFamily="34" charset="0"/>
                 <a:ea typeface="Calibri" pitchFamily="34" charset="-122"/>
                 <a:cs typeface="Calibri" pitchFamily="34" charset="-120"/>
               </a:rPr>
-              <a:t>analytics_plugin для Godot 4 · простое API из 4 вызовов · настройка в редакторе · надёжная отправка телеметрии и offline-буфер</a:t>
-            </a:r>
-            <a:endParaRPr lang="en-US" sz="1500" dirty="0"/>
-          </a:p>
-        </p:txBody>
-      </p:sp>
-      <p:sp>
-        <p:nvSpPr>
-          <p:cNvPr id="26" name="Text 24"/>
-          <p:cNvSpPr/>
-          <p:nvPr/>
-        </p:nvSpPr>
-        <p:spPr>
-          <a:xfrm>
-            <a:off x="640080" y="4983480"/>
-            <a:ext cx="10515600" cy="365760"/>
-          </a:xfrm>
-          <a:prstGeom prst="rect">
-            <a:avLst/>
-          </a:prstGeom>
-          <a:noFill/>
-          <a:ln/>
-        </p:spPr>
-        <p:txBody>
-          <a:bodyPr wrap="square" lIns="0" tIns="0" rIns="0" bIns="0" rtlCol="0" anchor="ctr"/>
-          <a:lstStyle/>
-          <a:p>
-            <a:pPr indent="0" marL="0">
-              <a:buNone/>
-            </a:pPr>
-            <a:r>
-              <a:rPr lang="en-US" sz="1400" b="1" dirty="0">
-                <a:solidFill>
-                  <a:srgbClr val="FFFFFF"/>
+              <a:t>Публикация в Asset Library</a:t>
+            </a:r>
+            <a:endParaRPr lang="en-US" sz="1450" dirty="0"/>
+          </a:p>
+        </p:txBody>
+      </p:sp>
+      <p:sp>
+        <p:nvSpPr>
+          <p:cNvPr id="11" name="Text 8"/>
+          <p:cNvSpPr/>
+          <p:nvPr/>
+        </p:nvSpPr>
+        <p:spPr>
+          <a:xfrm>
+            <a:off x="1664208" y="2313432"/>
+            <a:ext cx="4023360" cy="502920"/>
+          </a:xfrm>
+          <a:prstGeom prst="rect">
+            <a:avLst/>
+          </a:prstGeom>
+          <a:noFill/>
+          <a:ln/>
+        </p:spPr>
+        <p:txBody>
+          <a:bodyPr wrap="square" lIns="0" tIns="0" rIns="0" bIns="0" rtlCol="0" anchor="t"/>
+          <a:lstStyle/>
+          <a:p>
+            <a:pPr marL="0" indent="0">
+              <a:lnSpc>
+                <a:spcPct val="100000"/>
+              </a:lnSpc>
+              <a:buNone/>
+            </a:pPr>
+            <a:r>
+              <a:rPr lang="en-US" sz="1150" dirty="0">
+                <a:solidFill>
+                  <a:srgbClr val="33383F"/>
                 </a:solidFill>
                 <a:latin typeface="Calibri" pitchFamily="34" charset="0"/>
                 <a:ea typeface="Calibri" pitchFamily="34" charset="-122"/>
                 <a:cs typeface="Calibri" pitchFamily="34" charset="-120"/>
               </a:rPr>
-              <a:t>Артамонов Фёдор Андреевич  ·  Godot-инженер</a:t>
-            </a:r>
-            <a:pPr indent="0" marL="0">
-              <a:buNone/>
-            </a:pPr>
-            <a:r>
-              <a:rPr lang="en-US" sz="1400" dirty="0">
-                <a:solidFill>
-                  <a:srgbClr val="9FD4EE"/>
+              <a:t>оформление аддона для официального магазина ассетов Godot</a:t>
+            </a:r>
+            <a:endParaRPr lang="en-US" sz="1150" dirty="0"/>
+          </a:p>
+        </p:txBody>
+      </p:sp>
+      <p:sp>
+        <p:nvSpPr>
+          <p:cNvPr id="12" name="Shape 9"/>
+          <p:cNvSpPr/>
+          <p:nvPr/>
+        </p:nvSpPr>
+        <p:spPr>
+          <a:xfrm>
+            <a:off x="640080" y="3063240"/>
+            <a:ext cx="5212080" cy="1078992"/>
+          </a:xfrm>
+          <a:prstGeom prst="roundRect">
+            <a:avLst>
+              <a:gd name="adj" fmla="val 6780"/>
+            </a:avLst>
+          </a:prstGeom>
+          <a:solidFill>
+            <a:srgbClr val="F4FAFD"/>
+          </a:solidFill>
+          <a:ln w="12700">
+            <a:solidFill>
+              <a:srgbClr val="DCE6EC"/>
+            </a:solidFill>
+            <a:prstDash val="solid"/>
+          </a:ln>
+        </p:spPr>
+      </p:sp>
+      <p:sp>
+        <p:nvSpPr>
+          <p:cNvPr id="13" name="Shape 10"/>
+          <p:cNvSpPr/>
+          <p:nvPr/>
+        </p:nvSpPr>
+        <p:spPr>
+          <a:xfrm>
+            <a:off x="859536" y="3319272"/>
+            <a:ext cx="566928" cy="566928"/>
+          </a:xfrm>
+          <a:prstGeom prst="ellipse">
+            <a:avLst/>
+          </a:prstGeom>
+          <a:solidFill>
+            <a:srgbClr val="1F9BD8"/>
+          </a:solidFill>
+          <a:ln/>
+          <a:effectLst>
+            <a:outerShdw blurRad="88900" dist="25400" dir="5400000" algn="bl" rotWithShape="0">
+              <a:srgbClr val="B8C9D4">
+                <a:alpha val="22000"/>
+              </a:srgbClr>
+            </a:outerShdw>
+          </a:effectLst>
+        </p:spPr>
+      </p:sp>
+      <p:pic>
+        <p:nvPicPr>
+          <p:cNvPr id="14" name="Image 1" descr="icons/sliders.png"/>
+          <p:cNvPicPr>
+            <a:picLocks noChangeAspect="1"/>
+          </p:cNvPicPr>
+          <p:nvPr/>
+        </p:nvPicPr>
+        <p:blipFill>
+          <a:blip r:embed="rId4"/>
+          <a:stretch>
+            <a:fillRect/>
+          </a:stretch>
+        </p:blipFill>
+        <p:spPr>
+          <a:xfrm>
+            <a:off x="1029614" y="3489350"/>
+            <a:ext cx="226771" cy="226771"/>
+          </a:xfrm>
+          <a:prstGeom prst="rect">
+            <a:avLst/>
+          </a:prstGeom>
+        </p:spPr>
+      </p:pic>
+      <p:sp>
+        <p:nvSpPr>
+          <p:cNvPr id="15" name="Text 11"/>
+          <p:cNvSpPr/>
+          <p:nvPr/>
+        </p:nvSpPr>
+        <p:spPr>
+          <a:xfrm>
+            <a:off x="1664208" y="3227832"/>
+            <a:ext cx="4023360" cy="365760"/>
+          </a:xfrm>
+          <a:prstGeom prst="rect">
+            <a:avLst/>
+          </a:prstGeom>
+          <a:noFill/>
+          <a:ln/>
+        </p:spPr>
+        <p:txBody>
+          <a:bodyPr wrap="square" lIns="0" tIns="0" rIns="0" bIns="0" rtlCol="0" anchor="ctr"/>
+          <a:lstStyle/>
+          <a:p>
+            <a:pPr marL="0" indent="0">
+              <a:buNone/>
+            </a:pPr>
+            <a:r>
+              <a:rPr lang="en-US" sz="1450" b="1" dirty="0">
+                <a:solidFill>
+                  <a:srgbClr val="111418"/>
                 </a:solidFill>
                 <a:latin typeface="Calibri" pitchFamily="34" charset="0"/>
                 <a:ea typeface="Calibri" pitchFamily="34" charset="-122"/>
                 <a:cs typeface="Calibri" pitchFamily="34" charset="-120"/>
               </a:rPr>
-              <a:t xml:space="preserve">   ·   Группа МВИ-122</a:t>
-            </a:r>
-            <a:endParaRPr lang="en-US" sz="1400" dirty="0"/>
-          </a:p>
-        </p:txBody>
-      </p:sp>
-      <p:sp>
-        <p:nvSpPr>
-          <p:cNvPr id="27" name="Text 25"/>
-          <p:cNvSpPr/>
-          <p:nvPr/>
-        </p:nvSpPr>
-        <p:spPr>
-          <a:xfrm>
-            <a:off x="640080" y="5349240"/>
-            <a:ext cx="10515600" cy="365760"/>
-          </a:xfrm>
-          <a:prstGeom prst="rect">
-            <a:avLst/>
-          </a:prstGeom>
-          <a:noFill/>
-          <a:ln/>
-        </p:spPr>
-        <p:txBody>
-          <a:bodyPr wrap="square" lIns="0" tIns="0" rIns="0" bIns="0" rtlCol="0" anchor="ctr"/>
-          <a:lstStyle/>
-          <a:p>
-            <a:pPr indent="0" marL="0">
-              <a:buNone/>
-            </a:pPr>
-            <a:r>
-              <a:rPr lang="en-US" sz="1250" dirty="0">
-                <a:solidFill>
-                  <a:srgbClr val="9FD4EE"/>
+              <a:t>Расширение панели</a:t>
+            </a:r>
+            <a:endParaRPr lang="en-US" sz="1450" dirty="0"/>
+          </a:p>
+        </p:txBody>
+      </p:sp>
+      <p:sp>
+        <p:nvSpPr>
+          <p:cNvPr id="16" name="Text 12"/>
+          <p:cNvSpPr/>
+          <p:nvPr/>
+        </p:nvSpPr>
+        <p:spPr>
+          <a:xfrm>
+            <a:off x="1664208" y="3593592"/>
+            <a:ext cx="4023360" cy="502920"/>
+          </a:xfrm>
+          <a:prstGeom prst="rect">
+            <a:avLst/>
+          </a:prstGeom>
+          <a:noFill/>
+          <a:ln/>
+        </p:spPr>
+        <p:txBody>
+          <a:bodyPr wrap="square" lIns="0" tIns="0" rIns="0" bIns="0" rtlCol="0" anchor="t"/>
+          <a:lstStyle/>
+          <a:p>
+            <a:pPr marL="0" indent="0">
+              <a:lnSpc>
+                <a:spcPct val="100000"/>
+              </a:lnSpc>
+              <a:buNone/>
+            </a:pPr>
+            <a:r>
+              <a:rPr lang="en-US" sz="1150" dirty="0">
+                <a:solidFill>
+                  <a:srgbClr val="33383F"/>
                 </a:solidFill>
                 <a:latin typeface="Calibri" pitchFamily="34" charset="0"/>
                 <a:ea typeface="Calibri" pitchFamily="34" charset="-122"/>
                 <a:cs typeface="Calibri" pitchFamily="34" charset="-120"/>
               </a:rPr>
-              <a:t>Научный руководитель: Минаева Н. В., ст. преподаватель</a:t>
-            </a:r>
-            <a:endParaRPr lang="en-US" sz="1250" dirty="0"/>
+              <a:t>визуализация воронок событий и истории адаптаций в редакторе</a:t>
+            </a:r>
+            <a:endParaRPr lang="en-US" sz="1150" dirty="0"/>
+          </a:p>
+        </p:txBody>
+      </p:sp>
+      <p:sp>
+        <p:nvSpPr>
+          <p:cNvPr id="17" name="Shape 13"/>
+          <p:cNvSpPr/>
+          <p:nvPr/>
+        </p:nvSpPr>
+        <p:spPr>
+          <a:xfrm>
+            <a:off x="640080" y="4343400"/>
+            <a:ext cx="5212080" cy="1078992"/>
+          </a:xfrm>
+          <a:prstGeom prst="roundRect">
+            <a:avLst>
+              <a:gd name="adj" fmla="val 6780"/>
+            </a:avLst>
+          </a:prstGeom>
+          <a:solidFill>
+            <a:srgbClr val="F4FAFD"/>
+          </a:solidFill>
+          <a:ln w="12700">
+            <a:solidFill>
+              <a:srgbClr val="DCE6EC"/>
+            </a:solidFill>
+            <a:prstDash val="solid"/>
+          </a:ln>
+        </p:spPr>
+      </p:sp>
+      <p:sp>
+        <p:nvSpPr>
+          <p:cNvPr id="18" name="Shape 14"/>
+          <p:cNvSpPr/>
+          <p:nvPr/>
+        </p:nvSpPr>
+        <p:spPr>
+          <a:xfrm>
+            <a:off x="859536" y="4599432"/>
+            <a:ext cx="566928" cy="566928"/>
+          </a:xfrm>
+          <a:prstGeom prst="ellipse">
+            <a:avLst/>
+          </a:prstGeom>
+          <a:solidFill>
+            <a:srgbClr val="1F9BD8"/>
+          </a:solidFill>
+          <a:ln/>
+          <a:effectLst>
+            <a:outerShdw blurRad="88900" dist="25400" dir="5400000" algn="bl" rotWithShape="0">
+              <a:srgbClr val="B8C9D4">
+                <a:alpha val="22000"/>
+              </a:srgbClr>
+            </a:outerShdw>
+          </a:effectLst>
+        </p:spPr>
+      </p:sp>
+      <p:pic>
+        <p:nvPicPr>
+          <p:cNvPr id="19" name="Image 2" descr="icons/check.png"/>
+          <p:cNvPicPr>
+            <a:picLocks noChangeAspect="1"/>
+          </p:cNvPicPr>
+          <p:nvPr/>
+        </p:nvPicPr>
+        <p:blipFill>
+          <a:blip r:embed="rId5"/>
+          <a:stretch>
+            <a:fillRect/>
+          </a:stretch>
+        </p:blipFill>
+        <p:spPr>
+          <a:xfrm>
+            <a:off x="1029614" y="4769510"/>
+            <a:ext cx="226771" cy="226771"/>
+          </a:xfrm>
+          <a:prstGeom prst="rect">
+            <a:avLst/>
+          </a:prstGeom>
+        </p:spPr>
+      </p:pic>
+      <p:sp>
+        <p:nvSpPr>
+          <p:cNvPr id="20" name="Text 15"/>
+          <p:cNvSpPr/>
+          <p:nvPr/>
+        </p:nvSpPr>
+        <p:spPr>
+          <a:xfrm>
+            <a:off x="1664208" y="4507992"/>
+            <a:ext cx="4023360" cy="365760"/>
+          </a:xfrm>
+          <a:prstGeom prst="rect">
+            <a:avLst/>
+          </a:prstGeom>
+          <a:noFill/>
+          <a:ln/>
+        </p:spPr>
+        <p:txBody>
+          <a:bodyPr wrap="square" lIns="0" tIns="0" rIns="0" bIns="0" rtlCol="0" anchor="ctr"/>
+          <a:lstStyle/>
+          <a:p>
+            <a:pPr marL="0" indent="0">
+              <a:buNone/>
+            </a:pPr>
+            <a:r>
+              <a:rPr lang="en-US" sz="1450" b="1" dirty="0">
+                <a:solidFill>
+                  <a:srgbClr val="111418"/>
+                </a:solidFill>
+                <a:latin typeface="Calibri" pitchFamily="34" charset="0"/>
+                <a:ea typeface="Calibri" pitchFamily="34" charset="-122"/>
+                <a:cs typeface="Calibri" pitchFamily="34" charset="-120"/>
+              </a:rPr>
+              <a:t>Авто-тесты интеграции</a:t>
+            </a:r>
+            <a:endParaRPr lang="en-US" sz="1450" dirty="0"/>
+          </a:p>
+        </p:txBody>
+      </p:sp>
+      <p:sp>
+        <p:nvSpPr>
+          <p:cNvPr id="21" name="Text 16"/>
+          <p:cNvSpPr/>
+          <p:nvPr/>
+        </p:nvSpPr>
+        <p:spPr>
+          <a:xfrm>
+            <a:off x="1664208" y="4873752"/>
+            <a:ext cx="4023360" cy="502920"/>
+          </a:xfrm>
+          <a:prstGeom prst="rect">
+            <a:avLst/>
+          </a:prstGeom>
+          <a:noFill/>
+          <a:ln/>
+        </p:spPr>
+        <p:txBody>
+          <a:bodyPr wrap="square" lIns="0" tIns="0" rIns="0" bIns="0" rtlCol="0" anchor="t"/>
+          <a:lstStyle/>
+          <a:p>
+            <a:pPr marL="0" indent="0">
+              <a:lnSpc>
+                <a:spcPct val="100000"/>
+              </a:lnSpc>
+              <a:buNone/>
+            </a:pPr>
+            <a:r>
+              <a:rPr lang="en-US" sz="1150" dirty="0">
+                <a:solidFill>
+                  <a:srgbClr val="33383F"/>
+                </a:solidFill>
+                <a:latin typeface="Calibri" pitchFamily="34" charset="0"/>
+                <a:ea typeface="Calibri" pitchFamily="34" charset="-122"/>
+                <a:cs typeface="Calibri" pitchFamily="34" charset="-120"/>
+              </a:rPr>
+              <a:t>Сквозной чек-лист test_integration.gd как регрессионная проверка</a:t>
+            </a:r>
+            <a:endParaRPr lang="en-US" sz="1150" dirty="0"/>
+          </a:p>
+        </p:txBody>
+      </p:sp>
+      <p:sp>
+        <p:nvSpPr>
+          <p:cNvPr id="22" name="Shape 17"/>
+          <p:cNvSpPr/>
+          <p:nvPr/>
+        </p:nvSpPr>
+        <p:spPr>
+          <a:xfrm>
+            <a:off x="6766560" y="1783080"/>
+            <a:ext cx="4785055" cy="4160520"/>
+          </a:xfrm>
+          <a:prstGeom prst="roundRect">
+            <a:avLst>
+              <a:gd name="adj" fmla="val 2198"/>
+            </a:avLst>
+          </a:prstGeom>
+          <a:solidFill>
+            <a:srgbClr val="0B5E88"/>
+          </a:solidFill>
+          <a:ln/>
+          <a:effectLst>
+            <a:outerShdw blurRad="114300" dist="38100" dir="5400000" algn="bl" rotWithShape="0">
+              <a:srgbClr val="9FB6C4">
+                <a:alpha val="28000"/>
+              </a:srgbClr>
+            </a:outerShdw>
+          </a:effectLst>
+        </p:spPr>
+      </p:sp>
+      <p:sp>
+        <p:nvSpPr>
+          <p:cNvPr id="23" name="Text 18"/>
+          <p:cNvSpPr/>
+          <p:nvPr/>
+        </p:nvSpPr>
+        <p:spPr>
+          <a:xfrm>
+            <a:off x="6766560" y="2057400"/>
+            <a:ext cx="4785055" cy="274320"/>
+          </a:xfrm>
+          <a:prstGeom prst="rect">
+            <a:avLst/>
+          </a:prstGeom>
+          <a:noFill/>
+          <a:ln/>
+        </p:spPr>
+        <p:txBody>
+          <a:bodyPr wrap="square" lIns="0" tIns="0" rIns="0" bIns="0" rtlCol="0" anchor="ctr"/>
+          <a:lstStyle/>
+          <a:p>
+            <a:pPr marL="0" indent="0" algn="ctr">
+              <a:buNone/>
+            </a:pPr>
+            <a:r>
+              <a:rPr lang="en-US" sz="1200" b="1" kern="0" spc="200" dirty="0">
+                <a:solidFill>
+                  <a:srgbClr val="8FD0EE"/>
+                </a:solidFill>
+                <a:latin typeface="Calibri" pitchFamily="34" charset="0"/>
+                <a:ea typeface="Calibri" pitchFamily="34" charset="-122"/>
+                <a:cs typeface="Calibri" pitchFamily="34" charset="-120"/>
+              </a:rPr>
+              <a:t>РЕПОЗИТОРИЙ ПРОЕКТА</a:t>
+            </a:r>
+            <a:endParaRPr lang="en-US" sz="1200" dirty="0"/>
+          </a:p>
+        </p:txBody>
+      </p:sp>
+      <p:sp>
+        <p:nvSpPr>
+          <p:cNvPr id="24" name="Shape 19"/>
+          <p:cNvSpPr/>
+          <p:nvPr/>
+        </p:nvSpPr>
+        <p:spPr>
+          <a:xfrm>
+            <a:off x="7924648" y="2468880"/>
+            <a:ext cx="2468880" cy="2468880"/>
+          </a:xfrm>
+          <a:prstGeom prst="roundRect">
+            <a:avLst>
+              <a:gd name="adj" fmla="val 2963"/>
+            </a:avLst>
+          </a:prstGeom>
+          <a:solidFill>
+            <a:srgbClr val="FFFFFF"/>
+          </a:solidFill>
+          <a:ln/>
+        </p:spPr>
+      </p:sp>
+      <p:pic>
+        <p:nvPicPr>
+          <p:cNvPr id="25" name="Image 3" descr="qr_git.png"/>
+          <p:cNvPicPr>
+            <a:picLocks noChangeAspect="1"/>
+          </p:cNvPicPr>
+          <p:nvPr/>
+        </p:nvPicPr>
+        <p:blipFill>
+          <a:blip r:embed="rId6"/>
+          <a:stretch>
+            <a:fillRect/>
+          </a:stretch>
+        </p:blipFill>
+        <p:spPr>
+          <a:xfrm>
+            <a:off x="8070952" y="2615184"/>
+            <a:ext cx="2176272" cy="2176272"/>
+          </a:xfrm>
+          <a:prstGeom prst="rect">
+            <a:avLst/>
+          </a:prstGeom>
+        </p:spPr>
+      </p:pic>
+      <p:sp>
+        <p:nvSpPr>
+          <p:cNvPr id="26" name="Text 20"/>
+          <p:cNvSpPr/>
+          <p:nvPr/>
+        </p:nvSpPr>
+        <p:spPr>
+          <a:xfrm>
+            <a:off x="6766560" y="5074920"/>
+            <a:ext cx="4785055" cy="365760"/>
+          </a:xfrm>
+          <a:prstGeom prst="rect">
+            <a:avLst/>
+          </a:prstGeom>
+          <a:noFill/>
+          <a:ln/>
+        </p:spPr>
+        <p:txBody>
+          <a:bodyPr wrap="square" lIns="0" tIns="0" rIns="0" bIns="0" rtlCol="0" anchor="ctr"/>
+          <a:lstStyle/>
+          <a:p>
+            <a:pPr marL="0" indent="0" algn="ctr">
+              <a:buNone/>
+            </a:pPr>
+            <a:r>
+              <a:rPr lang="en-US" sz="1150" b="1" dirty="0">
+                <a:solidFill>
+                  <a:srgbClr val="FFFFFF"/>
+                </a:solidFill>
+                <a:latin typeface="Calibri" pitchFamily="34" charset="0"/>
+                <a:ea typeface="Calibri" pitchFamily="34" charset="-122"/>
+                <a:cs typeface="Calibri" pitchFamily="34" charset="-120"/>
+              </a:rPr>
+              <a:t>github.com/Antizi/diplom-Game_Plugs_Ai</a:t>
+            </a:r>
+            <a:endParaRPr lang="en-US" sz="1150" dirty="0"/>
+          </a:p>
+        </p:txBody>
+      </p:sp>
+      <p:sp>
+        <p:nvSpPr>
+          <p:cNvPr id="27" name="Text 21"/>
+          <p:cNvSpPr/>
+          <p:nvPr/>
+        </p:nvSpPr>
+        <p:spPr>
+          <a:xfrm>
+            <a:off x="6766560" y="5440680"/>
+            <a:ext cx="4785055" cy="274320"/>
+          </a:xfrm>
+          <a:prstGeom prst="rect">
+            <a:avLst/>
+          </a:prstGeom>
+          <a:noFill/>
+          <a:ln/>
+        </p:spPr>
+        <p:txBody>
+          <a:bodyPr wrap="square" lIns="0" tIns="0" rIns="0" bIns="0" rtlCol="0" anchor="ctr"/>
+          <a:lstStyle/>
+          <a:p>
+            <a:pPr marL="0" indent="0" algn="ctr">
+              <a:buNone/>
+            </a:pPr>
+            <a:r>
+              <a:rPr lang="en-US" sz="1000" dirty="0">
+                <a:solidFill>
+                  <a:srgbClr val="9FD4EE"/>
+                </a:solidFill>
+                <a:latin typeface="Calibri" pitchFamily="34" charset="0"/>
+                <a:ea typeface="Calibri" pitchFamily="34" charset="-122"/>
+                <a:cs typeface="Calibri" pitchFamily="34" charset="-120"/>
+              </a:rPr>
+              <a:t>Наведите камеру телефона на QR-код</a:t>
+            </a:r>
+            <a:endParaRPr lang="en-US" sz="1000" dirty="0"/>
           </a:p>
         </p:txBody>
       </p:sp>
@@ -3201,6 +3110,1363 @@
 </file>
 
 <file path=ppt/slides/slide11.xml><?xml version="1.0" encoding="utf-8"?>
+<p:sld xmlns:a="http://schemas.openxmlformats.org/drawingml/2006/main" xmlns:r="http://schemas.openxmlformats.org/officeDocument/2006/relationships" xmlns:p="http://schemas.openxmlformats.org/presentationml/2006/main">
+  <p:cSld name="Slide 10">
+    <p:bg>
+      <p:bgPr>
+        <a:solidFill>
+          <a:srgbClr val="0B5E88"/>
+        </a:solidFill>
+        <a:effectLst/>
+      </p:bgPr>
+    </p:bg>
+    <p:spTree>
+      <p:nvGrpSpPr>
+        <p:cNvPr id="1" name=""/>
+        <p:cNvGrpSpPr/>
+        <p:nvPr/>
+      </p:nvGrpSpPr>
+      <p:grpSpPr>
+        <a:xfrm>
+          <a:off x="0" y="0"/>
+          <a:ext cx="0" cy="0"/>
+          <a:chOff x="0" y="0"/>
+          <a:chExt cx="0" cy="0"/>
+        </a:xfrm>
+      </p:grpSpPr>
+      <p:sp>
+        <p:nvSpPr>
+          <p:cNvPr id="2" name="Shape 0"/>
+          <p:cNvSpPr/>
+          <p:nvPr/>
+        </p:nvSpPr>
+        <p:spPr>
+          <a:xfrm>
+            <a:off x="640080" y="5760720"/>
+            <a:ext cx="54864" cy="54864"/>
+          </a:xfrm>
+          <a:prstGeom prst="ellipse">
+            <a:avLst/>
+          </a:prstGeom>
+          <a:solidFill>
+            <a:srgbClr val="3E8FB8"/>
+          </a:solidFill>
+          <a:ln/>
+        </p:spPr>
+      </p:sp>
+      <p:sp>
+        <p:nvSpPr>
+          <p:cNvPr id="3" name="Shape 1"/>
+          <p:cNvSpPr/>
+          <p:nvPr/>
+        </p:nvSpPr>
+        <p:spPr>
+          <a:xfrm>
+            <a:off x="640080" y="6126480"/>
+            <a:ext cx="54864" cy="54864"/>
+          </a:xfrm>
+          <a:prstGeom prst="ellipse">
+            <a:avLst/>
+          </a:prstGeom>
+          <a:solidFill>
+            <a:srgbClr val="3E8FB8"/>
+          </a:solidFill>
+          <a:ln/>
+        </p:spPr>
+      </p:sp>
+      <p:sp>
+        <p:nvSpPr>
+          <p:cNvPr id="4" name="Shape 2"/>
+          <p:cNvSpPr/>
+          <p:nvPr/>
+        </p:nvSpPr>
+        <p:spPr>
+          <a:xfrm>
+            <a:off x="640080" y="6492240"/>
+            <a:ext cx="54864" cy="54864"/>
+          </a:xfrm>
+          <a:prstGeom prst="ellipse">
+            <a:avLst/>
+          </a:prstGeom>
+          <a:solidFill>
+            <a:srgbClr val="3E8FB8"/>
+          </a:solidFill>
+          <a:ln/>
+        </p:spPr>
+      </p:sp>
+      <p:sp>
+        <p:nvSpPr>
+          <p:cNvPr id="5" name="Shape 3"/>
+          <p:cNvSpPr/>
+          <p:nvPr/>
+        </p:nvSpPr>
+        <p:spPr>
+          <a:xfrm>
+            <a:off x="1097280" y="5760720"/>
+            <a:ext cx="54864" cy="54864"/>
+          </a:xfrm>
+          <a:prstGeom prst="ellipse">
+            <a:avLst/>
+          </a:prstGeom>
+          <a:solidFill>
+            <a:srgbClr val="3E8FB8"/>
+          </a:solidFill>
+          <a:ln/>
+        </p:spPr>
+      </p:sp>
+      <p:sp>
+        <p:nvSpPr>
+          <p:cNvPr id="6" name="Shape 4"/>
+          <p:cNvSpPr/>
+          <p:nvPr/>
+        </p:nvSpPr>
+        <p:spPr>
+          <a:xfrm>
+            <a:off x="1097280" y="6126480"/>
+            <a:ext cx="54864" cy="54864"/>
+          </a:xfrm>
+          <a:prstGeom prst="ellipse">
+            <a:avLst/>
+          </a:prstGeom>
+          <a:solidFill>
+            <a:srgbClr val="3E8FB8"/>
+          </a:solidFill>
+          <a:ln/>
+        </p:spPr>
+      </p:sp>
+      <p:sp>
+        <p:nvSpPr>
+          <p:cNvPr id="7" name="Shape 5"/>
+          <p:cNvSpPr/>
+          <p:nvPr/>
+        </p:nvSpPr>
+        <p:spPr>
+          <a:xfrm>
+            <a:off x="1097280" y="6492240"/>
+            <a:ext cx="54864" cy="54864"/>
+          </a:xfrm>
+          <a:prstGeom prst="ellipse">
+            <a:avLst/>
+          </a:prstGeom>
+          <a:solidFill>
+            <a:srgbClr val="3E8FB8"/>
+          </a:solidFill>
+          <a:ln/>
+        </p:spPr>
+      </p:sp>
+      <p:sp>
+        <p:nvSpPr>
+          <p:cNvPr id="8" name="Shape 6"/>
+          <p:cNvSpPr/>
+          <p:nvPr/>
+        </p:nvSpPr>
+        <p:spPr>
+          <a:xfrm>
+            <a:off x="1554480" y="5760720"/>
+            <a:ext cx="54864" cy="54864"/>
+          </a:xfrm>
+          <a:prstGeom prst="ellipse">
+            <a:avLst/>
+          </a:prstGeom>
+          <a:solidFill>
+            <a:srgbClr val="3E8FB8"/>
+          </a:solidFill>
+          <a:ln/>
+        </p:spPr>
+      </p:sp>
+      <p:sp>
+        <p:nvSpPr>
+          <p:cNvPr id="9" name="Shape 7"/>
+          <p:cNvSpPr/>
+          <p:nvPr/>
+        </p:nvSpPr>
+        <p:spPr>
+          <a:xfrm>
+            <a:off x="1554480" y="6126480"/>
+            <a:ext cx="54864" cy="54864"/>
+          </a:xfrm>
+          <a:prstGeom prst="ellipse">
+            <a:avLst/>
+          </a:prstGeom>
+          <a:solidFill>
+            <a:srgbClr val="3E8FB8"/>
+          </a:solidFill>
+          <a:ln/>
+        </p:spPr>
+      </p:sp>
+      <p:sp>
+        <p:nvSpPr>
+          <p:cNvPr id="10" name="Shape 8"/>
+          <p:cNvSpPr/>
+          <p:nvPr/>
+        </p:nvSpPr>
+        <p:spPr>
+          <a:xfrm>
+            <a:off x="1554480" y="6492240"/>
+            <a:ext cx="54864" cy="54864"/>
+          </a:xfrm>
+          <a:prstGeom prst="ellipse">
+            <a:avLst/>
+          </a:prstGeom>
+          <a:solidFill>
+            <a:srgbClr val="3E8FB8"/>
+          </a:solidFill>
+          <a:ln/>
+        </p:spPr>
+      </p:sp>
+      <p:sp>
+        <p:nvSpPr>
+          <p:cNvPr id="11" name="Shape 9"/>
+          <p:cNvSpPr/>
+          <p:nvPr/>
+        </p:nvSpPr>
+        <p:spPr>
+          <a:xfrm>
+            <a:off x="2011680" y="5760720"/>
+            <a:ext cx="54864" cy="54864"/>
+          </a:xfrm>
+          <a:prstGeom prst="ellipse">
+            <a:avLst/>
+          </a:prstGeom>
+          <a:solidFill>
+            <a:srgbClr val="3E8FB8"/>
+          </a:solidFill>
+          <a:ln/>
+        </p:spPr>
+      </p:sp>
+      <p:sp>
+        <p:nvSpPr>
+          <p:cNvPr id="12" name="Shape 10"/>
+          <p:cNvSpPr/>
+          <p:nvPr/>
+        </p:nvSpPr>
+        <p:spPr>
+          <a:xfrm>
+            <a:off x="2011680" y="6126480"/>
+            <a:ext cx="54864" cy="54864"/>
+          </a:xfrm>
+          <a:prstGeom prst="ellipse">
+            <a:avLst/>
+          </a:prstGeom>
+          <a:solidFill>
+            <a:srgbClr val="3E8FB8"/>
+          </a:solidFill>
+          <a:ln/>
+        </p:spPr>
+      </p:sp>
+      <p:sp>
+        <p:nvSpPr>
+          <p:cNvPr id="13" name="Shape 11"/>
+          <p:cNvSpPr/>
+          <p:nvPr/>
+        </p:nvSpPr>
+        <p:spPr>
+          <a:xfrm>
+            <a:off x="2011680" y="6492240"/>
+            <a:ext cx="54864" cy="54864"/>
+          </a:xfrm>
+          <a:prstGeom prst="ellipse">
+            <a:avLst/>
+          </a:prstGeom>
+          <a:solidFill>
+            <a:srgbClr val="3E8FB8"/>
+          </a:solidFill>
+          <a:ln/>
+        </p:spPr>
+      </p:sp>
+      <p:sp>
+        <p:nvSpPr>
+          <p:cNvPr id="14" name="Shape 12"/>
+          <p:cNvSpPr/>
+          <p:nvPr/>
+        </p:nvSpPr>
+        <p:spPr>
+          <a:xfrm>
+            <a:off x="2468880" y="5760720"/>
+            <a:ext cx="54864" cy="54864"/>
+          </a:xfrm>
+          <a:prstGeom prst="ellipse">
+            <a:avLst/>
+          </a:prstGeom>
+          <a:solidFill>
+            <a:srgbClr val="3E8FB8"/>
+          </a:solidFill>
+          <a:ln/>
+        </p:spPr>
+      </p:sp>
+      <p:sp>
+        <p:nvSpPr>
+          <p:cNvPr id="15" name="Shape 13"/>
+          <p:cNvSpPr/>
+          <p:nvPr/>
+        </p:nvSpPr>
+        <p:spPr>
+          <a:xfrm>
+            <a:off x="2468880" y="6126480"/>
+            <a:ext cx="54864" cy="54864"/>
+          </a:xfrm>
+          <a:prstGeom prst="ellipse">
+            <a:avLst/>
+          </a:prstGeom>
+          <a:solidFill>
+            <a:srgbClr val="3E8FB8"/>
+          </a:solidFill>
+          <a:ln/>
+        </p:spPr>
+      </p:sp>
+      <p:sp>
+        <p:nvSpPr>
+          <p:cNvPr id="16" name="Shape 14"/>
+          <p:cNvSpPr/>
+          <p:nvPr/>
+        </p:nvSpPr>
+        <p:spPr>
+          <a:xfrm>
+            <a:off x="2468880" y="6492240"/>
+            <a:ext cx="54864" cy="54864"/>
+          </a:xfrm>
+          <a:prstGeom prst="ellipse">
+            <a:avLst/>
+          </a:prstGeom>
+          <a:solidFill>
+            <a:srgbClr val="3E8FB8"/>
+          </a:solidFill>
+          <a:ln/>
+        </p:spPr>
+      </p:sp>
+      <p:sp>
+        <p:nvSpPr>
+          <p:cNvPr id="17" name="Shape 15"/>
+          <p:cNvSpPr/>
+          <p:nvPr/>
+        </p:nvSpPr>
+        <p:spPr>
+          <a:xfrm>
+            <a:off x="2926080" y="5760720"/>
+            <a:ext cx="54864" cy="54864"/>
+          </a:xfrm>
+          <a:prstGeom prst="ellipse">
+            <a:avLst/>
+          </a:prstGeom>
+          <a:solidFill>
+            <a:srgbClr val="3E8FB8"/>
+          </a:solidFill>
+          <a:ln/>
+        </p:spPr>
+      </p:sp>
+      <p:sp>
+        <p:nvSpPr>
+          <p:cNvPr id="18" name="Shape 16"/>
+          <p:cNvSpPr/>
+          <p:nvPr/>
+        </p:nvSpPr>
+        <p:spPr>
+          <a:xfrm>
+            <a:off x="2926080" y="6126480"/>
+            <a:ext cx="54864" cy="54864"/>
+          </a:xfrm>
+          <a:prstGeom prst="ellipse">
+            <a:avLst/>
+          </a:prstGeom>
+          <a:solidFill>
+            <a:srgbClr val="3E8FB8"/>
+          </a:solidFill>
+          <a:ln/>
+        </p:spPr>
+      </p:sp>
+      <p:sp>
+        <p:nvSpPr>
+          <p:cNvPr id="19" name="Shape 17"/>
+          <p:cNvSpPr/>
+          <p:nvPr/>
+        </p:nvSpPr>
+        <p:spPr>
+          <a:xfrm>
+            <a:off x="2926080" y="6492240"/>
+            <a:ext cx="54864" cy="54864"/>
+          </a:xfrm>
+          <a:prstGeom prst="ellipse">
+            <a:avLst/>
+          </a:prstGeom>
+          <a:solidFill>
+            <a:srgbClr val="3E8FB8"/>
+          </a:solidFill>
+          <a:ln/>
+        </p:spPr>
+      </p:sp>
+      <p:sp>
+        <p:nvSpPr>
+          <p:cNvPr id="20" name="Shape 18"/>
+          <p:cNvSpPr/>
+          <p:nvPr/>
+        </p:nvSpPr>
+        <p:spPr>
+          <a:xfrm>
+            <a:off x="3383280" y="5760720"/>
+            <a:ext cx="54864" cy="54864"/>
+          </a:xfrm>
+          <a:prstGeom prst="ellipse">
+            <a:avLst/>
+          </a:prstGeom>
+          <a:solidFill>
+            <a:srgbClr val="3E8FB8"/>
+          </a:solidFill>
+          <a:ln/>
+        </p:spPr>
+      </p:sp>
+      <p:sp>
+        <p:nvSpPr>
+          <p:cNvPr id="21" name="Shape 19"/>
+          <p:cNvSpPr/>
+          <p:nvPr/>
+        </p:nvSpPr>
+        <p:spPr>
+          <a:xfrm>
+            <a:off x="3383280" y="6126480"/>
+            <a:ext cx="54864" cy="54864"/>
+          </a:xfrm>
+          <a:prstGeom prst="ellipse">
+            <a:avLst/>
+          </a:prstGeom>
+          <a:solidFill>
+            <a:srgbClr val="3E8FB8"/>
+          </a:solidFill>
+          <a:ln/>
+        </p:spPr>
+      </p:sp>
+      <p:sp>
+        <p:nvSpPr>
+          <p:cNvPr id="22" name="Shape 20"/>
+          <p:cNvSpPr/>
+          <p:nvPr/>
+        </p:nvSpPr>
+        <p:spPr>
+          <a:xfrm>
+            <a:off x="3383280" y="6492240"/>
+            <a:ext cx="54864" cy="54864"/>
+          </a:xfrm>
+          <a:prstGeom prst="ellipse">
+            <a:avLst/>
+          </a:prstGeom>
+          <a:solidFill>
+            <a:srgbClr val="3E8FB8"/>
+          </a:solidFill>
+          <a:ln/>
+        </p:spPr>
+      </p:sp>
+      <p:sp>
+        <p:nvSpPr>
+          <p:cNvPr id="23" name="Text 21"/>
+          <p:cNvSpPr/>
+          <p:nvPr/>
+        </p:nvSpPr>
+        <p:spPr>
+          <a:xfrm>
+            <a:off x="640080" y="2011680"/>
+            <a:ext cx="10058400" cy="365760"/>
+          </a:xfrm>
+          <a:prstGeom prst="rect">
+            <a:avLst/>
+          </a:prstGeom>
+          <a:noFill/>
+          <a:ln/>
+        </p:spPr>
+        <p:txBody>
+          <a:bodyPr wrap="square" lIns="0" tIns="0" rIns="0" bIns="0" rtlCol="0" anchor="ctr"/>
+          <a:lstStyle/>
+          <a:p>
+            <a:pPr marL="0" indent="0">
+              <a:buNone/>
+            </a:pPr>
+            <a:r>
+              <a:rPr lang="en-US" sz="2000" b="1" kern="0" spc="300" dirty="0">
+                <a:solidFill>
+                  <a:srgbClr val="8FD0EE"/>
+                </a:solidFill>
+                <a:latin typeface="Calibri" pitchFamily="34" charset="0"/>
+                <a:ea typeface="Calibri" pitchFamily="34" charset="-122"/>
+                <a:cs typeface="Calibri" pitchFamily="34" charset="-120"/>
+              </a:rPr>
+              <a:t>СПАСИБО ЗА ВНИМАНИЕ</a:t>
+            </a:r>
+            <a:r>
+              <a:rPr lang="ru-RU" sz="2000" b="1" kern="0" spc="300" dirty="0">
+                <a:solidFill>
+                  <a:srgbClr val="8FD0EE"/>
+                </a:solidFill>
+                <a:latin typeface="Calibri" pitchFamily="34" charset="0"/>
+                <a:ea typeface="Calibri" pitchFamily="34" charset="-122"/>
+                <a:cs typeface="Calibri" pitchFamily="34" charset="-120"/>
+              </a:rPr>
+              <a:t>!</a:t>
+            </a:r>
+            <a:endParaRPr lang="en-US" sz="2000" dirty="0"/>
+          </a:p>
+        </p:txBody>
+      </p:sp>
+      <p:sp>
+        <p:nvSpPr>
+          <p:cNvPr id="24" name="Text 22"/>
+          <p:cNvSpPr/>
+          <p:nvPr/>
+        </p:nvSpPr>
+        <p:spPr>
+          <a:xfrm>
+            <a:off x="640080" y="2423160"/>
+            <a:ext cx="10424160" cy="1371600"/>
+          </a:xfrm>
+          <a:prstGeom prst="rect">
+            <a:avLst/>
+          </a:prstGeom>
+          <a:noFill/>
+          <a:ln/>
+        </p:spPr>
+        <p:txBody>
+          <a:bodyPr wrap="square" lIns="0" tIns="0" rIns="0" bIns="0" rtlCol="0" anchor="t"/>
+          <a:lstStyle/>
+          <a:p>
+            <a:pPr marL="0" indent="0">
+              <a:lnSpc>
+                <a:spcPct val="102000"/>
+              </a:lnSpc>
+              <a:buNone/>
+            </a:pPr>
+            <a:r>
+              <a:rPr lang="en-US" sz="4000" b="1" dirty="0">
+                <a:solidFill>
+                  <a:srgbClr val="FFFFFF"/>
+                </a:solidFill>
+                <a:latin typeface="Cambria" pitchFamily="34" charset="0"/>
+                <a:ea typeface="Cambria" pitchFamily="34" charset="-122"/>
+                <a:cs typeface="Cambria" pitchFamily="34" charset="-120"/>
+              </a:rPr>
+              <a:t>Сбор и передача игровой телеметрии</a:t>
+            </a:r>
+            <a:endParaRPr lang="en-US" sz="4000" dirty="0"/>
+          </a:p>
+          <a:p>
+            <a:pPr marL="0" indent="0">
+              <a:lnSpc>
+                <a:spcPct val="102000"/>
+              </a:lnSpc>
+              <a:buNone/>
+            </a:pPr>
+            <a:r>
+              <a:rPr lang="en-US" sz="4000" b="1" dirty="0">
+                <a:solidFill>
+                  <a:srgbClr val="FFFFFF"/>
+                </a:solidFill>
+                <a:latin typeface="Cambria" pitchFamily="34" charset="0"/>
+                <a:ea typeface="Cambria" pitchFamily="34" charset="-122"/>
+                <a:cs typeface="Cambria" pitchFamily="34" charset="-120"/>
+              </a:rPr>
+              <a:t>в распределённое хранилище</a:t>
+            </a:r>
+            <a:endParaRPr lang="en-US" sz="4000" dirty="0"/>
+          </a:p>
+        </p:txBody>
+      </p:sp>
+      <p:sp>
+        <p:nvSpPr>
+          <p:cNvPr id="26" name="Text 24"/>
+          <p:cNvSpPr/>
+          <p:nvPr/>
+        </p:nvSpPr>
+        <p:spPr>
+          <a:xfrm>
+            <a:off x="640080" y="4983480"/>
+            <a:ext cx="10515600" cy="365760"/>
+          </a:xfrm>
+          <a:prstGeom prst="rect">
+            <a:avLst/>
+          </a:prstGeom>
+          <a:noFill/>
+          <a:ln/>
+        </p:spPr>
+        <p:txBody>
+          <a:bodyPr wrap="square" lIns="0" tIns="0" rIns="0" bIns="0" rtlCol="0" anchor="ctr"/>
+          <a:lstStyle/>
+          <a:p>
+            <a:pPr marL="0" indent="0">
+              <a:buNone/>
+            </a:pPr>
+            <a:r>
+              <a:rPr lang="en-US" sz="1400" b="1" dirty="0">
+                <a:solidFill>
+                  <a:srgbClr val="FFFFFF"/>
+                </a:solidFill>
+                <a:latin typeface="Calibri" pitchFamily="34" charset="0"/>
+                <a:ea typeface="Calibri" pitchFamily="34" charset="-122"/>
+                <a:cs typeface="Calibri" pitchFamily="34" charset="-120"/>
+              </a:rPr>
+              <a:t>Артамонов Фёдор Андреевич  ·  Godot-инженер</a:t>
+            </a:r>
+            <a:r>
+              <a:rPr lang="en-US" sz="1400" dirty="0">
+                <a:solidFill>
+                  <a:srgbClr val="9FD4EE"/>
+                </a:solidFill>
+                <a:latin typeface="Calibri" pitchFamily="34" charset="0"/>
+                <a:ea typeface="Calibri" pitchFamily="34" charset="-122"/>
+                <a:cs typeface="Calibri" pitchFamily="34" charset="-120"/>
+              </a:rPr>
+              <a:t>   ·   Группа МВИ-122</a:t>
+            </a:r>
+            <a:endParaRPr lang="en-US" sz="1400" dirty="0"/>
+          </a:p>
+        </p:txBody>
+      </p:sp>
+      <p:sp>
+        <p:nvSpPr>
+          <p:cNvPr id="27" name="Text 25"/>
+          <p:cNvSpPr/>
+          <p:nvPr/>
+        </p:nvSpPr>
+        <p:spPr>
+          <a:xfrm>
+            <a:off x="640080" y="5349240"/>
+            <a:ext cx="10515600" cy="365760"/>
+          </a:xfrm>
+          <a:prstGeom prst="rect">
+            <a:avLst/>
+          </a:prstGeom>
+          <a:noFill/>
+          <a:ln/>
+        </p:spPr>
+        <p:txBody>
+          <a:bodyPr wrap="square" lIns="0" tIns="0" rIns="0" bIns="0" rtlCol="0" anchor="ctr"/>
+          <a:lstStyle/>
+          <a:p>
+            <a:pPr marL="0" indent="0">
+              <a:buNone/>
+            </a:pPr>
+            <a:r>
+              <a:rPr lang="en-US" sz="1250" dirty="0">
+                <a:solidFill>
+                  <a:srgbClr val="9FD4EE"/>
+                </a:solidFill>
+                <a:latin typeface="Calibri" pitchFamily="34" charset="0"/>
+                <a:ea typeface="Calibri" pitchFamily="34" charset="-122"/>
+                <a:cs typeface="Calibri" pitchFamily="34" charset="-120"/>
+              </a:rPr>
+              <a:t>Научный руководитель: Минаева Н. В., ст. преподаватель</a:t>
+            </a:r>
+            <a:endParaRPr lang="en-US" sz="1250" dirty="0"/>
+          </a:p>
+        </p:txBody>
+      </p:sp>
+    </p:spTree>
+  </p:cSld>
+  <p:clrMapOvr>
+    <a:masterClrMapping/>
+  </p:clrMapOvr>
+</p:sld>
+</file>
+
+<file path=ppt/slides/slide2.xml><?xml version="1.0" encoding="utf-8"?>
+<p:sld xmlns:a="http://schemas.openxmlformats.org/drawingml/2006/main" xmlns:r="http://schemas.openxmlformats.org/officeDocument/2006/relationships" xmlns:p="http://schemas.openxmlformats.org/presentationml/2006/main">
+  <p:cSld name="Slide 2">
+    <p:bg>
+      <p:bgPr>
+        <a:solidFill>
+          <a:srgbClr val="FFFFFF"/>
+        </a:solidFill>
+        <a:effectLst/>
+      </p:bgPr>
+    </p:bg>
+    <p:spTree>
+      <p:nvGrpSpPr>
+        <p:cNvPr id="1" name=""/>
+        <p:cNvGrpSpPr/>
+        <p:nvPr/>
+      </p:nvGrpSpPr>
+      <p:grpSpPr>
+        <a:xfrm>
+          <a:off x="0" y="0"/>
+          <a:ext cx="0" cy="0"/>
+          <a:chOff x="0" y="0"/>
+          <a:chExt cx="0" cy="0"/>
+        </a:xfrm>
+      </p:grpSpPr>
+      <p:sp>
+        <p:nvSpPr>
+          <p:cNvPr id="2" name="Text 0"/>
+          <p:cNvSpPr/>
+          <p:nvPr/>
+        </p:nvSpPr>
+        <p:spPr>
+          <a:xfrm>
+            <a:off x="10820095" y="384048"/>
+            <a:ext cx="822960" cy="640080"/>
+          </a:xfrm>
+          <a:prstGeom prst="rect">
+            <a:avLst/>
+          </a:prstGeom>
+          <a:noFill/>
+          <a:ln/>
+        </p:spPr>
+        <p:txBody>
+          <a:bodyPr wrap="square" lIns="0" tIns="0" rIns="0" bIns="0" rtlCol="0" anchor="ctr"/>
+          <a:lstStyle/>
+          <a:p>
+            <a:pPr marL="0" indent="0" algn="r">
+              <a:buNone/>
+            </a:pPr>
+            <a:r>
+              <a:rPr lang="en-US" sz="3000" b="1" dirty="0">
+                <a:solidFill>
+                  <a:srgbClr val="C6D6E0"/>
+                </a:solidFill>
+                <a:latin typeface="Cambria" pitchFamily="34" charset="0"/>
+                <a:ea typeface="Cambria" pitchFamily="34" charset="-122"/>
+                <a:cs typeface="Cambria" pitchFamily="34" charset="-120"/>
+              </a:rPr>
+              <a:t>2</a:t>
+            </a:r>
+            <a:endParaRPr lang="en-US" sz="3000" dirty="0"/>
+          </a:p>
+        </p:txBody>
+      </p:sp>
+      <p:sp>
+        <p:nvSpPr>
+          <p:cNvPr id="3" name="Text 1"/>
+          <p:cNvSpPr/>
+          <p:nvPr/>
+        </p:nvSpPr>
+        <p:spPr>
+          <a:xfrm>
+            <a:off x="640080" y="475488"/>
+            <a:ext cx="8229600" cy="274320"/>
+          </a:xfrm>
+          <a:prstGeom prst="rect">
+            <a:avLst/>
+          </a:prstGeom>
+          <a:noFill/>
+          <a:ln/>
+        </p:spPr>
+        <p:txBody>
+          <a:bodyPr wrap="square" lIns="0" tIns="0" rIns="0" bIns="0" rtlCol="0" anchor="ctr"/>
+          <a:lstStyle/>
+          <a:p>
+            <a:pPr marL="0" indent="0">
+              <a:buNone/>
+            </a:pPr>
+            <a:r>
+              <a:rPr lang="en-US" sz="2000" b="1" kern="0" spc="250" dirty="0">
+                <a:solidFill>
+                  <a:srgbClr val="1F9BD8"/>
+                </a:solidFill>
+                <a:latin typeface="Calibri" pitchFamily="34" charset="0"/>
+                <a:ea typeface="Calibri" pitchFamily="34" charset="-122"/>
+                <a:cs typeface="Calibri" pitchFamily="34" charset="-120"/>
+              </a:rPr>
+              <a:t>АКТУАЛЬНОСТЬ</a:t>
+            </a:r>
+            <a:endParaRPr lang="en-US" sz="2000" dirty="0"/>
+          </a:p>
+        </p:txBody>
+      </p:sp>
+      <p:sp>
+        <p:nvSpPr>
+          <p:cNvPr id="4" name="Text 2"/>
+          <p:cNvSpPr/>
+          <p:nvPr/>
+        </p:nvSpPr>
+        <p:spPr>
+          <a:xfrm>
+            <a:off x="640080" y="749808"/>
+            <a:ext cx="10362895" cy="777240"/>
+          </a:xfrm>
+          <a:prstGeom prst="rect">
+            <a:avLst/>
+          </a:prstGeom>
+          <a:noFill/>
+          <a:ln/>
+        </p:spPr>
+        <p:txBody>
+          <a:bodyPr wrap="square" lIns="0" tIns="0" rIns="0" bIns="0" rtlCol="0" anchor="ctr"/>
+          <a:lstStyle/>
+          <a:p>
+            <a:pPr marL="0" indent="0">
+              <a:buNone/>
+            </a:pPr>
+            <a:r>
+              <a:rPr lang="en-US" sz="3000" b="1" dirty="0">
+                <a:solidFill>
+                  <a:srgbClr val="111418"/>
+                </a:solidFill>
+                <a:latin typeface="Cambria" pitchFamily="34" charset="0"/>
+                <a:ea typeface="Cambria" pitchFamily="34" charset="-122"/>
+                <a:cs typeface="Cambria" pitchFamily="34" charset="-120"/>
+              </a:rPr>
+              <a:t>Независимая разработка игр</a:t>
+            </a:r>
+            <a:endParaRPr lang="en-US" sz="3000" dirty="0"/>
+          </a:p>
+        </p:txBody>
+      </p:sp>
+      <p:sp>
+        <p:nvSpPr>
+          <p:cNvPr id="8" name="Shape 6"/>
+          <p:cNvSpPr/>
+          <p:nvPr/>
+        </p:nvSpPr>
+        <p:spPr>
+          <a:xfrm>
+            <a:off x="640080" y="2150000"/>
+            <a:ext cx="3474720" cy="3150000"/>
+          </a:xfrm>
+          <a:prstGeom prst="roundRect">
+            <a:avLst>
+              <a:gd name="adj" fmla="val 4500"/>
+            </a:avLst>
+          </a:prstGeom>
+          <a:solidFill>
+            <a:srgbClr val="F4FAFD"/>
+          </a:solidFill>
+          <a:ln w="12700">
+            <a:solidFill>
+              <a:srgbClr val="DCE6EC"/>
+            </a:solidFill>
+            <a:prstDash val="solid"/>
+          </a:ln>
+          <a:effectLst>
+            <a:outerShdw blurRad="88900" dist="25400" dir="5400000" algn="bl" rotWithShape="0">
+              <a:srgbClr val="B8C9D4">
+                <a:alpha val="22000"/>
+              </a:srgbClr>
+            </a:outerShdw>
+          </a:effectLst>
+        </p:spPr>
+      </p:sp>
+      <p:sp>
+        <p:nvSpPr>
+          <p:cNvPr id="9" name="Shape 7"/>
+          <p:cNvSpPr/>
+          <p:nvPr/>
+        </p:nvSpPr>
+        <p:spPr>
+          <a:xfrm>
+            <a:off x="970080" y="2530000"/>
+            <a:ext cx="700000" cy="700000"/>
+          </a:xfrm>
+          <a:prstGeom prst="ellipse">
+            <a:avLst/>
+          </a:prstGeom>
+          <a:solidFill>
+            <a:srgbClr val="1F9BD8"/>
+          </a:solidFill>
+          <a:ln/>
+          <a:effectLst>
+            <a:outerShdw blurRad="88900" dist="25400" dir="5400000" algn="bl" rotWithShape="0">
+              <a:srgbClr val="B8C9D4">
+                <a:alpha val="22000"/>
+              </a:srgbClr>
+            </a:outerShdw>
+          </a:effectLst>
+        </p:spPr>
+      </p:sp>
+      <p:pic>
+        <p:nvPicPr>
+          <p:cNvPr id="10" name="Image 0" descr="icons/store.png"/>
+          <p:cNvPicPr>
+            <a:picLocks noChangeAspect="1"/>
+          </p:cNvPicPr>
+          <p:nvPr/>
+        </p:nvPicPr>
+        <p:blipFill>
+          <a:blip r:embed="rId3"/>
+          <a:stretch>
+            <a:fillRect/>
+          </a:stretch>
+        </p:blipFill>
+        <p:spPr>
+          <a:xfrm>
+            <a:off x="1180080" y="2740000"/>
+            <a:ext cx="300000" cy="300000"/>
+          </a:xfrm>
+          <a:prstGeom prst="rect">
+            <a:avLst/>
+          </a:prstGeom>
+        </p:spPr>
+      </p:pic>
+      <p:sp>
+        <p:nvSpPr>
+          <p:cNvPr id="11" name="Text 8"/>
+          <p:cNvSpPr/>
+          <p:nvPr/>
+        </p:nvSpPr>
+        <p:spPr>
+          <a:xfrm>
+            <a:off x="970080" y="3780000"/>
+            <a:ext cx="2814720" cy="420000"/>
+          </a:xfrm>
+          <a:prstGeom prst="rect">
+            <a:avLst/>
+          </a:prstGeom>
+          <a:noFill/>
+          <a:ln/>
+        </p:spPr>
+        <p:txBody>
+          <a:bodyPr wrap="square" lIns="0" tIns="0" rIns="0" bIns="0" rtlCol="0" anchor="t"/>
+          <a:lstStyle/>
+          <a:p>
+            <a:pPr marL="0" indent="0">
+              <a:buNone/>
+            </a:pPr>
+            <a:r>
+              <a:rPr lang="en-US" sz="1700" b="1" dirty="0">
+                <a:solidFill>
+                  <a:srgbClr val="111418"/>
+                </a:solidFill>
+                <a:latin typeface="Calibri" pitchFamily="34" charset="0"/>
+                <a:ea typeface="Calibri" pitchFamily="34" charset="-122"/>
+                <a:cs typeface="Calibri" pitchFamily="34" charset="-120"/>
+              </a:rPr>
+              <a:t>Массовый сегмент</a:t>
+            </a:r>
+            <a:endParaRPr lang="en-US" sz="1700" dirty="0"/>
+          </a:p>
+        </p:txBody>
+      </p:sp>
+      <p:sp>
+        <p:nvSpPr>
+          <p:cNvPr id="12" name="Text 9"/>
+          <p:cNvSpPr/>
+          <p:nvPr/>
+        </p:nvSpPr>
+        <p:spPr>
+          <a:xfrm>
+            <a:off x="970080" y="4320000"/>
+            <a:ext cx="2814720" cy="560000"/>
+          </a:xfrm>
+          <a:prstGeom prst="rect">
+            <a:avLst/>
+          </a:prstGeom>
+          <a:noFill/>
+          <a:ln/>
+        </p:spPr>
+        <p:txBody>
+          <a:bodyPr wrap="square" lIns="0" tIns="0" rIns="0" bIns="0" rtlCol="0" anchor="t"/>
+          <a:lstStyle/>
+          <a:p>
+            <a:pPr marL="0" indent="0">
+              <a:lnSpc>
+                <a:spcPct val="104000"/>
+              </a:lnSpc>
+              <a:buNone/>
+            </a:pPr>
+            <a:r>
+              <a:rPr lang="ru-RU" sz="1300" dirty="0">
+                <a:solidFill>
+                  <a:srgbClr val="33383F"/>
+                </a:solidFill>
+                <a:latin typeface="Calibri" pitchFamily="34" charset="0"/>
+                <a:ea typeface="Calibri" pitchFamily="34" charset="-122"/>
+                <a:cs typeface="Calibri" pitchFamily="34" charset="-120"/>
+              </a:rPr>
+              <a:t>У инди </a:t>
+            </a:r>
+            <a:r>
+              <a:rPr lang="en-US" sz="1300" dirty="0" err="1">
+                <a:solidFill>
+                  <a:srgbClr val="33383F"/>
+                </a:solidFill>
+                <a:latin typeface="Calibri" pitchFamily="34" charset="0"/>
+                <a:ea typeface="Calibri" pitchFamily="34" charset="-122"/>
+                <a:cs typeface="Calibri" pitchFamily="34" charset="-120"/>
+              </a:rPr>
+              <a:t>тысячи</a:t>
+            </a:r>
+            <a:r>
+              <a:rPr lang="en-US" sz="1300" dirty="0">
+                <a:solidFill>
+                  <a:srgbClr val="33383F"/>
+                </a:solidFill>
+                <a:latin typeface="Calibri" pitchFamily="34" charset="0"/>
+                <a:ea typeface="Calibri" pitchFamily="34" charset="-122"/>
+                <a:cs typeface="Calibri" pitchFamily="34" charset="-120"/>
+              </a:rPr>
+              <a:t> релизов в </a:t>
+            </a:r>
+            <a:r>
+              <a:rPr lang="en-US" sz="1300" dirty="0" err="1">
+                <a:solidFill>
+                  <a:srgbClr val="33383F"/>
+                </a:solidFill>
+                <a:latin typeface="Calibri" pitchFamily="34" charset="0"/>
+                <a:ea typeface="Calibri" pitchFamily="34" charset="-122"/>
+                <a:cs typeface="Calibri" pitchFamily="34" charset="-120"/>
+              </a:rPr>
+              <a:t>год</a:t>
+            </a:r>
+            <a:r>
+              <a:rPr lang="ru-RU" sz="1300" dirty="0">
+                <a:solidFill>
+                  <a:srgbClr val="33383F"/>
+                </a:solidFill>
+                <a:latin typeface="Calibri" pitchFamily="34" charset="0"/>
+                <a:ea typeface="Calibri" pitchFamily="34" charset="-122"/>
+                <a:cs typeface="Calibri" pitchFamily="34" charset="-120"/>
+              </a:rPr>
+              <a:t>, это</a:t>
+            </a:r>
+            <a:r>
+              <a:rPr lang="en-US" sz="1300" dirty="0">
+                <a:solidFill>
+                  <a:srgbClr val="33383F"/>
+                </a:solidFill>
+                <a:latin typeface="Calibri" pitchFamily="34" charset="0"/>
+                <a:ea typeface="Calibri" pitchFamily="34" charset="-122"/>
+                <a:cs typeface="Calibri" pitchFamily="34" charset="-120"/>
+              </a:rPr>
+              <a:t> заметная часть рынка</a:t>
+            </a:r>
+            <a:endParaRPr lang="en-US" sz="1300" dirty="0"/>
+          </a:p>
+        </p:txBody>
+      </p:sp>
+      <p:sp>
+        <p:nvSpPr>
+          <p:cNvPr id="13" name="Shape 10"/>
+          <p:cNvSpPr/>
+          <p:nvPr/>
+        </p:nvSpPr>
+        <p:spPr>
+          <a:xfrm>
+            <a:off x="4352544" y="2150000"/>
+            <a:ext cx="3474720" cy="3150000"/>
+          </a:xfrm>
+          <a:prstGeom prst="roundRect">
+            <a:avLst>
+              <a:gd name="adj" fmla="val 4500"/>
+            </a:avLst>
+          </a:prstGeom>
+          <a:solidFill>
+            <a:srgbClr val="F4FAFD"/>
+          </a:solidFill>
+          <a:ln w="12700">
+            <a:solidFill>
+              <a:srgbClr val="DCE6EC"/>
+            </a:solidFill>
+            <a:prstDash val="solid"/>
+          </a:ln>
+          <a:effectLst>
+            <a:outerShdw blurRad="88900" dist="25400" dir="5400000" algn="bl" rotWithShape="0">
+              <a:srgbClr val="B8C9D4">
+                <a:alpha val="22000"/>
+              </a:srgbClr>
+            </a:outerShdw>
+          </a:effectLst>
+        </p:spPr>
+      </p:sp>
+      <p:sp>
+        <p:nvSpPr>
+          <p:cNvPr id="14" name="Shape 11"/>
+          <p:cNvSpPr/>
+          <p:nvPr/>
+        </p:nvSpPr>
+        <p:spPr>
+          <a:xfrm>
+            <a:off x="4682544" y="2530000"/>
+            <a:ext cx="700000" cy="700000"/>
+          </a:xfrm>
+          <a:prstGeom prst="ellipse">
+            <a:avLst/>
+          </a:prstGeom>
+          <a:solidFill>
+            <a:srgbClr val="1F9BD8"/>
+          </a:solidFill>
+          <a:ln/>
+          <a:effectLst>
+            <a:outerShdw blurRad="88900" dist="25400" dir="5400000" algn="bl" rotWithShape="0">
+              <a:srgbClr val="B8C9D4">
+                <a:alpha val="22000"/>
+              </a:srgbClr>
+            </a:outerShdw>
+          </a:effectLst>
+        </p:spPr>
+      </p:sp>
+      <p:pic>
+        <p:nvPicPr>
+          <p:cNvPr id="15" name="Image 1" descr="icons/users.png"/>
+          <p:cNvPicPr>
+            <a:picLocks noChangeAspect="1"/>
+          </p:cNvPicPr>
+          <p:nvPr/>
+        </p:nvPicPr>
+        <p:blipFill>
+          <a:blip r:embed="rId4"/>
+          <a:stretch>
+            <a:fillRect/>
+          </a:stretch>
+        </p:blipFill>
+        <p:spPr>
+          <a:xfrm>
+            <a:off x="4892544" y="2740000"/>
+            <a:ext cx="300000" cy="300000"/>
+          </a:xfrm>
+          <a:prstGeom prst="rect">
+            <a:avLst/>
+          </a:prstGeom>
+        </p:spPr>
+      </p:pic>
+      <p:sp>
+        <p:nvSpPr>
+          <p:cNvPr id="16" name="Text 12"/>
+          <p:cNvSpPr/>
+          <p:nvPr/>
+        </p:nvSpPr>
+        <p:spPr>
+          <a:xfrm>
+            <a:off x="4682544" y="3780000"/>
+            <a:ext cx="2814720" cy="420000"/>
+          </a:xfrm>
+          <a:prstGeom prst="rect">
+            <a:avLst/>
+          </a:prstGeom>
+          <a:noFill/>
+          <a:ln/>
+        </p:spPr>
+        <p:txBody>
+          <a:bodyPr wrap="square" lIns="0" tIns="0" rIns="0" bIns="0" rtlCol="0" anchor="t"/>
+          <a:lstStyle/>
+          <a:p>
+            <a:pPr marL="0" indent="0">
+              <a:buNone/>
+            </a:pPr>
+            <a:r>
+              <a:rPr lang="en-US" sz="1700" b="1" dirty="0">
+                <a:solidFill>
+                  <a:srgbClr val="111418"/>
+                </a:solidFill>
+                <a:latin typeface="Calibri" pitchFamily="34" charset="0"/>
+                <a:ea typeface="Calibri" pitchFamily="34" charset="-122"/>
+                <a:cs typeface="Calibri" pitchFamily="34" charset="-120"/>
+              </a:rPr>
+              <a:t>Нет своей аналитики</a:t>
+            </a:r>
+            <a:endParaRPr lang="en-US" sz="1700" dirty="0"/>
+          </a:p>
+        </p:txBody>
+      </p:sp>
+      <p:sp>
+        <p:nvSpPr>
+          <p:cNvPr id="17" name="Text 13"/>
+          <p:cNvSpPr/>
+          <p:nvPr/>
+        </p:nvSpPr>
+        <p:spPr>
+          <a:xfrm>
+            <a:off x="4682544" y="4320000"/>
+            <a:ext cx="2814720" cy="560000"/>
+          </a:xfrm>
+          <a:prstGeom prst="rect">
+            <a:avLst/>
+          </a:prstGeom>
+          <a:noFill/>
+          <a:ln/>
+        </p:spPr>
+        <p:txBody>
+          <a:bodyPr wrap="square" lIns="0" tIns="0" rIns="0" bIns="0" rtlCol="0" anchor="t"/>
+          <a:lstStyle/>
+          <a:p>
+            <a:pPr marL="0" indent="0">
+              <a:lnSpc>
+                <a:spcPct val="104000"/>
+              </a:lnSpc>
+              <a:buNone/>
+            </a:pPr>
+            <a:r>
+              <a:rPr lang="en-US" sz="1300" dirty="0">
+                <a:solidFill>
+                  <a:srgbClr val="33383F"/>
+                </a:solidFill>
+                <a:latin typeface="Calibri" pitchFamily="34" charset="0"/>
+                <a:ea typeface="Calibri" pitchFamily="34" charset="-122"/>
+                <a:cs typeface="Calibri" pitchFamily="34" charset="-120"/>
+              </a:rPr>
+              <a:t>у малых команд нет ресурсов на data-инфраструктуру</a:t>
+            </a:r>
+            <a:endParaRPr lang="en-US" sz="1300" dirty="0"/>
+          </a:p>
+        </p:txBody>
+      </p:sp>
+      <p:sp>
+        <p:nvSpPr>
+          <p:cNvPr id="18" name="Shape 14"/>
+          <p:cNvSpPr/>
+          <p:nvPr/>
+        </p:nvSpPr>
+        <p:spPr>
+          <a:xfrm>
+            <a:off x="8065008" y="2150000"/>
+            <a:ext cx="3474720" cy="3150000"/>
+          </a:xfrm>
+          <a:prstGeom prst="roundRect">
+            <a:avLst>
+              <a:gd name="adj" fmla="val 4500"/>
+            </a:avLst>
+          </a:prstGeom>
+          <a:solidFill>
+            <a:srgbClr val="F4FAFD"/>
+          </a:solidFill>
+          <a:ln w="12700">
+            <a:solidFill>
+              <a:srgbClr val="DCE6EC"/>
+            </a:solidFill>
+            <a:prstDash val="solid"/>
+          </a:ln>
+          <a:effectLst>
+            <a:outerShdw blurRad="88900" dist="25400" dir="5400000" algn="bl" rotWithShape="0">
+              <a:srgbClr val="B8C9D4">
+                <a:alpha val="22000"/>
+              </a:srgbClr>
+            </a:outerShdw>
+          </a:effectLst>
+        </p:spPr>
+      </p:sp>
+      <p:sp>
+        <p:nvSpPr>
+          <p:cNvPr id="19" name="Shape 15"/>
+          <p:cNvSpPr/>
+          <p:nvPr/>
+        </p:nvSpPr>
+        <p:spPr>
+          <a:xfrm>
+            <a:off x="8395008" y="2530000"/>
+            <a:ext cx="700000" cy="700000"/>
+          </a:xfrm>
+          <a:prstGeom prst="ellipse">
+            <a:avLst/>
+          </a:prstGeom>
+          <a:solidFill>
+            <a:srgbClr val="1F9BD8"/>
+          </a:solidFill>
+          <a:ln/>
+          <a:effectLst>
+            <a:outerShdw blurRad="88900" dist="25400" dir="5400000" algn="bl" rotWithShape="0">
+              <a:srgbClr val="B8C9D4">
+                <a:alpha val="22000"/>
+              </a:srgbClr>
+            </a:outerShdw>
+          </a:effectLst>
+        </p:spPr>
+      </p:sp>
+      <p:pic>
+        <p:nvPicPr>
+          <p:cNvPr id="20" name="Image 2" descr="icons/sliders.png"/>
+          <p:cNvPicPr>
+            <a:picLocks noChangeAspect="1"/>
+          </p:cNvPicPr>
+          <p:nvPr/>
+        </p:nvPicPr>
+        <p:blipFill>
+          <a:blip r:embed="rId5"/>
+          <a:stretch>
+            <a:fillRect/>
+          </a:stretch>
+        </p:blipFill>
+        <p:spPr>
+          <a:xfrm>
+            <a:off x="8605008" y="2740000"/>
+            <a:ext cx="300000" cy="300000"/>
+          </a:xfrm>
+          <a:prstGeom prst="rect">
+            <a:avLst/>
+          </a:prstGeom>
+        </p:spPr>
+      </p:pic>
+      <p:sp>
+        <p:nvSpPr>
+          <p:cNvPr id="21" name="Text 16"/>
+          <p:cNvSpPr/>
+          <p:nvPr/>
+        </p:nvSpPr>
+        <p:spPr>
+          <a:xfrm>
+            <a:off x="8395008" y="3780000"/>
+            <a:ext cx="2814720" cy="420000"/>
+          </a:xfrm>
+          <a:prstGeom prst="rect">
+            <a:avLst/>
+          </a:prstGeom>
+          <a:noFill/>
+          <a:ln/>
+        </p:spPr>
+        <p:txBody>
+          <a:bodyPr wrap="square" lIns="0" tIns="0" rIns="0" bIns="0" rtlCol="0" anchor="t"/>
+          <a:lstStyle/>
+          <a:p>
+            <a:pPr marL="0" indent="0">
+              <a:buNone/>
+            </a:pPr>
+            <a:r>
+              <a:rPr lang="en-US" sz="1700" b="1" dirty="0">
+                <a:solidFill>
+                  <a:srgbClr val="111418"/>
+                </a:solidFill>
+                <a:latin typeface="Calibri" pitchFamily="34" charset="0"/>
+                <a:ea typeface="Calibri" pitchFamily="34" charset="-122"/>
+                <a:cs typeface="Calibri" pitchFamily="34" charset="-120"/>
+              </a:rPr>
+              <a:t>Ручной баланс</a:t>
+            </a:r>
+            <a:endParaRPr lang="en-US" sz="1700" dirty="0"/>
+          </a:p>
+        </p:txBody>
+      </p:sp>
+      <p:sp>
+        <p:nvSpPr>
+          <p:cNvPr id="22" name="Text 17"/>
+          <p:cNvSpPr/>
+          <p:nvPr/>
+        </p:nvSpPr>
+        <p:spPr>
+          <a:xfrm>
+            <a:off x="8395008" y="4320000"/>
+            <a:ext cx="2814720" cy="560000"/>
+          </a:xfrm>
+          <a:prstGeom prst="rect">
+            <a:avLst/>
+          </a:prstGeom>
+          <a:noFill/>
+          <a:ln/>
+        </p:spPr>
+        <p:txBody>
+          <a:bodyPr wrap="square" lIns="0" tIns="0" rIns="0" bIns="0" rtlCol="0" anchor="t"/>
+          <a:lstStyle/>
+          <a:p>
+            <a:pPr marL="0" indent="0">
+              <a:lnSpc>
+                <a:spcPct val="104000"/>
+              </a:lnSpc>
+              <a:buNone/>
+            </a:pPr>
+            <a:r>
+              <a:rPr lang="en-US" sz="1300" dirty="0">
+                <a:solidFill>
+                  <a:srgbClr val="33383F"/>
+                </a:solidFill>
+                <a:latin typeface="Calibri" pitchFamily="34" charset="0"/>
+                <a:ea typeface="Calibri" pitchFamily="34" charset="-122"/>
+                <a:cs typeface="Calibri" pitchFamily="34" charset="-120"/>
+              </a:rPr>
+              <a:t>сложность настраивается «на глаз», одинаково для всех</a:t>
+            </a:r>
+            <a:endParaRPr lang="en-US" sz="1300" dirty="0"/>
+          </a:p>
+        </p:txBody>
+      </p:sp>
+    </p:spTree>
+  </p:cSld>
+  <p:clrMapOvr>
+    <a:masterClrMapping/>
+  </p:clrMapOvr>
+</p:sld>
+</file>
+
+<file path=ppt/slides/slide3.xml><?xml version="1.0" encoding="utf-8"?>
 <p:sld xmlns:a="http://schemas.openxmlformats.org/drawingml/2006/main" xmlns:r="http://schemas.openxmlformats.org/officeDocument/2006/relationships" xmlns:p="http://schemas.openxmlformats.org/presentationml/2006/main">
   <p:cSld>
     <p:bg>
@@ -3246,11 +4512,11 @@
           <a:bodyPr wrap="square" lIns="0" tIns="0" rIns="0" bIns="0" rtlCol="0" anchor="ctr"/>
           <a:lstStyle/>
           <a:p>
-            <a:pPr algn="l" indent="0" marL="0">
-              <a:buNone/>
-            </a:pPr>
-            <a:r>
-              <a:rPr lang="ru-RU" sz="1500" b="1" spc="250" kern="0" dirty="0">
+            <a:pPr marL="0" indent="0" algn="l">
+              <a:buNone/>
+            </a:pPr>
+            <a:r>
+              <a:rPr lang="ru-RU" sz="2000" b="1" kern="0" spc="250" dirty="0">
                 <a:solidFill>
                   <a:srgbClr val="1F9BD8"/>
                 </a:solidFill>
@@ -3284,7 +4550,7 @@
           <a:bodyPr wrap="square" lIns="0" tIns="0" rIns="0" bIns="0" rtlCol="0" anchor="ctr"/>
           <a:lstStyle/>
           <a:p>
-            <a:pPr algn="l" indent="0" marL="0">
+            <a:pPr marL="0" indent="0" algn="l">
               <a:buNone/>
             </a:pPr>
             <a:r>
@@ -3322,7 +4588,7 @@
           <a:bodyPr wrap="square" lIns="0" tIns="0" rIns="0" bIns="0" rtlCol="0" anchor="ctr"/>
           <a:lstStyle/>
           <a:p>
-            <a:pPr algn="r" indent="0" marL="0">
+            <a:pPr marL="0" indent="0" algn="r">
               <a:buNone/>
             </a:pPr>
             <a:r>
@@ -3347,8 +4613,8 @@
         </p:nvSpPr>
         <p:spPr>
           <a:xfrm>
-            <a:off x="3360000" y="1560000"/>
-            <a:ext cx="8260000" cy="3760000"/>
+            <a:off x="3768949" y="1855844"/>
+            <a:ext cx="6433945" cy="4088402"/>
           </a:xfrm>
           <a:prstGeom prst="roundRect">
             <a:avLst>
@@ -3374,7 +4640,7 @@
         </p:nvSpPr>
         <p:spPr>
           <a:xfrm>
-            <a:off x="3560000" y="1700000"/>
+            <a:off x="3945894" y="2006844"/>
             <a:ext cx="3000000" cy="260000"/>
           </a:xfrm>
           <a:prstGeom prst="rect">
@@ -3387,11 +4653,11 @@
           <a:bodyPr wrap="square" lIns="0" tIns="0" rIns="0" bIns="0" rtlCol="0" anchor="ctr"/>
           <a:lstStyle/>
           <a:p>
-            <a:pPr algn="l" indent="0" marL="0">
-              <a:buNone/>
-            </a:pPr>
-            <a:r>
-              <a:rPr lang="ru-RU" sz="1150" b="1" spc="200" kern="0" dirty="0">
+            <a:pPr marL="0" indent="0" algn="l">
+              <a:buNone/>
+            </a:pPr>
+            <a:r>
+              <a:rPr lang="ru-RU" sz="1150" b="1" kern="0" spc="200" dirty="0">
                 <a:solidFill>
                   <a:srgbClr val="1F9BD8"/>
                 </a:solidFill>
@@ -3412,7 +4678,7 @@
         </p:nvCxnSpPr>
         <p:spPr>
           <a:xfrm>
-            <a:off x="2200000" y="3330000"/>
+            <a:off x="2585894" y="3636844"/>
             <a:ext cx="2050000" cy="0"/>
           </a:xfrm>
           <a:prstGeom prst="straightConnector1">
@@ -3434,7 +4700,7 @@
         </p:nvCxnSpPr>
         <p:spPr>
           <a:xfrm flipH="1">
-            <a:off x="2200000" y="3520000"/>
+            <a:off x="2585894" y="3826844"/>
             <a:ext cx="2050000" cy="0"/>
           </a:xfrm>
           <a:prstGeom prst="straightConnector1">
@@ -3456,7 +4722,7 @@
         </p:nvCxnSpPr>
         <p:spPr>
           <a:xfrm flipV="1">
-            <a:off x="5150000" y="2670000"/>
+            <a:off x="5535894" y="2976844"/>
             <a:ext cx="2480000" cy="540000"/>
           </a:xfrm>
           <a:prstGeom prst="straightConnector1">
@@ -3478,7 +4744,7 @@
         </p:nvCxnSpPr>
         <p:spPr>
           <a:xfrm flipH="1">
-            <a:off x="5150000" y="2850000"/>
+            <a:off x="5535894" y="3156844"/>
             <a:ext cx="2480000" cy="540000"/>
           </a:xfrm>
           <a:prstGeom prst="straightConnector1">
@@ -3500,7 +4766,7 @@
         </p:nvCxnSpPr>
         <p:spPr>
           <a:xfrm>
-            <a:off x="5150000" y="3450000"/>
+            <a:off x="5535894" y="3756844"/>
             <a:ext cx="2480000" cy="840000"/>
           </a:xfrm>
           <a:prstGeom prst="straightConnector1">
@@ -3522,7 +4788,7 @@
         </p:nvCxnSpPr>
         <p:spPr>
           <a:xfrm flipH="1" flipV="1">
-            <a:off x="5150000" y="3630000"/>
+            <a:off x="5535894" y="3936844"/>
             <a:ext cx="2480000" cy="840000"/>
           </a:xfrm>
           <a:prstGeom prst="straightConnector1">
@@ -3544,7 +4810,7 @@
         </p:nvSpPr>
         <p:spPr>
           <a:xfrm>
-            <a:off x="1490000" y="3120000"/>
+            <a:off x="1875894" y="3426844"/>
             <a:ext cx="660000" cy="430000"/>
           </a:xfrm>
           <a:prstGeom prst="roundRect">
@@ -3566,7 +4832,7 @@
         </p:nvSpPr>
         <p:spPr>
           <a:xfrm>
-            <a:off x="1558000" y="3188000"/>
+            <a:off x="1943894" y="3494844"/>
             <a:ext cx="524000" cy="294000"/>
           </a:xfrm>
           <a:prstGeom prst="roundRect">
@@ -3588,7 +4854,7 @@
         </p:nvSpPr>
         <p:spPr>
           <a:xfrm>
-            <a:off x="1774000" y="3550000"/>
+            <a:off x="2159894" y="3856844"/>
             <a:ext cx="92000" cy="96000"/>
           </a:xfrm>
           <a:prstGeom prst="roundRect">
@@ -3610,7 +4876,7 @@
         </p:nvSpPr>
         <p:spPr>
           <a:xfrm>
-            <a:off x="1655000" y="3632000"/>
+            <a:off x="2040894" y="3938844"/>
             <a:ext cx="330000" cy="66000"/>
           </a:xfrm>
           <a:prstGeom prst="roundRect">
@@ -3633,14 +4899,14 @@
           <p:nvPr/>
         </p:nvPicPr>
         <p:blipFill>
-          <a:blip r:embed="rId20"/>
+          <a:blip r:embed="rId2"/>
           <a:stretch>
             <a:fillRect/>
           </a:stretch>
         </p:blipFill>
         <p:spPr>
           <a:xfrm>
-            <a:off x="4250000" y="2990000"/>
+            <a:off x="4635894" y="3296844"/>
             <a:ext cx="860000" cy="860000"/>
           </a:xfrm>
           <a:prstGeom prst="rect">
@@ -3656,7 +4922,7 @@
         </p:nvCxnSpPr>
         <p:spPr>
           <a:xfrm>
-            <a:off x="7760000" y="2430000"/>
+            <a:off x="8145894" y="2736844"/>
             <a:ext cx="300000" cy="0"/>
           </a:xfrm>
           <a:prstGeom prst="straightConnector1">
@@ -3677,7 +4943,7 @@
         </p:nvCxnSpPr>
         <p:spPr>
           <a:xfrm>
-            <a:off x="7760000" y="2430000"/>
+            <a:off x="8145894" y="2736844"/>
             <a:ext cx="300000" cy="250000"/>
           </a:xfrm>
           <a:prstGeom prst="straightConnector1">
@@ -3698,7 +4964,7 @@
         </p:nvCxnSpPr>
         <p:spPr>
           <a:xfrm>
-            <a:off x="7760000" y="2430000"/>
+            <a:off x="8145894" y="2736844"/>
             <a:ext cx="300000" cy="500000"/>
           </a:xfrm>
           <a:prstGeom prst="straightConnector1">
@@ -3719,7 +4985,7 @@
         </p:nvCxnSpPr>
         <p:spPr>
           <a:xfrm flipV="1">
-            <a:off x="7760000" y="2430000"/>
+            <a:off x="8145894" y="2736844"/>
             <a:ext cx="300000" cy="250000"/>
           </a:xfrm>
           <a:prstGeom prst="straightConnector1">
@@ -3740,7 +5006,7 @@
         </p:nvCxnSpPr>
         <p:spPr>
           <a:xfrm>
-            <a:off x="7760000" y="2680000"/>
+            <a:off x="8145894" y="2986844"/>
             <a:ext cx="300000" cy="0"/>
           </a:xfrm>
           <a:prstGeom prst="straightConnector1">
@@ -3761,7 +5027,7 @@
         </p:nvCxnSpPr>
         <p:spPr>
           <a:xfrm>
-            <a:off x="7760000" y="2680000"/>
+            <a:off x="8145894" y="2986844"/>
             <a:ext cx="300000" cy="250000"/>
           </a:xfrm>
           <a:prstGeom prst="straightConnector1">
@@ -3782,7 +5048,7 @@
         </p:nvCxnSpPr>
         <p:spPr>
           <a:xfrm flipV="1">
-            <a:off x="7760000" y="2430000"/>
+            <a:off x="8145894" y="2736844"/>
             <a:ext cx="300000" cy="500000"/>
           </a:xfrm>
           <a:prstGeom prst="straightConnector1">
@@ -3803,7 +5069,7 @@
         </p:nvCxnSpPr>
         <p:spPr>
           <a:xfrm flipV="1">
-            <a:off x="7760000" y="2680000"/>
+            <a:off x="8145894" y="2986844"/>
             <a:ext cx="300000" cy="250000"/>
           </a:xfrm>
           <a:prstGeom prst="straightConnector1">
@@ -3824,7 +5090,7 @@
         </p:nvCxnSpPr>
         <p:spPr>
           <a:xfrm>
-            <a:off x="7760000" y="2930000"/>
+            <a:off x="8145894" y="3236844"/>
             <a:ext cx="300000" cy="0"/>
           </a:xfrm>
           <a:prstGeom prst="straightConnector1">
@@ -3845,7 +5111,7 @@
         </p:nvCxnSpPr>
         <p:spPr>
           <a:xfrm>
-            <a:off x="8060000" y="2430000"/>
+            <a:off x="8445894" y="2736844"/>
             <a:ext cx="300000" cy="110000"/>
           </a:xfrm>
           <a:prstGeom prst="straightConnector1">
@@ -3866,7 +5132,7 @@
         </p:nvCxnSpPr>
         <p:spPr>
           <a:xfrm>
-            <a:off x="8060000" y="2430000"/>
+            <a:off x="8445894" y="2736844"/>
             <a:ext cx="300000" cy="390000"/>
           </a:xfrm>
           <a:prstGeom prst="straightConnector1">
@@ -3887,7 +5153,7 @@
         </p:nvCxnSpPr>
         <p:spPr>
           <a:xfrm flipV="1">
-            <a:off x="8060000" y="2540000"/>
+            <a:off x="8445894" y="2846844"/>
             <a:ext cx="300000" cy="140000"/>
           </a:xfrm>
           <a:prstGeom prst="straightConnector1">
@@ -3908,7 +5174,7 @@
         </p:nvCxnSpPr>
         <p:spPr>
           <a:xfrm>
-            <a:off x="8060000" y="2680000"/>
+            <a:off x="8445894" y="2986844"/>
             <a:ext cx="300000" cy="140000"/>
           </a:xfrm>
           <a:prstGeom prst="straightConnector1">
@@ -3929,7 +5195,7 @@
         </p:nvCxnSpPr>
         <p:spPr>
           <a:xfrm flipV="1">
-            <a:off x="8060000" y="2540000"/>
+            <a:off x="8445894" y="2846844"/>
             <a:ext cx="300000" cy="390000"/>
           </a:xfrm>
           <a:prstGeom prst="straightConnector1">
@@ -3950,7 +5216,7 @@
         </p:nvCxnSpPr>
         <p:spPr>
           <a:xfrm flipV="1">
-            <a:off x="8060000" y="2820000"/>
+            <a:off x="8445894" y="3126844"/>
             <a:ext cx="300000" cy="110000"/>
           </a:xfrm>
           <a:prstGeom prst="straightConnector1">
@@ -3971,7 +5237,7 @@
         </p:nvSpPr>
         <p:spPr>
           <a:xfrm>
-            <a:off x="7700000" y="2370000"/>
+            <a:off x="8085894" y="2676844"/>
             <a:ext cx="120000" cy="120000"/>
           </a:xfrm>
           <a:prstGeom prst="ellipse">
@@ -3991,7 +5257,7 @@
         </p:nvSpPr>
         <p:spPr>
           <a:xfrm>
-            <a:off x="7700000" y="2620000"/>
+            <a:off x="8085894" y="2926844"/>
             <a:ext cx="120000" cy="120000"/>
           </a:xfrm>
           <a:prstGeom prst="ellipse">
@@ -4011,7 +5277,7 @@
         </p:nvSpPr>
         <p:spPr>
           <a:xfrm>
-            <a:off x="7700000" y="2870000"/>
+            <a:off x="8085894" y="3176844"/>
             <a:ext cx="120000" cy="120000"/>
           </a:xfrm>
           <a:prstGeom prst="ellipse">
@@ -4031,7 +5297,7 @@
         </p:nvSpPr>
         <p:spPr>
           <a:xfrm>
-            <a:off x="8000000" y="2370000"/>
+            <a:off x="8385894" y="2676844"/>
             <a:ext cx="120000" cy="120000"/>
           </a:xfrm>
           <a:prstGeom prst="ellipse">
@@ -4051,7 +5317,7 @@
         </p:nvSpPr>
         <p:spPr>
           <a:xfrm>
-            <a:off x="8000000" y="2620000"/>
+            <a:off x="8385894" y="2926844"/>
             <a:ext cx="120000" cy="120000"/>
           </a:xfrm>
           <a:prstGeom prst="ellipse">
@@ -4071,7 +5337,7 @@
         </p:nvSpPr>
         <p:spPr>
           <a:xfrm>
-            <a:off x="8000000" y="2870000"/>
+            <a:off x="8385894" y="3176844"/>
             <a:ext cx="120000" cy="120000"/>
           </a:xfrm>
           <a:prstGeom prst="ellipse">
@@ -4091,7 +5357,7 @@
         </p:nvSpPr>
         <p:spPr>
           <a:xfrm>
-            <a:off x="8300000" y="2480000"/>
+            <a:off x="8685894" y="2786844"/>
             <a:ext cx="120000" cy="120000"/>
           </a:xfrm>
           <a:prstGeom prst="ellipse">
@@ -4111,7 +5377,7 @@
         </p:nvSpPr>
         <p:spPr>
           <a:xfrm>
-            <a:off x="8300000" y="2760000"/>
+            <a:off x="8685894" y="3066844"/>
             <a:ext cx="120000" cy="120000"/>
           </a:xfrm>
           <a:prstGeom prst="ellipse">
@@ -4132,14 +5398,14 @@
           <p:nvPr/>
         </p:nvPicPr>
         <p:blipFill>
-          <a:blip r:embed="rId9"/>
+          <a:blip r:embed="rId3"/>
           <a:stretch>
             <a:fillRect/>
           </a:stretch>
         </p:blipFill>
         <p:spPr>
           <a:xfrm>
-            <a:off x="7630000" y="4090000"/>
+            <a:off x="8015894" y="4396844"/>
             <a:ext cx="860000" cy="860000"/>
           </a:xfrm>
           <a:prstGeom prst="rect">
@@ -4155,7 +5421,7 @@
         </p:nvSpPr>
         <p:spPr>
           <a:xfrm>
-            <a:off x="420000" y="2700000"/>
+            <a:off x="805894" y="3006844"/>
             <a:ext cx="2800000" cy="360000"/>
           </a:xfrm>
           <a:prstGeom prst="rect">
@@ -4168,7 +5434,7 @@
           <a:bodyPr wrap="square" lIns="0" tIns="0" rIns="0" bIns="0" rtlCol="0" anchor="ctr"/>
           <a:lstStyle/>
           <a:p>
-            <a:pPr algn="ctr" indent="0" marL="0">
+            <a:pPr marL="0" indent="0" algn="ctr">
               <a:buNone/>
             </a:pPr>
             <a:r>
@@ -4193,7 +5459,7 @@
         </p:nvSpPr>
         <p:spPr>
           <a:xfrm>
-            <a:off x="3280000" y="2700000"/>
+            <a:off x="3665894" y="3006844"/>
             <a:ext cx="2800000" cy="360000"/>
           </a:xfrm>
           <a:prstGeom prst="rect">
@@ -4206,7 +5472,7 @@
           <a:bodyPr wrap="square" lIns="0" tIns="0" rIns="0" bIns="0" rtlCol="0" anchor="ctr"/>
           <a:lstStyle/>
           <a:p>
-            <a:pPr algn="ctr" indent="0" marL="0">
+            <a:pPr marL="0" indent="0" algn="ctr">
               <a:buNone/>
             </a:pPr>
             <a:r>
@@ -4231,7 +5497,7 @@
         </p:nvSpPr>
         <p:spPr>
           <a:xfrm>
-            <a:off x="6660000" y="1960000"/>
+            <a:off x="7045894" y="2266844"/>
             <a:ext cx="2800000" cy="360000"/>
           </a:xfrm>
           <a:prstGeom prst="rect">
@@ -4244,7 +5510,7 @@
           <a:bodyPr wrap="square" lIns="0" tIns="0" rIns="0" bIns="0" rtlCol="0" anchor="ctr"/>
           <a:lstStyle/>
           <a:p>
-            <a:pPr algn="ctr" indent="0" marL="0">
+            <a:pPr marL="0" indent="0" algn="ctr">
               <a:buNone/>
             </a:pPr>
             <a:r>
@@ -4269,7 +5535,7 @@
         </p:nvSpPr>
         <p:spPr>
           <a:xfrm>
-            <a:off x="6660000" y="5040000"/>
+            <a:off x="7045894" y="5346844"/>
             <a:ext cx="2800000" cy="360000"/>
           </a:xfrm>
           <a:prstGeom prst="rect">
@@ -4282,7 +5548,7 @@
           <a:bodyPr wrap="square" lIns="0" tIns="0" rIns="0" bIns="0" rtlCol="0" anchor="ctr"/>
           <a:lstStyle/>
           <a:p>
-            <a:pPr algn="ctr" indent="0" marL="0">
+            <a:pPr marL="0" indent="0" algn="ctr">
               <a:buNone/>
             </a:pPr>
             <a:r>
@@ -4307,7 +5573,7 @@
         </p:nvSpPr>
         <p:spPr>
           <a:xfrm>
-            <a:off x="2375000" y="3030000"/>
+            <a:off x="2760894" y="3336844"/>
             <a:ext cx="1700000" cy="240000"/>
           </a:xfrm>
           <a:prstGeom prst="rect">
@@ -4320,7 +5586,7 @@
           <a:bodyPr wrap="square" lIns="0" tIns="0" rIns="0" bIns="0" rtlCol="0" anchor="ctr"/>
           <a:lstStyle/>
           <a:p>
-            <a:pPr algn="ctr" indent="0" marL="0">
+            <a:pPr marL="0" indent="0" algn="ctr">
               <a:buNone/>
             </a:pPr>
             <a:r>
@@ -4345,7 +5611,7 @@
         </p:nvSpPr>
         <p:spPr>
           <a:xfrm>
-            <a:off x="2225000" y="3610000"/>
+            <a:off x="2610894" y="3916844"/>
             <a:ext cx="2000000" cy="240000"/>
           </a:xfrm>
           <a:prstGeom prst="rect">
@@ -4358,7 +5624,7 @@
           <a:bodyPr wrap="square" lIns="0" tIns="0" rIns="0" bIns="0" rtlCol="0" anchor="ctr"/>
           <a:lstStyle/>
           <a:p>
-            <a:pPr algn="ctr" indent="0" marL="0">
+            <a:pPr marL="0" indent="0" algn="ctr">
               <a:buNone/>
             </a:pPr>
             <a:r>
@@ -4383,7 +5649,7 @@
         </p:nvSpPr>
         <p:spPr>
           <a:xfrm>
-            <a:off x="5900000" y="2640000"/>
+            <a:off x="6285894" y="2946844"/>
             <a:ext cx="1500000" cy="240000"/>
           </a:xfrm>
           <a:prstGeom prst="rect">
@@ -4396,7 +5662,7 @@
           <a:bodyPr wrap="square" lIns="0" tIns="0" rIns="0" bIns="0" rtlCol="0" anchor="ctr"/>
           <a:lstStyle/>
           <a:p>
-            <a:pPr algn="ctr" indent="0" marL="0">
+            <a:pPr marL="0" indent="0" algn="ctr">
               <a:buNone/>
             </a:pPr>
             <a:r>
@@ -4421,7 +5687,7 @@
         </p:nvSpPr>
         <p:spPr>
           <a:xfrm>
-            <a:off x="5900000" y="4360000"/>
+            <a:off x="6285894" y="4666844"/>
             <a:ext cx="1500000" cy="240000"/>
           </a:xfrm>
           <a:prstGeom prst="rect">
@@ -4434,7 +5700,7 @@
           <a:bodyPr wrap="square" lIns="0" tIns="0" rIns="0" bIns="0" rtlCol="0" anchor="ctr"/>
           <a:lstStyle/>
           <a:p>
-            <a:pPr algn="ctr" indent="0" marL="0">
+            <a:pPr marL="0" indent="0" algn="ctr">
               <a:buNone/>
             </a:pPr>
             <a:r>
@@ -4459,14 +5725,15 @@
 </p:sld>
 </file>
 
-<file path=ppt/slides/slide2.xml><?xml version="1.0" encoding="utf-8"?>
+<file path=ppt/slides/slide4.xml><?xml version="1.0" encoding="utf-8"?>
 <p:sld xmlns:a="http://schemas.openxmlformats.org/drawingml/2006/main" xmlns:r="http://schemas.openxmlformats.org/officeDocument/2006/relationships" xmlns:p="http://schemas.openxmlformats.org/presentationml/2006/main">
-  <p:cSld name="Slide 2">
+  <p:cSld name="Slide 3">
     <p:bg>
       <p:bgPr>
         <a:solidFill>
           <a:srgbClr val="FFFFFF"/>
         </a:solidFill>
+        <a:effectLst/>
       </p:bgPr>
     </p:bg>
     <p:spTree>
@@ -4504,7 +5771,7 @@
           <a:bodyPr wrap="square" lIns="0" tIns="0" rIns="0" bIns="0" rtlCol="0" anchor="ctr"/>
           <a:lstStyle/>
           <a:p>
-            <a:pPr algn="r" indent="0" marL="0">
+            <a:pPr marL="0" indent="0" algn="r">
               <a:buNone/>
             </a:pPr>
             <a:r>
@@ -4516,7 +5783,7 @@
                 <a:ea typeface="Cambria" pitchFamily="34" charset="-122"/>
                 <a:cs typeface="Cambria" pitchFamily="34" charset="-120"/>
               </a:rPr>
-              <a:t>2</a:t>
+              <a:t>4</a:t>
             </a:r>
             <a:endParaRPr lang="en-US" sz="3000" dirty="0"/>
           </a:p>
@@ -4543,11 +5810,11 @@
           <a:bodyPr wrap="square" lIns="0" tIns="0" rIns="0" bIns="0" rtlCol="0" anchor="ctr"/>
           <a:lstStyle/>
           <a:p>
-            <a:pPr indent="0" marL="0">
-              <a:buNone/>
-            </a:pPr>
-            <a:r>
-              <a:rPr lang="en-US" sz="1500" b="1" spc="250" kern="0" dirty="0">
+            <a:pPr marL="0" indent="0">
+              <a:buNone/>
+            </a:pPr>
+            <a:r>
+              <a:rPr lang="en-US" sz="2000" b="1" kern="0" spc="250" dirty="0">
                 <a:solidFill>
                   <a:srgbClr val="1F9BD8"/>
                 </a:solidFill>
@@ -4555,9 +5822,9 @@
                 <a:ea typeface="Calibri" pitchFamily="34" charset="-122"/>
                 <a:cs typeface="Calibri" pitchFamily="34" charset="-120"/>
               </a:rPr>
-              <a:t>АКТУАЛЬНОСТЬ</a:t>
-            </a:r>
-            <a:endParaRPr lang="en-US" sz="1500" dirty="0"/>
+              <a:t>ВЫБОР ДВИЖКА</a:t>
+            </a:r>
+            <a:endParaRPr lang="en-US" sz="2000" dirty="0"/>
           </a:p>
         </p:txBody>
       </p:sp>
@@ -4582,7 +5849,7 @@
           <a:bodyPr wrap="square" lIns="0" tIns="0" rIns="0" bIns="0" rtlCol="0" anchor="ctr"/>
           <a:lstStyle/>
           <a:p>
-            <a:pPr indent="0" marL="0">
+            <a:pPr marL="0" indent="0">
               <a:buNone/>
             </a:pPr>
             <a:r>
@@ -4594,7 +5861,7 @@
                 <a:ea typeface="Cambria" pitchFamily="34" charset="-122"/>
                 <a:cs typeface="Cambria" pitchFamily="34" charset="-120"/>
               </a:rPr>
-              <a:t>Независимая разработка игр</a:t>
+              <a:t>Преимущества Godot 4</a:t>
             </a:r>
             <a:endParaRPr lang="en-US" sz="3000" dirty="0"/>
           </a:p>
@@ -4602,22 +5869,256 @@
       </p:sp>
       <p:sp>
         <p:nvSpPr>
-          <p:cNvPr id="8" name="Shape 6"/>
-          <p:cNvSpPr/>
-          <p:nvPr/>
-        </p:nvSpPr>
-        <p:spPr>
-          <a:xfrm>
-            <a:off x="640080" y="2150000"/>
-            <a:ext cx="3474720" cy="3150000"/>
+          <p:cNvPr id="7" name="Text 5"/>
+          <p:cNvSpPr/>
+          <p:nvPr/>
+        </p:nvSpPr>
+        <p:spPr>
+          <a:xfrm>
+            <a:off x="1847088" y="1816636"/>
+            <a:ext cx="2743200" cy="868680"/>
+          </a:xfrm>
+          <a:prstGeom prst="rect">
+            <a:avLst/>
+          </a:prstGeom>
+          <a:noFill/>
+          <a:ln/>
+        </p:spPr>
+        <p:txBody>
+          <a:bodyPr wrap="square" lIns="0" tIns="0" rIns="0" bIns="0" rtlCol="0" anchor="ctr"/>
+          <a:lstStyle/>
+          <a:p>
+            <a:pPr marL="0" indent="0" algn="ctr">
+              <a:buNone/>
+            </a:pPr>
+            <a:r>
+              <a:rPr lang="en-US" sz="5000" b="1" dirty="0">
+                <a:solidFill>
+                  <a:srgbClr val="0E7FB8"/>
+                </a:solidFill>
+                <a:latin typeface="Cambria" pitchFamily="34" charset="0"/>
+                <a:ea typeface="Cambria" pitchFamily="34" charset="-122"/>
+                <a:cs typeface="Cambria" pitchFamily="34" charset="-120"/>
+              </a:rPr>
+              <a:t>100%</a:t>
+            </a:r>
+            <a:endParaRPr lang="en-US" sz="5000" dirty="0"/>
+          </a:p>
+        </p:txBody>
+      </p:sp>
+      <p:sp>
+        <p:nvSpPr>
+          <p:cNvPr id="8" name="Text 6"/>
+          <p:cNvSpPr/>
+          <p:nvPr/>
+        </p:nvSpPr>
+        <p:spPr>
+          <a:xfrm>
+            <a:off x="1847088" y="2685316"/>
+            <a:ext cx="2743200" cy="457200"/>
+          </a:xfrm>
+          <a:prstGeom prst="rect">
+            <a:avLst/>
+          </a:prstGeom>
+          <a:noFill/>
+          <a:ln/>
+        </p:spPr>
+        <p:txBody>
+          <a:bodyPr wrap="square" lIns="0" tIns="0" rIns="0" bIns="0" rtlCol="0" anchor="t"/>
+          <a:lstStyle/>
+          <a:p>
+            <a:pPr marL="0" indent="0" algn="ctr">
+              <a:buNone/>
+            </a:pPr>
+            <a:r>
+              <a:rPr lang="en-US" sz="1200" dirty="0">
+                <a:solidFill>
+                  <a:srgbClr val="6B7480"/>
+                </a:solidFill>
+                <a:latin typeface="Calibri" pitchFamily="34" charset="0"/>
+                <a:ea typeface="Calibri" pitchFamily="34" charset="-122"/>
+                <a:cs typeface="Calibri" pitchFamily="34" charset="-120"/>
+              </a:rPr>
+              <a:t>открытый код, MIT-лицензия</a:t>
+            </a:r>
+            <a:endParaRPr lang="en-US" sz="1200" dirty="0"/>
+          </a:p>
+        </p:txBody>
+      </p:sp>
+      <p:sp>
+        <p:nvSpPr>
+          <p:cNvPr id="9" name="Text 7"/>
+          <p:cNvSpPr/>
+          <p:nvPr/>
+        </p:nvSpPr>
+        <p:spPr>
+          <a:xfrm>
+            <a:off x="4590288" y="1816636"/>
+            <a:ext cx="2743200" cy="868680"/>
+          </a:xfrm>
+          <a:prstGeom prst="rect">
+            <a:avLst/>
+          </a:prstGeom>
+          <a:noFill/>
+          <a:ln/>
+        </p:spPr>
+        <p:txBody>
+          <a:bodyPr wrap="square" lIns="0" tIns="0" rIns="0" bIns="0" rtlCol="0" anchor="ctr"/>
+          <a:lstStyle/>
+          <a:p>
+            <a:pPr marL="0" indent="0" algn="ctr">
+              <a:buNone/>
+            </a:pPr>
+            <a:r>
+              <a:rPr lang="en-US" sz="5000" b="1" dirty="0">
+                <a:solidFill>
+                  <a:srgbClr val="0E7FB8"/>
+                </a:solidFill>
+                <a:latin typeface="Cambria" pitchFamily="34" charset="0"/>
+                <a:ea typeface="Cambria" pitchFamily="34" charset="-122"/>
+                <a:cs typeface="Cambria" pitchFamily="34" charset="-120"/>
+              </a:rPr>
+              <a:t>4.2+</a:t>
+            </a:r>
+            <a:endParaRPr lang="en-US" sz="5000" dirty="0"/>
+          </a:p>
+        </p:txBody>
+      </p:sp>
+      <p:sp>
+        <p:nvSpPr>
+          <p:cNvPr id="10" name="Text 8"/>
+          <p:cNvSpPr/>
+          <p:nvPr/>
+        </p:nvSpPr>
+        <p:spPr>
+          <a:xfrm>
+            <a:off x="4590288" y="2685316"/>
+            <a:ext cx="2743200" cy="457200"/>
+          </a:xfrm>
+          <a:prstGeom prst="rect">
+            <a:avLst/>
+          </a:prstGeom>
+          <a:noFill/>
+          <a:ln/>
+        </p:spPr>
+        <p:txBody>
+          <a:bodyPr wrap="square" lIns="0" tIns="0" rIns="0" bIns="0" rtlCol="0" anchor="t"/>
+          <a:lstStyle/>
+          <a:p>
+            <a:pPr marL="0" indent="0" algn="ctr">
+              <a:buNone/>
+            </a:pPr>
+            <a:r>
+              <a:rPr lang="en-US" sz="1200" dirty="0">
+                <a:solidFill>
+                  <a:srgbClr val="6B7480"/>
+                </a:solidFill>
+                <a:latin typeface="Calibri" pitchFamily="34" charset="0"/>
+                <a:ea typeface="Calibri" pitchFamily="34" charset="-122"/>
+                <a:cs typeface="Calibri" pitchFamily="34" charset="-120"/>
+              </a:rPr>
+              <a:t>целевая версия движка</a:t>
+            </a:r>
+            <a:endParaRPr lang="en-US" sz="1200" dirty="0"/>
+          </a:p>
+        </p:txBody>
+      </p:sp>
+      <p:sp>
+        <p:nvSpPr>
+          <p:cNvPr id="11" name="Text 9"/>
+          <p:cNvSpPr/>
+          <p:nvPr/>
+        </p:nvSpPr>
+        <p:spPr>
+          <a:xfrm>
+            <a:off x="7333488" y="1816636"/>
+            <a:ext cx="2743200" cy="868680"/>
+          </a:xfrm>
+          <a:prstGeom prst="rect">
+            <a:avLst/>
+          </a:prstGeom>
+          <a:noFill/>
+          <a:ln/>
+        </p:spPr>
+        <p:txBody>
+          <a:bodyPr wrap="square" lIns="0" tIns="0" rIns="0" bIns="0" rtlCol="0" anchor="ctr"/>
+          <a:lstStyle/>
+          <a:p>
+            <a:pPr marL="0" indent="0" algn="ctr">
+              <a:buNone/>
+            </a:pPr>
+            <a:r>
+              <a:rPr lang="en-US" sz="5000" b="1" dirty="0">
+                <a:solidFill>
+                  <a:srgbClr val="0E7FB8"/>
+                </a:solidFill>
+                <a:latin typeface="Cambria" pitchFamily="34" charset="0"/>
+                <a:ea typeface="Cambria" pitchFamily="34" charset="-122"/>
+                <a:cs typeface="Cambria" pitchFamily="34" charset="-120"/>
+              </a:rPr>
+              <a:t>1 папка</a:t>
+            </a:r>
+            <a:endParaRPr lang="en-US" sz="5000" dirty="0"/>
+          </a:p>
+        </p:txBody>
+      </p:sp>
+      <p:sp>
+        <p:nvSpPr>
+          <p:cNvPr id="12" name="Text 10"/>
+          <p:cNvSpPr/>
+          <p:nvPr/>
+        </p:nvSpPr>
+        <p:spPr>
+          <a:xfrm>
+            <a:off x="7333488" y="2685316"/>
+            <a:ext cx="2743200" cy="457200"/>
+          </a:xfrm>
+          <a:prstGeom prst="rect">
+            <a:avLst/>
+          </a:prstGeom>
+          <a:noFill/>
+          <a:ln/>
+        </p:spPr>
+        <p:txBody>
+          <a:bodyPr wrap="square" lIns="0" tIns="0" rIns="0" bIns="0" rtlCol="0" anchor="t"/>
+          <a:lstStyle/>
+          <a:p>
+            <a:pPr marL="0" indent="0" algn="ctr">
+              <a:buNone/>
+            </a:pPr>
+            <a:r>
+              <a:rPr lang="en-US" sz="1200" dirty="0">
+                <a:solidFill>
+                  <a:srgbClr val="6B7480"/>
+                </a:solidFill>
+                <a:latin typeface="Calibri" pitchFamily="34" charset="0"/>
+                <a:ea typeface="Calibri" pitchFamily="34" charset="-122"/>
+                <a:cs typeface="Calibri" pitchFamily="34" charset="-120"/>
+              </a:rPr>
+              <a:t>вся установка аддона</a:t>
+            </a:r>
+            <a:endParaRPr lang="en-US" sz="1200" dirty="0"/>
+          </a:p>
+        </p:txBody>
+      </p:sp>
+      <p:sp>
+        <p:nvSpPr>
+          <p:cNvPr id="13" name="Shape 11"/>
+          <p:cNvSpPr/>
+          <p:nvPr/>
+        </p:nvSpPr>
+        <p:spPr>
+          <a:xfrm>
+            <a:off x="646176" y="3502152"/>
+            <a:ext cx="3474720" cy="2194560"/>
           </a:xfrm>
           <a:prstGeom prst="roundRect">
             <a:avLst>
-              <a:gd name="adj" fmla="val 4500"/>
+              <a:gd name="adj" fmla="val 3750"/>
             </a:avLst>
           </a:prstGeom>
           <a:solidFill>
-            <a:srgbClr val="F4FAFD"/>
+            <a:srgbClr val="FFFFFF"/>
           </a:solidFill>
           <a:ln w="12700">
             <a:solidFill>
@@ -4626,7 +6127,7 @@
             <a:prstDash val="solid"/>
           </a:ln>
           <a:effectLst>
-            <a:outerShdw sx="100000" sy="100000" kx="0" ky="0" algn="bl" rotWithShape="0" blurRad="88900" dist="25400" dir="5400000">
+            <a:outerShdw blurRad="88900" dist="25400" dir="5400000" algn="bl" rotWithShape="0">
               <a:srgbClr val="B8C9D4">
                 <a:alpha val="22000"/>
               </a:srgbClr>
@@ -4636,14 +6137,14 @@
       </p:sp>
       <p:sp>
         <p:nvSpPr>
-          <p:cNvPr id="9" name="Shape 7"/>
-          <p:cNvSpPr/>
-          <p:nvPr/>
-        </p:nvSpPr>
-        <p:spPr>
-          <a:xfrm>
-            <a:off x="970080" y="2530000"/>
-            <a:ext cx="700000" cy="700000"/>
+          <p:cNvPr id="14" name="Shape 12"/>
+          <p:cNvSpPr/>
+          <p:nvPr/>
+        </p:nvSpPr>
+        <p:spPr>
+          <a:xfrm>
+            <a:off x="883920" y="3758184"/>
+            <a:ext cx="548640" cy="548640"/>
           </a:xfrm>
           <a:prstGeom prst="ellipse">
             <a:avLst/>
@@ -4653,7 +6154,7 @@
           </a:solidFill>
           <a:ln/>
           <a:effectLst>
-            <a:outerShdw sx="100000" sy="100000" kx="0" ky="0" algn="bl" rotWithShape="0" blurRad="88900" dist="25400" dir="5400000">
+            <a:outerShdw blurRad="88900" dist="25400" dir="5400000" algn="bl" rotWithShape="0">
               <a:srgbClr val="B8C9D4">
                 <a:alpha val="22000"/>
               </a:srgbClr>
@@ -4663,22 +6164,22 @@
       </p:sp>
       <p:pic>
         <p:nvPicPr>
-          <p:cNvPr id="10" name="Image 0" descr="icons/store.png"/>
+          <p:cNvPr id="15" name="Image 0" descr="icons/check.png"/>
           <p:cNvPicPr>
             <a:picLocks noChangeAspect="1"/>
           </p:cNvPicPr>
           <p:nvPr/>
         </p:nvPicPr>
         <p:blipFill>
-          <a:blip r:embed="rId1"/>
+          <a:blip r:embed="rId3"/>
           <a:stretch>
             <a:fillRect/>
           </a:stretch>
         </p:blipFill>
         <p:spPr>
           <a:xfrm>
-            <a:off x="1180080" y="2740000"/>
-            <a:ext cx="300000" cy="300000"/>
+            <a:off x="1048512" y="3922776"/>
+            <a:ext cx="219456" cy="219456"/>
           </a:xfrm>
           <a:prstGeom prst="rect">
             <a:avLst/>
@@ -4687,30 +6188,30 @@
       </p:pic>
       <p:sp>
         <p:nvSpPr>
-          <p:cNvPr id="11" name="Text 8"/>
-          <p:cNvSpPr/>
-          <p:nvPr/>
-        </p:nvSpPr>
-        <p:spPr>
-          <a:xfrm>
-            <a:off x="970080" y="3780000"/>
-            <a:ext cx="2814720" cy="420000"/>
-          </a:xfrm>
-          <a:prstGeom prst="rect">
-            <a:avLst/>
-          </a:prstGeom>
-          <a:noFill/>
-          <a:ln/>
-        </p:spPr>
-        <p:txBody>
-          <a:bodyPr wrap="square" lIns="0" tIns="0" rIns="0" bIns="0" rtlCol="0" anchor="t"/>
-          <a:lstStyle/>
-          <a:p>
-            <a:pPr indent="0" marL="0">
-              <a:buNone/>
-            </a:pPr>
-            <a:r>
-              <a:rPr lang="en-US" sz="1700" b="1" dirty="0">
+          <p:cNvPr id="16" name="Text 13"/>
+          <p:cNvSpPr/>
+          <p:nvPr/>
+        </p:nvSpPr>
+        <p:spPr>
+          <a:xfrm>
+            <a:off x="883920" y="4434840"/>
+            <a:ext cx="3017520" cy="457200"/>
+          </a:xfrm>
+          <a:prstGeom prst="rect">
+            <a:avLst/>
+          </a:prstGeom>
+          <a:noFill/>
+          <a:ln/>
+        </p:spPr>
+        <p:txBody>
+          <a:bodyPr wrap="square" lIns="0" tIns="0" rIns="0" bIns="0" rtlCol="0" anchor="ctr"/>
+          <a:lstStyle/>
+          <a:p>
+            <a:pPr marL="0" indent="0">
+              <a:buNone/>
+            </a:pPr>
+            <a:r>
+              <a:rPr lang="en-US" sz="1450" b="1" dirty="0">
                 <a:solidFill>
                   <a:srgbClr val="111418"/>
                 </a:solidFill>
@@ -4718,22 +6219,22 @@
                 <a:ea typeface="Calibri" pitchFamily="34" charset="-122"/>
                 <a:cs typeface="Calibri" pitchFamily="34" charset="-120"/>
               </a:rPr>
-              <a:t>Массовый сегмент</a:t>
-            </a:r>
-            <a:endParaRPr lang="en-US" sz="1700" dirty="0"/>
-          </a:p>
-        </p:txBody>
-      </p:sp>
-      <p:sp>
-        <p:nvSpPr>
-          <p:cNvPr id="12" name="Text 9"/>
-          <p:cNvSpPr/>
-          <p:nvPr/>
-        </p:nvSpPr>
-        <p:spPr>
-          <a:xfrm>
-            <a:off x="970080" y="4320000"/>
-            <a:ext cx="2814720" cy="560000"/>
+              <a:t>Бесплатный и открытый</a:t>
+            </a:r>
+            <a:endParaRPr lang="en-US" sz="1450" dirty="0"/>
+          </a:p>
+        </p:txBody>
+      </p:sp>
+      <p:sp>
+        <p:nvSpPr>
+          <p:cNvPr id="17" name="Text 14"/>
+          <p:cNvSpPr/>
+          <p:nvPr/>
+        </p:nvSpPr>
+        <p:spPr>
+          <a:xfrm>
+            <a:off x="883920" y="4873752"/>
+            <a:ext cx="3017520" cy="731520"/>
           </a:xfrm>
           <a:prstGeom prst="rect">
             <a:avLst/>
@@ -4745,14 +6246,14 @@
           <a:bodyPr wrap="square" lIns="0" tIns="0" rIns="0" bIns="0" rtlCol="0" anchor="t"/>
           <a:lstStyle/>
           <a:p>
-            <a:pPr indent="0" marL="0">
+            <a:pPr marL="0" indent="0">
               <a:lnSpc>
-                <a:spcPct val="104000"/>
+                <a:spcPct val="103000"/>
               </a:lnSpc>
               <a:buNone/>
             </a:pPr>
             <a:r>
-              <a:rPr lang="en-US" sz="1300" dirty="0">
+              <a:rPr lang="en-US" sz="1200" dirty="0">
                 <a:solidFill>
                   <a:srgbClr val="33383F"/>
                 </a:solidFill>
@@ -4760,30 +6261,30 @@
                 <a:ea typeface="Calibri" pitchFamily="34" charset="-122"/>
                 <a:cs typeface="Calibri" pitchFamily="34" charset="-120"/>
               </a:rPr>
-              <a:t>тысячи релизов в год; инди — заметная часть рынка</a:t>
-            </a:r>
-            <a:endParaRPr lang="en-US" sz="1300" dirty="0"/>
-          </a:p>
-        </p:txBody>
-      </p:sp>
-      <p:sp>
-        <p:nvSpPr>
-          <p:cNvPr id="13" name="Shape 10"/>
-          <p:cNvSpPr/>
-          <p:nvPr/>
-        </p:nvSpPr>
-        <p:spPr>
-          <a:xfrm>
-            <a:off x="4352544" y="2150000"/>
-            <a:ext cx="3474720" cy="3150000"/>
+              <a:t>нет роялти и лицензионных платежей — критично для инди</a:t>
+            </a:r>
+            <a:endParaRPr lang="en-US" sz="1200" dirty="0"/>
+          </a:p>
+        </p:txBody>
+      </p:sp>
+      <p:sp>
+        <p:nvSpPr>
+          <p:cNvPr id="18" name="Shape 15"/>
+          <p:cNvSpPr/>
+          <p:nvPr/>
+        </p:nvSpPr>
+        <p:spPr>
+          <a:xfrm>
+            <a:off x="4358640" y="3502152"/>
+            <a:ext cx="3474720" cy="2194560"/>
           </a:xfrm>
           <a:prstGeom prst="roundRect">
             <a:avLst>
-              <a:gd name="adj" fmla="val 4500"/>
+              <a:gd name="adj" fmla="val 3750"/>
             </a:avLst>
           </a:prstGeom>
           <a:solidFill>
-            <a:srgbClr val="F4FAFD"/>
+            <a:srgbClr val="EAF6FC"/>
           </a:solidFill>
           <a:ln w="12700">
             <a:solidFill>
@@ -4792,7 +6293,7 @@
             <a:prstDash val="solid"/>
           </a:ln>
           <a:effectLst>
-            <a:outerShdw sx="100000" sy="100000" kx="0" ky="0" algn="bl" rotWithShape="0" blurRad="88900" dist="25400" dir="5400000">
+            <a:outerShdw blurRad="88900" dist="25400" dir="5400000" algn="bl" rotWithShape="0">
               <a:srgbClr val="B8C9D4">
                 <a:alpha val="22000"/>
               </a:srgbClr>
@@ -4802,14 +6303,14 @@
       </p:sp>
       <p:sp>
         <p:nvSpPr>
-          <p:cNvPr id="14" name="Shape 11"/>
-          <p:cNvSpPr/>
-          <p:nvPr/>
-        </p:nvSpPr>
-        <p:spPr>
-          <a:xfrm>
-            <a:off x="4682544" y="2530000"/>
-            <a:ext cx="700000" cy="700000"/>
+          <p:cNvPr id="19" name="Shape 16"/>
+          <p:cNvSpPr/>
+          <p:nvPr/>
+        </p:nvSpPr>
+        <p:spPr>
+          <a:xfrm>
+            <a:off x="4596384" y="3758184"/>
+            <a:ext cx="548640" cy="548640"/>
           </a:xfrm>
           <a:prstGeom prst="ellipse">
             <a:avLst/>
@@ -4819,7 +6320,7 @@
           </a:solidFill>
           <a:ln/>
           <a:effectLst>
-            <a:outerShdw sx="100000" sy="100000" kx="0" ky="0" algn="bl" rotWithShape="0" blurRad="88900" dist="25400" dir="5400000">
+            <a:outerShdw blurRad="88900" dist="25400" dir="5400000" algn="bl" rotWithShape="0">
               <a:srgbClr val="B8C9D4">
                 <a:alpha val="22000"/>
               </a:srgbClr>
@@ -4829,22 +6330,22 @@
       </p:sp>
       <p:pic>
         <p:nvPicPr>
-          <p:cNvPr id="15" name="Image 1" descr="icons/users.png"/>
+          <p:cNvPr id="20" name="Image 1" descr="icons/puzzle.png"/>
           <p:cNvPicPr>
             <a:picLocks noChangeAspect="1"/>
           </p:cNvPicPr>
           <p:nvPr/>
         </p:nvPicPr>
         <p:blipFill>
-          <a:blip r:embed="rId2"/>
+          <a:blip r:embed="rId4"/>
           <a:stretch>
             <a:fillRect/>
           </a:stretch>
         </p:blipFill>
         <p:spPr>
           <a:xfrm>
-            <a:off x="4892544" y="2740000"/>
-            <a:ext cx="300000" cy="300000"/>
+            <a:off x="4760976" y="3922776"/>
+            <a:ext cx="219456" cy="219456"/>
           </a:xfrm>
           <a:prstGeom prst="rect">
             <a:avLst/>
@@ -4853,30 +6354,30 @@
       </p:pic>
       <p:sp>
         <p:nvSpPr>
-          <p:cNvPr id="16" name="Text 12"/>
-          <p:cNvSpPr/>
-          <p:nvPr/>
-        </p:nvSpPr>
-        <p:spPr>
-          <a:xfrm>
-            <a:off x="4682544" y="3780000"/>
-            <a:ext cx="2814720" cy="420000"/>
-          </a:xfrm>
-          <a:prstGeom prst="rect">
-            <a:avLst/>
-          </a:prstGeom>
-          <a:noFill/>
-          <a:ln/>
-        </p:spPr>
-        <p:txBody>
-          <a:bodyPr wrap="square" lIns="0" tIns="0" rIns="0" bIns="0" rtlCol="0" anchor="t"/>
-          <a:lstStyle/>
-          <a:p>
-            <a:pPr indent="0" marL="0">
-              <a:buNone/>
-            </a:pPr>
-            <a:r>
-              <a:rPr lang="en-US" sz="1700" b="1" dirty="0">
+          <p:cNvPr id="21" name="Text 17"/>
+          <p:cNvSpPr/>
+          <p:nvPr/>
+        </p:nvSpPr>
+        <p:spPr>
+          <a:xfrm>
+            <a:off x="4596384" y="4434840"/>
+            <a:ext cx="3017520" cy="457200"/>
+          </a:xfrm>
+          <a:prstGeom prst="rect">
+            <a:avLst/>
+          </a:prstGeom>
+          <a:noFill/>
+          <a:ln/>
+        </p:spPr>
+        <p:txBody>
+          <a:bodyPr wrap="square" lIns="0" tIns="0" rIns="0" bIns="0" rtlCol="0" anchor="ctr"/>
+          <a:lstStyle/>
+          <a:p>
+            <a:pPr marL="0" indent="0">
+              <a:buNone/>
+            </a:pPr>
+            <a:r>
+              <a:rPr lang="en-US" sz="1450" b="1" dirty="0">
                 <a:solidFill>
                   <a:srgbClr val="111418"/>
                 </a:solidFill>
@@ -4884,22 +6385,22 @@
                 <a:ea typeface="Calibri" pitchFamily="34" charset="-122"/>
                 <a:cs typeface="Calibri" pitchFamily="34" charset="-120"/>
               </a:rPr>
-              <a:t>Нет своей аналитики</a:t>
-            </a:r>
-            <a:endParaRPr lang="en-US" sz="1700" dirty="0"/>
-          </a:p>
-        </p:txBody>
-      </p:sp>
-      <p:sp>
-        <p:nvSpPr>
-          <p:cNvPr id="17" name="Text 13"/>
-          <p:cNvSpPr/>
-          <p:nvPr/>
-        </p:nvSpPr>
-        <p:spPr>
-          <a:xfrm>
-            <a:off x="4682544" y="4320000"/>
-            <a:ext cx="2814720" cy="560000"/>
+              <a:t>Нативная система плагинов</a:t>
+            </a:r>
+            <a:endParaRPr lang="en-US" sz="1450" dirty="0"/>
+          </a:p>
+        </p:txBody>
+      </p:sp>
+      <p:sp>
+        <p:nvSpPr>
+          <p:cNvPr id="22" name="Text 18"/>
+          <p:cNvSpPr/>
+          <p:nvPr/>
+        </p:nvSpPr>
+        <p:spPr>
+          <a:xfrm>
+            <a:off x="4596384" y="4873752"/>
+            <a:ext cx="3017520" cy="731520"/>
           </a:xfrm>
           <a:prstGeom prst="rect">
             <a:avLst/>
@@ -4911,14 +6412,14 @@
           <a:bodyPr wrap="square" lIns="0" tIns="0" rIns="0" bIns="0" rtlCol="0" anchor="t"/>
           <a:lstStyle/>
           <a:p>
-            <a:pPr indent="0" marL="0">
+            <a:pPr marL="0" indent="0">
               <a:lnSpc>
-                <a:spcPct val="104000"/>
+                <a:spcPct val="103000"/>
               </a:lnSpc>
               <a:buNone/>
             </a:pPr>
             <a:r>
-              <a:rPr lang="en-US" sz="1300" dirty="0">
+              <a:rPr lang="en-US" sz="1200" dirty="0">
                 <a:solidFill>
                   <a:srgbClr val="33383F"/>
                 </a:solidFill>
@@ -4926,30 +6427,30 @@
                 <a:ea typeface="Calibri" pitchFamily="34" charset="-122"/>
                 <a:cs typeface="Calibri" pitchFamily="34" charset="-120"/>
               </a:rPr>
-              <a:t>у малых команд нет ресурсов на data-инфраструктуру</a:t>
-            </a:r>
-            <a:endParaRPr lang="en-US" sz="1300" dirty="0"/>
-          </a:p>
-        </p:txBody>
-      </p:sp>
-      <p:sp>
-        <p:nvSpPr>
-          <p:cNvPr id="18" name="Shape 14"/>
-          <p:cNvSpPr/>
-          <p:nvPr/>
-        </p:nvSpPr>
-        <p:spPr>
-          <a:xfrm>
-            <a:off x="8065008" y="2150000"/>
-            <a:ext cx="3474720" cy="3150000"/>
+              <a:t>EditorPlugin, автозагрузка, кастомные панели редактора «из коробки»</a:t>
+            </a:r>
+            <a:endParaRPr lang="en-US" sz="1200" dirty="0"/>
+          </a:p>
+        </p:txBody>
+      </p:sp>
+      <p:sp>
+        <p:nvSpPr>
+          <p:cNvPr id="23" name="Shape 19"/>
+          <p:cNvSpPr/>
+          <p:nvPr/>
+        </p:nvSpPr>
+        <p:spPr>
+          <a:xfrm>
+            <a:off x="8071104" y="3502152"/>
+            <a:ext cx="3474720" cy="2194560"/>
           </a:xfrm>
           <a:prstGeom prst="roundRect">
             <a:avLst>
-              <a:gd name="adj" fmla="val 4500"/>
+              <a:gd name="adj" fmla="val 3750"/>
             </a:avLst>
           </a:prstGeom>
           <a:solidFill>
-            <a:srgbClr val="F4FAFD"/>
+            <a:srgbClr val="FFFFFF"/>
           </a:solidFill>
           <a:ln w="12700">
             <a:solidFill>
@@ -4958,7 +6459,7 @@
             <a:prstDash val="solid"/>
           </a:ln>
           <a:effectLst>
-            <a:outerShdw sx="100000" sy="100000" kx="0" ky="0" algn="bl" rotWithShape="0" blurRad="88900" dist="25400" dir="5400000">
+            <a:outerShdw blurRad="88900" dist="25400" dir="5400000" algn="bl" rotWithShape="0">
               <a:srgbClr val="B8C9D4">
                 <a:alpha val="22000"/>
               </a:srgbClr>
@@ -4968,14 +6469,14 @@
       </p:sp>
       <p:sp>
         <p:nvSpPr>
-          <p:cNvPr id="19" name="Shape 15"/>
-          <p:cNvSpPr/>
-          <p:nvPr/>
-        </p:nvSpPr>
-        <p:spPr>
-          <a:xfrm>
-            <a:off x="8395008" y="2530000"/>
-            <a:ext cx="700000" cy="700000"/>
+          <p:cNvPr id="24" name="Shape 20"/>
+          <p:cNvSpPr/>
+          <p:nvPr/>
+        </p:nvSpPr>
+        <p:spPr>
+          <a:xfrm>
+            <a:off x="8308848" y="3758184"/>
+            <a:ext cx="548640" cy="548640"/>
           </a:xfrm>
           <a:prstGeom prst="ellipse">
             <a:avLst/>
@@ -4985,7 +6486,7 @@
           </a:solidFill>
           <a:ln/>
           <a:effectLst>
-            <a:outerShdw sx="100000" sy="100000" kx="0" ky="0" algn="bl" rotWithShape="0" blurRad="88900" dist="25400" dir="5400000">
+            <a:outerShdw blurRad="88900" dist="25400" dir="5400000" algn="bl" rotWithShape="0">
               <a:srgbClr val="B8C9D4">
                 <a:alpha val="22000"/>
               </a:srgbClr>
@@ -4995,22 +6496,22 @@
       </p:sp>
       <p:pic>
         <p:nvPicPr>
-          <p:cNvPr id="20" name="Image 2" descr="icons/sliders.png"/>
+          <p:cNvPr id="25" name="Image 2" descr="icons/bolt.png"/>
           <p:cNvPicPr>
             <a:picLocks noChangeAspect="1"/>
           </p:cNvPicPr>
           <p:nvPr/>
         </p:nvPicPr>
         <p:blipFill>
-          <a:blip r:embed="rId3"/>
+          <a:blip r:embed="rId5"/>
           <a:stretch>
             <a:fillRect/>
           </a:stretch>
         </p:blipFill>
         <p:spPr>
           <a:xfrm>
-            <a:off x="8605008" y="2740000"/>
-            <a:ext cx="300000" cy="300000"/>
+            <a:off x="8473440" y="3922776"/>
+            <a:ext cx="219456" cy="219456"/>
           </a:xfrm>
           <a:prstGeom prst="rect">
             <a:avLst/>
@@ -5019,30 +6520,30 @@
       </p:pic>
       <p:sp>
         <p:nvSpPr>
-          <p:cNvPr id="21" name="Text 16"/>
-          <p:cNvSpPr/>
-          <p:nvPr/>
-        </p:nvSpPr>
-        <p:spPr>
-          <a:xfrm>
-            <a:off x="8395008" y="3780000"/>
-            <a:ext cx="2814720" cy="420000"/>
-          </a:xfrm>
-          <a:prstGeom prst="rect">
-            <a:avLst/>
-          </a:prstGeom>
-          <a:noFill/>
-          <a:ln/>
-        </p:spPr>
-        <p:txBody>
-          <a:bodyPr wrap="square" lIns="0" tIns="0" rIns="0" bIns="0" rtlCol="0" anchor="t"/>
-          <a:lstStyle/>
-          <a:p>
-            <a:pPr indent="0" marL="0">
-              <a:buNone/>
-            </a:pPr>
-            <a:r>
-              <a:rPr lang="en-US" sz="1700" b="1" dirty="0">
+          <p:cNvPr id="26" name="Text 21"/>
+          <p:cNvSpPr/>
+          <p:nvPr/>
+        </p:nvSpPr>
+        <p:spPr>
+          <a:xfrm>
+            <a:off x="8308848" y="4434840"/>
+            <a:ext cx="3017520" cy="457200"/>
+          </a:xfrm>
+          <a:prstGeom prst="rect">
+            <a:avLst/>
+          </a:prstGeom>
+          <a:noFill/>
+          <a:ln/>
+        </p:spPr>
+        <p:txBody>
+          <a:bodyPr wrap="square" lIns="0" tIns="0" rIns="0" bIns="0" rtlCol="0" anchor="ctr"/>
+          <a:lstStyle/>
+          <a:p>
+            <a:pPr marL="0" indent="0">
+              <a:buNone/>
+            </a:pPr>
+            <a:r>
+              <a:rPr lang="en-US" sz="1450" b="1" dirty="0">
                 <a:solidFill>
                   <a:srgbClr val="111418"/>
                 </a:solidFill>
@@ -5050,22 +6551,22 @@
                 <a:ea typeface="Calibri" pitchFamily="34" charset="-122"/>
                 <a:cs typeface="Calibri" pitchFamily="34" charset="-120"/>
               </a:rPr>
-              <a:t>Ручной баланс</a:t>
-            </a:r>
-            <a:endParaRPr lang="en-US" sz="1700" dirty="0"/>
-          </a:p>
-        </p:txBody>
-      </p:sp>
-      <p:sp>
-        <p:nvSpPr>
-          <p:cNvPr id="22" name="Text 17"/>
-          <p:cNvSpPr/>
-          <p:nvPr/>
-        </p:nvSpPr>
-        <p:spPr>
-          <a:xfrm>
-            <a:off x="8395008" y="4320000"/>
-            <a:ext cx="2814720" cy="560000"/>
+              <a:t>GDScript + быстрый цикл</a:t>
+            </a:r>
+            <a:endParaRPr lang="en-US" sz="1450" dirty="0"/>
+          </a:p>
+        </p:txBody>
+      </p:sp>
+      <p:sp>
+        <p:nvSpPr>
+          <p:cNvPr id="27" name="Text 22"/>
+          <p:cNvSpPr/>
+          <p:nvPr/>
+        </p:nvSpPr>
+        <p:spPr>
+          <a:xfrm>
+            <a:off x="8308848" y="4873752"/>
+            <a:ext cx="3017520" cy="731520"/>
           </a:xfrm>
           <a:prstGeom prst="rect">
             <a:avLst/>
@@ -5077,14 +6578,14 @@
           <a:bodyPr wrap="square" lIns="0" tIns="0" rIns="0" bIns="0" rtlCol="0" anchor="t"/>
           <a:lstStyle/>
           <a:p>
-            <a:pPr indent="0" marL="0">
+            <a:pPr marL="0" indent="0">
               <a:lnSpc>
-                <a:spcPct val="104000"/>
+                <a:spcPct val="103000"/>
               </a:lnSpc>
               <a:buNone/>
             </a:pPr>
             <a:r>
-              <a:rPr lang="en-US" sz="1300" dirty="0">
+              <a:rPr lang="en-US" sz="1200" dirty="0">
                 <a:solidFill>
                   <a:srgbClr val="33383F"/>
                 </a:solidFill>
@@ -5092,9 +6593,9 @@
                 <a:ea typeface="Calibri" pitchFamily="34" charset="-122"/>
                 <a:cs typeface="Calibri" pitchFamily="34" charset="-120"/>
               </a:rPr>
-              <a:t>сложность настраивается «на глаз», одинаково для всех</a:t>
-            </a:r>
-            <a:endParaRPr lang="en-US" sz="1300" dirty="0"/>
+              <a:t>низкий порог входа, мгновенная итерация в редакторе</a:t>
+            </a:r>
+            <a:endParaRPr lang="en-US" sz="1200" dirty="0"/>
           </a:p>
         </p:txBody>
       </p:sp>
@@ -5106,888 +6607,7 @@
 </p:sld>
 </file>
 
-<file path=ppt/slides/slide3.xml><?xml version="1.0" encoding="utf-8"?>
-<p:sld xmlns:a="http://schemas.openxmlformats.org/drawingml/2006/main" xmlns:r="http://schemas.openxmlformats.org/officeDocument/2006/relationships" xmlns:p="http://schemas.openxmlformats.org/presentationml/2006/main">
-  <p:cSld name="Slide 3">
-    <p:bg>
-      <p:bgPr>
-        <a:solidFill>
-          <a:srgbClr val="FFFFFF"/>
-        </a:solidFill>
-      </p:bgPr>
-    </p:bg>
-    <p:spTree>
-      <p:nvGrpSpPr>
-        <p:cNvPr id="1" name=""/>
-        <p:cNvGrpSpPr/>
-        <p:nvPr/>
-      </p:nvGrpSpPr>
-      <p:grpSpPr>
-        <a:xfrm>
-          <a:off x="0" y="0"/>
-          <a:ext cx="0" cy="0"/>
-          <a:chOff x="0" y="0"/>
-          <a:chExt cx="0" cy="0"/>
-        </a:xfrm>
-      </p:grpSpPr>
-      <p:sp>
-        <p:nvSpPr>
-          <p:cNvPr id="2" name="Text 0"/>
-          <p:cNvSpPr/>
-          <p:nvPr/>
-        </p:nvSpPr>
-        <p:spPr>
-          <a:xfrm>
-            <a:off x="10820095" y="384048"/>
-            <a:ext cx="822960" cy="640080"/>
-          </a:xfrm>
-          <a:prstGeom prst="rect">
-            <a:avLst/>
-          </a:prstGeom>
-          <a:noFill/>
-          <a:ln/>
-        </p:spPr>
-        <p:txBody>
-          <a:bodyPr wrap="square" lIns="0" tIns="0" rIns="0" bIns="0" rtlCol="0" anchor="ctr"/>
-          <a:lstStyle/>
-          <a:p>
-            <a:pPr algn="r" indent="0" marL="0">
-              <a:buNone/>
-            </a:pPr>
-            <a:r>
-              <a:rPr lang="en-US" sz="3000" b="1" dirty="0">
-                <a:solidFill>
-                  <a:srgbClr val="C6D6E0"/>
-                </a:solidFill>
-                <a:latin typeface="Cambria" pitchFamily="34" charset="0"/>
-                <a:ea typeface="Cambria" pitchFamily="34" charset="-122"/>
-                <a:cs typeface="Cambria" pitchFamily="34" charset="-120"/>
-              </a:rPr>
-              <a:t>4</a:t>
-            </a:r>
-            <a:endParaRPr lang="en-US" sz="3000" dirty="0"/>
-          </a:p>
-        </p:txBody>
-      </p:sp>
-      <p:sp>
-        <p:nvSpPr>
-          <p:cNvPr id="3" name="Text 1"/>
-          <p:cNvSpPr/>
-          <p:nvPr/>
-        </p:nvSpPr>
-        <p:spPr>
-          <a:xfrm>
-            <a:off x="640080" y="475488"/>
-            <a:ext cx="8229600" cy="274320"/>
-          </a:xfrm>
-          <a:prstGeom prst="rect">
-            <a:avLst/>
-          </a:prstGeom>
-          <a:noFill/>
-          <a:ln/>
-        </p:spPr>
-        <p:txBody>
-          <a:bodyPr wrap="square" lIns="0" tIns="0" rIns="0" bIns="0" rtlCol="0" anchor="ctr"/>
-          <a:lstStyle/>
-          <a:p>
-            <a:pPr indent="0" marL="0">
-              <a:buNone/>
-            </a:pPr>
-            <a:r>
-              <a:rPr lang="en-US" sz="1500" b="1" spc="250" kern="0" dirty="0">
-                <a:solidFill>
-                  <a:srgbClr val="1F9BD8"/>
-                </a:solidFill>
-                <a:latin typeface="Calibri" pitchFamily="34" charset="0"/>
-                <a:ea typeface="Calibri" pitchFamily="34" charset="-122"/>
-                <a:cs typeface="Calibri" pitchFamily="34" charset="-120"/>
-              </a:rPr>
-              <a:t>ВЫБОР ДВИЖКА</a:t>
-            </a:r>
-            <a:endParaRPr lang="en-US" sz="1500" dirty="0"/>
-          </a:p>
-        </p:txBody>
-      </p:sp>
-      <p:sp>
-        <p:nvSpPr>
-          <p:cNvPr id="4" name="Text 2"/>
-          <p:cNvSpPr/>
-          <p:nvPr/>
-        </p:nvSpPr>
-        <p:spPr>
-          <a:xfrm>
-            <a:off x="640080" y="749808"/>
-            <a:ext cx="10362895" cy="777240"/>
-          </a:xfrm>
-          <a:prstGeom prst="rect">
-            <a:avLst/>
-          </a:prstGeom>
-          <a:noFill/>
-          <a:ln/>
-        </p:spPr>
-        <p:txBody>
-          <a:bodyPr wrap="square" lIns="0" tIns="0" rIns="0" bIns="0" rtlCol="0" anchor="ctr"/>
-          <a:lstStyle/>
-          <a:p>
-            <a:pPr indent="0" marL="0">
-              <a:buNone/>
-            </a:pPr>
-            <a:r>
-              <a:rPr lang="en-US" sz="3000" b="1" dirty="0">
-                <a:solidFill>
-                  <a:srgbClr val="111418"/>
-                </a:solidFill>
-                <a:latin typeface="Cambria" pitchFamily="34" charset="0"/>
-                <a:ea typeface="Cambria" pitchFamily="34" charset="-122"/>
-                <a:cs typeface="Cambria" pitchFamily="34" charset="-120"/>
-              </a:rPr>
-              <a:t>Преимущества Godot 4</a:t>
-            </a:r>
-            <a:endParaRPr lang="en-US" sz="3000" dirty="0"/>
-          </a:p>
-        </p:txBody>
-      </p:sp>
-      <p:sp>
-        <p:nvSpPr>
-          <p:cNvPr id="7" name="Text 5"/>
-          <p:cNvSpPr/>
-          <p:nvPr/>
-        </p:nvSpPr>
-        <p:spPr>
-          <a:xfrm>
-            <a:off x="640080" y="1828800"/>
-            <a:ext cx="2743200" cy="868680"/>
-          </a:xfrm>
-          <a:prstGeom prst="rect">
-            <a:avLst/>
-          </a:prstGeom>
-          <a:noFill/>
-          <a:ln/>
-        </p:spPr>
-        <p:txBody>
-          <a:bodyPr wrap="square" lIns="0" tIns="0" rIns="0" bIns="0" rtlCol="0" anchor="ctr"/>
-          <a:lstStyle/>
-          <a:p>
-            <a:pPr algn="ctr" indent="0" marL="0">
-              <a:buNone/>
-            </a:pPr>
-            <a:r>
-              <a:rPr lang="en-US" sz="5000" b="1" dirty="0">
-                <a:solidFill>
-                  <a:srgbClr val="0E7FB8"/>
-                </a:solidFill>
-                <a:latin typeface="Cambria" pitchFamily="34" charset="0"/>
-                <a:ea typeface="Cambria" pitchFamily="34" charset="-122"/>
-                <a:cs typeface="Cambria" pitchFamily="34" charset="-120"/>
-              </a:rPr>
-              <a:t>100%</a:t>
-            </a:r>
-            <a:endParaRPr lang="en-US" sz="5000" dirty="0"/>
-          </a:p>
-        </p:txBody>
-      </p:sp>
-      <p:sp>
-        <p:nvSpPr>
-          <p:cNvPr id="8" name="Text 6"/>
-          <p:cNvSpPr/>
-          <p:nvPr/>
-        </p:nvSpPr>
-        <p:spPr>
-          <a:xfrm>
-            <a:off x="640080" y="2697480"/>
-            <a:ext cx="2743200" cy="457200"/>
-          </a:xfrm>
-          <a:prstGeom prst="rect">
-            <a:avLst/>
-          </a:prstGeom>
-          <a:noFill/>
-          <a:ln/>
-        </p:spPr>
-        <p:txBody>
-          <a:bodyPr wrap="square" lIns="0" tIns="0" rIns="0" bIns="0" rtlCol="0" anchor="t"/>
-          <a:lstStyle/>
-          <a:p>
-            <a:pPr algn="ctr" indent="0" marL="0">
-              <a:buNone/>
-            </a:pPr>
-            <a:r>
-              <a:rPr lang="en-US" sz="1200" dirty="0">
-                <a:solidFill>
-                  <a:srgbClr val="6B7480"/>
-                </a:solidFill>
-                <a:latin typeface="Calibri" pitchFamily="34" charset="0"/>
-                <a:ea typeface="Calibri" pitchFamily="34" charset="-122"/>
-                <a:cs typeface="Calibri" pitchFamily="34" charset="-120"/>
-              </a:rPr>
-              <a:t>открытый код, MIT-лицензия</a:t>
-            </a:r>
-            <a:endParaRPr lang="en-US" sz="1200" dirty="0"/>
-          </a:p>
-        </p:txBody>
-      </p:sp>
-      <p:sp>
-        <p:nvSpPr>
-          <p:cNvPr id="9" name="Text 7"/>
-          <p:cNvSpPr/>
-          <p:nvPr/>
-        </p:nvSpPr>
-        <p:spPr>
-          <a:xfrm>
-            <a:off x="3383280" y="1828800"/>
-            <a:ext cx="2743200" cy="868680"/>
-          </a:xfrm>
-          <a:prstGeom prst="rect">
-            <a:avLst/>
-          </a:prstGeom>
-          <a:noFill/>
-          <a:ln/>
-        </p:spPr>
-        <p:txBody>
-          <a:bodyPr wrap="square" lIns="0" tIns="0" rIns="0" bIns="0" rtlCol="0" anchor="ctr"/>
-          <a:lstStyle/>
-          <a:p>
-            <a:pPr algn="ctr" indent="0" marL="0">
-              <a:buNone/>
-            </a:pPr>
-            <a:r>
-              <a:rPr lang="en-US" sz="5000" b="1" dirty="0">
-                <a:solidFill>
-                  <a:srgbClr val="0E7FB8"/>
-                </a:solidFill>
-                <a:latin typeface="Cambria" pitchFamily="34" charset="0"/>
-                <a:ea typeface="Cambria" pitchFamily="34" charset="-122"/>
-                <a:cs typeface="Cambria" pitchFamily="34" charset="-120"/>
-              </a:rPr>
-              <a:t>4.2+</a:t>
-            </a:r>
-            <a:endParaRPr lang="en-US" sz="5000" dirty="0"/>
-          </a:p>
-        </p:txBody>
-      </p:sp>
-      <p:sp>
-        <p:nvSpPr>
-          <p:cNvPr id="10" name="Text 8"/>
-          <p:cNvSpPr/>
-          <p:nvPr/>
-        </p:nvSpPr>
-        <p:spPr>
-          <a:xfrm>
-            <a:off x="3383280" y="2697480"/>
-            <a:ext cx="2743200" cy="457200"/>
-          </a:xfrm>
-          <a:prstGeom prst="rect">
-            <a:avLst/>
-          </a:prstGeom>
-          <a:noFill/>
-          <a:ln/>
-        </p:spPr>
-        <p:txBody>
-          <a:bodyPr wrap="square" lIns="0" tIns="0" rIns="0" bIns="0" rtlCol="0" anchor="t"/>
-          <a:lstStyle/>
-          <a:p>
-            <a:pPr algn="ctr" indent="0" marL="0">
-              <a:buNone/>
-            </a:pPr>
-            <a:r>
-              <a:rPr lang="en-US" sz="1200" dirty="0">
-                <a:solidFill>
-                  <a:srgbClr val="6B7480"/>
-                </a:solidFill>
-                <a:latin typeface="Calibri" pitchFamily="34" charset="0"/>
-                <a:ea typeface="Calibri" pitchFamily="34" charset="-122"/>
-                <a:cs typeface="Calibri" pitchFamily="34" charset="-120"/>
-              </a:rPr>
-              <a:t>целевая версия движка</a:t>
-            </a:r>
-            <a:endParaRPr lang="en-US" sz="1200" dirty="0"/>
-          </a:p>
-        </p:txBody>
-      </p:sp>
-      <p:sp>
-        <p:nvSpPr>
-          <p:cNvPr id="11" name="Text 9"/>
-          <p:cNvSpPr/>
-          <p:nvPr/>
-        </p:nvSpPr>
-        <p:spPr>
-          <a:xfrm>
-            <a:off x="6126480" y="1828800"/>
-            <a:ext cx="2743200" cy="868680"/>
-          </a:xfrm>
-          <a:prstGeom prst="rect">
-            <a:avLst/>
-          </a:prstGeom>
-          <a:noFill/>
-          <a:ln/>
-        </p:spPr>
-        <p:txBody>
-          <a:bodyPr wrap="square" lIns="0" tIns="0" rIns="0" bIns="0" rtlCol="0" anchor="ctr"/>
-          <a:lstStyle/>
-          <a:p>
-            <a:pPr algn="ctr" indent="0" marL="0">
-              <a:buNone/>
-            </a:pPr>
-            <a:r>
-              <a:rPr lang="en-US" sz="5000" b="1" dirty="0">
-                <a:solidFill>
-                  <a:srgbClr val="0E7FB8"/>
-                </a:solidFill>
-                <a:latin typeface="Cambria" pitchFamily="34" charset="0"/>
-                <a:ea typeface="Cambria" pitchFamily="34" charset="-122"/>
-                <a:cs typeface="Cambria" pitchFamily="34" charset="-120"/>
-              </a:rPr>
-              <a:t>1 папка</a:t>
-            </a:r>
-            <a:endParaRPr lang="en-US" sz="5000" dirty="0"/>
-          </a:p>
-        </p:txBody>
-      </p:sp>
-      <p:sp>
-        <p:nvSpPr>
-          <p:cNvPr id="12" name="Text 10"/>
-          <p:cNvSpPr/>
-          <p:nvPr/>
-        </p:nvSpPr>
-        <p:spPr>
-          <a:xfrm>
-            <a:off x="6126480" y="2697480"/>
-            <a:ext cx="2743200" cy="457200"/>
-          </a:xfrm>
-          <a:prstGeom prst="rect">
-            <a:avLst/>
-          </a:prstGeom>
-          <a:noFill/>
-          <a:ln/>
-        </p:spPr>
-        <p:txBody>
-          <a:bodyPr wrap="square" lIns="0" tIns="0" rIns="0" bIns="0" rtlCol="0" anchor="t"/>
-          <a:lstStyle/>
-          <a:p>
-            <a:pPr algn="ctr" indent="0" marL="0">
-              <a:buNone/>
-            </a:pPr>
-            <a:r>
-              <a:rPr lang="en-US" sz="1200" dirty="0">
-                <a:solidFill>
-                  <a:srgbClr val="6B7480"/>
-                </a:solidFill>
-                <a:latin typeface="Calibri" pitchFamily="34" charset="0"/>
-                <a:ea typeface="Calibri" pitchFamily="34" charset="-122"/>
-                <a:cs typeface="Calibri" pitchFamily="34" charset="-120"/>
-              </a:rPr>
-              <a:t>вся установка аддона</a:t>
-            </a:r>
-            <a:endParaRPr lang="en-US" sz="1200" dirty="0"/>
-          </a:p>
-        </p:txBody>
-      </p:sp>
-      <p:sp>
-        <p:nvSpPr>
-          <p:cNvPr id="13" name="Shape 11"/>
-          <p:cNvSpPr/>
-          <p:nvPr/>
-        </p:nvSpPr>
-        <p:spPr>
-          <a:xfrm>
-            <a:off x="640080" y="3246120"/>
-            <a:ext cx="3474720" cy="2194560"/>
-          </a:xfrm>
-          <a:prstGeom prst="roundRect">
-            <a:avLst>
-              <a:gd name="adj" fmla="val 3750"/>
-            </a:avLst>
-          </a:prstGeom>
-          <a:solidFill>
-            <a:srgbClr val="FFFFFF"/>
-          </a:solidFill>
-          <a:ln w="12700">
-            <a:solidFill>
-              <a:srgbClr val="DCE6EC"/>
-            </a:solidFill>
-            <a:prstDash val="solid"/>
-          </a:ln>
-          <a:effectLst>
-            <a:outerShdw sx="100000" sy="100000" kx="0" ky="0" algn="bl" rotWithShape="0" blurRad="88900" dist="25400" dir="5400000">
-              <a:srgbClr val="B8C9D4">
-                <a:alpha val="22000"/>
-              </a:srgbClr>
-            </a:outerShdw>
-          </a:effectLst>
-        </p:spPr>
-      </p:sp>
-      <p:sp>
-        <p:nvSpPr>
-          <p:cNvPr id="14" name="Shape 12"/>
-          <p:cNvSpPr/>
-          <p:nvPr/>
-        </p:nvSpPr>
-        <p:spPr>
-          <a:xfrm>
-            <a:off x="877824" y="3502152"/>
-            <a:ext cx="548640" cy="548640"/>
-          </a:xfrm>
-          <a:prstGeom prst="ellipse">
-            <a:avLst/>
-          </a:prstGeom>
-          <a:solidFill>
-            <a:srgbClr val="1F9BD8"/>
-          </a:solidFill>
-          <a:ln/>
-          <a:effectLst>
-            <a:outerShdw sx="100000" sy="100000" kx="0" ky="0" algn="bl" rotWithShape="0" blurRad="88900" dist="25400" dir="5400000">
-              <a:srgbClr val="B8C9D4">
-                <a:alpha val="22000"/>
-              </a:srgbClr>
-            </a:outerShdw>
-          </a:effectLst>
-        </p:spPr>
-      </p:sp>
-      <p:pic>
-        <p:nvPicPr>
-          <p:cNvPr id="15" name="Image 0" descr="icons/check.png"/>
-          <p:cNvPicPr>
-            <a:picLocks noChangeAspect="1"/>
-          </p:cNvPicPr>
-          <p:nvPr/>
-        </p:nvPicPr>
-        <p:blipFill>
-          <a:blip r:embed="rId1"/>
-          <a:stretch>
-            <a:fillRect/>
-          </a:stretch>
-        </p:blipFill>
-        <p:spPr>
-          <a:xfrm>
-            <a:off x="1042416" y="3666744"/>
-            <a:ext cx="219456" cy="219456"/>
-          </a:xfrm>
-          <a:prstGeom prst="rect">
-            <a:avLst/>
-          </a:prstGeom>
-        </p:spPr>
-      </p:pic>
-      <p:sp>
-        <p:nvSpPr>
-          <p:cNvPr id="16" name="Text 13"/>
-          <p:cNvSpPr/>
-          <p:nvPr/>
-        </p:nvSpPr>
-        <p:spPr>
-          <a:xfrm>
-            <a:off x="877824" y="4178808"/>
-            <a:ext cx="3017520" cy="457200"/>
-          </a:xfrm>
-          <a:prstGeom prst="rect">
-            <a:avLst/>
-          </a:prstGeom>
-          <a:noFill/>
-          <a:ln/>
-        </p:spPr>
-        <p:txBody>
-          <a:bodyPr wrap="square" lIns="0" tIns="0" rIns="0" bIns="0" rtlCol="0" anchor="ctr"/>
-          <a:lstStyle/>
-          <a:p>
-            <a:pPr indent="0" marL="0">
-              <a:buNone/>
-            </a:pPr>
-            <a:r>
-              <a:rPr lang="en-US" sz="1450" b="1" dirty="0">
-                <a:solidFill>
-                  <a:srgbClr val="111418"/>
-                </a:solidFill>
-                <a:latin typeface="Calibri" pitchFamily="34" charset="0"/>
-                <a:ea typeface="Calibri" pitchFamily="34" charset="-122"/>
-                <a:cs typeface="Calibri" pitchFamily="34" charset="-120"/>
-              </a:rPr>
-              <a:t>Бесплатный и открытый</a:t>
-            </a:r>
-            <a:endParaRPr lang="en-US" sz="1450" dirty="0"/>
-          </a:p>
-        </p:txBody>
-      </p:sp>
-      <p:sp>
-        <p:nvSpPr>
-          <p:cNvPr id="17" name="Text 14"/>
-          <p:cNvSpPr/>
-          <p:nvPr/>
-        </p:nvSpPr>
-        <p:spPr>
-          <a:xfrm>
-            <a:off x="877824" y="4617720"/>
-            <a:ext cx="3017520" cy="731520"/>
-          </a:xfrm>
-          <a:prstGeom prst="rect">
-            <a:avLst/>
-          </a:prstGeom>
-          <a:noFill/>
-          <a:ln/>
-        </p:spPr>
-        <p:txBody>
-          <a:bodyPr wrap="square" lIns="0" tIns="0" rIns="0" bIns="0" rtlCol="0" anchor="t"/>
-          <a:lstStyle/>
-          <a:p>
-            <a:pPr indent="0" marL="0">
-              <a:lnSpc>
-                <a:spcPct val="103000"/>
-              </a:lnSpc>
-              <a:buNone/>
-            </a:pPr>
-            <a:r>
-              <a:rPr lang="en-US" sz="1200" dirty="0">
-                <a:solidFill>
-                  <a:srgbClr val="33383F"/>
-                </a:solidFill>
-                <a:latin typeface="Calibri" pitchFamily="34" charset="0"/>
-                <a:ea typeface="Calibri" pitchFamily="34" charset="-122"/>
-                <a:cs typeface="Calibri" pitchFamily="34" charset="-120"/>
-              </a:rPr>
-              <a:t>нет роялти и лицензионных платежей — критично для инди</a:t>
-            </a:r>
-            <a:endParaRPr lang="en-US" sz="1200" dirty="0"/>
-          </a:p>
-        </p:txBody>
-      </p:sp>
-      <p:sp>
-        <p:nvSpPr>
-          <p:cNvPr id="18" name="Shape 15"/>
-          <p:cNvSpPr/>
-          <p:nvPr/>
-        </p:nvSpPr>
-        <p:spPr>
-          <a:xfrm>
-            <a:off x="4352544" y="3246120"/>
-            <a:ext cx="3474720" cy="2194560"/>
-          </a:xfrm>
-          <a:prstGeom prst="roundRect">
-            <a:avLst>
-              <a:gd name="adj" fmla="val 3750"/>
-            </a:avLst>
-          </a:prstGeom>
-          <a:solidFill>
-            <a:srgbClr val="EAF6FC"/>
-          </a:solidFill>
-          <a:ln w="12700">
-            <a:solidFill>
-              <a:srgbClr val="DCE6EC"/>
-            </a:solidFill>
-            <a:prstDash val="solid"/>
-          </a:ln>
-          <a:effectLst>
-            <a:outerShdw sx="100000" sy="100000" kx="0" ky="0" algn="bl" rotWithShape="0" blurRad="88900" dist="25400" dir="5400000">
-              <a:srgbClr val="B8C9D4">
-                <a:alpha val="22000"/>
-              </a:srgbClr>
-            </a:outerShdw>
-          </a:effectLst>
-        </p:spPr>
-      </p:sp>
-      <p:sp>
-        <p:nvSpPr>
-          <p:cNvPr id="19" name="Shape 16"/>
-          <p:cNvSpPr/>
-          <p:nvPr/>
-        </p:nvSpPr>
-        <p:spPr>
-          <a:xfrm>
-            <a:off x="4590288" y="3502152"/>
-            <a:ext cx="548640" cy="548640"/>
-          </a:xfrm>
-          <a:prstGeom prst="ellipse">
-            <a:avLst/>
-          </a:prstGeom>
-          <a:solidFill>
-            <a:srgbClr val="1F9BD8"/>
-          </a:solidFill>
-          <a:ln/>
-          <a:effectLst>
-            <a:outerShdw sx="100000" sy="100000" kx="0" ky="0" algn="bl" rotWithShape="0" blurRad="88900" dist="25400" dir="5400000">
-              <a:srgbClr val="B8C9D4">
-                <a:alpha val="22000"/>
-              </a:srgbClr>
-            </a:outerShdw>
-          </a:effectLst>
-        </p:spPr>
-      </p:sp>
-      <p:pic>
-        <p:nvPicPr>
-          <p:cNvPr id="20" name="Image 1" descr="icons/puzzle.png"/>
-          <p:cNvPicPr>
-            <a:picLocks noChangeAspect="1"/>
-          </p:cNvPicPr>
-          <p:nvPr/>
-        </p:nvPicPr>
-        <p:blipFill>
-          <a:blip r:embed="rId2"/>
-          <a:stretch>
-            <a:fillRect/>
-          </a:stretch>
-        </p:blipFill>
-        <p:spPr>
-          <a:xfrm>
-            <a:off x="4754880" y="3666744"/>
-            <a:ext cx="219456" cy="219456"/>
-          </a:xfrm>
-          <a:prstGeom prst="rect">
-            <a:avLst/>
-          </a:prstGeom>
-        </p:spPr>
-      </p:pic>
-      <p:sp>
-        <p:nvSpPr>
-          <p:cNvPr id="21" name="Text 17"/>
-          <p:cNvSpPr/>
-          <p:nvPr/>
-        </p:nvSpPr>
-        <p:spPr>
-          <a:xfrm>
-            <a:off x="4590288" y="4178808"/>
-            <a:ext cx="3017520" cy="457200"/>
-          </a:xfrm>
-          <a:prstGeom prst="rect">
-            <a:avLst/>
-          </a:prstGeom>
-          <a:noFill/>
-          <a:ln/>
-        </p:spPr>
-        <p:txBody>
-          <a:bodyPr wrap="square" lIns="0" tIns="0" rIns="0" bIns="0" rtlCol="0" anchor="ctr"/>
-          <a:lstStyle/>
-          <a:p>
-            <a:pPr indent="0" marL="0">
-              <a:buNone/>
-            </a:pPr>
-            <a:r>
-              <a:rPr lang="en-US" sz="1450" b="1" dirty="0">
-                <a:solidFill>
-                  <a:srgbClr val="111418"/>
-                </a:solidFill>
-                <a:latin typeface="Calibri" pitchFamily="34" charset="0"/>
-                <a:ea typeface="Calibri" pitchFamily="34" charset="-122"/>
-                <a:cs typeface="Calibri" pitchFamily="34" charset="-120"/>
-              </a:rPr>
-              <a:t>Нативная система плагинов</a:t>
-            </a:r>
-            <a:endParaRPr lang="en-US" sz="1450" dirty="0"/>
-          </a:p>
-        </p:txBody>
-      </p:sp>
-      <p:sp>
-        <p:nvSpPr>
-          <p:cNvPr id="22" name="Text 18"/>
-          <p:cNvSpPr/>
-          <p:nvPr/>
-        </p:nvSpPr>
-        <p:spPr>
-          <a:xfrm>
-            <a:off x="4590288" y="4617720"/>
-            <a:ext cx="3017520" cy="731520"/>
-          </a:xfrm>
-          <a:prstGeom prst="rect">
-            <a:avLst/>
-          </a:prstGeom>
-          <a:noFill/>
-          <a:ln/>
-        </p:spPr>
-        <p:txBody>
-          <a:bodyPr wrap="square" lIns="0" tIns="0" rIns="0" bIns="0" rtlCol="0" anchor="t"/>
-          <a:lstStyle/>
-          <a:p>
-            <a:pPr indent="0" marL="0">
-              <a:lnSpc>
-                <a:spcPct val="103000"/>
-              </a:lnSpc>
-              <a:buNone/>
-            </a:pPr>
-            <a:r>
-              <a:rPr lang="en-US" sz="1200" dirty="0">
-                <a:solidFill>
-                  <a:srgbClr val="33383F"/>
-                </a:solidFill>
-                <a:latin typeface="Calibri" pitchFamily="34" charset="0"/>
-                <a:ea typeface="Calibri" pitchFamily="34" charset="-122"/>
-                <a:cs typeface="Calibri" pitchFamily="34" charset="-120"/>
-              </a:rPr>
-              <a:t>EditorPlugin, автозагрузка, кастомные панели редактора «из коробки»</a:t>
-            </a:r>
-            <a:endParaRPr lang="en-US" sz="1200" dirty="0"/>
-          </a:p>
-        </p:txBody>
-      </p:sp>
-      <p:sp>
-        <p:nvSpPr>
-          <p:cNvPr id="23" name="Shape 19"/>
-          <p:cNvSpPr/>
-          <p:nvPr/>
-        </p:nvSpPr>
-        <p:spPr>
-          <a:xfrm>
-            <a:off x="8065008" y="3246120"/>
-            <a:ext cx="3474720" cy="2194560"/>
-          </a:xfrm>
-          <a:prstGeom prst="roundRect">
-            <a:avLst>
-              <a:gd name="adj" fmla="val 3750"/>
-            </a:avLst>
-          </a:prstGeom>
-          <a:solidFill>
-            <a:srgbClr val="FFFFFF"/>
-          </a:solidFill>
-          <a:ln w="12700">
-            <a:solidFill>
-              <a:srgbClr val="DCE6EC"/>
-            </a:solidFill>
-            <a:prstDash val="solid"/>
-          </a:ln>
-          <a:effectLst>
-            <a:outerShdw sx="100000" sy="100000" kx="0" ky="0" algn="bl" rotWithShape="0" blurRad="88900" dist="25400" dir="5400000">
-              <a:srgbClr val="B8C9D4">
-                <a:alpha val="22000"/>
-              </a:srgbClr>
-            </a:outerShdw>
-          </a:effectLst>
-        </p:spPr>
-      </p:sp>
-      <p:sp>
-        <p:nvSpPr>
-          <p:cNvPr id="24" name="Shape 20"/>
-          <p:cNvSpPr/>
-          <p:nvPr/>
-        </p:nvSpPr>
-        <p:spPr>
-          <a:xfrm>
-            <a:off x="8302752" y="3502152"/>
-            <a:ext cx="548640" cy="548640"/>
-          </a:xfrm>
-          <a:prstGeom prst="ellipse">
-            <a:avLst/>
-          </a:prstGeom>
-          <a:solidFill>
-            <a:srgbClr val="1F9BD8"/>
-          </a:solidFill>
-          <a:ln/>
-          <a:effectLst>
-            <a:outerShdw sx="100000" sy="100000" kx="0" ky="0" algn="bl" rotWithShape="0" blurRad="88900" dist="25400" dir="5400000">
-              <a:srgbClr val="B8C9D4">
-                <a:alpha val="22000"/>
-              </a:srgbClr>
-            </a:outerShdw>
-          </a:effectLst>
-        </p:spPr>
-      </p:sp>
-      <p:pic>
-        <p:nvPicPr>
-          <p:cNvPr id="25" name="Image 2" descr="icons/bolt.png"/>
-          <p:cNvPicPr>
-            <a:picLocks noChangeAspect="1"/>
-          </p:cNvPicPr>
-          <p:nvPr/>
-        </p:nvPicPr>
-        <p:blipFill>
-          <a:blip r:embed="rId3"/>
-          <a:stretch>
-            <a:fillRect/>
-          </a:stretch>
-        </p:blipFill>
-        <p:spPr>
-          <a:xfrm>
-            <a:off x="8467344" y="3666744"/>
-            <a:ext cx="219456" cy="219456"/>
-          </a:xfrm>
-          <a:prstGeom prst="rect">
-            <a:avLst/>
-          </a:prstGeom>
-        </p:spPr>
-      </p:pic>
-      <p:sp>
-        <p:nvSpPr>
-          <p:cNvPr id="26" name="Text 21"/>
-          <p:cNvSpPr/>
-          <p:nvPr/>
-        </p:nvSpPr>
-        <p:spPr>
-          <a:xfrm>
-            <a:off x="8302752" y="4178808"/>
-            <a:ext cx="3017520" cy="457200"/>
-          </a:xfrm>
-          <a:prstGeom prst="rect">
-            <a:avLst/>
-          </a:prstGeom>
-          <a:noFill/>
-          <a:ln/>
-        </p:spPr>
-        <p:txBody>
-          <a:bodyPr wrap="square" lIns="0" tIns="0" rIns="0" bIns="0" rtlCol="0" anchor="ctr"/>
-          <a:lstStyle/>
-          <a:p>
-            <a:pPr indent="0" marL="0">
-              <a:buNone/>
-            </a:pPr>
-            <a:r>
-              <a:rPr lang="en-US" sz="1450" b="1" dirty="0">
-                <a:solidFill>
-                  <a:srgbClr val="111418"/>
-                </a:solidFill>
-                <a:latin typeface="Calibri" pitchFamily="34" charset="0"/>
-                <a:ea typeface="Calibri" pitchFamily="34" charset="-122"/>
-                <a:cs typeface="Calibri" pitchFamily="34" charset="-120"/>
-              </a:rPr>
-              <a:t>GDScript + быстрый цикл</a:t>
-            </a:r>
-            <a:endParaRPr lang="en-US" sz="1450" dirty="0"/>
-          </a:p>
-        </p:txBody>
-      </p:sp>
-      <p:sp>
-        <p:nvSpPr>
-          <p:cNvPr id="27" name="Text 22"/>
-          <p:cNvSpPr/>
-          <p:nvPr/>
-        </p:nvSpPr>
-        <p:spPr>
-          <a:xfrm>
-            <a:off x="8302752" y="4617720"/>
-            <a:ext cx="3017520" cy="731520"/>
-          </a:xfrm>
-          <a:prstGeom prst="rect">
-            <a:avLst/>
-          </a:prstGeom>
-          <a:noFill/>
-          <a:ln/>
-        </p:spPr>
-        <p:txBody>
-          <a:bodyPr wrap="square" lIns="0" tIns="0" rIns="0" bIns="0" rtlCol="0" anchor="t"/>
-          <a:lstStyle/>
-          <a:p>
-            <a:pPr indent="0" marL="0">
-              <a:lnSpc>
-                <a:spcPct val="103000"/>
-              </a:lnSpc>
-              <a:buNone/>
-            </a:pPr>
-            <a:r>
-              <a:rPr lang="en-US" sz="1200" dirty="0">
-                <a:solidFill>
-                  <a:srgbClr val="33383F"/>
-                </a:solidFill>
-                <a:latin typeface="Calibri" pitchFamily="34" charset="0"/>
-                <a:ea typeface="Calibri" pitchFamily="34" charset="-122"/>
-                <a:cs typeface="Calibri" pitchFamily="34" charset="-120"/>
-              </a:rPr>
-              <a:t>низкий порог входа, мгновенная итерация в редакторе</a:t>
-            </a:r>
-            <a:endParaRPr lang="en-US" sz="1200" dirty="0"/>
-          </a:p>
-        </p:txBody>
-      </p:sp>
-    </p:spTree>
-  </p:cSld>
-  <p:clrMapOvr>
-    <a:masterClrMapping/>
-  </p:clrMapOvr>
-</p:sld>
-</file>
-
-<file path=ppt/slides/slide4.xml><?xml version="1.0" encoding="utf-8"?>
+<file path=ppt/slides/slide5.xml><?xml version="1.0" encoding="utf-8"?>
 <p:sld xmlns:a="http://schemas.openxmlformats.org/drawingml/2006/main" xmlns:r="http://schemas.openxmlformats.org/officeDocument/2006/relationships" xmlns:p="http://schemas.openxmlformats.org/presentationml/2006/main">
   <p:cSld>
     <p:bg>
@@ -6021,7 +6641,7 @@
         <p:spPr>
           <a:xfrm>
             <a:off x="640080" y="475488"/>
-            <a:ext cx="8229600" cy="300000"/>
+            <a:ext cx="8229600" cy="320000"/>
           </a:xfrm>
           <a:prstGeom prst="rect">
             <a:avLst/>
@@ -6033,11 +6653,11 @@
           <a:bodyPr wrap="square" lIns="0" tIns="0" rIns="0" bIns="0" rtlCol="0" anchor="ctr"/>
           <a:lstStyle/>
           <a:p>
-            <a:pPr algn="l" indent="0" marL="0">
-              <a:buNone/>
-            </a:pPr>
-            <a:r>
-              <a:rPr lang="ru-RU" sz="1500" b="1" kern="0" dirty="0">
+            <a:pPr marL="0" indent="0" algn="l">
+              <a:buNone/>
+            </a:pPr>
+            <a:r>
+              <a:rPr lang="ru-RU" sz="2000" b="1" kern="0" dirty="0">
                 <a:solidFill>
                   <a:srgbClr val="1F9BD8"/>
                 </a:solidFill>
@@ -6058,7 +6678,7 @@
         </p:nvSpPr>
         <p:spPr>
           <a:xfrm>
-            <a:off x="640080" y="749808"/>
+            <a:off x="640080" y="820000"/>
             <a:ext cx="10000000" cy="640080"/>
           </a:xfrm>
           <a:prstGeom prst="rect">
@@ -6071,7 +6691,7 @@
           <a:bodyPr wrap="square" lIns="0" tIns="0" rIns="0" bIns="0" rtlCol="0" anchor="ctr"/>
           <a:lstStyle/>
           <a:p>
-            <a:pPr algn="l" indent="0" marL="0">
+            <a:pPr marL="0" indent="0" algn="l">
               <a:buNone/>
             </a:pPr>
             <a:r>
@@ -6109,7 +6729,7 @@
           <a:bodyPr wrap="square" lIns="0" tIns="0" rIns="0" bIns="0" rtlCol="0" anchor="ctr"/>
           <a:lstStyle/>
           <a:p>
-            <a:pPr algn="r" indent="0" marL="0">
+            <a:pPr marL="0" indent="0" algn="r">
               <a:buNone/>
             </a:pPr>
             <a:r>
@@ -6134,8 +6754,8 @@
         </p:nvSpPr>
         <p:spPr>
           <a:xfrm>
-            <a:off x="640080" y="2650000"/>
-            <a:ext cx="2300000" cy="760000"/>
+            <a:off x="790080" y="2854602"/>
+            <a:ext cx="2300000" cy="972969"/>
           </a:xfrm>
           <a:prstGeom prst="chevron">
             <a:avLst>
@@ -6143,17 +6763,13 @@
             </a:avLst>
           </a:prstGeom>
           <a:solidFill>
-            <a:srgbClr val="BBD3E6"/>
-          </a:solidFill>
-          <a:ln w="6350">
-            <a:solidFill>
-              <a:srgbClr val="9AA0A6"/>
-            </a:solidFill>
-          </a:ln>
+            <a:srgbClr val="5AA6D2"/>
+          </a:solidFill>
+          <a:ln/>
           <a:effectLst>
-            <a:outerShdw sx="100000" sy="100000" kx="0" ky="0" algn="bl" rotWithShape="0" blurRad="76200" dist="20000" dir="5400000">
+            <a:outerShdw blurRad="76200" dist="20000" dir="5400000" algn="bl" rotWithShape="0">
               <a:srgbClr val="B8C9D4">
-                <a:alpha val="20000"/>
+                <a:alpha val="22000"/>
               </a:srgbClr>
             </a:outerShdw>
           </a:effectLst>
@@ -6167,8 +6783,8 @@
         </p:nvSpPr>
         <p:spPr>
           <a:xfrm>
-            <a:off x="840080" y="2650000"/>
-            <a:ext cx="1960000" cy="760000"/>
+            <a:off x="990080" y="2854602"/>
+            <a:ext cx="1960000" cy="972969"/>
           </a:xfrm>
           <a:prstGeom prst="rect">
             <a:avLst/>
@@ -6180,13 +6796,13 @@
           <a:bodyPr wrap="square" lIns="0" tIns="0" rIns="0" bIns="0" rtlCol="0" anchor="ctr"/>
           <a:lstStyle/>
           <a:p>
-            <a:pPr algn="ctr" indent="0" marL="0">
-              <a:buNone/>
-            </a:pPr>
-            <a:r>
-              <a:rPr lang="ru-RU" sz="1150" b="1" kern="0" dirty="0">
-                <a:solidFill>
-                  <a:srgbClr val="2B2B2B"/>
+            <a:pPr marL="0" indent="0" algn="ctr">
+              <a:buNone/>
+            </a:pPr>
+            <a:r>
+              <a:rPr lang="ru-RU" sz="1400" b="1" kern="0" dirty="0">
+                <a:solidFill>
+                  <a:srgbClr val="FFFFFF"/>
                 </a:solidFill>
                 <a:latin typeface="Calibri" pitchFamily="34" charset="0"/>
                 <a:ea typeface="Calibri" pitchFamily="34" charset="-122"/>
@@ -6205,8 +6821,8 @@
         </p:nvSpPr>
         <p:spPr>
           <a:xfrm>
-            <a:off x="790080" y="3714000"/>
-            <a:ext cx="130000" cy="130000"/>
+            <a:off x="940080" y="4115142"/>
+            <a:ext cx="130000" cy="166429"/>
           </a:xfrm>
           <a:prstGeom prst="rect">
             <a:avLst/>
@@ -6225,8 +6841,8 @@
         </p:nvSpPr>
         <p:spPr>
           <a:xfrm>
-            <a:off x="1020080" y="3670000"/>
-            <a:ext cx="1880000" cy="300000"/>
+            <a:off x="1170080" y="4023504"/>
+            <a:ext cx="1880000" cy="384067"/>
           </a:xfrm>
           <a:prstGeom prst="rect">
             <a:avLst/>
@@ -6238,11 +6854,11 @@
           <a:bodyPr wrap="square" lIns="0" tIns="0" rIns="0" bIns="0" rtlCol="0" anchor="ctr"/>
           <a:lstStyle/>
           <a:p>
-            <a:pPr algn="l" indent="0" marL="0">
-              <a:buNone/>
-            </a:pPr>
-            <a:r>
-              <a:rPr lang="ru-RU" sz="1100" kern="0" dirty="0">
+            <a:pPr marL="0" indent="0" algn="l">
+              <a:buNone/>
+            </a:pPr>
+            <a:r>
+              <a:rPr lang="ru-RU" sz="1200" kern="0" dirty="0">
                 <a:solidFill>
                   <a:srgbClr val="444444"/>
                 </a:solidFill>
@@ -6263,8 +6879,8 @@
         </p:nvSpPr>
         <p:spPr>
           <a:xfrm>
-            <a:off x="790080" y="4074000"/>
-            <a:ext cx="130000" cy="130000"/>
+            <a:off x="940080" y="4475142"/>
+            <a:ext cx="130000" cy="166429"/>
           </a:xfrm>
           <a:prstGeom prst="rect">
             <a:avLst/>
@@ -6283,8 +6899,8 @@
         </p:nvSpPr>
         <p:spPr>
           <a:xfrm>
-            <a:off x="1020080" y="4030000"/>
-            <a:ext cx="1880000" cy="300000"/>
+            <a:off x="1170080" y="4383504"/>
+            <a:ext cx="1880000" cy="384067"/>
           </a:xfrm>
           <a:prstGeom prst="rect">
             <a:avLst/>
@@ -6296,11 +6912,11 @@
           <a:bodyPr wrap="square" lIns="0" tIns="0" rIns="0" bIns="0" rtlCol="0" anchor="ctr"/>
           <a:lstStyle/>
           <a:p>
-            <a:pPr algn="l" indent="0" marL="0">
-              <a:buNone/>
-            </a:pPr>
-            <a:r>
-              <a:rPr lang="ru-RU" sz="1100" kern="0" dirty="0">
+            <a:pPr marL="0" indent="0" algn="l">
+              <a:buNone/>
+            </a:pPr>
+            <a:r>
+              <a:rPr lang="ru-RU" sz="1200" kern="0" dirty="0">
                 <a:solidFill>
                   <a:srgbClr val="444444"/>
                 </a:solidFill>
@@ -6315,72 +6931,14 @@
       </p:sp>
       <p:sp>
         <p:nvSpPr>
-          <p:cNvPr id="110" name="S"/>
-          <p:cNvSpPr/>
-          <p:nvPr/>
-        </p:nvSpPr>
-        <p:spPr>
-          <a:xfrm>
-            <a:off x="790080" y="4434000"/>
-            <a:ext cx="130000" cy="130000"/>
-          </a:xfrm>
-          <a:prstGeom prst="rect">
-            <a:avLst/>
-          </a:prstGeom>
-          <a:solidFill>
-            <a:srgbClr val="9AA3AD"/>
-          </a:solidFill>
-          <a:ln/>
-        </p:spPr>
-      </p:sp>
-      <p:sp>
-        <p:nvSpPr>
-          <p:cNvPr id="111" name="T"/>
-          <p:cNvSpPr/>
-          <p:nvPr/>
-        </p:nvSpPr>
-        <p:spPr>
-          <a:xfrm>
-            <a:off x="1020080" y="4390000"/>
-            <a:ext cx="1880000" cy="300000"/>
-          </a:xfrm>
-          <a:prstGeom prst="rect">
-            <a:avLst/>
-          </a:prstGeom>
-          <a:noFill/>
-          <a:ln/>
-        </p:spPr>
-        <p:txBody>
-          <a:bodyPr wrap="square" lIns="0" tIns="0" rIns="0" bIns="0" rtlCol="0" anchor="ctr"/>
-          <a:lstStyle/>
-          <a:p>
-            <a:pPr algn="l" indent="0" marL="0">
-              <a:buNone/>
-            </a:pPr>
-            <a:r>
-              <a:rPr lang="ru-RU" sz="1100" kern="0" dirty="0">
-                <a:solidFill>
-                  <a:srgbClr val="444444"/>
-                </a:solidFill>
-                <a:latin typeface="Calibri" pitchFamily="34" charset="0"/>
-                <a:ea typeface="Calibri" pitchFamily="34" charset="-122"/>
-                <a:cs typeface="Calibri" pitchFamily="34" charset="-120"/>
-              </a:rPr>
-              <a:t>Профиль модели</a:t>
-            </a:r>
-          </a:p>
-        </p:txBody>
-      </p:sp>
-      <p:sp>
-        <p:nvSpPr>
           <p:cNvPr id="112" name="S"/>
           <p:cNvSpPr/>
           <p:nvPr/>
         </p:nvSpPr>
         <p:spPr>
           <a:xfrm>
-            <a:off x="2760080" y="2650000"/>
-            <a:ext cx="2300000" cy="760000"/>
+            <a:off x="2910080" y="2854602"/>
+            <a:ext cx="2300000" cy="972969"/>
           </a:xfrm>
           <a:prstGeom prst="chevron">
             <a:avLst>
@@ -6388,17 +6946,13 @@
             </a:avLst>
           </a:prstGeom>
           <a:solidFill>
-            <a:srgbClr val="F3C89B"/>
-          </a:solidFill>
-          <a:ln w="6350">
-            <a:solidFill>
-              <a:srgbClr val="9AA0A6"/>
-            </a:solidFill>
-          </a:ln>
+            <a:srgbClr val="3D97CB"/>
+          </a:solidFill>
+          <a:ln/>
           <a:effectLst>
-            <a:outerShdw sx="100000" sy="100000" kx="0" ky="0" algn="bl" rotWithShape="0" blurRad="76200" dist="20000" dir="5400000">
+            <a:outerShdw blurRad="76200" dist="20000" dir="5400000" algn="bl" rotWithShape="0">
               <a:srgbClr val="B8C9D4">
-                <a:alpha val="20000"/>
+                <a:alpha val="22000"/>
               </a:srgbClr>
             </a:outerShdw>
           </a:effectLst>
@@ -6412,8 +6966,8 @@
         </p:nvSpPr>
         <p:spPr>
           <a:xfrm>
-            <a:off x="2960080" y="2650000"/>
-            <a:ext cx="1960000" cy="760000"/>
+            <a:off x="3110080" y="2854602"/>
+            <a:ext cx="1960000" cy="972969"/>
           </a:xfrm>
           <a:prstGeom prst="rect">
             <a:avLst/>
@@ -6425,13 +6979,13 @@
           <a:bodyPr wrap="square" lIns="0" tIns="0" rIns="0" bIns="0" rtlCol="0" anchor="ctr"/>
           <a:lstStyle/>
           <a:p>
-            <a:pPr algn="ctr" indent="0" marL="0">
-              <a:buNone/>
-            </a:pPr>
-            <a:r>
-              <a:rPr lang="ru-RU" sz="1150" b="1" kern="0" dirty="0">
-                <a:solidFill>
-                  <a:srgbClr val="2B2B2B"/>
+            <a:pPr marL="0" indent="0" algn="ctr">
+              <a:buNone/>
+            </a:pPr>
+            <a:r>
+              <a:rPr lang="ru-RU" sz="1400" b="1" kern="0" dirty="0">
+                <a:solidFill>
+                  <a:srgbClr val="FFFFFF"/>
                 </a:solidFill>
                 <a:latin typeface="Calibri" pitchFamily="34" charset="0"/>
                 <a:ea typeface="Calibri" pitchFamily="34" charset="-122"/>
@@ -6450,8 +7004,8 @@
         </p:nvSpPr>
         <p:spPr>
           <a:xfrm>
-            <a:off x="2910080" y="3714000"/>
-            <a:ext cx="130000" cy="130000"/>
+            <a:off x="3060080" y="4115142"/>
+            <a:ext cx="130000" cy="166429"/>
           </a:xfrm>
           <a:prstGeom prst="rect">
             <a:avLst/>
@@ -6470,8 +7024,8 @@
         </p:nvSpPr>
         <p:spPr>
           <a:xfrm>
-            <a:off x="3140080" y="3670000"/>
-            <a:ext cx="1880000" cy="300000"/>
+            <a:off x="3290080" y="4023504"/>
+            <a:ext cx="1880000" cy="384067"/>
           </a:xfrm>
           <a:prstGeom prst="rect">
             <a:avLst/>
@@ -6483,11 +7037,11 @@
           <a:bodyPr wrap="square" lIns="0" tIns="0" rIns="0" bIns="0" rtlCol="0" anchor="ctr"/>
           <a:lstStyle/>
           <a:p>
-            <a:pPr algn="l" indent="0" marL="0">
-              <a:buNone/>
-            </a:pPr>
-            <a:r>
-              <a:rPr lang="ru-RU" sz="1100" kern="0" dirty="0">
+            <a:pPr marL="0" indent="0" algn="l">
+              <a:buNone/>
+            </a:pPr>
+            <a:r>
+              <a:rPr lang="ru-RU" sz="1200" kern="0" dirty="0">
                 <a:solidFill>
                   <a:srgbClr val="444444"/>
                 </a:solidFill>
@@ -6508,8 +7062,8 @@
         </p:nvSpPr>
         <p:spPr>
           <a:xfrm>
-            <a:off x="2910080" y="4074000"/>
-            <a:ext cx="130000" cy="130000"/>
+            <a:off x="3060080" y="4475142"/>
+            <a:ext cx="130000" cy="166429"/>
           </a:xfrm>
           <a:prstGeom prst="rect">
             <a:avLst/>
@@ -6528,8 +7082,8 @@
         </p:nvSpPr>
         <p:spPr>
           <a:xfrm>
-            <a:off x="3140080" y="4030000"/>
-            <a:ext cx="1880000" cy="300000"/>
+            <a:off x="3290080" y="4383504"/>
+            <a:ext cx="1880000" cy="384067"/>
           </a:xfrm>
           <a:prstGeom prst="rect">
             <a:avLst/>
@@ -6541,11 +7095,11 @@
           <a:bodyPr wrap="square" lIns="0" tIns="0" rIns="0" bIns="0" rtlCol="0" anchor="ctr"/>
           <a:lstStyle/>
           <a:p>
-            <a:pPr algn="l" indent="0" marL="0">
-              <a:buNone/>
-            </a:pPr>
-            <a:r>
-              <a:rPr lang="ru-RU" sz="1100" kern="0" dirty="0">
+            <a:pPr marL="0" indent="0" algn="l">
+              <a:buNone/>
+            </a:pPr>
+            <a:r>
+              <a:rPr lang="ru-RU" sz="1200" kern="0" dirty="0" err="1">
                 <a:solidFill>
                   <a:srgbClr val="444444"/>
                 </a:solidFill>
@@ -6553,30 +7107,18 @@
                 <a:ea typeface="Calibri" pitchFamily="34" charset="-122"/>
                 <a:cs typeface="Calibri" pitchFamily="34" charset="-120"/>
               </a:rPr>
-              <a:t>Открытие сессии</a:t>
-            </a:r>
-          </a:p>
-        </p:txBody>
-      </p:sp>
-      <p:sp>
-        <p:nvSpPr>
-          <p:cNvPr id="118" name="S"/>
-          <p:cNvSpPr/>
-          <p:nvPr/>
-        </p:nvSpPr>
-        <p:spPr>
-          <a:xfrm>
-            <a:off x="2910080" y="4434000"/>
-            <a:ext cx="130000" cy="130000"/>
-          </a:xfrm>
-          <a:prstGeom prst="rect">
-            <a:avLst/>
-          </a:prstGeom>
-          <a:solidFill>
-            <a:srgbClr val="9AA3AD"/>
-          </a:solidFill>
-          <a:ln/>
-        </p:spPr>
+              <a:t>session_id</a:t>
+            </a:r>
+            <a:endParaRPr lang="ru-RU" sz="1200" kern="0" dirty="0">
+              <a:solidFill>
+                <a:srgbClr val="444444"/>
+              </a:solidFill>
+              <a:latin typeface="Calibri" pitchFamily="34" charset="0"/>
+              <a:ea typeface="Calibri" pitchFamily="34" charset="-122"/>
+              <a:cs typeface="Calibri" pitchFamily="34" charset="-120"/>
+            </a:endParaRPr>
+          </a:p>
+        </p:txBody>
       </p:sp>
       <p:sp>
         <p:nvSpPr>
@@ -6586,8 +7128,8 @@
         </p:nvSpPr>
         <p:spPr>
           <a:xfrm>
-            <a:off x="3140080" y="4390000"/>
-            <a:ext cx="1880000" cy="300000"/>
+            <a:off x="3290080" y="4743504"/>
+            <a:ext cx="1880000" cy="384067"/>
           </a:xfrm>
           <a:prstGeom prst="rect">
             <a:avLst/>
@@ -6599,20 +7141,17 @@
           <a:bodyPr wrap="square" lIns="0" tIns="0" rIns="0" bIns="0" rtlCol="0" anchor="ctr"/>
           <a:lstStyle/>
           <a:p>
-            <a:pPr algn="l" indent="0" marL="0">
-              <a:buNone/>
-            </a:pPr>
-            <a:r>
-              <a:rPr lang="ru-RU" sz="1100" kern="0" dirty="0">
-                <a:solidFill>
-                  <a:srgbClr val="444444"/>
-                </a:solidFill>
-                <a:latin typeface="Calibri" pitchFamily="34" charset="0"/>
-                <a:ea typeface="Calibri" pitchFamily="34" charset="-122"/>
-                <a:cs typeface="Calibri" pitchFamily="34" charset="-120"/>
-              </a:rPr>
-              <a:t>session_id</a:t>
-            </a:r>
+            <a:pPr marL="0" indent="0" algn="l">
+              <a:buNone/>
+            </a:pPr>
+            <a:endParaRPr lang="ru-RU" sz="1100" kern="0" dirty="0">
+              <a:solidFill>
+                <a:srgbClr val="444444"/>
+              </a:solidFill>
+              <a:latin typeface="Calibri" pitchFamily="34" charset="0"/>
+              <a:ea typeface="Calibri" pitchFamily="34" charset="-122"/>
+              <a:cs typeface="Calibri" pitchFamily="34" charset="-120"/>
+            </a:endParaRPr>
           </a:p>
         </p:txBody>
       </p:sp>
@@ -6624,8 +7163,8 @@
         </p:nvSpPr>
         <p:spPr>
           <a:xfrm>
-            <a:off x="4880080" y="2650000"/>
-            <a:ext cx="2300000" cy="760000"/>
+            <a:off x="5030080" y="2854602"/>
+            <a:ext cx="2300000" cy="972969"/>
           </a:xfrm>
           <a:prstGeom prst="chevron">
             <a:avLst>
@@ -6633,17 +7172,13 @@
             </a:avLst>
           </a:prstGeom>
           <a:solidFill>
-            <a:srgbClr val="D2C8DF"/>
-          </a:solidFill>
-          <a:ln w="6350">
-            <a:solidFill>
-              <a:srgbClr val="9AA0A6"/>
-            </a:solidFill>
-          </a:ln>
+            <a:srgbClr val="2589C4"/>
+          </a:solidFill>
+          <a:ln/>
           <a:effectLst>
-            <a:outerShdw sx="100000" sy="100000" kx="0" ky="0" algn="bl" rotWithShape="0" blurRad="76200" dist="20000" dir="5400000">
+            <a:outerShdw blurRad="76200" dist="20000" dir="5400000" algn="bl" rotWithShape="0">
               <a:srgbClr val="B8C9D4">
-                <a:alpha val="20000"/>
+                <a:alpha val="22000"/>
               </a:srgbClr>
             </a:outerShdw>
           </a:effectLst>
@@ -6657,8 +7192,8 @@
         </p:nvSpPr>
         <p:spPr>
           <a:xfrm>
-            <a:off x="5080080" y="2650000"/>
-            <a:ext cx="1960000" cy="760000"/>
+            <a:off x="5230080" y="2854602"/>
+            <a:ext cx="1960000" cy="972969"/>
           </a:xfrm>
           <a:prstGeom prst="rect">
             <a:avLst/>
@@ -6670,13 +7205,13 @@
           <a:bodyPr wrap="square" lIns="0" tIns="0" rIns="0" bIns="0" rtlCol="0" anchor="ctr"/>
           <a:lstStyle/>
           <a:p>
-            <a:pPr algn="ctr" indent="0" marL="0">
-              <a:buNone/>
-            </a:pPr>
-            <a:r>
-              <a:rPr lang="ru-RU" sz="1150" b="1" kern="0" dirty="0">
-                <a:solidFill>
-                  <a:srgbClr val="2B2B2B"/>
+            <a:pPr marL="0" indent="0" algn="ctr">
+              <a:buNone/>
+            </a:pPr>
+            <a:r>
+              <a:rPr lang="ru-RU" sz="1400" b="1" kern="0" dirty="0">
+                <a:solidFill>
+                  <a:srgbClr val="FFFFFF"/>
                 </a:solidFill>
                 <a:latin typeface="Calibri" pitchFamily="34" charset="0"/>
                 <a:ea typeface="Calibri" pitchFamily="34" charset="-122"/>
@@ -6695,8 +7230,8 @@
         </p:nvSpPr>
         <p:spPr>
           <a:xfrm>
-            <a:off x="5030080" y="3714000"/>
-            <a:ext cx="130000" cy="130000"/>
+            <a:off x="5180080" y="4115142"/>
+            <a:ext cx="130000" cy="166429"/>
           </a:xfrm>
           <a:prstGeom prst="rect">
             <a:avLst/>
@@ -6715,8 +7250,8 @@
         </p:nvSpPr>
         <p:spPr>
           <a:xfrm>
-            <a:off x="5260080" y="3670000"/>
-            <a:ext cx="1880000" cy="300000"/>
+            <a:off x="5410080" y="4023504"/>
+            <a:ext cx="1880000" cy="384067"/>
           </a:xfrm>
           <a:prstGeom prst="rect">
             <a:avLst/>
@@ -6728,11 +7263,11 @@
           <a:bodyPr wrap="square" lIns="0" tIns="0" rIns="0" bIns="0" rtlCol="0" anchor="ctr"/>
           <a:lstStyle/>
           <a:p>
-            <a:pPr algn="l" indent="0" marL="0">
-              <a:buNone/>
-            </a:pPr>
-            <a:r>
-              <a:rPr lang="ru-RU" sz="1100" kern="0" dirty="0">
+            <a:pPr marL="0" indent="0" algn="l">
+              <a:buNone/>
+            </a:pPr>
+            <a:r>
+              <a:rPr lang="ru-RU" sz="1200" kern="0" dirty="0">
                 <a:solidFill>
                   <a:srgbClr val="444444"/>
                 </a:solidFill>
@@ -6753,8 +7288,8 @@
         </p:nvSpPr>
         <p:spPr>
           <a:xfrm>
-            <a:off x="5030080" y="4074000"/>
-            <a:ext cx="130000" cy="130000"/>
+            <a:off x="5180080" y="4475142"/>
+            <a:ext cx="130000" cy="166429"/>
           </a:xfrm>
           <a:prstGeom prst="rect">
             <a:avLst/>
@@ -6773,8 +7308,8 @@
         </p:nvSpPr>
         <p:spPr>
           <a:xfrm>
-            <a:off x="5260080" y="4030000"/>
-            <a:ext cx="1880000" cy="300000"/>
+            <a:off x="5410080" y="4383504"/>
+            <a:ext cx="1880000" cy="384067"/>
           </a:xfrm>
           <a:prstGeom prst="rect">
             <a:avLst/>
@@ -6786,11 +7321,11 @@
           <a:bodyPr wrap="square" lIns="0" tIns="0" rIns="0" bIns="0" rtlCol="0" anchor="ctr"/>
           <a:lstStyle/>
           <a:p>
-            <a:pPr algn="l" indent="0" marL="0">
-              <a:buNone/>
-            </a:pPr>
-            <a:r>
-              <a:rPr lang="ru-RU" sz="1100" kern="0" dirty="0">
+            <a:pPr marL="0" indent="0" algn="l">
+              <a:buNone/>
+            </a:pPr>
+            <a:r>
+              <a:rPr lang="ru-RU" sz="1200" kern="0" dirty="0">
                 <a:solidFill>
                   <a:srgbClr val="444444"/>
                 </a:solidFill>
@@ -6805,72 +7340,14 @@
       </p:sp>
       <p:sp>
         <p:nvSpPr>
-          <p:cNvPr id="126" name="S"/>
-          <p:cNvSpPr/>
-          <p:nvPr/>
-        </p:nvSpPr>
-        <p:spPr>
-          <a:xfrm>
-            <a:off x="5030080" y="4434000"/>
-            <a:ext cx="130000" cy="130000"/>
-          </a:xfrm>
-          <a:prstGeom prst="rect">
-            <a:avLst/>
-          </a:prstGeom>
-          <a:solidFill>
-            <a:srgbClr val="9AA3AD"/>
-          </a:solidFill>
-          <a:ln/>
-        </p:spPr>
-      </p:sp>
-      <p:sp>
-        <p:nvSpPr>
-          <p:cNvPr id="127" name="T"/>
-          <p:cNvSpPr/>
-          <p:nvPr/>
-        </p:nvSpPr>
-        <p:spPr>
-          <a:xfrm>
-            <a:off x="5260080" y="4390000"/>
-            <a:ext cx="1880000" cy="300000"/>
-          </a:xfrm>
-          <a:prstGeom prst="rect">
-            <a:avLst/>
-          </a:prstGeom>
-          <a:noFill/>
-          <a:ln/>
-        </p:spPr>
-        <p:txBody>
-          <a:bodyPr wrap="square" lIns="0" tIns="0" rIns="0" bIns="0" rtlCol="0" anchor="ctr"/>
-          <a:lstStyle/>
-          <a:p>
-            <a:pPr algn="l" indent="0" marL="0">
-              <a:buNone/>
-            </a:pPr>
-            <a:r>
-              <a:rPr lang="ru-RU" sz="1100" kern="0" dirty="0">
-                <a:solidFill>
-                  <a:srgbClr val="444444"/>
-                </a:solidFill>
-                <a:latin typeface="Calibri" pitchFamily="34" charset="0"/>
-                <a:ea typeface="Calibri" pitchFamily="34" charset="-122"/>
-                <a:cs typeface="Calibri" pitchFamily="34" charset="-120"/>
-              </a:rPr>
-              <a:t>Метки времени</a:t>
-            </a:r>
-          </a:p>
-        </p:txBody>
-      </p:sp>
-      <p:sp>
-        <p:nvSpPr>
           <p:cNvPr id="128" name="S"/>
           <p:cNvSpPr/>
           <p:nvPr/>
         </p:nvSpPr>
         <p:spPr>
           <a:xfrm>
-            <a:off x="7000080" y="2650000"/>
-            <a:ext cx="2300000" cy="760000"/>
+            <a:off x="7150080" y="2854602"/>
+            <a:ext cx="2300000" cy="972969"/>
           </a:xfrm>
           <a:prstGeom prst="chevron">
             <a:avLst>
@@ -6878,17 +7355,13 @@
             </a:avLst>
           </a:prstGeom>
           <a:solidFill>
-            <a:srgbClr val="EFE98C"/>
-          </a:solidFill>
-          <a:ln w="6350">
-            <a:solidFill>
-              <a:srgbClr val="9AA0A6"/>
-            </a:solidFill>
-          </a:ln>
+            <a:srgbClr val="1B7AB0"/>
+          </a:solidFill>
+          <a:ln/>
           <a:effectLst>
-            <a:outerShdw sx="100000" sy="100000" kx="0" ky="0" algn="bl" rotWithShape="0" blurRad="76200" dist="20000" dir="5400000">
+            <a:outerShdw blurRad="76200" dist="20000" dir="5400000" algn="bl" rotWithShape="0">
               <a:srgbClr val="B8C9D4">
-                <a:alpha val="20000"/>
+                <a:alpha val="22000"/>
               </a:srgbClr>
             </a:outerShdw>
           </a:effectLst>
@@ -6902,8 +7375,8 @@
         </p:nvSpPr>
         <p:spPr>
           <a:xfrm>
-            <a:off x="7200080" y="2650000"/>
-            <a:ext cx="1960000" cy="760000"/>
+            <a:off x="7350080" y="2854602"/>
+            <a:ext cx="1960000" cy="972969"/>
           </a:xfrm>
           <a:prstGeom prst="rect">
             <a:avLst/>
@@ -6915,13 +7388,13 @@
           <a:bodyPr wrap="square" lIns="0" tIns="0" rIns="0" bIns="0" rtlCol="0" anchor="ctr"/>
           <a:lstStyle/>
           <a:p>
-            <a:pPr algn="ctr" indent="0" marL="0">
-              <a:buNone/>
-            </a:pPr>
-            <a:r>
-              <a:rPr lang="ru-RU" sz="1150" b="1" kern="0" dirty="0">
-                <a:solidFill>
-                  <a:srgbClr val="2B2B2B"/>
+            <a:pPr marL="0" indent="0" algn="ctr">
+              <a:buNone/>
+            </a:pPr>
+            <a:r>
+              <a:rPr lang="ru-RU" sz="1400" b="1" kern="0" dirty="0">
+                <a:solidFill>
+                  <a:srgbClr val="FFFFFF"/>
                 </a:solidFill>
                 <a:latin typeface="Calibri" pitchFamily="34" charset="0"/>
                 <a:ea typeface="Calibri" pitchFamily="34" charset="-122"/>
@@ -6940,8 +7413,8 @@
         </p:nvSpPr>
         <p:spPr>
           <a:xfrm>
-            <a:off x="7150080" y="3714000"/>
-            <a:ext cx="130000" cy="130000"/>
+            <a:off x="7300080" y="4115142"/>
+            <a:ext cx="130000" cy="166429"/>
           </a:xfrm>
           <a:prstGeom prst="rect">
             <a:avLst/>
@@ -6960,8 +7433,8 @@
         </p:nvSpPr>
         <p:spPr>
           <a:xfrm>
-            <a:off x="7380080" y="3670000"/>
-            <a:ext cx="1880000" cy="300000"/>
+            <a:off x="7530080" y="4023504"/>
+            <a:ext cx="1880000" cy="384067"/>
           </a:xfrm>
           <a:prstGeom prst="rect">
             <a:avLst/>
@@ -6973,11 +7446,11 @@
           <a:bodyPr wrap="square" lIns="0" tIns="0" rIns="0" bIns="0" rtlCol="0" anchor="ctr"/>
           <a:lstStyle/>
           <a:p>
-            <a:pPr algn="l" indent="0" marL="0">
-              <a:buNone/>
-            </a:pPr>
-            <a:r>
-              <a:rPr lang="ru-RU" sz="1100" kern="0" dirty="0">
+            <a:pPr marL="0" indent="0" algn="l">
+              <a:buNone/>
+            </a:pPr>
+            <a:r>
+              <a:rPr lang="ru-RU" sz="1200" kern="0" dirty="0">
                 <a:solidFill>
                   <a:srgbClr val="444444"/>
                 </a:solidFill>
@@ -6985,7 +7458,7 @@
                 <a:ea typeface="Calibri" pitchFamily="34" charset="-122"/>
                 <a:cs typeface="Calibri" pitchFamily="34" charset="-120"/>
               </a:rPr>
-              <a:t>Батч → /ingest</a:t>
+              <a:t>По таймеру/буферу</a:t>
             </a:r>
           </a:p>
         </p:txBody>
@@ -6998,8 +7471,8 @@
         </p:nvSpPr>
         <p:spPr>
           <a:xfrm>
-            <a:off x="7150080" y="4074000"/>
-            <a:ext cx="130000" cy="130000"/>
+            <a:off x="7300080" y="4475142"/>
+            <a:ext cx="130000" cy="166429"/>
           </a:xfrm>
           <a:prstGeom prst="rect">
             <a:avLst/>
@@ -7018,8 +7491,8 @@
         </p:nvSpPr>
         <p:spPr>
           <a:xfrm>
-            <a:off x="7380080" y="4030000"/>
-            <a:ext cx="1880000" cy="300000"/>
+            <a:off x="7530080" y="4383504"/>
+            <a:ext cx="1880000" cy="384067"/>
           </a:xfrm>
           <a:prstGeom prst="rect">
             <a:avLst/>
@@ -7031,11 +7504,11 @@
           <a:bodyPr wrap="square" lIns="0" tIns="0" rIns="0" bIns="0" rtlCol="0" anchor="ctr"/>
           <a:lstStyle/>
           <a:p>
-            <a:pPr algn="l" indent="0" marL="0">
-              <a:buNone/>
-            </a:pPr>
-            <a:r>
-              <a:rPr lang="ru-RU" sz="1100" kern="0" dirty="0">
+            <a:pPr marL="0" indent="0" algn="l">
+              <a:buNone/>
+            </a:pPr>
+            <a:r>
+              <a:rPr lang="ru-RU" sz="1200" kern="0" dirty="0">
                 <a:solidFill>
                   <a:srgbClr val="444444"/>
                 </a:solidFill>
@@ -7043,64 +7516,6 @@
                 <a:ea typeface="Calibri" pitchFamily="34" charset="-122"/>
                 <a:cs typeface="Calibri" pitchFamily="34" charset="-120"/>
               </a:rPr>
-              <a:t>По таймеру/буферу</a:t>
-            </a:r>
-          </a:p>
-        </p:txBody>
-      </p:sp>
-      <p:sp>
-        <p:nvSpPr>
-          <p:cNvPr id="134" name="S"/>
-          <p:cNvSpPr/>
-          <p:nvPr/>
-        </p:nvSpPr>
-        <p:spPr>
-          <a:xfrm>
-            <a:off x="7150080" y="4434000"/>
-            <a:ext cx="130000" cy="130000"/>
-          </a:xfrm>
-          <a:prstGeom prst="rect">
-            <a:avLst/>
-          </a:prstGeom>
-          <a:solidFill>
-            <a:srgbClr val="9AA3AD"/>
-          </a:solidFill>
-          <a:ln/>
-        </p:spPr>
-      </p:sp>
-      <p:sp>
-        <p:nvSpPr>
-          <p:cNvPr id="135" name="T"/>
-          <p:cNvSpPr/>
-          <p:nvPr/>
-        </p:nvSpPr>
-        <p:spPr>
-          <a:xfrm>
-            <a:off x="7380080" y="4390000"/>
-            <a:ext cx="1880000" cy="300000"/>
-          </a:xfrm>
-          <a:prstGeom prst="rect">
-            <a:avLst/>
-          </a:prstGeom>
-          <a:noFill/>
-          <a:ln/>
-        </p:spPr>
-        <p:txBody>
-          <a:bodyPr wrap="square" lIns="0" tIns="0" rIns="0" bIns="0" rtlCol="0" anchor="ctr"/>
-          <a:lstStyle/>
-          <a:p>
-            <a:pPr algn="l" indent="0" marL="0">
-              <a:buNone/>
-            </a:pPr>
-            <a:r>
-              <a:rPr lang="ru-RU" sz="1100" kern="0" dirty="0">
-                <a:solidFill>
-                  <a:srgbClr val="444444"/>
-                </a:solidFill>
-                <a:latin typeface="Calibri" pitchFamily="34" charset="0"/>
-                <a:ea typeface="Calibri" pitchFamily="34" charset="-122"/>
-                <a:cs typeface="Calibri" pitchFamily="34" charset="-120"/>
-              </a:rPr>
               <a:t>Повторные попытки</a:t>
             </a:r>
           </a:p>
@@ -7114,8 +7529,8 @@
         </p:nvSpPr>
         <p:spPr>
           <a:xfrm>
-            <a:off x="9120080" y="2650000"/>
-            <a:ext cx="2300000" cy="760000"/>
+            <a:off x="9270080" y="2854602"/>
+            <a:ext cx="2300000" cy="972969"/>
           </a:xfrm>
           <a:prstGeom prst="chevron">
             <a:avLst>
@@ -7123,17 +7538,13 @@
             </a:avLst>
           </a:prstGeom>
           <a:solidFill>
-            <a:srgbClr val="8FD6A0"/>
-          </a:solidFill>
-          <a:ln w="6350">
-            <a:solidFill>
-              <a:srgbClr val="9AA0A6"/>
-            </a:solidFill>
-          </a:ln>
+            <a:srgbClr val="14688F"/>
+          </a:solidFill>
+          <a:ln/>
           <a:effectLst>
-            <a:outerShdw sx="100000" sy="100000" kx="0" ky="0" algn="bl" rotWithShape="0" blurRad="76200" dist="20000" dir="5400000">
+            <a:outerShdw blurRad="76200" dist="20000" dir="5400000" algn="bl" rotWithShape="0">
               <a:srgbClr val="B8C9D4">
-                <a:alpha val="20000"/>
+                <a:alpha val="22000"/>
               </a:srgbClr>
             </a:outerShdw>
           </a:effectLst>
@@ -7147,8 +7558,8 @@
         </p:nvSpPr>
         <p:spPr>
           <a:xfrm>
-            <a:off x="9320080" y="2650000"/>
-            <a:ext cx="1960000" cy="760000"/>
+            <a:off x="9470080" y="2854602"/>
+            <a:ext cx="1960000" cy="972969"/>
           </a:xfrm>
           <a:prstGeom prst="rect">
             <a:avLst/>
@@ -7160,13 +7571,13 @@
           <a:bodyPr wrap="square" lIns="0" tIns="0" rIns="0" bIns="0" rtlCol="0" anchor="ctr"/>
           <a:lstStyle/>
           <a:p>
-            <a:pPr algn="ctr" indent="0" marL="0">
-              <a:buNone/>
-            </a:pPr>
-            <a:r>
-              <a:rPr lang="ru-RU" sz="1150" b="1" kern="0" dirty="0">
-                <a:solidFill>
-                  <a:srgbClr val="2B2B2B"/>
+            <a:pPr marL="0" indent="0" algn="ctr">
+              <a:buNone/>
+            </a:pPr>
+            <a:r>
+              <a:rPr lang="ru-RU" sz="1400" b="1" kern="0" dirty="0">
+                <a:solidFill>
+                  <a:srgbClr val="FFFFFF"/>
                 </a:solidFill>
                 <a:latin typeface="Calibri" pitchFamily="34" charset="0"/>
                 <a:ea typeface="Calibri" pitchFamily="34" charset="-122"/>
@@ -7185,8 +7596,8 @@
         </p:nvSpPr>
         <p:spPr>
           <a:xfrm>
-            <a:off x="9270080" y="3714000"/>
-            <a:ext cx="130000" cy="130000"/>
+            <a:off x="9420080" y="4115142"/>
+            <a:ext cx="130000" cy="166429"/>
           </a:xfrm>
           <a:prstGeom prst="rect">
             <a:avLst/>
@@ -7205,8 +7616,8 @@
         </p:nvSpPr>
         <p:spPr>
           <a:xfrm>
-            <a:off x="9500080" y="3670000"/>
-            <a:ext cx="1880000" cy="300000"/>
+            <a:off x="9650080" y="4023504"/>
+            <a:ext cx="1880000" cy="384067"/>
           </a:xfrm>
           <a:prstGeom prst="rect">
             <a:avLst/>
@@ -7218,11 +7629,11 @@
           <a:bodyPr wrap="square" lIns="0" tIns="0" rIns="0" bIns="0" rtlCol="0" anchor="ctr"/>
           <a:lstStyle/>
           <a:p>
-            <a:pPr algn="l" indent="0" marL="0">
-              <a:buNone/>
-            </a:pPr>
-            <a:r>
-              <a:rPr lang="ru-RU" sz="1100" kern="0" dirty="0">
+            <a:pPr marL="0" indent="0" algn="l">
+              <a:buNone/>
+            </a:pPr>
+            <a:r>
+              <a:rPr lang="ru-RU" sz="1200" kern="0" dirty="0">
                 <a:solidFill>
                   <a:srgbClr val="444444"/>
                 </a:solidFill>
@@ -7243,8 +7654,8 @@
         </p:nvSpPr>
         <p:spPr>
           <a:xfrm>
-            <a:off x="9270080" y="4074000"/>
-            <a:ext cx="130000" cy="130000"/>
+            <a:off x="9420080" y="4475142"/>
+            <a:ext cx="130000" cy="166429"/>
           </a:xfrm>
           <a:prstGeom prst="rect">
             <a:avLst/>
@@ -7263,8 +7674,8 @@
         </p:nvSpPr>
         <p:spPr>
           <a:xfrm>
-            <a:off x="9500080" y="4030000"/>
-            <a:ext cx="1880000" cy="300000"/>
+            <a:off x="9650080" y="4383504"/>
+            <a:ext cx="1880000" cy="384067"/>
           </a:xfrm>
           <a:prstGeom prst="rect">
             <a:avLst/>
@@ -7276,11 +7687,11 @@
           <a:bodyPr wrap="square" lIns="0" tIns="0" rIns="0" bIns="0" rtlCol="0" anchor="ctr"/>
           <a:lstStyle/>
           <a:p>
-            <a:pPr algn="l" indent="0" marL="0">
-              <a:buNone/>
-            </a:pPr>
-            <a:r>
-              <a:rPr lang="ru-RU" sz="1100" kern="0" dirty="0">
+            <a:pPr marL="0" indent="0" algn="l">
+              <a:buNone/>
+            </a:pPr>
+            <a:r>
+              <a:rPr lang="ru-RU" sz="1200" kern="0" dirty="0">
                 <a:solidFill>
                   <a:srgbClr val="444444"/>
                 </a:solidFill>
@@ -7289,64 +7700,6 @@
                 <a:cs typeface="Calibri" pitchFamily="34" charset="-120"/>
               </a:rPr>
               <a:t>Применение в игре</a:t>
-            </a:r>
-          </a:p>
-        </p:txBody>
-      </p:sp>
-      <p:sp>
-        <p:nvSpPr>
-          <p:cNvPr id="142" name="S"/>
-          <p:cNvSpPr/>
-          <p:nvPr/>
-        </p:nvSpPr>
-        <p:spPr>
-          <a:xfrm>
-            <a:off x="9270080" y="4434000"/>
-            <a:ext cx="130000" cy="130000"/>
-          </a:xfrm>
-          <a:prstGeom prst="rect">
-            <a:avLst/>
-          </a:prstGeom>
-          <a:solidFill>
-            <a:srgbClr val="9AA3AD"/>
-          </a:solidFill>
-          <a:ln/>
-        </p:spPr>
-      </p:sp>
-      <p:sp>
-        <p:nvSpPr>
-          <p:cNvPr id="143" name="T"/>
-          <p:cNvSpPr/>
-          <p:nvPr/>
-        </p:nvSpPr>
-        <p:spPr>
-          <a:xfrm>
-            <a:off x="9500080" y="4390000"/>
-            <a:ext cx="1880000" cy="300000"/>
-          </a:xfrm>
-          <a:prstGeom prst="rect">
-            <a:avLst/>
-          </a:prstGeom>
-          <a:noFill/>
-          <a:ln/>
-        </p:spPr>
-        <p:txBody>
-          <a:bodyPr wrap="square" lIns="0" tIns="0" rIns="0" bIns="0" rtlCol="0" anchor="ctr"/>
-          <a:lstStyle/>
-          <a:p>
-            <a:pPr algn="l" indent="0" marL="0">
-              <a:buNone/>
-            </a:pPr>
-            <a:r>
-              <a:rPr lang="ru-RU" sz="1100" kern="0" dirty="0">
-                <a:solidFill>
-                  <a:srgbClr val="444444"/>
-                </a:solidFill>
-                <a:latin typeface="Calibri" pitchFamily="34" charset="0"/>
-                <a:ea typeface="Calibri" pitchFamily="34" charset="-122"/>
-                <a:cs typeface="Calibri" pitchFamily="34" charset="-120"/>
-              </a:rPr>
-              <a:t>end_game, досыл</a:t>
             </a:r>
           </a:p>
         </p:txBody>
@@ -7359,7 +7712,7 @@
 </p:sld>
 </file>
 
-<file path=ppt/slides/slide5.xml><?xml version="1.0" encoding="utf-8"?>
+<file path=ppt/slides/slide6.xml><?xml version="1.0" encoding="utf-8"?>
 <p:sld xmlns:a="http://schemas.openxmlformats.org/drawingml/2006/main" xmlns:r="http://schemas.openxmlformats.org/officeDocument/2006/relationships" xmlns:p="http://schemas.openxmlformats.org/presentationml/2006/main">
   <p:cSld name="Slide 5">
     <p:bg>
@@ -7367,6 +7720,7 @@
         <a:solidFill>
           <a:srgbClr val="FFFFFF"/>
         </a:solidFill>
+        <a:effectLst/>
       </p:bgPr>
     </p:bg>
     <p:spTree>
@@ -7404,7 +7758,7 @@
           <a:bodyPr wrap="square" lIns="0" tIns="0" rIns="0" bIns="0" rtlCol="0" anchor="ctr"/>
           <a:lstStyle/>
           <a:p>
-            <a:pPr algn="r" indent="0" marL="0">
+            <a:pPr marL="0" indent="0" algn="r">
               <a:buNone/>
             </a:pPr>
             <a:r>
@@ -7443,11 +7797,11 @@
           <a:bodyPr wrap="square" lIns="0" tIns="0" rIns="0" bIns="0" rtlCol="0" anchor="ctr"/>
           <a:lstStyle/>
           <a:p>
-            <a:pPr indent="0" marL="0">
-              <a:buNone/>
-            </a:pPr>
-            <a:r>
-              <a:rPr lang="en-US" sz="1500" b="1" spc="250" kern="0" dirty="0">
+            <a:pPr marL="0" indent="0">
+              <a:buNone/>
+            </a:pPr>
+            <a:r>
+              <a:rPr lang="en-US" sz="2000" b="1" kern="0" spc="250" dirty="0">
                 <a:solidFill>
                   <a:srgbClr val="1F9BD8"/>
                 </a:solidFill>
@@ -7457,7 +7811,7 @@
               </a:rPr>
               <a:t>ИНТЕРФЕЙС</a:t>
             </a:r>
-            <a:endParaRPr lang="en-US" sz="1500" dirty="0"/>
+            <a:endParaRPr lang="en-US" sz="2000" dirty="0"/>
           </a:p>
         </p:txBody>
       </p:sp>
@@ -7482,7 +7836,7 @@
           <a:bodyPr wrap="square" lIns="0" tIns="0" rIns="0" bIns="0" rtlCol="0" anchor="ctr"/>
           <a:lstStyle/>
           <a:p>
-            <a:pPr indent="0" marL="0">
+            <a:pPr marL="0" indent="0">
               <a:buNone/>
             </a:pPr>
             <a:r>
@@ -7521,7 +7875,7 @@
           <a:bodyPr wrap="square" lIns="0" tIns="0" rIns="0" bIns="0" rtlCol="0" anchor="ctr"/>
           <a:lstStyle/>
           <a:p>
-            <a:pPr indent="0" marL="0">
+            <a:pPr marL="0" indent="0">
               <a:lnSpc>
                 <a:spcPct val="103000"/>
               </a:lnSpc>
@@ -7568,7 +7922,7 @@
             <a:prstDash val="solid"/>
           </a:ln>
           <a:effectLst>
-            <a:outerShdw sx="100000" sy="100000" kx="0" ky="0" algn="bl" rotWithShape="0" blurRad="88900" dist="25400" dir="5400000">
+            <a:outerShdw blurRad="88900" dist="25400" dir="5400000" algn="bl" rotWithShape="0">
               <a:srgbClr val="B8C9D4">
                 <a:alpha val="22000"/>
               </a:srgbClr>
@@ -7595,7 +7949,7 @@
           </a:solidFill>
           <a:ln/>
           <a:effectLst>
-            <a:outerShdw sx="100000" sy="100000" kx="0" ky="0" algn="bl" rotWithShape="0" blurRad="88900" dist="25400" dir="5400000">
+            <a:outerShdw blurRad="88900" dist="25400" dir="5400000" algn="bl" rotWithShape="0">
               <a:srgbClr val="B8C9D4">
                 <a:alpha val="22000"/>
               </a:srgbClr>
@@ -7612,7 +7966,7 @@
           <p:nvPr/>
         </p:nvPicPr>
         <p:blipFill>
-          <a:blip r:embed="rId1"/>
+          <a:blip r:embed="rId3"/>
           <a:stretch>
             <a:fillRect/>
           </a:stretch>
@@ -7648,7 +8002,7 @@
           <a:bodyPr wrap="square" lIns="0" tIns="0" rIns="0" bIns="0" rtlCol="0" anchor="ctr"/>
           <a:lstStyle/>
           <a:p>
-            <a:pPr indent="0" marL="0">
+            <a:pPr marL="0" indent="0">
               <a:buNone/>
             </a:pPr>
             <a:r>
@@ -7687,7 +8041,7 @@
           <a:bodyPr wrap="square" lIns="0" tIns="0" rIns="0" bIns="0" rtlCol="0" anchor="t"/>
           <a:lstStyle/>
           <a:p>
-            <a:pPr indent="0" marL="0">
+            <a:pPr marL="0" indent="0">
               <a:lnSpc>
                 <a:spcPct val="105000"/>
               </a:lnSpc>
@@ -7734,7 +8088,7 @@
             <a:prstDash val="solid"/>
           </a:ln>
           <a:effectLst>
-            <a:outerShdw sx="100000" sy="100000" kx="0" ky="0" algn="bl" rotWithShape="0" blurRad="88900" dist="25400" dir="5400000">
+            <a:outerShdw blurRad="88900" dist="25400" dir="5400000" algn="bl" rotWithShape="0">
               <a:srgbClr val="B8C9D4">
                 <a:alpha val="22000"/>
               </a:srgbClr>
@@ -7761,7 +8115,7 @@
           </a:solidFill>
           <a:ln/>
           <a:effectLst>
-            <a:outerShdw sx="100000" sy="100000" kx="0" ky="0" algn="bl" rotWithShape="0" blurRad="88900" dist="25400" dir="5400000">
+            <a:outerShdw blurRad="88900" dist="25400" dir="5400000" algn="bl" rotWithShape="0">
               <a:srgbClr val="B8C9D4">
                 <a:alpha val="22000"/>
               </a:srgbClr>
@@ -7778,7 +8132,7 @@
           <p:nvPr/>
         </p:nvPicPr>
         <p:blipFill>
-          <a:blip r:embed="rId2"/>
+          <a:blip r:embed="rId4"/>
           <a:stretch>
             <a:fillRect/>
           </a:stretch>
@@ -7814,7 +8168,7 @@
           <a:bodyPr wrap="square" lIns="0" tIns="0" rIns="0" bIns="0" rtlCol="0" anchor="ctr"/>
           <a:lstStyle/>
           <a:p>
-            <a:pPr indent="0" marL="0">
+            <a:pPr marL="0" indent="0">
               <a:buNone/>
             </a:pPr>
             <a:r>
@@ -7853,7 +8207,7 @@
           <a:bodyPr wrap="square" lIns="0" tIns="0" rIns="0" bIns="0" rtlCol="0" anchor="t"/>
           <a:lstStyle/>
           <a:p>
-            <a:pPr indent="0" marL="0">
+            <a:pPr marL="0" indent="0">
               <a:lnSpc>
                 <a:spcPct val="105000"/>
               </a:lnSpc>
@@ -7900,7 +8254,7 @@
             <a:prstDash val="solid"/>
           </a:ln>
           <a:effectLst>
-            <a:outerShdw sx="100000" sy="100000" kx="0" ky="0" algn="bl" rotWithShape="0" blurRad="88900" dist="25400" dir="5400000">
+            <a:outerShdw blurRad="88900" dist="25400" dir="5400000" algn="bl" rotWithShape="0">
               <a:srgbClr val="B8C9D4">
                 <a:alpha val="22000"/>
               </a:srgbClr>
@@ -7927,7 +8281,7 @@
           </a:solidFill>
           <a:ln/>
           <a:effectLst>
-            <a:outerShdw sx="100000" sy="100000" kx="0" ky="0" algn="bl" rotWithShape="0" blurRad="88900" dist="25400" dir="5400000">
+            <a:outerShdw blurRad="88900" dist="25400" dir="5400000" algn="bl" rotWithShape="0">
               <a:srgbClr val="B8C9D4">
                 <a:alpha val="22000"/>
               </a:srgbClr>
@@ -7944,7 +8298,7 @@
           <p:nvPr/>
         </p:nvPicPr>
         <p:blipFill>
-          <a:blip r:embed="rId3"/>
+          <a:blip r:embed="rId5"/>
           <a:stretch>
             <a:fillRect/>
           </a:stretch>
@@ -7980,7 +8334,7 @@
           <a:bodyPr wrap="square" lIns="0" tIns="0" rIns="0" bIns="0" rtlCol="0" anchor="ctr"/>
           <a:lstStyle/>
           <a:p>
-            <a:pPr indent="0" marL="0">
+            <a:pPr marL="0" indent="0">
               <a:buNone/>
             </a:pPr>
             <a:r>
@@ -8019,7 +8373,7 @@
           <a:bodyPr wrap="square" lIns="0" tIns="0" rIns="0" bIns="0" rtlCol="0" anchor="t"/>
           <a:lstStyle/>
           <a:p>
-            <a:pPr indent="0" marL="0">
+            <a:pPr marL="0" indent="0">
               <a:lnSpc>
                 <a:spcPct val="105000"/>
               </a:lnSpc>
@@ -8066,7 +8420,7 @@
             <a:prstDash val="solid"/>
           </a:ln>
           <a:effectLst>
-            <a:outerShdw sx="100000" sy="100000" kx="0" ky="0" algn="bl" rotWithShape="0" blurRad="88900" dist="25400" dir="5400000">
+            <a:outerShdw blurRad="88900" dist="25400" dir="5400000" algn="bl" rotWithShape="0">
               <a:srgbClr val="B8C9D4">
                 <a:alpha val="22000"/>
               </a:srgbClr>
@@ -8093,7 +8447,7 @@
           </a:solidFill>
           <a:ln/>
           <a:effectLst>
-            <a:outerShdw sx="100000" sy="100000" kx="0" ky="0" algn="bl" rotWithShape="0" blurRad="88900" dist="25400" dir="5400000">
+            <a:outerShdw blurRad="88900" dist="25400" dir="5400000" algn="bl" rotWithShape="0">
               <a:srgbClr val="B8C9D4">
                 <a:alpha val="22000"/>
               </a:srgbClr>
@@ -8110,7 +8464,7 @@
           <p:nvPr/>
         </p:nvPicPr>
         <p:blipFill>
-          <a:blip r:embed="rId4"/>
+          <a:blip r:embed="rId6"/>
           <a:stretch>
             <a:fillRect/>
           </a:stretch>
@@ -8146,7 +8500,7 @@
           <a:bodyPr wrap="square" lIns="0" tIns="0" rIns="0" bIns="0" rtlCol="0" anchor="ctr"/>
           <a:lstStyle/>
           <a:p>
-            <a:pPr indent="0" marL="0">
+            <a:pPr marL="0" indent="0">
               <a:buNone/>
             </a:pPr>
             <a:r>
@@ -8185,7 +8539,7 @@
           <a:bodyPr wrap="square" lIns="0" tIns="0" rIns="0" bIns="0" rtlCol="0" anchor="t"/>
           <a:lstStyle/>
           <a:p>
-            <a:pPr indent="0" marL="0">
+            <a:pPr marL="0" indent="0">
               <a:lnSpc>
                 <a:spcPct val="105000"/>
               </a:lnSpc>
@@ -8214,7 +8568,7 @@
 </p:sld>
 </file>
 
-<file path=ppt/slides/slide6.xml><?xml version="1.0" encoding="utf-8"?>
+<file path=ppt/slides/slide7.xml><?xml version="1.0" encoding="utf-8"?>
 <p:sld xmlns:a="http://schemas.openxmlformats.org/drawingml/2006/main" xmlns:r="http://schemas.openxmlformats.org/officeDocument/2006/relationships" xmlns:p="http://schemas.openxmlformats.org/presentationml/2006/main">
   <p:cSld name="Slide 6">
     <p:bg>
@@ -8222,6 +8576,7 @@
         <a:solidFill>
           <a:srgbClr val="FFFFFF"/>
         </a:solidFill>
+        <a:effectLst/>
       </p:bgPr>
     </p:bg>
     <p:spTree>
@@ -8259,7 +8614,7 @@
           <a:bodyPr wrap="square" lIns="0" tIns="0" rIns="0" bIns="0" rtlCol="0" anchor="ctr"/>
           <a:lstStyle/>
           <a:p>
-            <a:pPr algn="r" indent="0" marL="0">
+            <a:pPr marL="0" indent="0" algn="r">
               <a:buNone/>
             </a:pPr>
             <a:r>
@@ -8298,11 +8653,11 @@
           <a:bodyPr wrap="square" lIns="0" tIns="0" rIns="0" bIns="0" rtlCol="0" anchor="ctr"/>
           <a:lstStyle/>
           <a:p>
-            <a:pPr indent="0" marL="0">
-              <a:buNone/>
-            </a:pPr>
-            <a:r>
-              <a:rPr lang="en-US" sz="1500" b="1" spc="250" kern="0" dirty="0">
+            <a:pPr marL="0" indent="0">
+              <a:buNone/>
+            </a:pPr>
+            <a:r>
+              <a:rPr lang="en-US" sz="2000" b="1" kern="0" spc="250" dirty="0">
                 <a:solidFill>
                   <a:srgbClr val="1F9BD8"/>
                 </a:solidFill>
@@ -8312,7 +8667,7 @@
               </a:rPr>
               <a:t>ИНТЕРФЕЙС</a:t>
             </a:r>
-            <a:endParaRPr lang="en-US" sz="1500" dirty="0"/>
+            <a:endParaRPr lang="en-US" sz="2000" dirty="0"/>
           </a:p>
         </p:txBody>
       </p:sp>
@@ -8337,7 +8692,7 @@
           <a:bodyPr wrap="square" lIns="0" tIns="0" rIns="0" bIns="0" rtlCol="0" anchor="ctr"/>
           <a:lstStyle/>
           <a:p>
-            <a:pPr indent="0" marL="0">
+            <a:pPr marL="0" indent="0">
               <a:buNone/>
             </a:pPr>
             <a:r>
@@ -8381,7 +8736,7 @@
             <a:prstDash val="solid"/>
           </a:ln>
           <a:effectLst>
-            <a:outerShdw sx="100000" sy="100000" kx="0" ky="0" algn="bl" rotWithShape="0" blurRad="88900" dist="25400" dir="5400000">
+            <a:outerShdw blurRad="88900" dist="25400" dir="5400000" algn="bl" rotWithShape="0">
               <a:srgbClr val="B8C9D4">
                 <a:alpha val="22000"/>
               </a:srgbClr>
@@ -8430,7 +8785,7 @@
           <a:bodyPr wrap="square" lIns="0" tIns="0" rIns="0" bIns="0" rtlCol="0" anchor="ctr"/>
           <a:lstStyle/>
           <a:p>
-            <a:pPr indent="0" marL="0">
+            <a:pPr marL="0" indent="0">
               <a:buNone/>
             </a:pPr>
             <a:r>
@@ -8554,7 +8909,7 @@
           <a:bodyPr wrap="square" lIns="0" tIns="0" rIns="0" bIns="0" rtlCol="0" anchor="ctr"/>
           <a:lstStyle/>
           <a:p>
-            <a:pPr indent="0" marL="0">
+            <a:pPr marL="0" indent="0">
               <a:buNone/>
             </a:pPr>
             <a:r>
@@ -8593,7 +8948,7 @@
           <a:bodyPr wrap="square" lIns="0" tIns="0" rIns="0" bIns="0" rtlCol="0" anchor="ctr"/>
           <a:lstStyle/>
           <a:p>
-            <a:pPr indent="0" marL="0">
+            <a:pPr marL="0" indent="0">
               <a:buNone/>
             </a:pPr>
             <a:r>
@@ -8657,7 +9012,7 @@
           <a:bodyPr wrap="square" lIns="0" tIns="0" rIns="0" bIns="0" rtlCol="0" anchor="ctr"/>
           <a:lstStyle/>
           <a:p>
-            <a:pPr indent="0" marL="0">
+            <a:pPr marL="0" indent="0">
               <a:buNone/>
             </a:pPr>
             <a:r>
@@ -8696,7 +9051,7 @@
           <a:bodyPr wrap="square" lIns="0" tIns="0" rIns="0" bIns="0" rtlCol="0" anchor="ctr"/>
           <a:lstStyle/>
           <a:p>
-            <a:pPr indent="0" marL="0">
+            <a:pPr marL="0" indent="0">
               <a:buNone/>
             </a:pPr>
             <a:r>
@@ -8760,7 +9115,7 @@
           <a:bodyPr wrap="square" lIns="0" tIns="0" rIns="0" bIns="0" rtlCol="0" anchor="ctr"/>
           <a:lstStyle/>
           <a:p>
-            <a:pPr indent="0" marL="0">
+            <a:pPr marL="0" indent="0">
               <a:buNone/>
             </a:pPr>
             <a:r>
@@ -8799,7 +9154,7 @@
           <a:bodyPr wrap="square" lIns="0" tIns="0" rIns="0" bIns="0" rtlCol="0" anchor="ctr"/>
           <a:lstStyle/>
           <a:p>
-            <a:pPr indent="0" marL="0">
+            <a:pPr marL="0" indent="0">
               <a:buNone/>
             </a:pPr>
             <a:r>
@@ -8863,7 +9218,7 @@
           <a:bodyPr wrap="square" lIns="0" tIns="0" rIns="0" bIns="0" rtlCol="0" anchor="ctr"/>
           <a:lstStyle/>
           <a:p>
-            <a:pPr indent="0" marL="0">
+            <a:pPr marL="0" indent="0">
               <a:buNone/>
             </a:pPr>
             <a:r>
@@ -8902,7 +9257,7 @@
           <a:bodyPr wrap="square" lIns="0" tIns="0" rIns="0" bIns="0" rtlCol="0" anchor="ctr"/>
           <a:lstStyle/>
           <a:p>
-            <a:pPr indent="0" marL="0">
+            <a:pPr marL="0" indent="0">
               <a:buNone/>
             </a:pPr>
             <a:r>
@@ -8966,7 +9321,7 @@
           <a:bodyPr wrap="square" lIns="0" tIns="0" rIns="0" bIns="0" rtlCol="0" anchor="ctr"/>
           <a:lstStyle/>
           <a:p>
-            <a:pPr indent="0" marL="0">
+            <a:pPr marL="0" indent="0">
               <a:buNone/>
             </a:pPr>
             <a:r>
@@ -9005,7 +9360,7 @@
           <a:bodyPr wrap="square" lIns="0" tIns="0" rIns="0" bIns="0" rtlCol="0" anchor="ctr"/>
           <a:lstStyle/>
           <a:p>
-            <a:pPr indent="0" marL="0">
+            <a:pPr marL="0" indent="0">
               <a:buNone/>
             </a:pPr>
             <a:r>
@@ -9049,7 +9404,7 @@
             <a:prstDash val="solid"/>
           </a:ln>
           <a:effectLst>
-            <a:outerShdw sx="100000" sy="100000" kx="0" ky="0" algn="bl" rotWithShape="0" blurRad="88900" dist="25400" dir="5400000">
+            <a:outerShdw blurRad="88900" dist="25400" dir="5400000" algn="bl" rotWithShape="0">
               <a:srgbClr val="B8C9D4">
                 <a:alpha val="22000"/>
               </a:srgbClr>
@@ -9098,7 +9453,7 @@
           <a:bodyPr wrap="square" lIns="0" tIns="0" rIns="0" bIns="0" rtlCol="0" anchor="ctr"/>
           <a:lstStyle/>
           <a:p>
-            <a:pPr indent="0" marL="0">
+            <a:pPr marL="0" indent="0">
               <a:buNone/>
             </a:pPr>
             <a:r>
@@ -9197,7 +9552,7 @@
           <a:bodyPr wrap="square" lIns="0" tIns="0" rIns="0" bIns="0" rtlCol="0" anchor="ctr"/>
           <a:lstStyle/>
           <a:p>
-            <a:pPr indent="0" marL="0">
+            <a:pPr marL="0" indent="0">
               <a:buNone/>
             </a:pPr>
             <a:r>
@@ -9263,7 +9618,7 @@
           <a:bodyPr wrap="square" lIns="0" tIns="0" rIns="0" bIns="0" rtlCol="0" anchor="ctr"/>
           <a:lstStyle/>
           <a:p>
-            <a:pPr indent="0" marL="0">
+            <a:pPr marL="0" indent="0">
               <a:buNone/>
             </a:pPr>
             <a:r>
@@ -9275,7 +9630,7 @@
                 <a:ea typeface="Calibri" pitchFamily="34" charset="-122"/>
                 <a:cs typeface="Calibri" pitchFamily="34" charset="-120"/>
               </a:rPr>
-              <a:t>explorer</a:t>
+              <a:t>Исследователь</a:t>
             </a:r>
             <a:endParaRPr lang="en-US" sz="1100" dirty="0"/>
           </a:p>
@@ -9329,11 +9684,11 @@
           <a:bodyPr wrap="square" lIns="0" tIns="0" rIns="0" bIns="0" rtlCol="0" anchor="ctr"/>
           <a:lstStyle/>
           <a:p>
-            <a:pPr indent="0" marL="0">
-              <a:buNone/>
-            </a:pPr>
-            <a:r>
-              <a:rPr lang="en-US" sz="1100" dirty="0">
+            <a:pPr marL="0" indent="0">
+              <a:buNone/>
+            </a:pPr>
+            <a:r>
+              <a:rPr lang="ru-RU" sz="1100" dirty="0">
                 <a:solidFill>
                   <a:srgbClr val="0B5E88"/>
                 </a:solidFill>
@@ -9341,7 +9696,7 @@
                 <a:ea typeface="Calibri" pitchFamily="34" charset="-122"/>
                 <a:cs typeface="Calibri" pitchFamily="34" charset="-120"/>
               </a:rPr>
-              <a:t>achiever</a:t>
+              <a:t>Собиратель</a:t>
             </a:r>
             <a:endParaRPr lang="en-US" sz="1100" dirty="0"/>
           </a:p>
@@ -9395,7 +9750,7 @@
           <a:bodyPr wrap="square" lIns="0" tIns="0" rIns="0" bIns="0" rtlCol="0" anchor="ctr"/>
           <a:lstStyle/>
           <a:p>
-            <a:pPr indent="0" marL="0">
+            <a:pPr marL="0" indent="0">
               <a:buNone/>
             </a:pPr>
             <a:r>
@@ -9407,7 +9762,7 @@
                 <a:ea typeface="Calibri" pitchFamily="34" charset="-122"/>
                 <a:cs typeface="Calibri" pitchFamily="34" charset="-120"/>
               </a:rPr>
-              <a:t>socializer</a:t>
+              <a:t>Социальный</a:t>
             </a:r>
             <a:endParaRPr lang="en-US" sz="1100" dirty="0"/>
           </a:p>
@@ -9461,7 +9816,7 @@
           <a:bodyPr wrap="square" lIns="0" tIns="0" rIns="0" bIns="0" rtlCol="0" anchor="ctr"/>
           <a:lstStyle/>
           <a:p>
-            <a:pPr indent="0" marL="0">
+            <a:pPr marL="0" indent="0">
               <a:buNone/>
             </a:pPr>
             <a:r>
@@ -9473,7 +9828,7 @@
                 <a:ea typeface="Calibri" pitchFamily="34" charset="-122"/>
                 <a:cs typeface="Calibri" pitchFamily="34" charset="-120"/>
               </a:rPr>
-              <a:t>killer</a:t>
+              <a:t>Боец</a:t>
             </a:r>
             <a:endParaRPr lang="en-US" sz="1100" dirty="0"/>
           </a:p>
@@ -9500,7 +9855,7 @@
           <a:bodyPr wrap="square" lIns="0" tIns="0" rIns="0" bIns="0" rtlCol="0" anchor="ctr"/>
           <a:lstStyle/>
           <a:p>
-            <a:pPr indent="0" marL="0">
+            <a:pPr marL="0" indent="0">
               <a:buNone/>
             </a:pPr>
             <a:r>
@@ -9564,7 +9919,7 @@
           <a:bodyPr wrap="square" lIns="0" tIns="0" rIns="0" bIns="0" rtlCol="0" anchor="ctr"/>
           <a:lstStyle/>
           <a:p>
-            <a:pPr indent="0" marL="0">
+            <a:pPr marL="0" indent="0">
               <a:buNone/>
             </a:pPr>
             <a:r>
@@ -9603,7 +9958,7 @@
           <a:bodyPr wrap="square" lIns="0" tIns="0" rIns="0" bIns="0" rtlCol="0" anchor="ctr"/>
           <a:lstStyle/>
           <a:p>
-            <a:pPr indent="0" marL="0">
+            <a:pPr marL="0" indent="0">
               <a:buNone/>
             </a:pPr>
             <a:r>
@@ -9667,7 +10022,7 @@
           <a:bodyPr wrap="square" lIns="0" tIns="0" rIns="0" bIns="0" rtlCol="0" anchor="ctr"/>
           <a:lstStyle/>
           <a:p>
-            <a:pPr indent="0" marL="0">
+            <a:pPr marL="0" indent="0">
               <a:buNone/>
             </a:pPr>
             <a:r>
@@ -9706,7 +10061,7 @@
           <a:bodyPr wrap="square" lIns="0" tIns="0" rIns="0" bIns="0" rtlCol="0" anchor="ctr"/>
           <a:lstStyle/>
           <a:p>
-            <a:pPr indent="0" marL="0">
+            <a:pPr marL="0" indent="0">
               <a:buNone/>
             </a:pPr>
             <a:r>
@@ -9770,7 +10125,7 @@
           <a:bodyPr wrap="square" lIns="0" tIns="0" rIns="0" bIns="0" rtlCol="0" anchor="ctr"/>
           <a:lstStyle/>
           <a:p>
-            <a:pPr indent="0" marL="0">
+            <a:pPr marL="0" indent="0">
               <a:buNone/>
             </a:pPr>
             <a:r>
@@ -9809,7 +10164,7 @@
           <a:bodyPr wrap="square" lIns="0" tIns="0" rIns="0" bIns="0" rtlCol="0" anchor="ctr"/>
           <a:lstStyle/>
           <a:p>
-            <a:pPr indent="0" marL="0">
+            <a:pPr marL="0" indent="0">
               <a:buNone/>
             </a:pPr>
             <a:r>
@@ -9835,7 +10190,7 @@
 </p:sld>
 </file>
 
-<file path=ppt/slides/slide7.xml><?xml version="1.0" encoding="utf-8"?>
+<file path=ppt/slides/slide8.xml><?xml version="1.0" encoding="utf-8"?>
 <p:sld xmlns:a="http://schemas.openxmlformats.org/drawingml/2006/main" xmlns:r="http://schemas.openxmlformats.org/officeDocument/2006/relationships" xmlns:p="http://schemas.openxmlformats.org/presentationml/2006/main">
   <p:cSld name="Slide 7">
     <p:bg>
@@ -9843,6 +10198,7 @@
         <a:solidFill>
           <a:srgbClr val="FFFFFF"/>
         </a:solidFill>
+        <a:effectLst/>
       </p:bgPr>
     </p:bg>
     <p:spTree>
@@ -9880,7 +10236,7 @@
           <a:bodyPr wrap="square" lIns="0" tIns="0" rIns="0" bIns="0" rtlCol="0" anchor="ctr"/>
           <a:lstStyle/>
           <a:p>
-            <a:pPr algn="r" indent="0" marL="0">
+            <a:pPr marL="0" indent="0" algn="r">
               <a:buNone/>
             </a:pPr>
             <a:r>
@@ -9919,11 +10275,11 @@
           <a:bodyPr wrap="square" lIns="0" tIns="0" rIns="0" bIns="0" rtlCol="0" anchor="ctr"/>
           <a:lstStyle/>
           <a:p>
-            <a:pPr indent="0" marL="0">
-              <a:buNone/>
-            </a:pPr>
-            <a:r>
-              <a:rPr lang="en-US" sz="1500" b="1" spc="250" kern="0" dirty="0">
+            <a:pPr marL="0" indent="0">
+              <a:buNone/>
+            </a:pPr>
+            <a:r>
+              <a:rPr lang="en-US" sz="2000" b="1" kern="0" spc="250" dirty="0">
                 <a:solidFill>
                   <a:srgbClr val="1F9BD8"/>
                 </a:solidFill>
@@ -9933,7 +10289,7 @@
               </a:rPr>
               <a:t>КОНТРАКТ</a:t>
             </a:r>
-            <a:endParaRPr lang="en-US" sz="1500" dirty="0"/>
+            <a:endParaRPr lang="en-US" sz="2000" dirty="0"/>
           </a:p>
         </p:txBody>
       </p:sp>
@@ -9958,7 +10314,7 @@
           <a:bodyPr wrap="square" lIns="0" tIns="0" rIns="0" bIns="0" rtlCol="0" anchor="ctr"/>
           <a:lstStyle/>
           <a:p>
-            <a:pPr indent="0" marL="0">
+            <a:pPr marL="0" indent="0">
               <a:buNone/>
             </a:pPr>
             <a:r>
@@ -9997,7 +10353,7 @@
           </a:solidFill>
           <a:ln/>
           <a:effectLst>
-            <a:outerShdw sx="100000" sy="100000" kx="0" ky="0" algn="bl" rotWithShape="0" blurRad="88900" dist="25400" dir="5400000">
+            <a:outerShdw blurRad="88900" dist="25400" dir="5400000" algn="bl" rotWithShape="0">
               <a:srgbClr val="B8C9D4">
                 <a:alpha val="22000"/>
               </a:srgbClr>
@@ -10026,7 +10382,7 @@
           <a:bodyPr wrap="square" lIns="0" tIns="0" rIns="0" bIns="0" rtlCol="0" anchor="ctr"/>
           <a:lstStyle/>
           <a:p>
-            <a:pPr indent="0" marL="0">
+            <a:pPr marL="0" indent="0">
               <a:buNone/>
             </a:pPr>
             <a:r>
@@ -10065,7 +10421,7 @@
           <a:bodyPr wrap="square" lIns="0" tIns="0" rIns="0" bIns="0" rtlCol="0" anchor="t"/>
           <a:lstStyle/>
           <a:p>
-            <a:pPr indent="0" marL="0">
+            <a:pPr marL="0" indent="0">
               <a:lnSpc>
                 <a:spcPct val="112000"/>
               </a:lnSpc>
@@ -10085,7 +10441,7 @@
             <a:endParaRPr lang="en-US" sz="1150" dirty="0"/>
           </a:p>
           <a:p>
-            <a:pPr indent="0" marL="0">
+            <a:pPr marL="0" indent="0">
               <a:lnSpc>
                 <a:spcPct val="112000"/>
               </a:lnSpc>
@@ -10100,12 +10456,12 @@
                 <a:ea typeface="Courier New" pitchFamily="34" charset="-122"/>
                 <a:cs typeface="Courier New" pitchFamily="34" charset="-120"/>
               </a:rPr>
-              <a:t xml:space="preserve">  "events": [{</a:t>
+              <a:t>  "events": [{</a:t>
             </a:r>
             <a:endParaRPr lang="en-US" sz="1150" dirty="0"/>
           </a:p>
           <a:p>
-            <a:pPr indent="0" marL="0">
+            <a:pPr marL="0" indent="0">
               <a:lnSpc>
                 <a:spcPct val="112000"/>
               </a:lnSpc>
@@ -10120,12 +10476,12 @@
                 <a:ea typeface="Courier New" pitchFamily="34" charset="-122"/>
                 <a:cs typeface="Courier New" pitchFamily="34" charset="-120"/>
               </a:rPr>
-              <a:t xml:space="preserve">    "session_id": "uuid",</a:t>
+              <a:t>    "session_id": "uuid",</a:t>
             </a:r>
             <a:endParaRPr lang="en-US" sz="1150" dirty="0"/>
           </a:p>
           <a:p>
-            <a:pPr indent="0" marL="0">
+            <a:pPr marL="0" indent="0">
               <a:lnSpc>
                 <a:spcPct val="112000"/>
               </a:lnSpc>
@@ -10140,12 +10496,12 @@
                 <a:ea typeface="Courier New" pitchFamily="34" charset="-122"/>
                 <a:cs typeface="Courier New" pitchFamily="34" charset="-120"/>
               </a:rPr>
-              <a:t xml:space="preserve">    "player_id": "player_1",</a:t>
+              <a:t>    "player_id": "player_1",</a:t>
             </a:r>
             <a:endParaRPr lang="en-US" sz="1150" dirty="0"/>
           </a:p>
           <a:p>
-            <a:pPr indent="0" marL="0">
+            <a:pPr marL="0" indent="0">
               <a:lnSpc>
                 <a:spcPct val="112000"/>
               </a:lnSpc>
@@ -10160,12 +10516,12 @@
                 <a:ea typeface="Courier New" pitchFamily="34" charset="-122"/>
                 <a:cs typeface="Courier New" pitchFamily="34" charset="-120"/>
               </a:rPr>
-              <a:t xml:space="preserve">    "event_name": "level_complete",</a:t>
+              <a:t>    "event_name": "level_complete",</a:t>
             </a:r>
             <a:endParaRPr lang="en-US" sz="1150" dirty="0"/>
           </a:p>
           <a:p>
-            <a:pPr indent="0" marL="0">
+            <a:pPr marL="0" indent="0">
               <a:lnSpc>
                 <a:spcPct val="112000"/>
               </a:lnSpc>
@@ -10180,12 +10536,12 @@
                 <a:ea typeface="Courier New" pitchFamily="34" charset="-122"/>
                 <a:cs typeface="Courier New" pitchFamily="34" charset="-120"/>
               </a:rPr>
-              <a:t xml:space="preserve">    "timestamp": 1716812345.1,</a:t>
+              <a:t>    "timestamp": 1716812345.1,</a:t>
             </a:r>
             <a:endParaRPr lang="en-US" sz="1150" dirty="0"/>
           </a:p>
           <a:p>
-            <a:pPr indent="0" marL="0">
+            <a:pPr marL="0" indent="0">
               <a:lnSpc>
                 <a:spcPct val="112000"/>
               </a:lnSpc>
@@ -10200,12 +10556,12 @@
                 <a:ea typeface="Courier New" pitchFamily="34" charset="-122"/>
                 <a:cs typeface="Courier New" pitchFamily="34" charset="-120"/>
               </a:rPr>
-              <a:t xml:space="preserve">    "parameters": { "time_sec": 120,</a:t>
+              <a:t>    "parameters": { "time_sec": 120,</a:t>
             </a:r>
             <a:endParaRPr lang="en-US" sz="1150" dirty="0"/>
           </a:p>
           <a:p>
-            <a:pPr indent="0" marL="0">
+            <a:pPr marL="0" indent="0">
               <a:lnSpc>
                 <a:spcPct val="112000"/>
               </a:lnSpc>
@@ -10220,12 +10576,12 @@
                 <a:ea typeface="Courier New" pitchFamily="34" charset="-122"/>
                 <a:cs typeface="Courier New" pitchFamily="34" charset="-120"/>
               </a:rPr>
-              <a:t xml:space="preserve">                    "deaths": 2 }</a:t>
+              <a:t>                    "deaths": 2 }</a:t>
             </a:r>
             <a:endParaRPr lang="en-US" sz="1150" dirty="0"/>
           </a:p>
           <a:p>
-            <a:pPr indent="0" marL="0">
+            <a:pPr marL="0" indent="0">
               <a:lnSpc>
                 <a:spcPct val="112000"/>
               </a:lnSpc>
@@ -10240,12 +10596,12 @@
                 <a:ea typeface="Courier New" pitchFamily="34" charset="-122"/>
                 <a:cs typeface="Courier New" pitchFamily="34" charset="-120"/>
               </a:rPr>
-              <a:t xml:space="preserve">  }],</a:t>
+              <a:t>  }],</a:t>
             </a:r>
             <a:endParaRPr lang="en-US" sz="1150" dirty="0"/>
           </a:p>
           <a:p>
-            <a:pPr indent="0" marL="0">
+            <a:pPr marL="0" indent="0">
               <a:lnSpc>
                 <a:spcPct val="112000"/>
               </a:lnSpc>
@@ -10260,12 +10616,12 @@
                 <a:ea typeface="Courier New" pitchFamily="34" charset="-122"/>
                 <a:cs typeface="Courier New" pitchFamily="34" charset="-120"/>
               </a:rPr>
-              <a:t xml:space="preserve">  "metadata": {</a:t>
+              <a:t>  "metadata": {</a:t>
             </a:r>
             <a:endParaRPr lang="en-US" sz="1150" dirty="0"/>
           </a:p>
           <a:p>
-            <a:pPr indent="0" marL="0">
+            <a:pPr marL="0" indent="0">
               <a:lnSpc>
                 <a:spcPct val="112000"/>
               </a:lnSpc>
@@ -10280,12 +10636,12 @@
                 <a:ea typeface="Courier New" pitchFamily="34" charset="-122"/>
                 <a:cs typeface="Courier New" pitchFamily="34" charset="-120"/>
               </a:rPr>
-              <a:t xml:space="preserve">    "critical_points": [...],</a:t>
+              <a:t>    "critical_points": [...],</a:t>
             </a:r>
             <a:endParaRPr lang="en-US" sz="1150" dirty="0"/>
           </a:p>
           <a:p>
-            <a:pPr indent="0" marL="0">
+            <a:pPr marL="0" indent="0">
               <a:lnSpc>
                 <a:spcPct val="112000"/>
               </a:lnSpc>
@@ -10300,12 +10656,12 @@
                 <a:ea typeface="Courier New" pitchFamily="34" charset="-122"/>
                 <a:cs typeface="Courier New" pitchFamily="34" charset="-120"/>
               </a:rPr>
-              <a:t xml:space="preserve">    "archetypes": [...],</a:t>
+              <a:t>    "archetypes": [...],</a:t>
             </a:r>
             <a:endParaRPr lang="en-US" sz="1150" dirty="0"/>
           </a:p>
           <a:p>
-            <a:pPr indent="0" marL="0">
+            <a:pPr marL="0" indent="0">
               <a:lnSpc>
                 <a:spcPct val="112000"/>
               </a:lnSpc>
@@ -10320,12 +10676,12 @@
                 <a:ea typeface="Courier New" pitchFamily="34" charset="-122"/>
                 <a:cs typeface="Courier New" pitchFamily="34" charset="-120"/>
               </a:rPr>
-              <a:t xml:space="preserve">    "model_mode": "cloud"</a:t>
+              <a:t>    "model_mode": "cloud"</a:t>
             </a:r>
             <a:endParaRPr lang="en-US" sz="1150" dirty="0"/>
           </a:p>
           <a:p>
-            <a:pPr indent="0" marL="0">
+            <a:pPr marL="0" indent="0">
               <a:lnSpc>
                 <a:spcPct val="112000"/>
               </a:lnSpc>
@@ -10340,12 +10696,12 @@
                 <a:ea typeface="Courier New" pitchFamily="34" charset="-122"/>
                 <a:cs typeface="Courier New" pitchFamily="34" charset="-120"/>
               </a:rPr>
-              <a:t xml:space="preserve">  }</a:t>
+              <a:t>  }</a:t>
             </a:r>
             <a:endParaRPr lang="en-US" sz="1150" dirty="0"/>
           </a:p>
           <a:p>
-            <a:pPr indent="0" marL="0">
+            <a:pPr marL="0" indent="0">
               <a:lnSpc>
                 <a:spcPct val="112000"/>
               </a:lnSpc>
@@ -10392,7 +10748,7 @@
             <a:prstDash val="solid"/>
           </a:ln>
           <a:effectLst>
-            <a:outerShdw sx="100000" sy="100000" kx="0" ky="0" algn="bl" rotWithShape="0" blurRad="88900" dist="25400" dir="5400000">
+            <a:outerShdw blurRad="88900" dist="25400" dir="5400000" algn="bl" rotWithShape="0">
               <a:srgbClr val="B8C9D4">
                 <a:alpha val="22000"/>
               </a:srgbClr>
@@ -10419,7 +10775,7 @@
           </a:solidFill>
           <a:ln/>
           <a:effectLst>
-            <a:outerShdw sx="100000" sy="100000" kx="0" ky="0" algn="bl" rotWithShape="0" blurRad="88900" dist="25400" dir="5400000">
+            <a:outerShdw blurRad="88900" dist="25400" dir="5400000" algn="bl" rotWithShape="0">
               <a:srgbClr val="B8C9D4">
                 <a:alpha val="22000"/>
               </a:srgbClr>
@@ -10436,7 +10792,7 @@
           <p:nvPr/>
         </p:nvPicPr>
         <p:blipFill>
-          <a:blip r:embed="rId1"/>
+          <a:blip r:embed="rId3"/>
           <a:stretch>
             <a:fillRect/>
           </a:stretch>
@@ -10472,7 +10828,7 @@
           <a:bodyPr wrap="square" lIns="0" tIns="0" rIns="0" bIns="0" rtlCol="0" anchor="ctr"/>
           <a:lstStyle/>
           <a:p>
-            <a:pPr indent="0" marL="0">
+            <a:pPr marL="0" indent="0">
               <a:buNone/>
             </a:pPr>
             <a:r>
@@ -10511,7 +10867,7 @@
           <a:bodyPr wrap="square" lIns="0" tIns="0" rIns="0" bIns="0" rtlCol="0" anchor="t"/>
           <a:lstStyle/>
           <a:p>
-            <a:pPr indent="0" marL="0">
+            <a:pPr marL="0" indent="0">
               <a:lnSpc>
                 <a:spcPct val="100000"/>
               </a:lnSpc>
@@ -10558,7 +10914,7 @@
             <a:prstDash val="solid"/>
           </a:ln>
           <a:effectLst>
-            <a:outerShdw sx="100000" sy="100000" kx="0" ky="0" algn="bl" rotWithShape="0" blurRad="88900" dist="25400" dir="5400000">
+            <a:outerShdw blurRad="88900" dist="25400" dir="5400000" algn="bl" rotWithShape="0">
               <a:srgbClr val="B8C9D4">
                 <a:alpha val="22000"/>
               </a:srgbClr>
@@ -10585,7 +10941,7 @@
           </a:solidFill>
           <a:ln/>
           <a:effectLst>
-            <a:outerShdw sx="100000" sy="100000" kx="0" ky="0" algn="bl" rotWithShape="0" blurRad="88900" dist="25400" dir="5400000">
+            <a:outerShdw blurRad="88900" dist="25400" dir="5400000" algn="bl" rotWithShape="0">
               <a:srgbClr val="B8C9D4">
                 <a:alpha val="22000"/>
               </a:srgbClr>
@@ -10602,7 +10958,7 @@
           <p:nvPr/>
         </p:nvPicPr>
         <p:blipFill>
-          <a:blip r:embed="rId2"/>
+          <a:blip r:embed="rId4"/>
           <a:stretch>
             <a:fillRect/>
           </a:stretch>
@@ -10638,7 +10994,7 @@
           <a:bodyPr wrap="square" lIns="0" tIns="0" rIns="0" bIns="0" rtlCol="0" anchor="ctr"/>
           <a:lstStyle/>
           <a:p>
-            <a:pPr indent="0" marL="0">
+            <a:pPr marL="0" indent="0">
               <a:buNone/>
             </a:pPr>
             <a:r>
@@ -10677,7 +11033,7 @@
           <a:bodyPr wrap="square" lIns="0" tIns="0" rIns="0" bIns="0" rtlCol="0" anchor="t"/>
           <a:lstStyle/>
           <a:p>
-            <a:pPr indent="0" marL="0">
+            <a:pPr marL="0" indent="0">
               <a:lnSpc>
                 <a:spcPct val="100000"/>
               </a:lnSpc>
@@ -10724,7 +11080,7 @@
             <a:prstDash val="solid"/>
           </a:ln>
           <a:effectLst>
-            <a:outerShdw sx="100000" sy="100000" kx="0" ky="0" algn="bl" rotWithShape="0" blurRad="88900" dist="25400" dir="5400000">
+            <a:outerShdw blurRad="88900" dist="25400" dir="5400000" algn="bl" rotWithShape="0">
               <a:srgbClr val="B8C9D4">
                 <a:alpha val="22000"/>
               </a:srgbClr>
@@ -10751,7 +11107,7 @@
           </a:solidFill>
           <a:ln/>
           <a:effectLst>
-            <a:outerShdw sx="100000" sy="100000" kx="0" ky="0" algn="bl" rotWithShape="0" blurRad="88900" dist="25400" dir="5400000">
+            <a:outerShdw blurRad="88900" dist="25400" dir="5400000" algn="bl" rotWithShape="0">
               <a:srgbClr val="B8C9D4">
                 <a:alpha val="22000"/>
               </a:srgbClr>
@@ -10768,7 +11124,7 @@
           <p:nvPr/>
         </p:nvPicPr>
         <p:blipFill>
-          <a:blip r:embed="rId3"/>
+          <a:blip r:embed="rId5"/>
           <a:stretch>
             <a:fillRect/>
           </a:stretch>
@@ -10804,7 +11160,7 @@
           <a:bodyPr wrap="square" lIns="0" tIns="0" rIns="0" bIns="0" rtlCol="0" anchor="ctr"/>
           <a:lstStyle/>
           <a:p>
-            <a:pPr indent="0" marL="0">
+            <a:pPr marL="0" indent="0">
               <a:buNone/>
             </a:pPr>
             <a:r>
@@ -10843,7 +11199,7 @@
           <a:bodyPr wrap="square" lIns="0" tIns="0" rIns="0" bIns="0" rtlCol="0" anchor="t"/>
           <a:lstStyle/>
           <a:p>
-            <a:pPr indent="0" marL="0">
+            <a:pPr marL="0" indent="0">
               <a:lnSpc>
                 <a:spcPct val="100000"/>
               </a:lnSpc>
@@ -10872,7 +11228,7 @@
 </p:sld>
 </file>
 
-<file path=ppt/slides/slide8.xml><?xml version="1.0" encoding="utf-8"?>
+<file path=ppt/slides/slide9.xml><?xml version="1.0" encoding="utf-8"?>
 <p:sld xmlns:a="http://schemas.openxmlformats.org/drawingml/2006/main" xmlns:r="http://schemas.openxmlformats.org/officeDocument/2006/relationships" xmlns:p="http://schemas.openxmlformats.org/presentationml/2006/main">
   <p:cSld name="Slide 8">
     <p:bg>
@@ -10880,6 +11236,7 @@
         <a:solidFill>
           <a:srgbClr val="FFFFFF"/>
         </a:solidFill>
+        <a:effectLst/>
       </p:bgPr>
     </p:bg>
     <p:spTree>
@@ -10917,7 +11274,7 @@
           <a:bodyPr wrap="square" lIns="0" tIns="0" rIns="0" bIns="0" rtlCol="0" anchor="ctr"/>
           <a:lstStyle/>
           <a:p>
-            <a:pPr algn="r" indent="0" marL="0">
+            <a:pPr marL="0" indent="0" algn="r">
               <a:buNone/>
             </a:pPr>
             <a:r>
@@ -10956,11 +11313,11 @@
           <a:bodyPr wrap="square" lIns="0" tIns="0" rIns="0" bIns="0" rtlCol="0" anchor="ctr"/>
           <a:lstStyle/>
           <a:p>
-            <a:pPr indent="0" marL="0">
-              <a:buNone/>
-            </a:pPr>
-            <a:r>
-              <a:rPr lang="en-US" sz="1500" b="1" spc="250" kern="0" dirty="0">
+            <a:pPr marL="0" indent="0">
+              <a:buNone/>
+            </a:pPr>
+            <a:r>
+              <a:rPr lang="en-US" sz="2000" b="1" kern="0" spc="250" dirty="0">
                 <a:solidFill>
                   <a:srgbClr val="1F9BD8"/>
                 </a:solidFill>
@@ -10970,7 +11327,7 @@
               </a:rPr>
               <a:t>МАСШТАБИРОВАНИЕ</a:t>
             </a:r>
-            <a:endParaRPr lang="en-US" sz="1500" dirty="0"/>
+            <a:endParaRPr lang="en-US" sz="2000" dirty="0"/>
           </a:p>
         </p:txBody>
       </p:sp>
@@ -10995,7 +11352,7 @@
           <a:bodyPr wrap="square" lIns="0" tIns="0" rIns="0" bIns="0" rtlCol="0" anchor="ctr"/>
           <a:lstStyle/>
           <a:p>
-            <a:pPr indent="0" marL="0">
+            <a:pPr marL="0" indent="0">
               <a:buNone/>
             </a:pPr>
             <a:r>
@@ -11039,7 +11396,7 @@
             <a:prstDash val="solid"/>
           </a:ln>
           <a:effectLst>
-            <a:outerShdw sx="100000" sy="100000" kx="0" ky="0" algn="bl" rotWithShape="0" blurRad="88900" dist="25400" dir="5400000">
+            <a:outerShdw blurRad="88900" dist="25400" dir="5400000" algn="bl" rotWithShape="0">
               <a:srgbClr val="B8C9D4">
                 <a:alpha val="22000"/>
               </a:srgbClr>
@@ -11066,7 +11423,7 @@
           </a:solidFill>
           <a:ln/>
           <a:effectLst>
-            <a:outerShdw sx="100000" sy="100000" kx="0" ky="0" algn="bl" rotWithShape="0" blurRad="88900" dist="25400" dir="5400000">
+            <a:outerShdw blurRad="88900" dist="25400" dir="5400000" algn="bl" rotWithShape="0">
               <a:srgbClr val="B8C9D4">
                 <a:alpha val="22000"/>
               </a:srgbClr>
@@ -11083,7 +11440,7 @@
           <p:nvPr/>
         </p:nvPicPr>
         <p:blipFill>
-          <a:blip r:embed="rId1"/>
+          <a:blip r:embed="rId3"/>
           <a:stretch>
             <a:fillRect/>
           </a:stretch>
@@ -11119,7 +11476,7 @@
           <a:bodyPr wrap="square" lIns="0" tIns="0" rIns="0" bIns="0" rtlCol="0" anchor="ctr"/>
           <a:lstStyle/>
           <a:p>
-            <a:pPr indent="0" marL="0">
+            <a:pPr marL="0" indent="0">
               <a:buNone/>
             </a:pPr>
             <a:r>
@@ -11158,7 +11515,7 @@
           <a:bodyPr wrap="square" lIns="0" tIns="0" rIns="0" bIns="0" rtlCol="0" anchor="t"/>
           <a:lstStyle/>
           <a:p>
-            <a:pPr indent="0" marL="0">
+            <a:pPr marL="0" indent="0">
               <a:lnSpc>
                 <a:spcPct val="103000"/>
               </a:lnSpc>
@@ -11205,7 +11562,7 @@
             <a:prstDash val="solid"/>
           </a:ln>
           <a:effectLst>
-            <a:outerShdw sx="100000" sy="100000" kx="0" ky="0" algn="bl" rotWithShape="0" blurRad="88900" dist="25400" dir="5400000">
+            <a:outerShdw blurRad="88900" dist="25400" dir="5400000" algn="bl" rotWithShape="0">
               <a:srgbClr val="B8C9D4">
                 <a:alpha val="22000"/>
               </a:srgbClr>
@@ -11232,7 +11589,7 @@
           </a:solidFill>
           <a:ln/>
           <a:effectLst>
-            <a:outerShdw sx="100000" sy="100000" kx="0" ky="0" algn="bl" rotWithShape="0" blurRad="88900" dist="25400" dir="5400000">
+            <a:outerShdw blurRad="88900" dist="25400" dir="5400000" algn="bl" rotWithShape="0">
               <a:srgbClr val="B8C9D4">
                 <a:alpha val="22000"/>
               </a:srgbClr>
@@ -11249,7 +11606,7 @@
           <p:nvPr/>
         </p:nvPicPr>
         <p:blipFill>
-          <a:blip r:embed="rId2"/>
+          <a:blip r:embed="rId4"/>
           <a:stretch>
             <a:fillRect/>
           </a:stretch>
@@ -11285,7 +11642,7 @@
           <a:bodyPr wrap="square" lIns="0" tIns="0" rIns="0" bIns="0" rtlCol="0" anchor="ctr"/>
           <a:lstStyle/>
           <a:p>
-            <a:pPr indent="0" marL="0">
+            <a:pPr marL="0" indent="0">
               <a:buNone/>
             </a:pPr>
             <a:r>
@@ -11324,7 +11681,7 @@
           <a:bodyPr wrap="square" lIns="0" tIns="0" rIns="0" bIns="0" rtlCol="0" anchor="t"/>
           <a:lstStyle/>
           <a:p>
-            <a:pPr indent="0" marL="0">
+            <a:pPr marL="0" indent="0">
               <a:lnSpc>
                 <a:spcPct val="103000"/>
               </a:lnSpc>
@@ -11371,7 +11728,7 @@
             <a:prstDash val="solid"/>
           </a:ln>
           <a:effectLst>
-            <a:outerShdw sx="100000" sy="100000" kx="0" ky="0" algn="bl" rotWithShape="0" blurRad="88900" dist="25400" dir="5400000">
+            <a:outerShdw blurRad="88900" dist="25400" dir="5400000" algn="bl" rotWithShape="0">
               <a:srgbClr val="B8C9D4">
                 <a:alpha val="22000"/>
               </a:srgbClr>
@@ -11398,7 +11755,7 @@
           </a:solidFill>
           <a:ln/>
           <a:effectLst>
-            <a:outerShdw sx="100000" sy="100000" kx="0" ky="0" algn="bl" rotWithShape="0" blurRad="88900" dist="25400" dir="5400000">
+            <a:outerShdw blurRad="88900" dist="25400" dir="5400000" algn="bl" rotWithShape="0">
               <a:srgbClr val="B8C9D4">
                 <a:alpha val="22000"/>
               </a:srgbClr>
@@ -11415,7 +11772,7 @@
           <p:nvPr/>
         </p:nvPicPr>
         <p:blipFill>
-          <a:blip r:embed="rId3"/>
+          <a:blip r:embed="rId5"/>
           <a:stretch>
             <a:fillRect/>
           </a:stretch>
@@ -11451,7 +11808,7 @@
           <a:bodyPr wrap="square" lIns="0" tIns="0" rIns="0" bIns="0" rtlCol="0" anchor="ctr"/>
           <a:lstStyle/>
           <a:p>
-            <a:pPr indent="0" marL="0">
+            <a:pPr marL="0" indent="0">
               <a:buNone/>
             </a:pPr>
             <a:r>
@@ -11490,7 +11847,7 @@
           <a:bodyPr wrap="square" lIns="0" tIns="0" rIns="0" bIns="0" rtlCol="0" anchor="t"/>
           <a:lstStyle/>
           <a:p>
-            <a:pPr indent="0" marL="0">
+            <a:pPr marL="0" indent="0">
               <a:lnSpc>
                 <a:spcPct val="103000"/>
               </a:lnSpc>
@@ -11537,7 +11894,7 @@
             <a:prstDash val="solid"/>
           </a:ln>
           <a:effectLst>
-            <a:outerShdw sx="100000" sy="100000" kx="0" ky="0" algn="bl" rotWithShape="0" blurRad="88900" dist="25400" dir="5400000">
+            <a:outerShdw blurRad="88900" dist="25400" dir="5400000" algn="bl" rotWithShape="0">
               <a:srgbClr val="B8C9D4">
                 <a:alpha val="22000"/>
               </a:srgbClr>
@@ -11564,7 +11921,7 @@
           </a:solidFill>
           <a:ln/>
           <a:effectLst>
-            <a:outerShdw sx="100000" sy="100000" kx="0" ky="0" algn="bl" rotWithShape="0" blurRad="88900" dist="25400" dir="5400000">
+            <a:outerShdw blurRad="88900" dist="25400" dir="5400000" algn="bl" rotWithShape="0">
               <a:srgbClr val="B8C9D4">
                 <a:alpha val="22000"/>
               </a:srgbClr>
@@ -11581,7 +11938,7 @@
           <p:nvPr/>
         </p:nvPicPr>
         <p:blipFill>
-          <a:blip r:embed="rId4"/>
+          <a:blip r:embed="rId6"/>
           <a:stretch>
             <a:fillRect/>
           </a:stretch>
@@ -11617,7 +11974,7 @@
           <a:bodyPr wrap="square" lIns="0" tIns="0" rIns="0" bIns="0" rtlCol="0" anchor="ctr"/>
           <a:lstStyle/>
           <a:p>
-            <a:pPr indent="0" marL="0">
+            <a:pPr marL="0" indent="0">
               <a:buNone/>
             </a:pPr>
             <a:r>
@@ -11656,7 +12013,7 @@
           <a:bodyPr wrap="square" lIns="0" tIns="0" rIns="0" bIns="0" rtlCol="0" anchor="t"/>
           <a:lstStyle/>
           <a:p>
-            <a:pPr indent="0" marL="0">
+            <a:pPr marL="0" indent="0">
               <a:lnSpc>
                 <a:spcPct val="103000"/>
               </a:lnSpc>
@@ -11703,7 +12060,7 @@
             <a:prstDash val="solid"/>
           </a:ln>
           <a:effectLst>
-            <a:outerShdw sx="100000" sy="100000" kx="0" ky="0" algn="bl" rotWithShape="0" blurRad="88900" dist="25400" dir="5400000">
+            <a:outerShdw blurRad="88900" dist="25400" dir="5400000" algn="bl" rotWithShape="0">
               <a:srgbClr val="B8C9D4">
                 <a:alpha val="22000"/>
               </a:srgbClr>
@@ -11732,7 +12089,7 @@
           <a:bodyPr wrap="square" lIns="0" tIns="0" rIns="0" bIns="0" rtlCol="0" anchor="ctr"/>
           <a:lstStyle/>
           <a:p>
-            <a:pPr indent="0" marL="0">
+            <a:pPr marL="0" indent="0">
               <a:lnSpc>
                 <a:spcPct val="100000"/>
               </a:lnSpc>
@@ -11747,14 +12104,8 @@
                 <a:ea typeface="Calibri" pitchFamily="34" charset="-122"/>
                 <a:cs typeface="Calibri" pitchFamily="34" charset="-120"/>
               </a:rPr>
-              <a:t xml:space="preserve">Основа масштабируемости:  </a:t>
-            </a:r>
-            <a:pPr indent="0" marL="0">
-              <a:lnSpc>
-                <a:spcPct val="100000"/>
-              </a:lnSpc>
-              <a:buNone/>
-            </a:pPr>
+              <a:t>Основа масштабируемости:  </a:t>
+            </a:r>
             <a:r>
               <a:rPr lang="en-US" sz="1300" dirty="0">
                 <a:solidFill>
@@ -11767,824 +12118,6 @@
               <a:t>плагин слабо связан с игрой (автозагрузка + сигналы), вся тяжёлая логика — на сервере. Игра остаётся лёгкой и не зависит от размера проекта.</a:t>
             </a:r>
             <a:endParaRPr lang="en-US" sz="1300" dirty="0"/>
-          </a:p>
-        </p:txBody>
-      </p:sp>
-    </p:spTree>
-  </p:cSld>
-  <p:clrMapOvr>
-    <a:masterClrMapping/>
-  </p:clrMapOvr>
-</p:sld>
-</file>
-
-<file path=ppt/slides/slide9.xml><?xml version="1.0" encoding="utf-8"?>
-<p:sld xmlns:a="http://schemas.openxmlformats.org/drawingml/2006/main" xmlns:r="http://schemas.openxmlformats.org/officeDocument/2006/relationships" xmlns:p="http://schemas.openxmlformats.org/presentationml/2006/main">
-  <p:cSld name="Slide 9">
-    <p:bg>
-      <p:bgPr>
-        <a:solidFill>
-          <a:srgbClr val="FFFFFF"/>
-        </a:solidFill>
-      </p:bgPr>
-    </p:bg>
-    <p:spTree>
-      <p:nvGrpSpPr>
-        <p:cNvPr id="1" name=""/>
-        <p:cNvGrpSpPr/>
-        <p:nvPr/>
-      </p:nvGrpSpPr>
-      <p:grpSpPr>
-        <a:xfrm>
-          <a:off x="0" y="0"/>
-          <a:ext cx="0" cy="0"/>
-          <a:chOff x="0" y="0"/>
-          <a:chExt cx="0" cy="0"/>
-        </a:xfrm>
-      </p:grpSpPr>
-      <p:sp>
-        <p:nvSpPr>
-          <p:cNvPr id="2" name="Text 0"/>
-          <p:cNvSpPr/>
-          <p:nvPr/>
-        </p:nvSpPr>
-        <p:spPr>
-          <a:xfrm>
-            <a:off x="10820095" y="384048"/>
-            <a:ext cx="822960" cy="640080"/>
-          </a:xfrm>
-          <a:prstGeom prst="rect">
-            <a:avLst/>
-          </a:prstGeom>
-          <a:noFill/>
-          <a:ln/>
-        </p:spPr>
-        <p:txBody>
-          <a:bodyPr wrap="square" lIns="0" tIns="0" rIns="0" bIns="0" rtlCol="0" anchor="ctr"/>
-          <a:lstStyle/>
-          <a:p>
-            <a:pPr algn="r" indent="0" marL="0">
-              <a:buNone/>
-            </a:pPr>
-            <a:r>
-              <a:rPr lang="en-US" sz="3000" b="1" dirty="0">
-                <a:solidFill>
-                  <a:srgbClr val="C6D6E0"/>
-                </a:solidFill>
-                <a:latin typeface="Cambria" pitchFamily="34" charset="0"/>
-                <a:ea typeface="Cambria" pitchFamily="34" charset="-122"/>
-                <a:cs typeface="Cambria" pitchFamily="34" charset="-120"/>
-              </a:rPr>
-              <a:t>10</a:t>
-            </a:r>
-            <a:endParaRPr lang="en-US" sz="3000" dirty="0"/>
-          </a:p>
-        </p:txBody>
-      </p:sp>
-      <p:sp>
-        <p:nvSpPr>
-          <p:cNvPr id="3" name="Text 1"/>
-          <p:cNvSpPr/>
-          <p:nvPr/>
-        </p:nvSpPr>
-        <p:spPr>
-          <a:xfrm>
-            <a:off x="640080" y="475488"/>
-            <a:ext cx="8229600" cy="274320"/>
-          </a:xfrm>
-          <a:prstGeom prst="rect">
-            <a:avLst/>
-          </a:prstGeom>
-          <a:noFill/>
-          <a:ln/>
-        </p:spPr>
-        <p:txBody>
-          <a:bodyPr wrap="square" lIns="0" tIns="0" rIns="0" bIns="0" rtlCol="0" anchor="ctr"/>
-          <a:lstStyle/>
-          <a:p>
-            <a:pPr indent="0" marL="0">
-              <a:buNone/>
-            </a:pPr>
-            <a:r>
-              <a:rPr lang="en-US" sz="1500" b="1" spc="250" kern="0" dirty="0">
-                <a:solidFill>
-                  <a:srgbClr val="1F9BD8"/>
-                </a:solidFill>
-                <a:latin typeface="Calibri" pitchFamily="34" charset="0"/>
-                <a:ea typeface="Calibri" pitchFamily="34" charset="-122"/>
-                <a:cs typeface="Calibri" pitchFamily="34" charset="-120"/>
-              </a:rPr>
-              <a:t>ЗАДЕЛЫ НА БУДУЩЕЕ</a:t>
-            </a:r>
-            <a:endParaRPr lang="en-US" sz="1500" dirty="0"/>
-          </a:p>
-        </p:txBody>
-      </p:sp>
-      <p:sp>
-        <p:nvSpPr>
-          <p:cNvPr id="4" name="Text 2"/>
-          <p:cNvSpPr/>
-          <p:nvPr/>
-        </p:nvSpPr>
-        <p:spPr>
-          <a:xfrm>
-            <a:off x="640080" y="749808"/>
-            <a:ext cx="10362895" cy="777240"/>
-          </a:xfrm>
-          <a:prstGeom prst="rect">
-            <a:avLst/>
-          </a:prstGeom>
-          <a:noFill/>
-          <a:ln/>
-        </p:spPr>
-        <p:txBody>
-          <a:bodyPr wrap="square" lIns="0" tIns="0" rIns="0" bIns="0" rtlCol="0" anchor="ctr"/>
-          <a:lstStyle/>
-          <a:p>
-            <a:pPr indent="0" marL="0">
-              <a:buNone/>
-            </a:pPr>
-            <a:r>
-              <a:rPr lang="en-US" sz="3000" b="1" dirty="0">
-                <a:solidFill>
-                  <a:srgbClr val="111418"/>
-                </a:solidFill>
-                <a:latin typeface="Cambria" pitchFamily="34" charset="0"/>
-                <a:ea typeface="Cambria" pitchFamily="34" charset="-122"/>
-                <a:cs typeface="Cambria" pitchFamily="34" charset="-120"/>
-              </a:rPr>
-              <a:t>Заделы на будущее</a:t>
-            </a:r>
-            <a:endParaRPr lang="en-US" sz="3000" dirty="0"/>
-          </a:p>
-        </p:txBody>
-      </p:sp>
-      <p:sp>
-        <p:nvSpPr>
-          <p:cNvPr id="7" name="Shape 5"/>
-          <p:cNvSpPr/>
-          <p:nvPr/>
-        </p:nvSpPr>
-        <p:spPr>
-          <a:xfrm>
-            <a:off x="640080" y="1783080"/>
-            <a:ext cx="5212080" cy="1078992"/>
-          </a:xfrm>
-          <a:prstGeom prst="roundRect">
-            <a:avLst>
-              <a:gd name="adj" fmla="val 6780"/>
-            </a:avLst>
-          </a:prstGeom>
-          <a:solidFill>
-            <a:srgbClr val="F4FAFD"/>
-          </a:solidFill>
-          <a:ln w="12700">
-            <a:solidFill>
-              <a:srgbClr val="DCE6EC"/>
-            </a:solidFill>
-            <a:prstDash val="solid"/>
-          </a:ln>
-        </p:spPr>
-      </p:sp>
-      <p:sp>
-        <p:nvSpPr>
-          <p:cNvPr id="8" name="Shape 6"/>
-          <p:cNvSpPr/>
-          <p:nvPr/>
-        </p:nvSpPr>
-        <p:spPr>
-          <a:xfrm>
-            <a:off x="859536" y="2039112"/>
-            <a:ext cx="566928" cy="566928"/>
-          </a:xfrm>
-          <a:prstGeom prst="ellipse">
-            <a:avLst/>
-          </a:prstGeom>
-          <a:solidFill>
-            <a:srgbClr val="1F9BD8"/>
-          </a:solidFill>
-          <a:ln/>
-          <a:effectLst>
-            <a:outerShdw sx="100000" sy="100000" kx="0" ky="0" algn="bl" rotWithShape="0" blurRad="88900" dist="25400" dir="5400000">
-              <a:srgbClr val="B8C9D4">
-                <a:alpha val="22000"/>
-              </a:srgbClr>
-            </a:outerShdw>
-          </a:effectLst>
-        </p:spPr>
-      </p:sp>
-      <p:pic>
-        <p:nvPicPr>
-          <p:cNvPr id="9" name="Image 0" descr="icons/store.png"/>
-          <p:cNvPicPr>
-            <a:picLocks noChangeAspect="1"/>
-          </p:cNvPicPr>
-          <p:nvPr/>
-        </p:nvPicPr>
-        <p:blipFill>
-          <a:blip r:embed="rId1"/>
-          <a:stretch>
-            <a:fillRect/>
-          </a:stretch>
-        </p:blipFill>
-        <p:spPr>
-          <a:xfrm>
-            <a:off x="1029614" y="2209190"/>
-            <a:ext cx="226771" cy="226771"/>
-          </a:xfrm>
-          <a:prstGeom prst="rect">
-            <a:avLst/>
-          </a:prstGeom>
-        </p:spPr>
-      </p:pic>
-      <p:sp>
-        <p:nvSpPr>
-          <p:cNvPr id="10" name="Text 7"/>
-          <p:cNvSpPr/>
-          <p:nvPr/>
-        </p:nvSpPr>
-        <p:spPr>
-          <a:xfrm>
-            <a:off x="1664208" y="1947672"/>
-            <a:ext cx="4023360" cy="365760"/>
-          </a:xfrm>
-          <a:prstGeom prst="rect">
-            <a:avLst/>
-          </a:prstGeom>
-          <a:noFill/>
-          <a:ln/>
-        </p:spPr>
-        <p:txBody>
-          <a:bodyPr wrap="square" lIns="0" tIns="0" rIns="0" bIns="0" rtlCol="0" anchor="ctr"/>
-          <a:lstStyle/>
-          <a:p>
-            <a:pPr indent="0" marL="0">
-              <a:buNone/>
-            </a:pPr>
-            <a:r>
-              <a:rPr lang="en-US" sz="1450" b="1" dirty="0">
-                <a:solidFill>
-                  <a:srgbClr val="111418"/>
-                </a:solidFill>
-                <a:latin typeface="Calibri" pitchFamily="34" charset="0"/>
-                <a:ea typeface="Calibri" pitchFamily="34" charset="-122"/>
-                <a:cs typeface="Calibri" pitchFamily="34" charset="-120"/>
-              </a:rPr>
-              <a:t>Публикация в Asset Library</a:t>
-            </a:r>
-            <a:endParaRPr lang="en-US" sz="1450" dirty="0"/>
-          </a:p>
-        </p:txBody>
-      </p:sp>
-      <p:sp>
-        <p:nvSpPr>
-          <p:cNvPr id="11" name="Text 8"/>
-          <p:cNvSpPr/>
-          <p:nvPr/>
-        </p:nvSpPr>
-        <p:spPr>
-          <a:xfrm>
-            <a:off x="1664208" y="2313432"/>
-            <a:ext cx="4023360" cy="502920"/>
-          </a:xfrm>
-          <a:prstGeom prst="rect">
-            <a:avLst/>
-          </a:prstGeom>
-          <a:noFill/>
-          <a:ln/>
-        </p:spPr>
-        <p:txBody>
-          <a:bodyPr wrap="square" lIns="0" tIns="0" rIns="0" bIns="0" rtlCol="0" anchor="t"/>
-          <a:lstStyle/>
-          <a:p>
-            <a:pPr indent="0" marL="0">
-              <a:lnSpc>
-                <a:spcPct val="100000"/>
-              </a:lnSpc>
-              <a:buNone/>
-            </a:pPr>
-            <a:r>
-              <a:rPr lang="en-US" sz="1150" dirty="0">
-                <a:solidFill>
-                  <a:srgbClr val="33383F"/>
-                </a:solidFill>
-                <a:latin typeface="Calibri" pitchFamily="34" charset="0"/>
-                <a:ea typeface="Calibri" pitchFamily="34" charset="-122"/>
-                <a:cs typeface="Calibri" pitchFamily="34" charset="-120"/>
-              </a:rPr>
-              <a:t>оформление аддона для официального магазина ассетов Godot</a:t>
-            </a:r>
-            <a:endParaRPr lang="en-US" sz="1150" dirty="0"/>
-          </a:p>
-        </p:txBody>
-      </p:sp>
-      <p:sp>
-        <p:nvSpPr>
-          <p:cNvPr id="12" name="Shape 9"/>
-          <p:cNvSpPr/>
-          <p:nvPr/>
-        </p:nvSpPr>
-        <p:spPr>
-          <a:xfrm>
-            <a:off x="640080" y="3063240"/>
-            <a:ext cx="5212080" cy="1078992"/>
-          </a:xfrm>
-          <a:prstGeom prst="roundRect">
-            <a:avLst>
-              <a:gd name="adj" fmla="val 6780"/>
-            </a:avLst>
-          </a:prstGeom>
-          <a:solidFill>
-            <a:srgbClr val="F4FAFD"/>
-          </a:solidFill>
-          <a:ln w="12700">
-            <a:solidFill>
-              <a:srgbClr val="DCE6EC"/>
-            </a:solidFill>
-            <a:prstDash val="solid"/>
-          </a:ln>
-        </p:spPr>
-      </p:sp>
-      <p:sp>
-        <p:nvSpPr>
-          <p:cNvPr id="13" name="Shape 10"/>
-          <p:cNvSpPr/>
-          <p:nvPr/>
-        </p:nvSpPr>
-        <p:spPr>
-          <a:xfrm>
-            <a:off x="859536" y="3319272"/>
-            <a:ext cx="566928" cy="566928"/>
-          </a:xfrm>
-          <a:prstGeom prst="ellipse">
-            <a:avLst/>
-          </a:prstGeom>
-          <a:solidFill>
-            <a:srgbClr val="1F9BD8"/>
-          </a:solidFill>
-          <a:ln/>
-          <a:effectLst>
-            <a:outerShdw sx="100000" sy="100000" kx="0" ky="0" algn="bl" rotWithShape="0" blurRad="88900" dist="25400" dir="5400000">
-              <a:srgbClr val="B8C9D4">
-                <a:alpha val="22000"/>
-              </a:srgbClr>
-            </a:outerShdw>
-          </a:effectLst>
-        </p:spPr>
-      </p:sp>
-      <p:pic>
-        <p:nvPicPr>
-          <p:cNvPr id="14" name="Image 1" descr="icons/sliders.png"/>
-          <p:cNvPicPr>
-            <a:picLocks noChangeAspect="1"/>
-          </p:cNvPicPr>
-          <p:nvPr/>
-        </p:nvPicPr>
-        <p:blipFill>
-          <a:blip r:embed="rId2"/>
-          <a:stretch>
-            <a:fillRect/>
-          </a:stretch>
-        </p:blipFill>
-        <p:spPr>
-          <a:xfrm>
-            <a:off x="1029614" y="3489350"/>
-            <a:ext cx="226771" cy="226771"/>
-          </a:xfrm>
-          <a:prstGeom prst="rect">
-            <a:avLst/>
-          </a:prstGeom>
-        </p:spPr>
-      </p:pic>
-      <p:sp>
-        <p:nvSpPr>
-          <p:cNvPr id="15" name="Text 11"/>
-          <p:cNvSpPr/>
-          <p:nvPr/>
-        </p:nvSpPr>
-        <p:spPr>
-          <a:xfrm>
-            <a:off x="1664208" y="3227832"/>
-            <a:ext cx="4023360" cy="365760"/>
-          </a:xfrm>
-          <a:prstGeom prst="rect">
-            <a:avLst/>
-          </a:prstGeom>
-          <a:noFill/>
-          <a:ln/>
-        </p:spPr>
-        <p:txBody>
-          <a:bodyPr wrap="square" lIns="0" tIns="0" rIns="0" bIns="0" rtlCol="0" anchor="ctr"/>
-          <a:lstStyle/>
-          <a:p>
-            <a:pPr indent="0" marL="0">
-              <a:buNone/>
-            </a:pPr>
-            <a:r>
-              <a:rPr lang="en-US" sz="1450" b="1" dirty="0">
-                <a:solidFill>
-                  <a:srgbClr val="111418"/>
-                </a:solidFill>
-                <a:latin typeface="Calibri" pitchFamily="34" charset="0"/>
-                <a:ea typeface="Calibri" pitchFamily="34" charset="-122"/>
-                <a:cs typeface="Calibri" pitchFamily="34" charset="-120"/>
-              </a:rPr>
-              <a:t>Расширение панели</a:t>
-            </a:r>
-            <a:endParaRPr lang="en-US" sz="1450" dirty="0"/>
-          </a:p>
-        </p:txBody>
-      </p:sp>
-      <p:sp>
-        <p:nvSpPr>
-          <p:cNvPr id="16" name="Text 12"/>
-          <p:cNvSpPr/>
-          <p:nvPr/>
-        </p:nvSpPr>
-        <p:spPr>
-          <a:xfrm>
-            <a:off x="1664208" y="3593592"/>
-            <a:ext cx="4023360" cy="502920"/>
-          </a:xfrm>
-          <a:prstGeom prst="rect">
-            <a:avLst/>
-          </a:prstGeom>
-          <a:noFill/>
-          <a:ln/>
-        </p:spPr>
-        <p:txBody>
-          <a:bodyPr wrap="square" lIns="0" tIns="0" rIns="0" bIns="0" rtlCol="0" anchor="t"/>
-          <a:lstStyle/>
-          <a:p>
-            <a:pPr indent="0" marL="0">
-              <a:lnSpc>
-                <a:spcPct val="100000"/>
-              </a:lnSpc>
-              <a:buNone/>
-            </a:pPr>
-            <a:r>
-              <a:rPr lang="en-US" sz="1150" dirty="0">
-                <a:solidFill>
-                  <a:srgbClr val="33383F"/>
-                </a:solidFill>
-                <a:latin typeface="Calibri" pitchFamily="34" charset="0"/>
-                <a:ea typeface="Calibri" pitchFamily="34" charset="-122"/>
-                <a:cs typeface="Calibri" pitchFamily="34" charset="-120"/>
-              </a:rPr>
-              <a:t>визуализация воронок событий и истории адаптаций в редакторе</a:t>
-            </a:r>
-            <a:endParaRPr lang="en-US" sz="1150" dirty="0"/>
-          </a:p>
-        </p:txBody>
-      </p:sp>
-      <p:sp>
-        <p:nvSpPr>
-          <p:cNvPr id="17" name="Shape 13"/>
-          <p:cNvSpPr/>
-          <p:nvPr/>
-        </p:nvSpPr>
-        <p:spPr>
-          <a:xfrm>
-            <a:off x="640080" y="4343400"/>
-            <a:ext cx="5212080" cy="1078992"/>
-          </a:xfrm>
-          <a:prstGeom prst="roundRect">
-            <a:avLst>
-              <a:gd name="adj" fmla="val 6780"/>
-            </a:avLst>
-          </a:prstGeom>
-          <a:solidFill>
-            <a:srgbClr val="F4FAFD"/>
-          </a:solidFill>
-          <a:ln w="12700">
-            <a:solidFill>
-              <a:srgbClr val="DCE6EC"/>
-            </a:solidFill>
-            <a:prstDash val="solid"/>
-          </a:ln>
-        </p:spPr>
-      </p:sp>
-      <p:sp>
-        <p:nvSpPr>
-          <p:cNvPr id="18" name="Shape 14"/>
-          <p:cNvSpPr/>
-          <p:nvPr/>
-        </p:nvSpPr>
-        <p:spPr>
-          <a:xfrm>
-            <a:off x="859536" y="4599432"/>
-            <a:ext cx="566928" cy="566928"/>
-          </a:xfrm>
-          <a:prstGeom prst="ellipse">
-            <a:avLst/>
-          </a:prstGeom>
-          <a:solidFill>
-            <a:srgbClr val="1F9BD8"/>
-          </a:solidFill>
-          <a:ln/>
-          <a:effectLst>
-            <a:outerShdw sx="100000" sy="100000" kx="0" ky="0" algn="bl" rotWithShape="0" blurRad="88900" dist="25400" dir="5400000">
-              <a:srgbClr val="B8C9D4">
-                <a:alpha val="22000"/>
-              </a:srgbClr>
-            </a:outerShdw>
-          </a:effectLst>
-        </p:spPr>
-      </p:sp>
-      <p:pic>
-        <p:nvPicPr>
-          <p:cNvPr id="19" name="Image 2" descr="icons/check.png"/>
-          <p:cNvPicPr>
-            <a:picLocks noChangeAspect="1"/>
-          </p:cNvPicPr>
-          <p:nvPr/>
-        </p:nvPicPr>
-        <p:blipFill>
-          <a:blip r:embed="rId3"/>
-          <a:stretch>
-            <a:fillRect/>
-          </a:stretch>
-        </p:blipFill>
-        <p:spPr>
-          <a:xfrm>
-            <a:off x="1029614" y="4769510"/>
-            <a:ext cx="226771" cy="226771"/>
-          </a:xfrm>
-          <a:prstGeom prst="rect">
-            <a:avLst/>
-          </a:prstGeom>
-        </p:spPr>
-      </p:pic>
-      <p:sp>
-        <p:nvSpPr>
-          <p:cNvPr id="20" name="Text 15"/>
-          <p:cNvSpPr/>
-          <p:nvPr/>
-        </p:nvSpPr>
-        <p:spPr>
-          <a:xfrm>
-            <a:off x="1664208" y="4507992"/>
-            <a:ext cx="4023360" cy="365760"/>
-          </a:xfrm>
-          <a:prstGeom prst="rect">
-            <a:avLst/>
-          </a:prstGeom>
-          <a:noFill/>
-          <a:ln/>
-        </p:spPr>
-        <p:txBody>
-          <a:bodyPr wrap="square" lIns="0" tIns="0" rIns="0" bIns="0" rtlCol="0" anchor="ctr"/>
-          <a:lstStyle/>
-          <a:p>
-            <a:pPr indent="0" marL="0">
-              <a:buNone/>
-            </a:pPr>
-            <a:r>
-              <a:rPr lang="en-US" sz="1450" b="1" dirty="0">
-                <a:solidFill>
-                  <a:srgbClr val="111418"/>
-                </a:solidFill>
-                <a:latin typeface="Calibri" pitchFamily="34" charset="0"/>
-                <a:ea typeface="Calibri" pitchFamily="34" charset="-122"/>
-                <a:cs typeface="Calibri" pitchFamily="34" charset="-120"/>
-              </a:rPr>
-              <a:t>Авто-тесты интеграции</a:t>
-            </a:r>
-            <a:endParaRPr lang="en-US" sz="1450" dirty="0"/>
-          </a:p>
-        </p:txBody>
-      </p:sp>
-      <p:sp>
-        <p:nvSpPr>
-          <p:cNvPr id="21" name="Text 16"/>
-          <p:cNvSpPr/>
-          <p:nvPr/>
-        </p:nvSpPr>
-        <p:spPr>
-          <a:xfrm>
-            <a:off x="1664208" y="4873752"/>
-            <a:ext cx="4023360" cy="502920"/>
-          </a:xfrm>
-          <a:prstGeom prst="rect">
-            <a:avLst/>
-          </a:prstGeom>
-          <a:noFill/>
-          <a:ln/>
-        </p:spPr>
-        <p:txBody>
-          <a:bodyPr wrap="square" lIns="0" tIns="0" rIns="0" bIns="0" rtlCol="0" anchor="t"/>
-          <a:lstStyle/>
-          <a:p>
-            <a:pPr indent="0" marL="0">
-              <a:lnSpc>
-                <a:spcPct val="100000"/>
-              </a:lnSpc>
-              <a:buNone/>
-            </a:pPr>
-            <a:r>
-              <a:rPr lang="en-US" sz="1150" dirty="0">
-                <a:solidFill>
-                  <a:srgbClr val="33383F"/>
-                </a:solidFill>
-                <a:latin typeface="Calibri" pitchFamily="34" charset="0"/>
-                <a:ea typeface="Calibri" pitchFamily="34" charset="-122"/>
-                <a:cs typeface="Calibri" pitchFamily="34" charset="-120"/>
-              </a:rPr>
-              <a:t>Сквозной чек-лист test_integration.gd как регрессионная проверка</a:t>
-            </a:r>
-            <a:endParaRPr lang="en-US" sz="1150" dirty="0"/>
-          </a:p>
-        </p:txBody>
-      </p:sp>
-      <p:sp>
-        <p:nvSpPr>
-          <p:cNvPr id="22" name="Shape 17"/>
-          <p:cNvSpPr/>
-          <p:nvPr/>
-        </p:nvSpPr>
-        <p:spPr>
-          <a:xfrm>
-            <a:off x="6766560" y="1783080"/>
-            <a:ext cx="4785055" cy="4160520"/>
-          </a:xfrm>
-          <a:prstGeom prst="roundRect">
-            <a:avLst>
-              <a:gd name="adj" fmla="val 2198"/>
-            </a:avLst>
-          </a:prstGeom>
-          <a:solidFill>
-            <a:srgbClr val="0B5E88"/>
-          </a:solidFill>
-          <a:ln/>
-          <a:effectLst>
-            <a:outerShdw sx="100000" sy="100000" kx="0" ky="0" algn="bl" rotWithShape="0" blurRad="114300" dist="38100" dir="5400000">
-              <a:srgbClr val="9FB6C4">
-                <a:alpha val="28000"/>
-              </a:srgbClr>
-            </a:outerShdw>
-          </a:effectLst>
-        </p:spPr>
-      </p:sp>
-      <p:sp>
-        <p:nvSpPr>
-          <p:cNvPr id="23" name="Text 18"/>
-          <p:cNvSpPr/>
-          <p:nvPr/>
-        </p:nvSpPr>
-        <p:spPr>
-          <a:xfrm>
-            <a:off x="6766560" y="2057400"/>
-            <a:ext cx="4785055" cy="274320"/>
-          </a:xfrm>
-          <a:prstGeom prst="rect">
-            <a:avLst/>
-          </a:prstGeom>
-          <a:noFill/>
-          <a:ln/>
-        </p:spPr>
-        <p:txBody>
-          <a:bodyPr wrap="square" lIns="0" tIns="0" rIns="0" bIns="0" rtlCol="0" anchor="ctr"/>
-          <a:lstStyle/>
-          <a:p>
-            <a:pPr algn="ctr" indent="0" marL="0">
-              <a:buNone/>
-            </a:pPr>
-            <a:r>
-              <a:rPr lang="en-US" sz="1200" b="1" spc="200" kern="0" dirty="0">
-                <a:solidFill>
-                  <a:srgbClr val="8FD0EE"/>
-                </a:solidFill>
-                <a:latin typeface="Calibri" pitchFamily="34" charset="0"/>
-                <a:ea typeface="Calibri" pitchFamily="34" charset="-122"/>
-                <a:cs typeface="Calibri" pitchFamily="34" charset="-120"/>
-              </a:rPr>
-              <a:t>РЕПОЗИТОРИЙ ПРОЕКТА</a:t>
-            </a:r>
-            <a:endParaRPr lang="en-US" sz="1200" dirty="0"/>
-          </a:p>
-        </p:txBody>
-      </p:sp>
-      <p:sp>
-        <p:nvSpPr>
-          <p:cNvPr id="24" name="Shape 19"/>
-          <p:cNvSpPr/>
-          <p:nvPr/>
-        </p:nvSpPr>
-        <p:spPr>
-          <a:xfrm>
-            <a:off x="7924648" y="2468880"/>
-            <a:ext cx="2468880" cy="2468880"/>
-          </a:xfrm>
-          <a:prstGeom prst="roundRect">
-            <a:avLst>
-              <a:gd name="adj" fmla="val 2963"/>
-            </a:avLst>
-          </a:prstGeom>
-          <a:solidFill>
-            <a:srgbClr val="FFFFFF"/>
-          </a:solidFill>
-          <a:ln/>
-        </p:spPr>
-      </p:sp>
-      <p:pic>
-        <p:nvPicPr>
-          <p:cNvPr id="25" name="Image 3" descr="qr_git.png"/>
-          <p:cNvPicPr>
-            <a:picLocks noChangeAspect="1"/>
-          </p:cNvPicPr>
-          <p:nvPr/>
-        </p:nvPicPr>
-        <p:blipFill>
-          <a:blip r:embed="rId4"/>
-          <a:stretch>
-            <a:fillRect/>
-          </a:stretch>
-        </p:blipFill>
-        <p:spPr>
-          <a:xfrm>
-            <a:off x="8070952" y="2615184"/>
-            <a:ext cx="2176272" cy="2176272"/>
-          </a:xfrm>
-          <a:prstGeom prst="rect">
-            <a:avLst/>
-          </a:prstGeom>
-        </p:spPr>
-      </p:pic>
-      <p:sp>
-        <p:nvSpPr>
-          <p:cNvPr id="26" name="Text 20"/>
-          <p:cNvSpPr/>
-          <p:nvPr/>
-        </p:nvSpPr>
-        <p:spPr>
-          <a:xfrm>
-            <a:off x="6766560" y="5074920"/>
-            <a:ext cx="4785055" cy="365760"/>
-          </a:xfrm>
-          <a:prstGeom prst="rect">
-            <a:avLst/>
-          </a:prstGeom>
-          <a:noFill/>
-          <a:ln/>
-        </p:spPr>
-        <p:txBody>
-          <a:bodyPr wrap="square" lIns="0" tIns="0" rIns="0" bIns="0" rtlCol="0" anchor="ctr"/>
-          <a:lstStyle/>
-          <a:p>
-            <a:pPr algn="ctr" indent="0" marL="0">
-              <a:buNone/>
-            </a:pPr>
-            <a:r>
-              <a:rPr lang="en-US" sz="1150" b="1" dirty="0">
-                <a:solidFill>
-                  <a:srgbClr val="FFFFFF"/>
-                </a:solidFill>
-                <a:latin typeface="Calibri" pitchFamily="34" charset="0"/>
-                <a:ea typeface="Calibri" pitchFamily="34" charset="-122"/>
-                <a:cs typeface="Calibri" pitchFamily="34" charset="-120"/>
-              </a:rPr>
-              <a:t>github.com/Antizi/diplom-Game_Plugs_Ai</a:t>
-            </a:r>
-            <a:endParaRPr lang="en-US" sz="1150" dirty="0"/>
-          </a:p>
-        </p:txBody>
-      </p:sp>
-      <p:sp>
-        <p:nvSpPr>
-          <p:cNvPr id="27" name="Text 21"/>
-          <p:cNvSpPr/>
-          <p:nvPr/>
-        </p:nvSpPr>
-        <p:spPr>
-          <a:xfrm>
-            <a:off x="6766560" y="5440680"/>
-            <a:ext cx="4785055" cy="274320"/>
-          </a:xfrm>
-          <a:prstGeom prst="rect">
-            <a:avLst/>
-          </a:prstGeom>
-          <a:noFill/>
-          <a:ln/>
-        </p:spPr>
-        <p:txBody>
-          <a:bodyPr wrap="square" lIns="0" tIns="0" rIns="0" bIns="0" rtlCol="0" anchor="ctr"/>
-          <a:lstStyle/>
-          <a:p>
-            <a:pPr algn="ctr" indent="0" marL="0">
-              <a:buNone/>
-            </a:pPr>
-            <a:r>
-              <a:rPr lang="en-US" sz="1000" dirty="0">
-                <a:solidFill>
-                  <a:srgbClr val="9FD4EE"/>
-                </a:solidFill>
-                <a:latin typeface="Calibri" pitchFamily="34" charset="0"/>
-                <a:ea typeface="Calibri" pitchFamily="34" charset="-122"/>
-                <a:cs typeface="Calibri" pitchFamily="34" charset="-120"/>
-              </a:rPr>
-              <a:t>Наведите камеру телефона на QR-код</a:t>
-            </a:r>
-            <a:endParaRPr lang="en-US" sz="1000" dirty="0"/>
           </a:p>
         </p:txBody>
       </p:sp>
@@ -12889,4 +12422,299 @@
     </a:ext>
   </a:extLst>
 </a:theme>
+</file>
+
+<file path=ppt/theme/theme2.xml><?xml version="1.0" encoding="utf-8"?>
+<a:theme xmlns:a="http://schemas.openxmlformats.org/drawingml/2006/main" name="Тема Office">
+  <a:themeElements>
+    <a:clrScheme name="Стандартная">
+      <a:dk1>
+        <a:sysClr val="windowText" lastClr="000000"/>
+      </a:dk1>
+      <a:lt1>
+        <a:sysClr val="window" lastClr="FFFFFF"/>
+      </a:lt1>
+      <a:dk2>
+        <a:srgbClr val="44546A"/>
+      </a:dk2>
+      <a:lt2>
+        <a:srgbClr val="E7E6E6"/>
+      </a:lt2>
+      <a:accent1>
+        <a:srgbClr val="4472C4"/>
+      </a:accent1>
+      <a:accent2>
+        <a:srgbClr val="ED7D31"/>
+      </a:accent2>
+      <a:accent3>
+        <a:srgbClr val="A5A5A5"/>
+      </a:accent3>
+      <a:accent4>
+        <a:srgbClr val="FFC000"/>
+      </a:accent4>
+      <a:accent5>
+        <a:srgbClr val="5B9BD5"/>
+      </a:accent5>
+      <a:accent6>
+        <a:srgbClr val="70AD47"/>
+      </a:accent6>
+      <a:hlink>
+        <a:srgbClr val="0563C1"/>
+      </a:hlink>
+      <a:folHlink>
+        <a:srgbClr val="954F72"/>
+      </a:folHlink>
+    </a:clrScheme>
+    <a:fontScheme name="Стандартная">
+      <a:majorFont>
+        <a:latin typeface="Calibri Light" panose="020F0302020204030204"/>
+        <a:ea typeface=""/>
+        <a:cs typeface=""/>
+        <a:font script="Jpan" typeface="游ゴシック Light"/>
+        <a:font script="Hang" typeface="맑은 고딕"/>
+        <a:font script="Hans" typeface="等线 Light"/>
+        <a:font script="Hant" typeface="新細明體"/>
+        <a:font script="Arab" typeface="Times New Roman"/>
+        <a:font script="Hebr" typeface="Times New Roman"/>
+        <a:font script="Thai" typeface="Angsana New"/>
+        <a:font script="Ethi" typeface="Nyala"/>
+        <a:font script="Beng" typeface="Vrinda"/>
+        <a:font script="Gujr" typeface="Shruti"/>
+        <a:font script="Khmr" typeface="MoolBoran"/>
+        <a:font script="Knda" typeface="Tunga"/>
+        <a:font script="Guru" typeface="Raavi"/>
+        <a:font script="Cans" typeface="Euphemia"/>
+        <a:font script="Cher" typeface="Plantagenet Cherokee"/>
+        <a:font script="Yiii" typeface="Microsoft Yi Baiti"/>
+        <a:font script="Tibt" typeface="Microsoft Himalaya"/>
+        <a:font script="Thaa" typeface="MV Boli"/>
+        <a:font script="Deva" typeface="Mangal"/>
+        <a:font script="Telu" typeface="Gautami"/>
+        <a:font script="Taml" typeface="Latha"/>
+        <a:font script="Syrc" typeface="Estrangelo Edessa"/>
+        <a:font script="Orya" typeface="Kalinga"/>
+        <a:font script="Mlym" typeface="Kartika"/>
+        <a:font script="Laoo" typeface="DokChampa"/>
+        <a:font script="Sinh" typeface="Iskoola Pota"/>
+        <a:font script="Mong" typeface="Mongolian Baiti"/>
+        <a:font script="Viet" typeface="Times New Roman"/>
+        <a:font script="Uigh" typeface="Microsoft Uighur"/>
+        <a:font script="Geor" typeface="Sylfaen"/>
+        <a:font script="Armn" typeface="Arial"/>
+        <a:font script="Bugi" typeface="Leelawadee UI"/>
+        <a:font script="Bopo" typeface="Microsoft JhengHei"/>
+        <a:font script="Java" typeface="Javanese Text"/>
+        <a:font script="Lisu" typeface="Segoe UI"/>
+        <a:font script="Mymr" typeface="Myanmar Text"/>
+        <a:font script="Nkoo" typeface="Ebrima"/>
+        <a:font script="Olck" typeface="Nirmala UI"/>
+        <a:font script="Osma" typeface="Ebrima"/>
+        <a:font script="Phag" typeface="Phagspa"/>
+        <a:font script="Syrn" typeface="Estrangelo Edessa"/>
+        <a:font script="Syrj" typeface="Estrangelo Edessa"/>
+        <a:font script="Syre" typeface="Estrangelo Edessa"/>
+        <a:font script="Sora" typeface="Nirmala UI"/>
+        <a:font script="Tale" typeface="Microsoft Tai Le"/>
+        <a:font script="Talu" typeface="Microsoft New Tai Lue"/>
+        <a:font script="Tfng" typeface="Ebrima"/>
+      </a:majorFont>
+      <a:minorFont>
+        <a:latin typeface="Calibri" panose="020F0502020204030204"/>
+        <a:ea typeface=""/>
+        <a:cs typeface=""/>
+        <a:font script="Jpan" typeface="游ゴシック"/>
+        <a:font script="Hang" typeface="맑은 고딕"/>
+        <a:font script="Hans" typeface="等线"/>
+        <a:font script="Hant" typeface="新細明體"/>
+        <a:font script="Arab" typeface="Arial"/>
+        <a:font script="Hebr" typeface="Arial"/>
+        <a:font script="Thai" typeface="Cordia New"/>
+        <a:font script="Ethi" typeface="Nyala"/>
+        <a:font script="Beng" typeface="Vrinda"/>
+        <a:font script="Gujr" typeface="Shruti"/>
+        <a:font script="Khmr" typeface="DaunPenh"/>
+        <a:font script="Knda" typeface="Tunga"/>
+        <a:font script="Guru" typeface="Raavi"/>
+        <a:font script="Cans" typeface="Euphemia"/>
+        <a:font script="Cher" typeface="Plantagenet Cherokee"/>
+        <a:font script="Yiii" typeface="Microsoft Yi Baiti"/>
+        <a:font script="Tibt" typeface="Microsoft Himalaya"/>
+        <a:font script="Thaa" typeface="MV Boli"/>
+        <a:font script="Deva" typeface="Mangal"/>
+        <a:font script="Telu" typeface="Gautami"/>
+        <a:font script="Taml" typeface="Latha"/>
+        <a:font script="Syrc" typeface="Estrangelo Edessa"/>
+        <a:font script="Orya" typeface="Kalinga"/>
+        <a:font script="Mlym" typeface="Kartika"/>
+        <a:font script="Laoo" typeface="DokChampa"/>
+        <a:font script="Sinh" typeface="Iskoola Pota"/>
+        <a:font script="Mong" typeface="Mongolian Baiti"/>
+        <a:font script="Viet" typeface="Arial"/>
+        <a:font script="Uigh" typeface="Microsoft Uighur"/>
+        <a:font script="Geor" typeface="Sylfaen"/>
+        <a:font script="Armn" typeface="Arial"/>
+        <a:font script="Bugi" typeface="Leelawadee UI"/>
+        <a:font script="Bopo" typeface="Microsoft JhengHei"/>
+        <a:font script="Java" typeface="Javanese Text"/>
+        <a:font script="Lisu" typeface="Segoe UI"/>
+        <a:font script="Mymr" typeface="Myanmar Text"/>
+        <a:font script="Nkoo" typeface="Ebrima"/>
+        <a:font script="Olck" typeface="Nirmala UI"/>
+        <a:font script="Osma" typeface="Ebrima"/>
+        <a:font script="Phag" typeface="Phagspa"/>
+        <a:font script="Syrn" typeface="Estrangelo Edessa"/>
+        <a:font script="Syrj" typeface="Estrangelo Edessa"/>
+        <a:font script="Syre" typeface="Estrangelo Edessa"/>
+        <a:font script="Sora" typeface="Nirmala UI"/>
+        <a:font script="Tale" typeface="Microsoft Tai Le"/>
+        <a:font script="Talu" typeface="Microsoft New Tai Lue"/>
+        <a:font script="Tfng" typeface="Ebrima"/>
+      </a:minorFont>
+    </a:fontScheme>
+    <a:fmtScheme name="Стандартная">
+      <a:fillStyleLst>
+        <a:solidFill>
+          <a:schemeClr val="phClr"/>
+        </a:solidFill>
+        <a:gradFill rotWithShape="1">
+          <a:gsLst>
+            <a:gs pos="0">
+              <a:schemeClr val="phClr">
+                <a:lumMod val="110000"/>
+                <a:satMod val="105000"/>
+                <a:tint val="67000"/>
+              </a:schemeClr>
+            </a:gs>
+            <a:gs pos="50000">
+              <a:schemeClr val="phClr">
+                <a:lumMod val="105000"/>
+                <a:satMod val="103000"/>
+                <a:tint val="73000"/>
+              </a:schemeClr>
+            </a:gs>
+            <a:gs pos="100000">
+              <a:schemeClr val="phClr">
+                <a:lumMod val="105000"/>
+                <a:satMod val="109000"/>
+                <a:tint val="81000"/>
+              </a:schemeClr>
+            </a:gs>
+          </a:gsLst>
+          <a:lin ang="5400000" scaled="0"/>
+        </a:gradFill>
+        <a:gradFill rotWithShape="1">
+          <a:gsLst>
+            <a:gs pos="0">
+              <a:schemeClr val="phClr">
+                <a:satMod val="103000"/>
+                <a:lumMod val="102000"/>
+                <a:tint val="94000"/>
+              </a:schemeClr>
+            </a:gs>
+            <a:gs pos="50000">
+              <a:schemeClr val="phClr">
+                <a:satMod val="110000"/>
+                <a:lumMod val="100000"/>
+                <a:shade val="100000"/>
+              </a:schemeClr>
+            </a:gs>
+            <a:gs pos="100000">
+              <a:schemeClr val="phClr">
+                <a:lumMod val="99000"/>
+                <a:satMod val="120000"/>
+                <a:shade val="78000"/>
+              </a:schemeClr>
+            </a:gs>
+          </a:gsLst>
+          <a:lin ang="5400000" scaled="0"/>
+        </a:gradFill>
+      </a:fillStyleLst>
+      <a:lnStyleLst>
+        <a:ln w="6350" cap="flat" cmpd="sng" algn="ctr">
+          <a:solidFill>
+            <a:schemeClr val="phClr"/>
+          </a:solidFill>
+          <a:prstDash val="solid"/>
+          <a:miter lim="800000"/>
+        </a:ln>
+        <a:ln w="12700" cap="flat" cmpd="sng" algn="ctr">
+          <a:solidFill>
+            <a:schemeClr val="phClr"/>
+          </a:solidFill>
+          <a:prstDash val="solid"/>
+          <a:miter lim="800000"/>
+        </a:ln>
+        <a:ln w="19050" cap="flat" cmpd="sng" algn="ctr">
+          <a:solidFill>
+            <a:schemeClr val="phClr"/>
+          </a:solidFill>
+          <a:prstDash val="solid"/>
+          <a:miter lim="800000"/>
+        </a:ln>
+      </a:lnStyleLst>
+      <a:effectStyleLst>
+        <a:effectStyle>
+          <a:effectLst/>
+        </a:effectStyle>
+        <a:effectStyle>
+          <a:effectLst/>
+        </a:effectStyle>
+        <a:effectStyle>
+          <a:effectLst>
+            <a:outerShdw blurRad="57150" dist="19050" dir="5400000" algn="ctr" rotWithShape="0">
+              <a:srgbClr val="000000">
+                <a:alpha val="63000"/>
+              </a:srgbClr>
+            </a:outerShdw>
+          </a:effectLst>
+        </a:effectStyle>
+      </a:effectStyleLst>
+      <a:bgFillStyleLst>
+        <a:solidFill>
+          <a:schemeClr val="phClr"/>
+        </a:solidFill>
+        <a:solidFill>
+          <a:schemeClr val="phClr">
+            <a:tint val="95000"/>
+            <a:satMod val="170000"/>
+          </a:schemeClr>
+        </a:solidFill>
+        <a:gradFill rotWithShape="1">
+          <a:gsLst>
+            <a:gs pos="0">
+              <a:schemeClr val="phClr">
+                <a:tint val="93000"/>
+                <a:satMod val="150000"/>
+                <a:shade val="98000"/>
+                <a:lumMod val="102000"/>
+              </a:schemeClr>
+            </a:gs>
+            <a:gs pos="50000">
+              <a:schemeClr val="phClr">
+                <a:tint val="98000"/>
+                <a:satMod val="130000"/>
+                <a:shade val="90000"/>
+                <a:lumMod val="103000"/>
+              </a:schemeClr>
+            </a:gs>
+            <a:gs pos="100000">
+              <a:schemeClr val="phClr">
+                <a:shade val="63000"/>
+                <a:satMod val="120000"/>
+              </a:schemeClr>
+            </a:gs>
+          </a:gsLst>
+          <a:lin ang="5400000" scaled="0"/>
+        </a:gradFill>
+      </a:bgFillStyleLst>
+    </a:fmtScheme>
+  </a:themeElements>
+  <a:objectDefaults/>
+  <a:extraClrSchemeLst/>
+  <a:extLst>
+    <a:ext uri="{05A4C25C-085E-4340-85A3-A5531E510DB2}">
+      <thm15:themeFamily xmlns:thm15="http://schemas.microsoft.com/office/thememl/2012/main" name="Office Theme" id="{62F939B6-93AF-4DB8-9C6B-D6C7DFDC589F}" vid="{4A3C46E8-61CC-4603-A589-7422A47A8E4A}"/>
+    </a:ext>
+  </a:extLst>
+</a:theme>
 </file>